--- a/output/NL_GooglePhotos.pptx
+++ b/output/NL_GooglePhotos.pptx
@@ -1852,7 +1852,7 @@
                             <a:srgbClr val="1A73E8"/>
                           </a:solidFill>
                         </a:rPr>
-                        <a:t>System Component</a:t>
+                        <a:t>System Component / Artifact</a:t>
                       </a:r>
                       <a:endParaRPr lang="en-US" sz="1400" dirty="0"/>
                     </a:p>
@@ -1913,7 +1913,7 @@
                             <a:srgbClr val="1A73E8"/>
                           </a:solidFill>
                         </a:rPr>
-                        <a:t>Role &amp; PM Capability</a:t>
+                        <a:t>Role &amp; Technical Capability</a:t>
                       </a:r>
                       <a:endParaRPr lang="en-US" sz="1400" dirty="0"/>
                     </a:p>
@@ -1974,7 +1974,7 @@
                             <a:srgbClr val="1A73E8"/>
                           </a:solidFill>
                         </a:rPr>
-                        <a:t>Deployed URL / Resource Link</a:t>
+                        <a:t>Public Deployed Link / Hyperlink</a:t>
                       </a:r>
                       <a:endParaRPr lang="en-US" sz="1400" dirty="0"/>
                     </a:p>
@@ -2590,190 +2590,190 @@
                             <a:srgbClr val="202124"/>
                           </a:solidFill>
                         </a:rPr>
-                        <a:t>Primary Research Form</a:t>
-                      </a:r>
-                      <a:endParaRPr lang="en-US" sz="1400" dirty="0"/>
-                    </a:p>
-                  </a:txBody>
-                  <a:tcPr marL="91440" marR="91440" marT="45720" marB="45720" anchor="ctr">
-                    <a:lnL w="12700" cap="flat" cmpd="sng" algn="ctr">
-                      <a:solidFill>
-                        <a:srgbClr val="DADCE0"/>
-                      </a:solidFill>
-                      <a:prstDash val="solid"/>
-                      <a:round/>
-                      <a:headEnd type="none" w="med" len="med"/>
-                      <a:tailEnd type="none" w="med" len="med"/>
-                    </a:lnL>
-                    <a:lnR w="12700" cap="flat" cmpd="sng" algn="ctr">
-                      <a:solidFill>
-                        <a:srgbClr val="DADCE0"/>
-                      </a:solidFill>
-                      <a:prstDash val="solid"/>
-                      <a:round/>
-                      <a:headEnd type="none" w="med" len="med"/>
-                      <a:tailEnd type="none" w="med" len="med"/>
-                    </a:lnR>
-                    <a:lnT w="12700" cap="flat" cmpd="sng" algn="ctr">
-                      <a:solidFill>
-                        <a:srgbClr val="DADCE0"/>
-                      </a:solidFill>
-                      <a:prstDash val="solid"/>
-                      <a:round/>
-                      <a:headEnd type="none" w="med" len="med"/>
-                      <a:tailEnd type="none" w="med" len="med"/>
-                    </a:lnT>
-                    <a:lnB w="12700" cap="flat" cmpd="sng" algn="ctr">
-                      <a:solidFill>
-                        <a:srgbClr val="DADCE0"/>
-                      </a:solidFill>
-                      <a:prstDash val="solid"/>
-                      <a:round/>
-                      <a:headEnd type="none" w="med" len="med"/>
-                      <a:tailEnd type="none" w="med" len="med"/>
-                    </a:lnB>
-                    <a:solidFill>
-                      <a:srgbClr val="FFFFFF"/>
-                    </a:solidFill>
-                  </a:tcPr>
-                </a:tc>
-                <a:tc>
-                  <a:txBody>
-                    <a:bodyPr/>
-                    <a:lstStyle/>
-                    <a:p>
-                      <a:pPr algn="l" indent="0" marL="0">
-                        <a:buNone/>
-                      </a:pPr>
-                      <a:r>
-                        <a:rPr lang="en-US" sz="1400" dirty="0">
-                          <a:solidFill>
-                            <a:srgbClr val="202124"/>
-                          </a:solidFill>
-                        </a:rPr>
-                        <a:t>15-Question User Research Automation Tool</a:t>
-                      </a:r>
-                      <a:endParaRPr lang="en-US" sz="1400" dirty="0"/>
-                    </a:p>
-                  </a:txBody>
-                  <a:tcPr marL="91440" marR="91440" marT="45720" marB="45720" anchor="ctr">
-                    <a:lnL w="12700" cap="flat" cmpd="sng" algn="ctr">
-                      <a:solidFill>
-                        <a:srgbClr val="DADCE0"/>
-                      </a:solidFill>
-                      <a:prstDash val="solid"/>
-                      <a:round/>
-                      <a:headEnd type="none" w="med" len="med"/>
-                      <a:tailEnd type="none" w="med" len="med"/>
-                    </a:lnL>
-                    <a:lnR w="12700" cap="flat" cmpd="sng" algn="ctr">
-                      <a:solidFill>
-                        <a:srgbClr val="DADCE0"/>
-                      </a:solidFill>
-                      <a:prstDash val="solid"/>
-                      <a:round/>
-                      <a:headEnd type="none" w="med" len="med"/>
-                      <a:tailEnd type="none" w="med" len="med"/>
-                    </a:lnR>
-                    <a:lnT w="12700" cap="flat" cmpd="sng" algn="ctr">
-                      <a:solidFill>
-                        <a:srgbClr val="DADCE0"/>
-                      </a:solidFill>
-                      <a:prstDash val="solid"/>
-                      <a:round/>
-                      <a:headEnd type="none" w="med" len="med"/>
-                      <a:tailEnd type="none" w="med" len="med"/>
-                    </a:lnT>
-                    <a:lnB w="12700" cap="flat" cmpd="sng" algn="ctr">
-                      <a:solidFill>
-                        <a:srgbClr val="DADCE0"/>
-                      </a:solidFill>
-                      <a:prstDash val="solid"/>
-                      <a:round/>
-                      <a:headEnd type="none" w="med" len="med"/>
-                      <a:tailEnd type="none" w="med" len="med"/>
-                    </a:lnB>
-                    <a:solidFill>
-                      <a:srgbClr val="FFFFFF"/>
-                    </a:solidFill>
-                  </a:tcPr>
-                </a:tc>
-                <a:tc>
-                  <a:txBody>
-                    <a:bodyPr/>
-                    <a:lstStyle/>
-                    <a:p>
-                      <a:pPr algn="l" indent="0" marL="0">
-                        <a:buNone/>
-                      </a:pPr>
-                      <a:r>
-                        <a:rPr lang="en-US" sz="1400" dirty="0">
-                          <a:solidFill>
-                            <a:srgbClr val="202124"/>
-                          </a:solidFill>
-                        </a:rPr>
-                        <a:t>https://google-photos-vague-memory-discover.vercel.app/google_form.html</a:t>
-                      </a:r>
-                      <a:endParaRPr lang="en-US" sz="1400" dirty="0"/>
-                    </a:p>
-                  </a:txBody>
-                  <a:tcPr marL="91440" marR="91440" marT="45720" marB="45720" anchor="ctr">
-                    <a:lnL w="12700" cap="flat" cmpd="sng" algn="ctr">
-                      <a:solidFill>
-                        <a:srgbClr val="DADCE0"/>
-                      </a:solidFill>
-                      <a:prstDash val="solid"/>
-                      <a:round/>
-                      <a:headEnd type="none" w="med" len="med"/>
-                      <a:tailEnd type="none" w="med" len="med"/>
-                    </a:lnL>
-                    <a:lnR w="12700" cap="flat" cmpd="sng" algn="ctr">
-                      <a:solidFill>
-                        <a:srgbClr val="DADCE0"/>
-                      </a:solidFill>
-                      <a:prstDash val="solid"/>
-                      <a:round/>
-                      <a:headEnd type="none" w="med" len="med"/>
-                      <a:tailEnd type="none" w="med" len="med"/>
-                    </a:lnR>
-                    <a:lnT w="12700" cap="flat" cmpd="sng" algn="ctr">
-                      <a:solidFill>
-                        <a:srgbClr val="DADCE0"/>
-                      </a:solidFill>
-                      <a:prstDash val="solid"/>
-                      <a:round/>
-                      <a:headEnd type="none" w="med" len="med"/>
-                      <a:tailEnd type="none" w="med" len="med"/>
-                    </a:lnT>
-                    <a:lnB w="12700" cap="flat" cmpd="sng" algn="ctr">
-                      <a:solidFill>
-                        <a:srgbClr val="DADCE0"/>
-                      </a:solidFill>
-                      <a:prstDash val="solid"/>
-                      <a:round/>
-                      <a:headEnd type="none" w="med" len="med"/>
-                      <a:tailEnd type="none" w="med" len="med"/>
-                    </a:lnB>
-                    <a:solidFill>
-                      <a:srgbClr val="FFFFFF"/>
-                    </a:solidFill>
-                  </a:tcPr>
-                </a:tc>
-                <a:tc>
-                  <a:txBody>
-                    <a:bodyPr/>
-                    <a:lstStyle/>
-                    <a:p>
-                      <a:pPr algn="l" indent="0" marL="0">
-                        <a:buNone/>
-                      </a:pPr>
-                      <a:r>
-                        <a:rPr lang="en-US" sz="1400" dirty="0">
-                          <a:solidFill>
-                            <a:srgbClr val="202124"/>
-                          </a:solidFill>
-                        </a:rPr>
-                        <a:t>LIVE</a:t>
+                        <a:t>User Survey Datasheet</a:t>
+                      </a:r>
+                      <a:endParaRPr lang="en-US" sz="1400" dirty="0"/>
+                    </a:p>
+                  </a:txBody>
+                  <a:tcPr marL="91440" marR="91440" marT="45720" marB="45720" anchor="ctr">
+                    <a:lnL w="12700" cap="flat" cmpd="sng" algn="ctr">
+                      <a:solidFill>
+                        <a:srgbClr val="DADCE0"/>
+                      </a:solidFill>
+                      <a:prstDash val="solid"/>
+                      <a:round/>
+                      <a:headEnd type="none" w="med" len="med"/>
+                      <a:tailEnd type="none" w="med" len="med"/>
+                    </a:lnL>
+                    <a:lnR w="12700" cap="flat" cmpd="sng" algn="ctr">
+                      <a:solidFill>
+                        <a:srgbClr val="DADCE0"/>
+                      </a:solidFill>
+                      <a:prstDash val="solid"/>
+                      <a:round/>
+                      <a:headEnd type="none" w="med" len="med"/>
+                      <a:tailEnd type="none" w="med" len="med"/>
+                    </a:lnR>
+                    <a:lnT w="12700" cap="flat" cmpd="sng" algn="ctr">
+                      <a:solidFill>
+                        <a:srgbClr val="DADCE0"/>
+                      </a:solidFill>
+                      <a:prstDash val="solid"/>
+                      <a:round/>
+                      <a:headEnd type="none" w="med" len="med"/>
+                      <a:tailEnd type="none" w="med" len="med"/>
+                    </a:lnT>
+                    <a:lnB w="12700" cap="flat" cmpd="sng" algn="ctr">
+                      <a:solidFill>
+                        <a:srgbClr val="DADCE0"/>
+                      </a:solidFill>
+                      <a:prstDash val="solid"/>
+                      <a:round/>
+                      <a:headEnd type="none" w="med" len="med"/>
+                      <a:tailEnd type="none" w="med" len="med"/>
+                    </a:lnB>
+                    <a:solidFill>
+                      <a:srgbClr val="FFFFFF"/>
+                    </a:solidFill>
+                  </a:tcPr>
+                </a:tc>
+                <a:tc>
+                  <a:txBody>
+                    <a:bodyPr/>
+                    <a:lstStyle/>
+                    <a:p>
+                      <a:pPr algn="l" indent="0" marL="0">
+                        <a:buNone/>
+                      </a:pPr>
+                      <a:r>
+                        <a:rPr lang="en-US" sz="1400" dirty="0">
+                          <a:solidFill>
+                            <a:srgbClr val="202124"/>
+                          </a:solidFill>
+                        </a:rPr>
+                        <a:t>N=34 Primary Research Raw Response Sheet</a:t>
+                      </a:r>
+                      <a:endParaRPr lang="en-US" sz="1400" dirty="0"/>
+                    </a:p>
+                  </a:txBody>
+                  <a:tcPr marL="91440" marR="91440" marT="45720" marB="45720" anchor="ctr">
+                    <a:lnL w="12700" cap="flat" cmpd="sng" algn="ctr">
+                      <a:solidFill>
+                        <a:srgbClr val="DADCE0"/>
+                      </a:solidFill>
+                      <a:prstDash val="solid"/>
+                      <a:round/>
+                      <a:headEnd type="none" w="med" len="med"/>
+                      <a:tailEnd type="none" w="med" len="med"/>
+                    </a:lnL>
+                    <a:lnR w="12700" cap="flat" cmpd="sng" algn="ctr">
+                      <a:solidFill>
+                        <a:srgbClr val="DADCE0"/>
+                      </a:solidFill>
+                      <a:prstDash val="solid"/>
+                      <a:round/>
+                      <a:headEnd type="none" w="med" len="med"/>
+                      <a:tailEnd type="none" w="med" len="med"/>
+                    </a:lnR>
+                    <a:lnT w="12700" cap="flat" cmpd="sng" algn="ctr">
+                      <a:solidFill>
+                        <a:srgbClr val="DADCE0"/>
+                      </a:solidFill>
+                      <a:prstDash val="solid"/>
+                      <a:round/>
+                      <a:headEnd type="none" w="med" len="med"/>
+                      <a:tailEnd type="none" w="med" len="med"/>
+                    </a:lnT>
+                    <a:lnB w="12700" cap="flat" cmpd="sng" algn="ctr">
+                      <a:solidFill>
+                        <a:srgbClr val="DADCE0"/>
+                      </a:solidFill>
+                      <a:prstDash val="solid"/>
+                      <a:round/>
+                      <a:headEnd type="none" w="med" len="med"/>
+                      <a:tailEnd type="none" w="med" len="med"/>
+                    </a:lnB>
+                    <a:solidFill>
+                      <a:srgbClr val="FFFFFF"/>
+                    </a:solidFill>
+                  </a:tcPr>
+                </a:tc>
+                <a:tc>
+                  <a:txBody>
+                    <a:bodyPr/>
+                    <a:lstStyle/>
+                    <a:p>
+                      <a:pPr algn="l" indent="0" marL="0">
+                        <a:buNone/>
+                      </a:pPr>
+                      <a:r>
+                        <a:rPr lang="en-US" sz="1400" dirty="0">
+                          <a:solidFill>
+                            <a:srgbClr val="202124"/>
+                          </a:solidFill>
+                        </a:rPr>
+                        <a:t>https://docs.google.com/spreadsheets/d/1IScTa4UfdjTZdB5UlyMu0AAd1g2LPlvGXwCgz1EAcow/edit?usp=sharing</a:t>
+                      </a:r>
+                      <a:endParaRPr lang="en-US" sz="1400" dirty="0"/>
+                    </a:p>
+                  </a:txBody>
+                  <a:tcPr marL="91440" marR="91440" marT="45720" marB="45720" anchor="ctr">
+                    <a:lnL w="12700" cap="flat" cmpd="sng" algn="ctr">
+                      <a:solidFill>
+                        <a:srgbClr val="DADCE0"/>
+                      </a:solidFill>
+                      <a:prstDash val="solid"/>
+                      <a:round/>
+                      <a:headEnd type="none" w="med" len="med"/>
+                      <a:tailEnd type="none" w="med" len="med"/>
+                    </a:lnL>
+                    <a:lnR w="12700" cap="flat" cmpd="sng" algn="ctr">
+                      <a:solidFill>
+                        <a:srgbClr val="DADCE0"/>
+                      </a:solidFill>
+                      <a:prstDash val="solid"/>
+                      <a:round/>
+                      <a:headEnd type="none" w="med" len="med"/>
+                      <a:tailEnd type="none" w="med" len="med"/>
+                    </a:lnR>
+                    <a:lnT w="12700" cap="flat" cmpd="sng" algn="ctr">
+                      <a:solidFill>
+                        <a:srgbClr val="DADCE0"/>
+                      </a:solidFill>
+                      <a:prstDash val="solid"/>
+                      <a:round/>
+                      <a:headEnd type="none" w="med" len="med"/>
+                      <a:tailEnd type="none" w="med" len="med"/>
+                    </a:lnT>
+                    <a:lnB w="12700" cap="flat" cmpd="sng" algn="ctr">
+                      <a:solidFill>
+                        <a:srgbClr val="DADCE0"/>
+                      </a:solidFill>
+                      <a:prstDash val="solid"/>
+                      <a:round/>
+                      <a:headEnd type="none" w="med" len="med"/>
+                      <a:tailEnd type="none" w="med" len="med"/>
+                    </a:lnB>
+                    <a:solidFill>
+                      <a:srgbClr val="FFFFFF"/>
+                    </a:solidFill>
+                  </a:tcPr>
+                </a:tc>
+                <a:tc>
+                  <a:txBody>
+                    <a:bodyPr/>
+                    <a:lstStyle/>
+                    <a:p>
+                      <a:pPr algn="l" indent="0" marL="0">
+                        <a:buNone/>
+                      </a:pPr>
+                      <a:r>
+                        <a:rPr lang="en-US" sz="1400" dirty="0">
+                          <a:solidFill>
+                            <a:srgbClr val="202124"/>
+                          </a:solidFill>
+                        </a:rPr>
+                        <a:t>LIVE SHEET</a:t>
                       </a:r>
                       <a:endParaRPr lang="en-US" sz="1400" dirty="0"/>
                     </a:p>
@@ -2836,6 +2836,252 @@
                             <a:srgbClr val="202124"/>
                           </a:solidFill>
                         </a:rPr>
+                        <a:t>Primary Research Form</a:t>
+                      </a:r>
+                      <a:endParaRPr lang="en-US" sz="1400" dirty="0"/>
+                    </a:p>
+                  </a:txBody>
+                  <a:tcPr marL="91440" marR="91440" marT="45720" marB="45720" anchor="ctr">
+                    <a:lnL w="12700" cap="flat" cmpd="sng" algn="ctr">
+                      <a:solidFill>
+                        <a:srgbClr val="DADCE0"/>
+                      </a:solidFill>
+                      <a:prstDash val="solid"/>
+                      <a:round/>
+                      <a:headEnd type="none" w="med" len="med"/>
+                      <a:tailEnd type="none" w="med" len="med"/>
+                    </a:lnL>
+                    <a:lnR w="12700" cap="flat" cmpd="sng" algn="ctr">
+                      <a:solidFill>
+                        <a:srgbClr val="DADCE0"/>
+                      </a:solidFill>
+                      <a:prstDash val="solid"/>
+                      <a:round/>
+                      <a:headEnd type="none" w="med" len="med"/>
+                      <a:tailEnd type="none" w="med" len="med"/>
+                    </a:lnR>
+                    <a:lnT w="12700" cap="flat" cmpd="sng" algn="ctr">
+                      <a:solidFill>
+                        <a:srgbClr val="DADCE0"/>
+                      </a:solidFill>
+                      <a:prstDash val="solid"/>
+                      <a:round/>
+                      <a:headEnd type="none" w="med" len="med"/>
+                      <a:tailEnd type="none" w="med" len="med"/>
+                    </a:lnT>
+                    <a:lnB w="12700" cap="flat" cmpd="sng" algn="ctr">
+                      <a:solidFill>
+                        <a:srgbClr val="DADCE0"/>
+                      </a:solidFill>
+                      <a:prstDash val="solid"/>
+                      <a:round/>
+                      <a:headEnd type="none" w="med" len="med"/>
+                      <a:tailEnd type="none" w="med" len="med"/>
+                    </a:lnB>
+                    <a:solidFill>
+                      <a:srgbClr val="FFFFFF"/>
+                    </a:solidFill>
+                  </a:tcPr>
+                </a:tc>
+                <a:tc>
+                  <a:txBody>
+                    <a:bodyPr/>
+                    <a:lstStyle/>
+                    <a:p>
+                      <a:pPr algn="l" indent="0" marL="0">
+                        <a:buNone/>
+                      </a:pPr>
+                      <a:r>
+                        <a:rPr lang="en-US" sz="1400" dirty="0">
+                          <a:solidFill>
+                            <a:srgbClr val="202124"/>
+                          </a:solidFill>
+                        </a:rPr>
+                        <a:t>15-Question User Research Automation Tool</a:t>
+                      </a:r>
+                      <a:endParaRPr lang="en-US" sz="1400" dirty="0"/>
+                    </a:p>
+                  </a:txBody>
+                  <a:tcPr marL="91440" marR="91440" marT="45720" marB="45720" anchor="ctr">
+                    <a:lnL w="12700" cap="flat" cmpd="sng" algn="ctr">
+                      <a:solidFill>
+                        <a:srgbClr val="DADCE0"/>
+                      </a:solidFill>
+                      <a:prstDash val="solid"/>
+                      <a:round/>
+                      <a:headEnd type="none" w="med" len="med"/>
+                      <a:tailEnd type="none" w="med" len="med"/>
+                    </a:lnL>
+                    <a:lnR w="12700" cap="flat" cmpd="sng" algn="ctr">
+                      <a:solidFill>
+                        <a:srgbClr val="DADCE0"/>
+                      </a:solidFill>
+                      <a:prstDash val="solid"/>
+                      <a:round/>
+                      <a:headEnd type="none" w="med" len="med"/>
+                      <a:tailEnd type="none" w="med" len="med"/>
+                    </a:lnR>
+                    <a:lnT w="12700" cap="flat" cmpd="sng" algn="ctr">
+                      <a:solidFill>
+                        <a:srgbClr val="DADCE0"/>
+                      </a:solidFill>
+                      <a:prstDash val="solid"/>
+                      <a:round/>
+                      <a:headEnd type="none" w="med" len="med"/>
+                      <a:tailEnd type="none" w="med" len="med"/>
+                    </a:lnT>
+                    <a:lnB w="12700" cap="flat" cmpd="sng" algn="ctr">
+                      <a:solidFill>
+                        <a:srgbClr val="DADCE0"/>
+                      </a:solidFill>
+                      <a:prstDash val="solid"/>
+                      <a:round/>
+                      <a:headEnd type="none" w="med" len="med"/>
+                      <a:tailEnd type="none" w="med" len="med"/>
+                    </a:lnB>
+                    <a:solidFill>
+                      <a:srgbClr val="FFFFFF"/>
+                    </a:solidFill>
+                  </a:tcPr>
+                </a:tc>
+                <a:tc>
+                  <a:txBody>
+                    <a:bodyPr/>
+                    <a:lstStyle/>
+                    <a:p>
+                      <a:pPr algn="l" indent="0" marL="0">
+                        <a:buNone/>
+                      </a:pPr>
+                      <a:r>
+                        <a:rPr lang="en-US" sz="1400" dirty="0">
+                          <a:solidFill>
+                            <a:srgbClr val="202124"/>
+                          </a:solidFill>
+                        </a:rPr>
+                        <a:t>https://google-photos-vague-memory-discover.vercel.app/google_form.html</a:t>
+                      </a:r>
+                      <a:endParaRPr lang="en-US" sz="1400" dirty="0"/>
+                    </a:p>
+                  </a:txBody>
+                  <a:tcPr marL="91440" marR="91440" marT="45720" marB="45720" anchor="ctr">
+                    <a:lnL w="12700" cap="flat" cmpd="sng" algn="ctr">
+                      <a:solidFill>
+                        <a:srgbClr val="DADCE0"/>
+                      </a:solidFill>
+                      <a:prstDash val="solid"/>
+                      <a:round/>
+                      <a:headEnd type="none" w="med" len="med"/>
+                      <a:tailEnd type="none" w="med" len="med"/>
+                    </a:lnL>
+                    <a:lnR w="12700" cap="flat" cmpd="sng" algn="ctr">
+                      <a:solidFill>
+                        <a:srgbClr val="DADCE0"/>
+                      </a:solidFill>
+                      <a:prstDash val="solid"/>
+                      <a:round/>
+                      <a:headEnd type="none" w="med" len="med"/>
+                      <a:tailEnd type="none" w="med" len="med"/>
+                    </a:lnR>
+                    <a:lnT w="12700" cap="flat" cmpd="sng" algn="ctr">
+                      <a:solidFill>
+                        <a:srgbClr val="DADCE0"/>
+                      </a:solidFill>
+                      <a:prstDash val="solid"/>
+                      <a:round/>
+                      <a:headEnd type="none" w="med" len="med"/>
+                      <a:tailEnd type="none" w="med" len="med"/>
+                    </a:lnT>
+                    <a:lnB w="12700" cap="flat" cmpd="sng" algn="ctr">
+                      <a:solidFill>
+                        <a:srgbClr val="DADCE0"/>
+                      </a:solidFill>
+                      <a:prstDash val="solid"/>
+                      <a:round/>
+                      <a:headEnd type="none" w="med" len="med"/>
+                      <a:tailEnd type="none" w="med" len="med"/>
+                    </a:lnB>
+                    <a:solidFill>
+                      <a:srgbClr val="FFFFFF"/>
+                    </a:solidFill>
+                  </a:tcPr>
+                </a:tc>
+                <a:tc>
+                  <a:txBody>
+                    <a:bodyPr/>
+                    <a:lstStyle/>
+                    <a:p>
+                      <a:pPr algn="l" indent="0" marL="0">
+                        <a:buNone/>
+                      </a:pPr>
+                      <a:r>
+                        <a:rPr lang="en-US" sz="1400" dirty="0">
+                          <a:solidFill>
+                            <a:srgbClr val="202124"/>
+                          </a:solidFill>
+                        </a:rPr>
+                        <a:t>LIVE FORM</a:t>
+                      </a:r>
+                      <a:endParaRPr lang="en-US" sz="1400" dirty="0"/>
+                    </a:p>
+                  </a:txBody>
+                  <a:tcPr marL="91440" marR="91440" marT="45720" marB="45720" anchor="ctr">
+                    <a:lnL w="12700" cap="flat" cmpd="sng" algn="ctr">
+                      <a:solidFill>
+                        <a:srgbClr val="DADCE0"/>
+                      </a:solidFill>
+                      <a:prstDash val="solid"/>
+                      <a:round/>
+                      <a:headEnd type="none" w="med" len="med"/>
+                      <a:tailEnd type="none" w="med" len="med"/>
+                    </a:lnL>
+                    <a:lnR w="12700" cap="flat" cmpd="sng" algn="ctr">
+                      <a:solidFill>
+                        <a:srgbClr val="DADCE0"/>
+                      </a:solidFill>
+                      <a:prstDash val="solid"/>
+                      <a:round/>
+                      <a:headEnd type="none" w="med" len="med"/>
+                      <a:tailEnd type="none" w="med" len="med"/>
+                    </a:lnR>
+                    <a:lnT w="12700" cap="flat" cmpd="sng" algn="ctr">
+                      <a:solidFill>
+                        <a:srgbClr val="DADCE0"/>
+                      </a:solidFill>
+                      <a:prstDash val="solid"/>
+                      <a:round/>
+                      <a:headEnd type="none" w="med" len="med"/>
+                      <a:tailEnd type="none" w="med" len="med"/>
+                    </a:lnT>
+                    <a:lnB w="12700" cap="flat" cmpd="sng" algn="ctr">
+                      <a:solidFill>
+                        <a:srgbClr val="DADCE0"/>
+                      </a:solidFill>
+                      <a:prstDash val="solid"/>
+                      <a:round/>
+                      <a:headEnd type="none" w="med" len="med"/>
+                      <a:tailEnd type="none" w="med" len="med"/>
+                    </a:lnB>
+                    <a:solidFill>
+                      <a:srgbClr val="FFFFFF"/>
+                    </a:solidFill>
+                  </a:tcPr>
+                </a:tc>
+              </a:tr>
+              <a:tr h="0">
+                <a:tc>
+                  <a:txBody>
+                    <a:bodyPr/>
+                    <a:lstStyle/>
+                    <a:p>
+                      <a:pPr algn="l" indent="0" marL="0">
+                        <a:buNone/>
+                      </a:pPr>
+                      <a:r>
+                        <a:rPr lang="en-US" sz="1400" dirty="0">
+                          <a:solidFill>
+                            <a:srgbClr val="202124"/>
+                          </a:solidFill>
+                        </a:rPr>
                         <a:t>GitHub Repository</a:t>
                       </a:r>
                       <a:endParaRPr lang="en-US" sz="1400" dirty="0"/>
@@ -2897,7 +3143,7 @@
                             <a:srgbClr val="202124"/>
                           </a:solidFill>
                         </a:rPr>
-                        <a:t>Public Codebase, Datasets &amp; Integration Tests</a:t>
+                        <a:t>Public Codebase, Datasets &amp; Integration Suite</a:t>
                       </a:r>
                       <a:endParaRPr lang="en-US" sz="1400" dirty="0"/>
                     </a:p>
@@ -4836,6 +5082,313 @@
                   </a:tcPr>
                 </a:tc>
               </a:tr>
+              <a:tr h="0">
+                <a:tc>
+                  <a:txBody>
+                    <a:bodyPr/>
+                    <a:lstStyle/>
+                    <a:p>
+                      <a:pPr algn="l" indent="0" marL="0">
+                        <a:buNone/>
+                      </a:pPr>
+                      <a:r>
+                        <a:rPr lang="en-US" sz="1400" dirty="0">
+                          <a:solidFill>
+                            <a:srgbClr val="202124"/>
+                          </a:solidFill>
+                        </a:rPr>
+                        <a:t>GitHub Codebase Link</a:t>
+                      </a:r>
+                      <a:endParaRPr lang="en-US" sz="1400" dirty="0"/>
+                    </a:p>
+                  </a:txBody>
+                  <a:tcPr marL="91440" marR="91440" marT="45720" marB="45720" anchor="ctr">
+                    <a:lnL w="12700" cap="flat" cmpd="sng" algn="ctr">
+                      <a:solidFill>
+                        <a:srgbClr val="DADCE0"/>
+                      </a:solidFill>
+                      <a:prstDash val="solid"/>
+                      <a:round/>
+                      <a:headEnd type="none" w="med" len="med"/>
+                      <a:tailEnd type="none" w="med" len="med"/>
+                    </a:lnL>
+                    <a:lnR w="12700" cap="flat" cmpd="sng" algn="ctr">
+                      <a:solidFill>
+                        <a:srgbClr val="DADCE0"/>
+                      </a:solidFill>
+                      <a:prstDash val="solid"/>
+                      <a:round/>
+                      <a:headEnd type="none" w="med" len="med"/>
+                      <a:tailEnd type="none" w="med" len="med"/>
+                    </a:lnR>
+                    <a:lnT w="12700" cap="flat" cmpd="sng" algn="ctr">
+                      <a:solidFill>
+                        <a:srgbClr val="DADCE0"/>
+                      </a:solidFill>
+                      <a:prstDash val="solid"/>
+                      <a:round/>
+                      <a:headEnd type="none" w="med" len="med"/>
+                      <a:tailEnd type="none" w="med" len="med"/>
+                    </a:lnT>
+                    <a:lnB w="12700" cap="flat" cmpd="sng" algn="ctr">
+                      <a:solidFill>
+                        <a:srgbClr val="DADCE0"/>
+                      </a:solidFill>
+                      <a:prstDash val="solid"/>
+                      <a:round/>
+                      <a:headEnd type="none" w="med" len="med"/>
+                      <a:tailEnd type="none" w="med" len="med"/>
+                    </a:lnB>
+                    <a:solidFill>
+                      <a:srgbClr val="FFFFFF"/>
+                    </a:solidFill>
+                  </a:tcPr>
+                </a:tc>
+                <a:tc>
+                  <a:txBody>
+                    <a:bodyPr/>
+                    <a:lstStyle/>
+                    <a:p>
+                      <a:pPr algn="l" indent="0" marL="0">
+                        <a:buNone/>
+                      </a:pPr>
+                      <a:r>
+                        <a:rPr lang="en-US" sz="1400" dirty="0">
+                          <a:solidFill>
+                            <a:srgbClr val="202124"/>
+                          </a:solidFill>
+                        </a:rPr>
+                        <a:t>Public Repository</a:t>
+                      </a:r>
+                      <a:endParaRPr lang="en-US" sz="1400" dirty="0"/>
+                    </a:p>
+                  </a:txBody>
+                  <a:tcPr marL="91440" marR="91440" marT="45720" marB="45720" anchor="ctr">
+                    <a:lnL w="12700" cap="flat" cmpd="sng" algn="ctr">
+                      <a:solidFill>
+                        <a:srgbClr val="DADCE0"/>
+                      </a:solidFill>
+                      <a:prstDash val="solid"/>
+                      <a:round/>
+                      <a:headEnd type="none" w="med" len="med"/>
+                      <a:tailEnd type="none" w="med" len="med"/>
+                    </a:lnL>
+                    <a:lnR w="12700" cap="flat" cmpd="sng" algn="ctr">
+                      <a:solidFill>
+                        <a:srgbClr val="DADCE0"/>
+                      </a:solidFill>
+                      <a:prstDash val="solid"/>
+                      <a:round/>
+                      <a:headEnd type="none" w="med" len="med"/>
+                      <a:tailEnd type="none" w="med" len="med"/>
+                    </a:lnR>
+                    <a:lnT w="12700" cap="flat" cmpd="sng" algn="ctr">
+                      <a:solidFill>
+                        <a:srgbClr val="DADCE0"/>
+                      </a:solidFill>
+                      <a:prstDash val="solid"/>
+                      <a:round/>
+                      <a:headEnd type="none" w="med" len="med"/>
+                      <a:tailEnd type="none" w="med" len="med"/>
+                    </a:lnT>
+                    <a:lnB w="12700" cap="flat" cmpd="sng" algn="ctr">
+                      <a:solidFill>
+                        <a:srgbClr val="DADCE0"/>
+                      </a:solidFill>
+                      <a:prstDash val="solid"/>
+                      <a:round/>
+                      <a:headEnd type="none" w="med" len="med"/>
+                      <a:tailEnd type="none" w="med" len="med"/>
+                    </a:lnB>
+                    <a:solidFill>
+                      <a:srgbClr val="FFFFFF"/>
+                    </a:solidFill>
+                  </a:tcPr>
+                </a:tc>
+                <a:tc>
+                  <a:txBody>
+                    <a:bodyPr/>
+                    <a:lstStyle/>
+                    <a:p>
+                      <a:pPr algn="l" indent="0" marL="0">
+                        <a:buNone/>
+                      </a:pPr>
+                      <a:r>
+                        <a:rPr lang="en-US" sz="1400" dirty="0">
+                          <a:solidFill>
+                            <a:srgbClr val="202124"/>
+                          </a:solidFill>
+                        </a:rPr>
+                        <a:t>Full Source Code &amp; Tests</a:t>
+                      </a:r>
+                      <a:endParaRPr lang="en-US" sz="1400" dirty="0"/>
+                    </a:p>
+                  </a:txBody>
+                  <a:tcPr marL="91440" marR="91440" marT="45720" marB="45720" anchor="ctr">
+                    <a:lnL w="12700" cap="flat" cmpd="sng" algn="ctr">
+                      <a:solidFill>
+                        <a:srgbClr val="DADCE0"/>
+                      </a:solidFill>
+                      <a:prstDash val="solid"/>
+                      <a:round/>
+                      <a:headEnd type="none" w="med" len="med"/>
+                      <a:tailEnd type="none" w="med" len="med"/>
+                    </a:lnL>
+                    <a:lnR w="12700" cap="flat" cmpd="sng" algn="ctr">
+                      <a:solidFill>
+                        <a:srgbClr val="DADCE0"/>
+                      </a:solidFill>
+                      <a:prstDash val="solid"/>
+                      <a:round/>
+                      <a:headEnd type="none" w="med" len="med"/>
+                      <a:tailEnd type="none" w="med" len="med"/>
+                    </a:lnR>
+                    <a:lnT w="12700" cap="flat" cmpd="sng" algn="ctr">
+                      <a:solidFill>
+                        <a:srgbClr val="DADCE0"/>
+                      </a:solidFill>
+                      <a:prstDash val="solid"/>
+                      <a:round/>
+                      <a:headEnd type="none" w="med" len="med"/>
+                      <a:tailEnd type="none" w="med" len="med"/>
+                    </a:lnT>
+                    <a:lnB w="12700" cap="flat" cmpd="sng" algn="ctr">
+                      <a:solidFill>
+                        <a:srgbClr val="DADCE0"/>
+                      </a:solidFill>
+                      <a:prstDash val="solid"/>
+                      <a:round/>
+                      <a:headEnd type="none" w="med" len="med"/>
+                      <a:tailEnd type="none" w="med" len="med"/>
+                    </a:lnB>
+                    <a:solidFill>
+                      <a:srgbClr val="FFFFFF"/>
+                    </a:solidFill>
+                  </a:tcPr>
+                </a:tc>
+                <a:tc>
+                  <a:txBody>
+                    <a:bodyPr/>
+                    <a:lstStyle/>
+                    <a:p>
+                      <a:pPr algn="l" indent="0" marL="0">
+                        <a:buNone/>
+                      </a:pPr>
+                      <a:r>
+                        <a:rPr lang="en-US" sz="1400" dirty="0">
+                          <a:solidFill>
+                            <a:srgbClr val="202124"/>
+                          </a:solidFill>
+                        </a:rPr>
+                        <a:t>https://github.com/hatakekakashi05/google-photos-vague-memory-</a:t>
+                      </a:r>
+                      <a:endParaRPr lang="en-US" sz="1400" dirty="0"/>
+                    </a:p>
+                  </a:txBody>
+                  <a:tcPr marL="91440" marR="91440" marT="45720" marB="45720" anchor="ctr">
+                    <a:lnL w="12700" cap="flat" cmpd="sng" algn="ctr">
+                      <a:solidFill>
+                        <a:srgbClr val="DADCE0"/>
+                      </a:solidFill>
+                      <a:prstDash val="solid"/>
+                      <a:round/>
+                      <a:headEnd type="none" w="med" len="med"/>
+                      <a:tailEnd type="none" w="med" len="med"/>
+                    </a:lnL>
+                    <a:lnR w="12700" cap="flat" cmpd="sng" algn="ctr">
+                      <a:solidFill>
+                        <a:srgbClr val="DADCE0"/>
+                      </a:solidFill>
+                      <a:prstDash val="solid"/>
+                      <a:round/>
+                      <a:headEnd type="none" w="med" len="med"/>
+                      <a:tailEnd type="none" w="med" len="med"/>
+                    </a:lnR>
+                    <a:lnT w="12700" cap="flat" cmpd="sng" algn="ctr">
+                      <a:solidFill>
+                        <a:srgbClr val="DADCE0"/>
+                      </a:solidFill>
+                      <a:prstDash val="solid"/>
+                      <a:round/>
+                      <a:headEnd type="none" w="med" len="med"/>
+                      <a:tailEnd type="none" w="med" len="med"/>
+                    </a:lnT>
+                    <a:lnB w="12700" cap="flat" cmpd="sng" algn="ctr">
+                      <a:solidFill>
+                        <a:srgbClr val="DADCE0"/>
+                      </a:solidFill>
+                      <a:prstDash val="solid"/>
+                      <a:round/>
+                      <a:headEnd type="none" w="med" len="med"/>
+                      <a:tailEnd type="none" w="med" len="med"/>
+                    </a:lnB>
+                    <a:solidFill>
+                      <a:srgbClr val="FFFFFF"/>
+                    </a:solidFill>
+                  </a:tcPr>
+                </a:tc>
+                <a:tc>
+                  <a:txBody>
+                    <a:bodyPr/>
+                    <a:lstStyle/>
+                    <a:p>
+                      <a:pPr algn="l" indent="0" marL="0">
+                        <a:buNone/>
+                      </a:pPr>
+                      <a:r>
+                        <a:rPr lang="en-US" sz="1400" dirty="0">
+                          <a:solidFill>
+                            <a:srgbClr val="202124"/>
+                          </a:solidFill>
+                        </a:rPr>
+                        <a:t>Production Ready</a:t>
+                      </a:r>
+                      <a:endParaRPr lang="en-US" sz="1400" dirty="0"/>
+                    </a:p>
+                  </a:txBody>
+                  <a:tcPr marL="91440" marR="91440" marT="45720" marB="45720" anchor="ctr">
+                    <a:lnL w="12700" cap="flat" cmpd="sng" algn="ctr">
+                      <a:solidFill>
+                        <a:srgbClr val="DADCE0"/>
+                      </a:solidFill>
+                      <a:prstDash val="solid"/>
+                      <a:round/>
+                      <a:headEnd type="none" w="med" len="med"/>
+                      <a:tailEnd type="none" w="med" len="med"/>
+                    </a:lnL>
+                    <a:lnR w="12700" cap="flat" cmpd="sng" algn="ctr">
+                      <a:solidFill>
+                        <a:srgbClr val="DADCE0"/>
+                      </a:solidFill>
+                      <a:prstDash val="solid"/>
+                      <a:round/>
+                      <a:headEnd type="none" w="med" len="med"/>
+                      <a:tailEnd type="none" w="med" len="med"/>
+                    </a:lnR>
+                    <a:lnT w="12700" cap="flat" cmpd="sng" algn="ctr">
+                      <a:solidFill>
+                        <a:srgbClr val="DADCE0"/>
+                      </a:solidFill>
+                      <a:prstDash val="solid"/>
+                      <a:round/>
+                      <a:headEnd type="none" w="med" len="med"/>
+                      <a:tailEnd type="none" w="med" len="med"/>
+                    </a:lnT>
+                    <a:lnB w="12700" cap="flat" cmpd="sng" algn="ctr">
+                      <a:solidFill>
+                        <a:srgbClr val="DADCE0"/>
+                      </a:solidFill>
+                      <a:prstDash val="solid"/>
+                      <a:round/>
+                      <a:headEnd type="none" w="med" len="med"/>
+                      <a:tailEnd type="none" w="med" len="med"/>
+                    </a:lnB>
+                    <a:solidFill>
+                      <a:srgbClr val="FFFFFF"/>
+                    </a:solidFill>
+                  </a:tcPr>
+                </a:tc>
+              </a:tr>
             </a:tbl>
           </a:graphicData>
         </a:graphic>
@@ -5035,7 +5588,7 @@
                   <a:srgbClr val="1A73E8"/>
                 </a:solidFill>
               </a:rPr>
-              <a:t>Canonical North-Star Metric Tree Architecture</a:t>
+              <a:t>Canonical North-Star Metric Tree Architecture &amp; Empirical Lift Targets</a:t>
             </a:r>
             <a:endParaRPr lang="en-US" sz="1500" dirty="0"/>
           </a:p>
@@ -5207,7 +5760,7 @@
                             <a:srgbClr val="1A73E8"/>
                           </a:solidFill>
                         </a:rPr>
-                        <a:t>Baseline / Target</a:t>
+                        <a:t>Baseline → Target</a:t>
                       </a:r>
                       <a:endParaRPr lang="en-US" sz="1400" dirty="0"/>
                     </a:p>
@@ -5636,7 +6189,7 @@
                             <a:srgbClr val="202124"/>
                           </a:solidFill>
                         </a:rPr>
-                        <a:t>Primary Impact</a:t>
+                        <a:t>Primary Lift</a:t>
                       </a:r>
                       <a:endParaRPr lang="en-US" sz="1400" dirty="0"/>
                     </a:p>
@@ -5882,7 +6435,7 @@
                             <a:srgbClr val="202124"/>
                           </a:solidFill>
                         </a:rPr>
-                        <a:t>Surfaced Candidate Anchors / Total Vague Query Sessions</a:t>
+                        <a:t>Surfaced Candidate Anchors (K=5) / Total Vague Query Sessions</a:t>
                       </a:r>
                       <a:endParaRPr lang="en-US" sz="1400" dirty="0"/>
                     </a:p>
@@ -6189,7 +6742,7 @@
                             <a:srgbClr val="202124"/>
                           </a:solidFill>
                         </a:rPr>
-                        <a:t>Target Media Found in Context / Surfaced Anchor Sessions</a:t>
+                        <a:t>Target Media Found in Context (±4h, ≤1km) / Anchor Sessions</a:t>
                       </a:r>
                       <a:endParaRPr lang="en-US" sz="1400" dirty="0"/>
                     </a:p>
@@ -6313,7 +6866,7 @@
                             <a:srgbClr val="202124"/>
                           </a:solidFill>
                         </a:rPr>
-                        <a:t>Guardrail Metric</a:t>
+                        <a:t>Guardrail Metric 1</a:t>
                       </a:r>
                       <a:endParaRPr lang="en-US" sz="1400" dirty="0"/>
                     </a:p>
@@ -6496,7 +7049,7 @@
                             <a:srgbClr val="202124"/>
                           </a:solidFill>
                         </a:rPr>
-                        <a:t>Search Sessions Abandoned between 1 to 3 minutes of timeline scrolling</a:t>
+                        <a:t>Search Sessions Abandoned after 1 to 3 minutes of timeline scrolling</a:t>
                       </a:r>
                       <a:endParaRPr lang="en-US" sz="1400" dirty="0"/>
                     </a:p>
@@ -6558,6 +7111,313 @@
                           </a:solidFill>
                         </a:rPr>
                         <a:t>Friction Reducer</a:t>
+                      </a:r>
+                      <a:endParaRPr lang="en-US" sz="1400" dirty="0"/>
+                    </a:p>
+                  </a:txBody>
+                  <a:tcPr marL="91440" marR="91440" marT="45720" marB="45720" anchor="ctr">
+                    <a:lnL w="12700" cap="flat" cmpd="sng" algn="ctr">
+                      <a:solidFill>
+                        <a:srgbClr val="DADCE0"/>
+                      </a:solidFill>
+                      <a:prstDash val="solid"/>
+                      <a:round/>
+                      <a:headEnd type="none" w="med" len="med"/>
+                      <a:tailEnd type="none" w="med" len="med"/>
+                    </a:lnL>
+                    <a:lnR w="12700" cap="flat" cmpd="sng" algn="ctr">
+                      <a:solidFill>
+                        <a:srgbClr val="DADCE0"/>
+                      </a:solidFill>
+                      <a:prstDash val="solid"/>
+                      <a:round/>
+                      <a:headEnd type="none" w="med" len="med"/>
+                      <a:tailEnd type="none" w="med" len="med"/>
+                    </a:lnR>
+                    <a:lnT w="12700" cap="flat" cmpd="sng" algn="ctr">
+                      <a:solidFill>
+                        <a:srgbClr val="DADCE0"/>
+                      </a:solidFill>
+                      <a:prstDash val="solid"/>
+                      <a:round/>
+                      <a:headEnd type="none" w="med" len="med"/>
+                      <a:tailEnd type="none" w="med" len="med"/>
+                    </a:lnT>
+                    <a:lnB w="12700" cap="flat" cmpd="sng" algn="ctr">
+                      <a:solidFill>
+                        <a:srgbClr val="DADCE0"/>
+                      </a:solidFill>
+                      <a:prstDash val="solid"/>
+                      <a:round/>
+                      <a:headEnd type="none" w="med" len="med"/>
+                      <a:tailEnd type="none" w="med" len="med"/>
+                    </a:lnB>
+                    <a:solidFill>
+                      <a:srgbClr val="FFFFFF"/>
+                    </a:solidFill>
+                  </a:tcPr>
+                </a:tc>
+              </a:tr>
+              <a:tr h="0">
+                <a:tc>
+                  <a:txBody>
+                    <a:bodyPr/>
+                    <a:lstStyle/>
+                    <a:p>
+                      <a:pPr algn="l" indent="0" marL="0">
+                        <a:buNone/>
+                      </a:pPr>
+                      <a:r>
+                        <a:rPr lang="en-US" sz="1400" dirty="0">
+                          <a:solidFill>
+                            <a:srgbClr val="202124"/>
+                          </a:solidFill>
+                        </a:rPr>
+                        <a:t>Guardrail Metric 2</a:t>
+                      </a:r>
+                      <a:endParaRPr lang="en-US" sz="1400" dirty="0"/>
+                    </a:p>
+                  </a:txBody>
+                  <a:tcPr marL="91440" marR="91440" marT="45720" marB="45720" anchor="ctr">
+                    <a:lnL w="12700" cap="flat" cmpd="sng" algn="ctr">
+                      <a:solidFill>
+                        <a:srgbClr val="DADCE0"/>
+                      </a:solidFill>
+                      <a:prstDash val="solid"/>
+                      <a:round/>
+                      <a:headEnd type="none" w="med" len="med"/>
+                      <a:tailEnd type="none" w="med" len="med"/>
+                    </a:lnL>
+                    <a:lnR w="12700" cap="flat" cmpd="sng" algn="ctr">
+                      <a:solidFill>
+                        <a:srgbClr val="DADCE0"/>
+                      </a:solidFill>
+                      <a:prstDash val="solid"/>
+                      <a:round/>
+                      <a:headEnd type="none" w="med" len="med"/>
+                      <a:tailEnd type="none" w="med" len="med"/>
+                    </a:lnR>
+                    <a:lnT w="12700" cap="flat" cmpd="sng" algn="ctr">
+                      <a:solidFill>
+                        <a:srgbClr val="DADCE0"/>
+                      </a:solidFill>
+                      <a:prstDash val="solid"/>
+                      <a:round/>
+                      <a:headEnd type="none" w="med" len="med"/>
+                      <a:tailEnd type="none" w="med" len="med"/>
+                    </a:lnT>
+                    <a:lnB w="12700" cap="flat" cmpd="sng" algn="ctr">
+                      <a:solidFill>
+                        <a:srgbClr val="DADCE0"/>
+                      </a:solidFill>
+                      <a:prstDash val="solid"/>
+                      <a:round/>
+                      <a:headEnd type="none" w="med" len="med"/>
+                      <a:tailEnd type="none" w="med" len="med"/>
+                    </a:lnB>
+                    <a:solidFill>
+                      <a:srgbClr val="FFFFFF"/>
+                    </a:solidFill>
+                  </a:tcPr>
+                </a:tc>
+                <a:tc>
+                  <a:txBody>
+                    <a:bodyPr/>
+                    <a:lstStyle/>
+                    <a:p>
+                      <a:pPr algn="l" indent="0" marL="0">
+                        <a:buNone/>
+                      </a:pPr>
+                      <a:r>
+                        <a:rPr lang="en-US" sz="1400" dirty="0">
+                          <a:solidFill>
+                            <a:srgbClr val="202124"/>
+                          </a:solidFill>
+                        </a:rPr>
+                        <a:t>API End-to-End Latency</a:t>
+                      </a:r>
+                      <a:endParaRPr lang="en-US" sz="1400" dirty="0"/>
+                    </a:p>
+                  </a:txBody>
+                  <a:tcPr marL="91440" marR="91440" marT="45720" marB="45720" anchor="ctr">
+                    <a:lnL w="12700" cap="flat" cmpd="sng" algn="ctr">
+                      <a:solidFill>
+                        <a:srgbClr val="DADCE0"/>
+                      </a:solidFill>
+                      <a:prstDash val="solid"/>
+                      <a:round/>
+                      <a:headEnd type="none" w="med" len="med"/>
+                      <a:tailEnd type="none" w="med" len="med"/>
+                    </a:lnL>
+                    <a:lnR w="12700" cap="flat" cmpd="sng" algn="ctr">
+                      <a:solidFill>
+                        <a:srgbClr val="DADCE0"/>
+                      </a:solidFill>
+                      <a:prstDash val="solid"/>
+                      <a:round/>
+                      <a:headEnd type="none" w="med" len="med"/>
+                      <a:tailEnd type="none" w="med" len="med"/>
+                    </a:lnR>
+                    <a:lnT w="12700" cap="flat" cmpd="sng" algn="ctr">
+                      <a:solidFill>
+                        <a:srgbClr val="DADCE0"/>
+                      </a:solidFill>
+                      <a:prstDash val="solid"/>
+                      <a:round/>
+                      <a:headEnd type="none" w="med" len="med"/>
+                      <a:tailEnd type="none" w="med" len="med"/>
+                    </a:lnT>
+                    <a:lnB w="12700" cap="flat" cmpd="sng" algn="ctr">
+                      <a:solidFill>
+                        <a:srgbClr val="DADCE0"/>
+                      </a:solidFill>
+                      <a:prstDash val="solid"/>
+                      <a:round/>
+                      <a:headEnd type="none" w="med" len="med"/>
+                      <a:tailEnd type="none" w="med" len="med"/>
+                    </a:lnB>
+                    <a:solidFill>
+                      <a:srgbClr val="FFFFFF"/>
+                    </a:solidFill>
+                  </a:tcPr>
+                </a:tc>
+                <a:tc>
+                  <a:txBody>
+                    <a:bodyPr/>
+                    <a:lstStyle/>
+                    <a:p>
+                      <a:pPr algn="l" indent="0" marL="0">
+                        <a:buNone/>
+                      </a:pPr>
+                      <a:r>
+                        <a:rPr lang="en-US" sz="1400" dirty="0">
+                          <a:solidFill>
+                            <a:srgbClr val="202124"/>
+                          </a:solidFill>
+                        </a:rPr>
+                        <a:t>&lt; 250ms Target</a:t>
+                      </a:r>
+                      <a:endParaRPr lang="en-US" sz="1400" dirty="0"/>
+                    </a:p>
+                  </a:txBody>
+                  <a:tcPr marL="91440" marR="91440" marT="45720" marB="45720" anchor="ctr">
+                    <a:lnL w="12700" cap="flat" cmpd="sng" algn="ctr">
+                      <a:solidFill>
+                        <a:srgbClr val="DADCE0"/>
+                      </a:solidFill>
+                      <a:prstDash val="solid"/>
+                      <a:round/>
+                      <a:headEnd type="none" w="med" len="med"/>
+                      <a:tailEnd type="none" w="med" len="med"/>
+                    </a:lnL>
+                    <a:lnR w="12700" cap="flat" cmpd="sng" algn="ctr">
+                      <a:solidFill>
+                        <a:srgbClr val="DADCE0"/>
+                      </a:solidFill>
+                      <a:prstDash val="solid"/>
+                      <a:round/>
+                      <a:headEnd type="none" w="med" len="med"/>
+                      <a:tailEnd type="none" w="med" len="med"/>
+                    </a:lnR>
+                    <a:lnT w="12700" cap="flat" cmpd="sng" algn="ctr">
+                      <a:solidFill>
+                        <a:srgbClr val="DADCE0"/>
+                      </a:solidFill>
+                      <a:prstDash val="solid"/>
+                      <a:round/>
+                      <a:headEnd type="none" w="med" len="med"/>
+                      <a:tailEnd type="none" w="med" len="med"/>
+                    </a:lnT>
+                    <a:lnB w="12700" cap="flat" cmpd="sng" algn="ctr">
+                      <a:solidFill>
+                        <a:srgbClr val="DADCE0"/>
+                      </a:solidFill>
+                      <a:prstDash val="solid"/>
+                      <a:round/>
+                      <a:headEnd type="none" w="med" len="med"/>
+                      <a:tailEnd type="none" w="med" len="med"/>
+                    </a:lnB>
+                    <a:solidFill>
+                      <a:srgbClr val="FFFFFF"/>
+                    </a:solidFill>
+                  </a:tcPr>
+                </a:tc>
+                <a:tc>
+                  <a:txBody>
+                    <a:bodyPr/>
+                    <a:lstStyle/>
+                    <a:p>
+                      <a:pPr algn="l" indent="0" marL="0">
+                        <a:buNone/>
+                      </a:pPr>
+                      <a:r>
+                        <a:rPr lang="en-US" sz="1400" dirty="0">
+                          <a:solidFill>
+                            <a:srgbClr val="202124"/>
+                          </a:solidFill>
+                        </a:rPr>
+                        <a:t>Total Milliseconds from Query Submission to Context Grid Render</a:t>
+                      </a:r>
+                      <a:endParaRPr lang="en-US" sz="1400" dirty="0"/>
+                    </a:p>
+                  </a:txBody>
+                  <a:tcPr marL="91440" marR="91440" marT="45720" marB="45720" anchor="ctr">
+                    <a:lnL w="12700" cap="flat" cmpd="sng" algn="ctr">
+                      <a:solidFill>
+                        <a:srgbClr val="DADCE0"/>
+                      </a:solidFill>
+                      <a:prstDash val="solid"/>
+                      <a:round/>
+                      <a:headEnd type="none" w="med" len="med"/>
+                      <a:tailEnd type="none" w="med" len="med"/>
+                    </a:lnL>
+                    <a:lnR w="12700" cap="flat" cmpd="sng" algn="ctr">
+                      <a:solidFill>
+                        <a:srgbClr val="DADCE0"/>
+                      </a:solidFill>
+                      <a:prstDash val="solid"/>
+                      <a:round/>
+                      <a:headEnd type="none" w="med" len="med"/>
+                      <a:tailEnd type="none" w="med" len="med"/>
+                    </a:lnR>
+                    <a:lnT w="12700" cap="flat" cmpd="sng" algn="ctr">
+                      <a:solidFill>
+                        <a:srgbClr val="DADCE0"/>
+                      </a:solidFill>
+                      <a:prstDash val="solid"/>
+                      <a:round/>
+                      <a:headEnd type="none" w="med" len="med"/>
+                      <a:tailEnd type="none" w="med" len="med"/>
+                    </a:lnT>
+                    <a:lnB w="12700" cap="flat" cmpd="sng" algn="ctr">
+                      <a:solidFill>
+                        <a:srgbClr val="DADCE0"/>
+                      </a:solidFill>
+                      <a:prstDash val="solid"/>
+                      <a:round/>
+                      <a:headEnd type="none" w="med" len="med"/>
+                      <a:tailEnd type="none" w="med" len="med"/>
+                    </a:lnB>
+                    <a:solidFill>
+                      <a:srgbClr val="FFFFFF"/>
+                    </a:solidFill>
+                  </a:tcPr>
+                </a:tc>
+                <a:tc>
+                  <a:txBody>
+                    <a:bodyPr/>
+                    <a:lstStyle/>
+                    <a:p>
+                      <a:pPr algn="l" indent="0" marL="0">
+                        <a:buNone/>
+                      </a:pPr>
+                      <a:r>
+                        <a:rPr lang="en-US" sz="1400" dirty="0">
+                          <a:solidFill>
+                            <a:srgbClr val="202124"/>
+                          </a:solidFill>
+                        </a:rPr>
+                        <a:t>Performance</a:t>
                       </a:r>
                       <a:endParaRPr lang="en-US" sz="1400" dirty="0"/>
                     </a:p>
@@ -6804,7 +7664,7 @@
                   <a:srgbClr val="1A73E8"/>
                 </a:solidFill>
               </a:rPr>
-              <a:t>Multi-Platform Public Community Feedback Analytics</a:t>
+              <a:t>Multi-Platform Public Community Feedback Analytics &amp; Gemini AI Synthesis</a:t>
             </a:r>
             <a:endParaRPr lang="en-US" sz="1500" dirty="0"/>
           </a:p>
@@ -8327,6 +9187,313 @@
                           </a:solidFill>
                         </a:rPr>
                         <a:t>Linear timeline search degradation</a:t>
+                      </a:r>
+                      <a:endParaRPr lang="en-US" sz="1400" dirty="0"/>
+                    </a:p>
+                  </a:txBody>
+                  <a:tcPr marL="91440" marR="91440" marT="45720" marB="45720" anchor="ctr">
+                    <a:lnL w="12700" cap="flat" cmpd="sng" algn="ctr">
+                      <a:solidFill>
+                        <a:srgbClr val="DADCE0"/>
+                      </a:solidFill>
+                      <a:prstDash val="solid"/>
+                      <a:round/>
+                      <a:headEnd type="none" w="med" len="med"/>
+                      <a:tailEnd type="none" w="med" len="med"/>
+                    </a:lnL>
+                    <a:lnR w="12700" cap="flat" cmpd="sng" algn="ctr">
+                      <a:solidFill>
+                        <a:srgbClr val="DADCE0"/>
+                      </a:solidFill>
+                      <a:prstDash val="solid"/>
+                      <a:round/>
+                      <a:headEnd type="none" w="med" len="med"/>
+                      <a:tailEnd type="none" w="med" len="med"/>
+                    </a:lnR>
+                    <a:lnT w="12700" cap="flat" cmpd="sng" algn="ctr">
+                      <a:solidFill>
+                        <a:srgbClr val="DADCE0"/>
+                      </a:solidFill>
+                      <a:prstDash val="solid"/>
+                      <a:round/>
+                      <a:headEnd type="none" w="med" len="med"/>
+                      <a:tailEnd type="none" w="med" len="med"/>
+                    </a:lnT>
+                    <a:lnB w="12700" cap="flat" cmpd="sng" algn="ctr">
+                      <a:solidFill>
+                        <a:srgbClr val="DADCE0"/>
+                      </a:solidFill>
+                      <a:prstDash val="solid"/>
+                      <a:round/>
+                      <a:headEnd type="none" w="med" len="med"/>
+                      <a:tailEnd type="none" w="med" len="med"/>
+                    </a:lnB>
+                    <a:solidFill>
+                      <a:srgbClr val="FFFFFF"/>
+                    </a:solidFill>
+                  </a:tcPr>
+                </a:tc>
+              </a:tr>
+              <a:tr h="0">
+                <a:tc>
+                  <a:txBody>
+                    <a:bodyPr/>
+                    <a:lstStyle/>
+                    <a:p>
+                      <a:pPr algn="l" indent="0" marL="0">
+                        <a:buNone/>
+                      </a:pPr>
+                      <a:r>
+                        <a:rPr lang="en-US" sz="1400" dirty="0">
+                          <a:solidFill>
+                            <a:srgbClr val="202124"/>
+                          </a:solidFill>
+                        </a:rPr>
+                        <a:t>Discovery Engine Link</a:t>
+                      </a:r>
+                      <a:endParaRPr lang="en-US" sz="1400" dirty="0"/>
+                    </a:p>
+                  </a:txBody>
+                  <a:tcPr marL="91440" marR="91440" marT="45720" marB="45720" anchor="ctr">
+                    <a:lnL w="12700" cap="flat" cmpd="sng" algn="ctr">
+                      <a:solidFill>
+                        <a:srgbClr val="DADCE0"/>
+                      </a:solidFill>
+                      <a:prstDash val="solid"/>
+                      <a:round/>
+                      <a:headEnd type="none" w="med" len="med"/>
+                      <a:tailEnd type="none" w="med" len="med"/>
+                    </a:lnL>
+                    <a:lnR w="12700" cap="flat" cmpd="sng" algn="ctr">
+                      <a:solidFill>
+                        <a:srgbClr val="DADCE0"/>
+                      </a:solidFill>
+                      <a:prstDash val="solid"/>
+                      <a:round/>
+                      <a:headEnd type="none" w="med" len="med"/>
+                      <a:tailEnd type="none" w="med" len="med"/>
+                    </a:lnR>
+                    <a:lnT w="12700" cap="flat" cmpd="sng" algn="ctr">
+                      <a:solidFill>
+                        <a:srgbClr val="DADCE0"/>
+                      </a:solidFill>
+                      <a:prstDash val="solid"/>
+                      <a:round/>
+                      <a:headEnd type="none" w="med" len="med"/>
+                      <a:tailEnd type="none" w="med" len="med"/>
+                    </a:lnT>
+                    <a:lnB w="12700" cap="flat" cmpd="sng" algn="ctr">
+                      <a:solidFill>
+                        <a:srgbClr val="DADCE0"/>
+                      </a:solidFill>
+                      <a:prstDash val="solid"/>
+                      <a:round/>
+                      <a:headEnd type="none" w="med" len="med"/>
+                      <a:tailEnd type="none" w="med" len="med"/>
+                    </a:lnB>
+                    <a:solidFill>
+                      <a:srgbClr val="FFFFFF"/>
+                    </a:solidFill>
+                  </a:tcPr>
+                </a:tc>
+                <a:tc>
+                  <a:txBody>
+                    <a:bodyPr/>
+                    <a:lstStyle/>
+                    <a:p>
+                      <a:pPr algn="l" indent="0" marL="0">
+                        <a:buNone/>
+                      </a:pPr>
+                      <a:r>
+                        <a:rPr lang="en-US" sz="1400" dirty="0">
+                          <a:solidFill>
+                            <a:srgbClr val="202124"/>
+                          </a:solidFill>
+                        </a:rPr>
+                        <a:t>Live Dashboard</a:t>
+                      </a:r>
+                      <a:endParaRPr lang="en-US" sz="1400" dirty="0"/>
+                    </a:p>
+                  </a:txBody>
+                  <a:tcPr marL="91440" marR="91440" marT="45720" marB="45720" anchor="ctr">
+                    <a:lnL w="12700" cap="flat" cmpd="sng" algn="ctr">
+                      <a:solidFill>
+                        <a:srgbClr val="DADCE0"/>
+                      </a:solidFill>
+                      <a:prstDash val="solid"/>
+                      <a:round/>
+                      <a:headEnd type="none" w="med" len="med"/>
+                      <a:tailEnd type="none" w="med" len="med"/>
+                    </a:lnL>
+                    <a:lnR w="12700" cap="flat" cmpd="sng" algn="ctr">
+                      <a:solidFill>
+                        <a:srgbClr val="DADCE0"/>
+                      </a:solidFill>
+                      <a:prstDash val="solid"/>
+                      <a:round/>
+                      <a:headEnd type="none" w="med" len="med"/>
+                      <a:tailEnd type="none" w="med" len="med"/>
+                    </a:lnR>
+                    <a:lnT w="12700" cap="flat" cmpd="sng" algn="ctr">
+                      <a:solidFill>
+                        <a:srgbClr val="DADCE0"/>
+                      </a:solidFill>
+                      <a:prstDash val="solid"/>
+                      <a:round/>
+                      <a:headEnd type="none" w="med" len="med"/>
+                      <a:tailEnd type="none" w="med" len="med"/>
+                    </a:lnT>
+                    <a:lnB w="12700" cap="flat" cmpd="sng" algn="ctr">
+                      <a:solidFill>
+                        <a:srgbClr val="DADCE0"/>
+                      </a:solidFill>
+                      <a:prstDash val="solid"/>
+                      <a:round/>
+                      <a:headEnd type="none" w="med" len="med"/>
+                      <a:tailEnd type="none" w="med" len="med"/>
+                    </a:lnB>
+                    <a:solidFill>
+                      <a:srgbClr val="FFFFFF"/>
+                    </a:solidFill>
+                  </a:tcPr>
+                </a:tc>
+                <a:tc>
+                  <a:txBody>
+                    <a:bodyPr/>
+                    <a:lstStyle/>
+                    <a:p>
+                      <a:pPr algn="l" indent="0" marL="0">
+                        <a:buNone/>
+                      </a:pPr>
+                      <a:r>
+                        <a:rPr lang="en-US" sz="1400" dirty="0">
+                          <a:solidFill>
+                            <a:srgbClr val="202124"/>
+                          </a:solidFill>
+                        </a:rPr>
+                        <a:t>1,000 Reviews</a:t>
+                      </a:r>
+                      <a:endParaRPr lang="en-US" sz="1400" dirty="0"/>
+                    </a:p>
+                  </a:txBody>
+                  <a:tcPr marL="91440" marR="91440" marT="45720" marB="45720" anchor="ctr">
+                    <a:lnL w="12700" cap="flat" cmpd="sng" algn="ctr">
+                      <a:solidFill>
+                        <a:srgbClr val="DADCE0"/>
+                      </a:solidFill>
+                      <a:prstDash val="solid"/>
+                      <a:round/>
+                      <a:headEnd type="none" w="med" len="med"/>
+                      <a:tailEnd type="none" w="med" len="med"/>
+                    </a:lnL>
+                    <a:lnR w="12700" cap="flat" cmpd="sng" algn="ctr">
+                      <a:solidFill>
+                        <a:srgbClr val="DADCE0"/>
+                      </a:solidFill>
+                      <a:prstDash val="solid"/>
+                      <a:round/>
+                      <a:headEnd type="none" w="med" len="med"/>
+                      <a:tailEnd type="none" w="med" len="med"/>
+                    </a:lnR>
+                    <a:lnT w="12700" cap="flat" cmpd="sng" algn="ctr">
+                      <a:solidFill>
+                        <a:srgbClr val="DADCE0"/>
+                      </a:solidFill>
+                      <a:prstDash val="solid"/>
+                      <a:round/>
+                      <a:headEnd type="none" w="med" len="med"/>
+                      <a:tailEnd type="none" w="med" len="med"/>
+                    </a:lnT>
+                    <a:lnB w="12700" cap="flat" cmpd="sng" algn="ctr">
+                      <a:solidFill>
+                        <a:srgbClr val="DADCE0"/>
+                      </a:solidFill>
+                      <a:prstDash val="solid"/>
+                      <a:round/>
+                      <a:headEnd type="none" w="med" len="med"/>
+                      <a:tailEnd type="none" w="med" len="med"/>
+                    </a:lnB>
+                    <a:solidFill>
+                      <a:srgbClr val="FFFFFF"/>
+                    </a:solidFill>
+                  </a:tcPr>
+                </a:tc>
+                <a:tc>
+                  <a:txBody>
+                    <a:bodyPr/>
+                    <a:lstStyle/>
+                    <a:p>
+                      <a:pPr algn="l" indent="0" marL="0">
+                        <a:buNone/>
+                      </a:pPr>
+                      <a:r>
+                        <a:rPr lang="en-US" sz="1400" dirty="0">
+                          <a:solidFill>
+                            <a:srgbClr val="202124"/>
+                          </a:solidFill>
+                        </a:rPr>
+                        <a:t>https://google-photos-vague-memory-discover.vercel.app/</a:t>
+                      </a:r>
+                      <a:endParaRPr lang="en-US" sz="1400" dirty="0"/>
+                    </a:p>
+                  </a:txBody>
+                  <a:tcPr marL="91440" marR="91440" marT="45720" marB="45720" anchor="ctr">
+                    <a:lnL w="12700" cap="flat" cmpd="sng" algn="ctr">
+                      <a:solidFill>
+                        <a:srgbClr val="DADCE0"/>
+                      </a:solidFill>
+                      <a:prstDash val="solid"/>
+                      <a:round/>
+                      <a:headEnd type="none" w="med" len="med"/>
+                      <a:tailEnd type="none" w="med" len="med"/>
+                    </a:lnL>
+                    <a:lnR w="12700" cap="flat" cmpd="sng" algn="ctr">
+                      <a:solidFill>
+                        <a:srgbClr val="DADCE0"/>
+                      </a:solidFill>
+                      <a:prstDash val="solid"/>
+                      <a:round/>
+                      <a:headEnd type="none" w="med" len="med"/>
+                      <a:tailEnd type="none" w="med" len="med"/>
+                    </a:lnR>
+                    <a:lnT w="12700" cap="flat" cmpd="sng" algn="ctr">
+                      <a:solidFill>
+                        <a:srgbClr val="DADCE0"/>
+                      </a:solidFill>
+                      <a:prstDash val="solid"/>
+                      <a:round/>
+                      <a:headEnd type="none" w="med" len="med"/>
+                      <a:tailEnd type="none" w="med" len="med"/>
+                    </a:lnT>
+                    <a:lnB w="12700" cap="flat" cmpd="sng" algn="ctr">
+                      <a:solidFill>
+                        <a:srgbClr val="DADCE0"/>
+                      </a:solidFill>
+                      <a:prstDash val="solid"/>
+                      <a:round/>
+                      <a:headEnd type="none" w="med" len="med"/>
+                      <a:tailEnd type="none" w="med" len="med"/>
+                    </a:lnB>
+                    <a:solidFill>
+                      <a:srgbClr val="FFFFFF"/>
+                    </a:solidFill>
+                  </a:tcPr>
+                </a:tc>
+                <a:tc>
+                  <a:txBody>
+                    <a:bodyPr/>
+                    <a:lstStyle/>
+                    <a:p>
+                      <a:pPr algn="l" indent="0" marL="0">
+                        <a:buNone/>
+                      </a:pPr>
+                      <a:r>
+                        <a:rPr lang="en-US" sz="1400" dirty="0">
+                          <a:solidFill>
+                            <a:srgbClr val="202124"/>
+                          </a:solidFill>
+                        </a:rPr>
+                        <a:t>Real-Time Gemini Synthesis</a:t>
                       </a:r>
                       <a:endParaRPr lang="en-US" sz="1400" dirty="0"/>
                     </a:p>
@@ -8805,7 +9972,7 @@
                             <a:srgbClr val="1A73E8"/>
                           </a:solidFill>
                         </a:rPr>
-                        <a:t>Observed User Retrieval Behavior</a:t>
+                        <a:t>Observed User Behavior &amp; Resource Link</a:t>
                       </a:r>
                       <a:endParaRPr lang="en-US" sz="1400" dirty="0"/>
                     </a:p>
@@ -9790,6 +10957,252 @@
                           </a:solidFill>
                         </a:rPr>
                         <a:t>Time-sensitive tax, warranty, and expense reimbursement filings</a:t>
+                      </a:r>
+                      <a:endParaRPr lang="en-US" sz="1400" dirty="0"/>
+                    </a:p>
+                  </a:txBody>
+                  <a:tcPr marL="91440" marR="91440" marT="45720" marB="45720" anchor="ctr">
+                    <a:lnL w="12700" cap="flat" cmpd="sng" algn="ctr">
+                      <a:solidFill>
+                        <a:srgbClr val="DADCE0"/>
+                      </a:solidFill>
+                      <a:prstDash val="solid"/>
+                      <a:round/>
+                      <a:headEnd type="none" w="med" len="med"/>
+                      <a:tailEnd type="none" w="med" len="med"/>
+                    </a:lnL>
+                    <a:lnR w="12700" cap="flat" cmpd="sng" algn="ctr">
+                      <a:solidFill>
+                        <a:srgbClr val="DADCE0"/>
+                      </a:solidFill>
+                      <a:prstDash val="solid"/>
+                      <a:round/>
+                      <a:headEnd type="none" w="med" len="med"/>
+                      <a:tailEnd type="none" w="med" len="med"/>
+                    </a:lnR>
+                    <a:lnT w="12700" cap="flat" cmpd="sng" algn="ctr">
+                      <a:solidFill>
+                        <a:srgbClr val="DADCE0"/>
+                      </a:solidFill>
+                      <a:prstDash val="solid"/>
+                      <a:round/>
+                      <a:headEnd type="none" w="med" len="med"/>
+                      <a:tailEnd type="none" w="med" len="med"/>
+                    </a:lnT>
+                    <a:lnB w="12700" cap="flat" cmpd="sng" algn="ctr">
+                      <a:solidFill>
+                        <a:srgbClr val="DADCE0"/>
+                      </a:solidFill>
+                      <a:prstDash val="solid"/>
+                      <a:round/>
+                      <a:headEnd type="none" w="med" len="med"/>
+                      <a:tailEnd type="none" w="med" len="med"/>
+                    </a:lnB>
+                    <a:solidFill>
+                      <a:srgbClr val="FFFFFF"/>
+                    </a:solidFill>
+                  </a:tcPr>
+                </a:tc>
+              </a:tr>
+              <a:tr h="0">
+                <a:tc>
+                  <a:txBody>
+                    <a:bodyPr/>
+                    <a:lstStyle/>
+                    <a:p>
+                      <a:pPr algn="l" indent="0" marL="0">
+                        <a:buNone/>
+                      </a:pPr>
+                      <a:r>
+                        <a:rPr lang="en-US" sz="1400" dirty="0">
+                          <a:solidFill>
+                            <a:srgbClr val="202124"/>
+                          </a:solidFill>
+                        </a:rPr>
+                        <a:t>User Survey Datasheet</a:t>
+                      </a:r>
+                      <a:endParaRPr lang="en-US" sz="1400" dirty="0"/>
+                    </a:p>
+                  </a:txBody>
+                  <a:tcPr marL="91440" marR="91440" marT="45720" marB="45720" anchor="ctr">
+                    <a:lnL w="12700" cap="flat" cmpd="sng" algn="ctr">
+                      <a:solidFill>
+                        <a:srgbClr val="DADCE0"/>
+                      </a:solidFill>
+                      <a:prstDash val="solid"/>
+                      <a:round/>
+                      <a:headEnd type="none" w="med" len="med"/>
+                      <a:tailEnd type="none" w="med" len="med"/>
+                    </a:lnL>
+                    <a:lnR w="12700" cap="flat" cmpd="sng" algn="ctr">
+                      <a:solidFill>
+                        <a:srgbClr val="DADCE0"/>
+                      </a:solidFill>
+                      <a:prstDash val="solid"/>
+                      <a:round/>
+                      <a:headEnd type="none" w="med" len="med"/>
+                      <a:tailEnd type="none" w="med" len="med"/>
+                    </a:lnR>
+                    <a:lnT w="12700" cap="flat" cmpd="sng" algn="ctr">
+                      <a:solidFill>
+                        <a:srgbClr val="DADCE0"/>
+                      </a:solidFill>
+                      <a:prstDash val="solid"/>
+                      <a:round/>
+                      <a:headEnd type="none" w="med" len="med"/>
+                      <a:tailEnd type="none" w="med" len="med"/>
+                    </a:lnT>
+                    <a:lnB w="12700" cap="flat" cmpd="sng" algn="ctr">
+                      <a:solidFill>
+                        <a:srgbClr val="DADCE0"/>
+                      </a:solidFill>
+                      <a:prstDash val="solid"/>
+                      <a:round/>
+                      <a:headEnd type="none" w="med" len="med"/>
+                      <a:tailEnd type="none" w="med" len="med"/>
+                    </a:lnB>
+                    <a:solidFill>
+                      <a:srgbClr val="FFFFFF"/>
+                    </a:solidFill>
+                  </a:tcPr>
+                </a:tc>
+                <a:tc>
+                  <a:txBody>
+                    <a:bodyPr/>
+                    <a:lstStyle/>
+                    <a:p>
+                      <a:pPr algn="l" indent="0" marL="0">
+                        <a:buNone/>
+                      </a:pPr>
+                      <a:r>
+                        <a:rPr lang="en-US" sz="1400" dirty="0">
+                          <a:solidFill>
+                            <a:srgbClr val="202124"/>
+                          </a:solidFill>
+                        </a:rPr>
+                        <a:t>Raw N=34 Google Sheet Data</a:t>
+                      </a:r>
+                      <a:endParaRPr lang="en-US" sz="1400" dirty="0"/>
+                    </a:p>
+                  </a:txBody>
+                  <a:tcPr marL="91440" marR="91440" marT="45720" marB="45720" anchor="ctr">
+                    <a:lnL w="12700" cap="flat" cmpd="sng" algn="ctr">
+                      <a:solidFill>
+                        <a:srgbClr val="DADCE0"/>
+                      </a:solidFill>
+                      <a:prstDash val="solid"/>
+                      <a:round/>
+                      <a:headEnd type="none" w="med" len="med"/>
+                      <a:tailEnd type="none" w="med" len="med"/>
+                    </a:lnL>
+                    <a:lnR w="12700" cap="flat" cmpd="sng" algn="ctr">
+                      <a:solidFill>
+                        <a:srgbClr val="DADCE0"/>
+                      </a:solidFill>
+                      <a:prstDash val="solid"/>
+                      <a:round/>
+                      <a:headEnd type="none" w="med" len="med"/>
+                      <a:tailEnd type="none" w="med" len="med"/>
+                    </a:lnR>
+                    <a:lnT w="12700" cap="flat" cmpd="sng" algn="ctr">
+                      <a:solidFill>
+                        <a:srgbClr val="DADCE0"/>
+                      </a:solidFill>
+                      <a:prstDash val="solid"/>
+                      <a:round/>
+                      <a:headEnd type="none" w="med" len="med"/>
+                      <a:tailEnd type="none" w="med" len="med"/>
+                    </a:lnT>
+                    <a:lnB w="12700" cap="flat" cmpd="sng" algn="ctr">
+                      <a:solidFill>
+                        <a:srgbClr val="DADCE0"/>
+                      </a:solidFill>
+                      <a:prstDash val="solid"/>
+                      <a:round/>
+                      <a:headEnd type="none" w="med" len="med"/>
+                      <a:tailEnd type="none" w="med" len="med"/>
+                    </a:lnB>
+                    <a:solidFill>
+                      <a:srgbClr val="FFFFFF"/>
+                    </a:solidFill>
+                  </a:tcPr>
+                </a:tc>
+                <a:tc>
+                  <a:txBody>
+                    <a:bodyPr/>
+                    <a:lstStyle/>
+                    <a:p>
+                      <a:pPr algn="l" indent="0" marL="0">
+                        <a:buNone/>
+                      </a:pPr>
+                      <a:r>
+                        <a:rPr lang="en-US" sz="1400" dirty="0">
+                          <a:solidFill>
+                            <a:srgbClr val="202124"/>
+                          </a:solidFill>
+                        </a:rPr>
+                        <a:t>15 Questions</a:t>
+                      </a:r>
+                      <a:endParaRPr lang="en-US" sz="1400" dirty="0"/>
+                    </a:p>
+                  </a:txBody>
+                  <a:tcPr marL="91440" marR="91440" marT="45720" marB="45720" anchor="ctr">
+                    <a:lnL w="12700" cap="flat" cmpd="sng" algn="ctr">
+                      <a:solidFill>
+                        <a:srgbClr val="DADCE0"/>
+                      </a:solidFill>
+                      <a:prstDash val="solid"/>
+                      <a:round/>
+                      <a:headEnd type="none" w="med" len="med"/>
+                      <a:tailEnd type="none" w="med" len="med"/>
+                    </a:lnL>
+                    <a:lnR w="12700" cap="flat" cmpd="sng" algn="ctr">
+                      <a:solidFill>
+                        <a:srgbClr val="DADCE0"/>
+                      </a:solidFill>
+                      <a:prstDash val="solid"/>
+                      <a:round/>
+                      <a:headEnd type="none" w="med" len="med"/>
+                      <a:tailEnd type="none" w="med" len="med"/>
+                    </a:lnR>
+                    <a:lnT w="12700" cap="flat" cmpd="sng" algn="ctr">
+                      <a:solidFill>
+                        <a:srgbClr val="DADCE0"/>
+                      </a:solidFill>
+                      <a:prstDash val="solid"/>
+                      <a:round/>
+                      <a:headEnd type="none" w="med" len="med"/>
+                      <a:tailEnd type="none" w="med" len="med"/>
+                    </a:lnT>
+                    <a:lnB w="12700" cap="flat" cmpd="sng" algn="ctr">
+                      <a:solidFill>
+                        <a:srgbClr val="DADCE0"/>
+                      </a:solidFill>
+                      <a:prstDash val="solid"/>
+                      <a:round/>
+                      <a:headEnd type="none" w="med" len="med"/>
+                      <a:tailEnd type="none" w="med" len="med"/>
+                    </a:lnB>
+                    <a:solidFill>
+                      <a:srgbClr val="FFFFFF"/>
+                    </a:solidFill>
+                  </a:tcPr>
+                </a:tc>
+                <a:tc>
+                  <a:txBody>
+                    <a:bodyPr/>
+                    <a:lstStyle/>
+                    <a:p>
+                      <a:pPr algn="l" indent="0" marL="0">
+                        <a:buNone/>
+                      </a:pPr>
+                      <a:r>
+                        <a:rPr lang="en-US" sz="1400" dirty="0">
+                          <a:solidFill>
+                            <a:srgbClr val="202124"/>
+                          </a:solidFill>
+                        </a:rPr>
+                        <a:t>https://docs.google.com/spreadsheets/d/1IScTa4UfdjTZdB5UlyMu0AAd1g2LPlvGXwCgz1EAcow/edit?usp=sharing</a:t>
                       </a:r>
                       <a:endParaRPr lang="en-US" sz="1400" dirty="0"/>
                     </a:p>
@@ -15099,7 +16512,7 @@
                   <a:srgbClr val="1A73E8"/>
                 </a:solidFill>
               </a:rPr>
-              <a:t>3-Screen Interactive Solution Prototype Specification</a:t>
+              <a:t>3-Screen Interactive Solution Prototype Specification &amp; Live Links</a:t>
             </a:r>
             <a:endParaRPr lang="en-US" sz="1500" dirty="0"/>
           </a:p>
@@ -15393,7 +16806,7 @@
                             <a:srgbClr val="1A73E8"/>
                           </a:solidFill>
                         </a:rPr>
-                        <a:t>Rendered Output</a:t>
+                        <a:t>Rendered Output &amp; Live URL</a:t>
                       </a:r>
                       <a:endParaRPr lang="en-US" sz="1400" dirty="0"/>
                     </a:p>
@@ -16622,6 +18035,313 @@
                           </a:solidFill>
                         </a:rPr>
                         <a:t>Expands 4-5 surrounding photos</a:t>
+                      </a:r>
+                      <a:endParaRPr lang="en-US" sz="1400" dirty="0"/>
+                    </a:p>
+                  </a:txBody>
+                  <a:tcPr marL="91440" marR="91440" marT="45720" marB="45720" anchor="ctr">
+                    <a:lnL w="12700" cap="flat" cmpd="sng" algn="ctr">
+                      <a:solidFill>
+                        <a:srgbClr val="DADCE0"/>
+                      </a:solidFill>
+                      <a:prstDash val="solid"/>
+                      <a:round/>
+                      <a:headEnd type="none" w="med" len="med"/>
+                      <a:tailEnd type="none" w="med" len="med"/>
+                    </a:lnL>
+                    <a:lnR w="12700" cap="flat" cmpd="sng" algn="ctr">
+                      <a:solidFill>
+                        <a:srgbClr val="DADCE0"/>
+                      </a:solidFill>
+                      <a:prstDash val="solid"/>
+                      <a:round/>
+                      <a:headEnd type="none" w="med" len="med"/>
+                      <a:tailEnd type="none" w="med" len="med"/>
+                    </a:lnR>
+                    <a:lnT w="12700" cap="flat" cmpd="sng" algn="ctr">
+                      <a:solidFill>
+                        <a:srgbClr val="DADCE0"/>
+                      </a:solidFill>
+                      <a:prstDash val="solid"/>
+                      <a:round/>
+                      <a:headEnd type="none" w="med" len="med"/>
+                      <a:tailEnd type="none" w="med" len="med"/>
+                    </a:lnT>
+                    <a:lnB w="12700" cap="flat" cmpd="sng" algn="ctr">
+                      <a:solidFill>
+                        <a:srgbClr val="DADCE0"/>
+                      </a:solidFill>
+                      <a:prstDash val="solid"/>
+                      <a:round/>
+                      <a:headEnd type="none" w="med" len="med"/>
+                      <a:tailEnd type="none" w="med" len="med"/>
+                    </a:lnB>
+                    <a:solidFill>
+                      <a:srgbClr val="FFFFFF"/>
+                    </a:solidFill>
+                  </a:tcPr>
+                </a:tc>
+              </a:tr>
+              <a:tr h="0">
+                <a:tc>
+                  <a:txBody>
+                    <a:bodyPr/>
+                    <a:lstStyle/>
+                    <a:p>
+                      <a:pPr algn="l" indent="0" marL="0">
+                        <a:buNone/>
+                      </a:pPr>
+                      <a:r>
+                        <a:rPr lang="en-US" sz="1400" dirty="0">
+                          <a:solidFill>
+                            <a:srgbClr val="202124"/>
+                          </a:solidFill>
+                        </a:rPr>
+                        <a:t>Live App 2 MVP Link</a:t>
+                      </a:r>
+                      <a:endParaRPr lang="en-US" sz="1400" dirty="0"/>
+                    </a:p>
+                  </a:txBody>
+                  <a:tcPr marL="91440" marR="91440" marT="45720" marB="45720" anchor="ctr">
+                    <a:lnL w="12700" cap="flat" cmpd="sng" algn="ctr">
+                      <a:solidFill>
+                        <a:srgbClr val="DADCE0"/>
+                      </a:solidFill>
+                      <a:prstDash val="solid"/>
+                      <a:round/>
+                      <a:headEnd type="none" w="med" len="med"/>
+                      <a:tailEnd type="none" w="med" len="med"/>
+                    </a:lnL>
+                    <a:lnR w="12700" cap="flat" cmpd="sng" algn="ctr">
+                      <a:solidFill>
+                        <a:srgbClr val="DADCE0"/>
+                      </a:solidFill>
+                      <a:prstDash val="solid"/>
+                      <a:round/>
+                      <a:headEnd type="none" w="med" len="med"/>
+                      <a:tailEnd type="none" w="med" len="med"/>
+                    </a:lnR>
+                    <a:lnT w="12700" cap="flat" cmpd="sng" algn="ctr">
+                      <a:solidFill>
+                        <a:srgbClr val="DADCE0"/>
+                      </a:solidFill>
+                      <a:prstDash val="solid"/>
+                      <a:round/>
+                      <a:headEnd type="none" w="med" len="med"/>
+                      <a:tailEnd type="none" w="med" len="med"/>
+                    </a:lnT>
+                    <a:lnB w="12700" cap="flat" cmpd="sng" algn="ctr">
+                      <a:solidFill>
+                        <a:srgbClr val="DADCE0"/>
+                      </a:solidFill>
+                      <a:prstDash val="solid"/>
+                      <a:round/>
+                      <a:headEnd type="none" w="med" len="med"/>
+                      <a:tailEnd type="none" w="med" len="med"/>
+                    </a:lnB>
+                    <a:solidFill>
+                      <a:srgbClr val="FFFFFF"/>
+                    </a:solidFill>
+                  </a:tcPr>
+                </a:tc>
+                <a:tc>
+                  <a:txBody>
+                    <a:bodyPr/>
+                    <a:lstStyle/>
+                    <a:p>
+                      <a:pPr algn="l" indent="0" marL="0">
+                        <a:buNone/>
+                      </a:pPr>
+                      <a:r>
+                        <a:rPr lang="en-US" sz="1400" dirty="0">
+                          <a:solidFill>
+                            <a:srgbClr val="202124"/>
+                          </a:solidFill>
+                        </a:rPr>
+                        <a:t>Deployed Vercel MVP App</a:t>
+                      </a:r>
+                      <a:endParaRPr lang="en-US" sz="1400" dirty="0"/>
+                    </a:p>
+                  </a:txBody>
+                  <a:tcPr marL="91440" marR="91440" marT="45720" marB="45720" anchor="ctr">
+                    <a:lnL w="12700" cap="flat" cmpd="sng" algn="ctr">
+                      <a:solidFill>
+                        <a:srgbClr val="DADCE0"/>
+                      </a:solidFill>
+                      <a:prstDash val="solid"/>
+                      <a:round/>
+                      <a:headEnd type="none" w="med" len="med"/>
+                      <a:tailEnd type="none" w="med" len="med"/>
+                    </a:lnL>
+                    <a:lnR w="12700" cap="flat" cmpd="sng" algn="ctr">
+                      <a:solidFill>
+                        <a:srgbClr val="DADCE0"/>
+                      </a:solidFill>
+                      <a:prstDash val="solid"/>
+                      <a:round/>
+                      <a:headEnd type="none" w="med" len="med"/>
+                      <a:tailEnd type="none" w="med" len="med"/>
+                    </a:lnR>
+                    <a:lnT w="12700" cap="flat" cmpd="sng" algn="ctr">
+                      <a:solidFill>
+                        <a:srgbClr val="DADCE0"/>
+                      </a:solidFill>
+                      <a:prstDash val="solid"/>
+                      <a:round/>
+                      <a:headEnd type="none" w="med" len="med"/>
+                      <a:tailEnd type="none" w="med" len="med"/>
+                    </a:lnT>
+                    <a:lnB w="12700" cap="flat" cmpd="sng" algn="ctr">
+                      <a:solidFill>
+                        <a:srgbClr val="DADCE0"/>
+                      </a:solidFill>
+                      <a:prstDash val="solid"/>
+                      <a:round/>
+                      <a:headEnd type="none" w="med" len="med"/>
+                      <a:tailEnd type="none" w="med" len="med"/>
+                    </a:lnB>
+                    <a:solidFill>
+                      <a:srgbClr val="FFFFFF"/>
+                    </a:solidFill>
+                  </a:tcPr>
+                </a:tc>
+                <a:tc>
+                  <a:txBody>
+                    <a:bodyPr/>
+                    <a:lstStyle/>
+                    <a:p>
+                      <a:pPr algn="l" indent="0" marL="0">
+                        <a:buNone/>
+                      </a:pPr>
+                      <a:r>
+                        <a:rPr lang="en-US" sz="1400" dirty="0">
+                          <a:solidFill>
+                            <a:srgbClr val="202124"/>
+                          </a:solidFill>
+                        </a:rPr>
+                        <a:t>Interactive Prototype Testing</a:t>
+                      </a:r>
+                      <a:endParaRPr lang="en-US" sz="1400" dirty="0"/>
+                    </a:p>
+                  </a:txBody>
+                  <a:tcPr marL="91440" marR="91440" marT="45720" marB="45720" anchor="ctr">
+                    <a:lnL w="12700" cap="flat" cmpd="sng" algn="ctr">
+                      <a:solidFill>
+                        <a:srgbClr val="DADCE0"/>
+                      </a:solidFill>
+                      <a:prstDash val="solid"/>
+                      <a:round/>
+                      <a:headEnd type="none" w="med" len="med"/>
+                      <a:tailEnd type="none" w="med" len="med"/>
+                    </a:lnL>
+                    <a:lnR w="12700" cap="flat" cmpd="sng" algn="ctr">
+                      <a:solidFill>
+                        <a:srgbClr val="DADCE0"/>
+                      </a:solidFill>
+                      <a:prstDash val="solid"/>
+                      <a:round/>
+                      <a:headEnd type="none" w="med" len="med"/>
+                      <a:tailEnd type="none" w="med" len="med"/>
+                    </a:lnR>
+                    <a:lnT w="12700" cap="flat" cmpd="sng" algn="ctr">
+                      <a:solidFill>
+                        <a:srgbClr val="DADCE0"/>
+                      </a:solidFill>
+                      <a:prstDash val="solid"/>
+                      <a:round/>
+                      <a:headEnd type="none" w="med" len="med"/>
+                      <a:tailEnd type="none" w="med" len="med"/>
+                    </a:lnT>
+                    <a:lnB w="12700" cap="flat" cmpd="sng" algn="ctr">
+                      <a:solidFill>
+                        <a:srgbClr val="DADCE0"/>
+                      </a:solidFill>
+                      <a:prstDash val="solid"/>
+                      <a:round/>
+                      <a:headEnd type="none" w="med" len="med"/>
+                      <a:tailEnd type="none" w="med" len="med"/>
+                    </a:lnB>
+                    <a:solidFill>
+                      <a:srgbClr val="FFFFFF"/>
+                    </a:solidFill>
+                  </a:tcPr>
+                </a:tc>
+                <a:tc>
+                  <a:txBody>
+                    <a:bodyPr/>
+                    <a:lstStyle/>
+                    <a:p>
+                      <a:pPr algn="l" indent="0" marL="0">
+                        <a:buNone/>
+                      </a:pPr>
+                      <a:r>
+                        <a:rPr lang="en-US" sz="1400" dirty="0">
+                          <a:solidFill>
+                            <a:srgbClr val="202124"/>
+                          </a:solidFill>
+                        </a:rPr>
+                        <a:t>Live REST API Endpoints</a:t>
+                      </a:r>
+                      <a:endParaRPr lang="en-US" sz="1400" dirty="0"/>
+                    </a:p>
+                  </a:txBody>
+                  <a:tcPr marL="91440" marR="91440" marT="45720" marB="45720" anchor="ctr">
+                    <a:lnL w="12700" cap="flat" cmpd="sng" algn="ctr">
+                      <a:solidFill>
+                        <a:srgbClr val="DADCE0"/>
+                      </a:solidFill>
+                      <a:prstDash val="solid"/>
+                      <a:round/>
+                      <a:headEnd type="none" w="med" len="med"/>
+                      <a:tailEnd type="none" w="med" len="med"/>
+                    </a:lnL>
+                    <a:lnR w="12700" cap="flat" cmpd="sng" algn="ctr">
+                      <a:solidFill>
+                        <a:srgbClr val="DADCE0"/>
+                      </a:solidFill>
+                      <a:prstDash val="solid"/>
+                      <a:round/>
+                      <a:headEnd type="none" w="med" len="med"/>
+                      <a:tailEnd type="none" w="med" len="med"/>
+                    </a:lnR>
+                    <a:lnT w="12700" cap="flat" cmpd="sng" algn="ctr">
+                      <a:solidFill>
+                        <a:srgbClr val="DADCE0"/>
+                      </a:solidFill>
+                      <a:prstDash val="solid"/>
+                      <a:round/>
+                      <a:headEnd type="none" w="med" len="med"/>
+                      <a:tailEnd type="none" w="med" len="med"/>
+                    </a:lnT>
+                    <a:lnB w="12700" cap="flat" cmpd="sng" algn="ctr">
+                      <a:solidFill>
+                        <a:srgbClr val="DADCE0"/>
+                      </a:solidFill>
+                      <a:prstDash val="solid"/>
+                      <a:round/>
+                      <a:headEnd type="none" w="med" len="med"/>
+                      <a:tailEnd type="none" w="med" len="med"/>
+                    </a:lnB>
+                    <a:solidFill>
+                      <a:srgbClr val="FFFFFF"/>
+                    </a:solidFill>
+                  </a:tcPr>
+                </a:tc>
+                <a:tc>
+                  <a:txBody>
+                    <a:bodyPr/>
+                    <a:lstStyle/>
+                    <a:p>
+                      <a:pPr algn="l" indent="0" marL="0">
+                        <a:buNone/>
+                      </a:pPr>
+                      <a:r>
+                        <a:rPr lang="en-US" sz="1400" dirty="0">
+                          <a:solidFill>
+                            <a:srgbClr val="202124"/>
+                          </a:solidFill>
+                        </a:rPr>
+                        <a:t>https://google-photos-vague-memory-discover.vercel.app/</a:t>
                       </a:r>
                       <a:endParaRPr lang="en-US" sz="1400" dirty="0"/>
                     </a:p>
@@ -16868,7 +18588,7 @@
                   <a:srgbClr val="1A73E8"/>
                 </a:solidFill>
               </a:rPr>
-              <a:t>Ground-Truth Evaluation Benchmark &amp; API Audit Results</a:t>
+              <a:t>Ground-Truth Evaluation Benchmark &amp; API Audit Results (26 Photo Records)</a:t>
             </a:r>
             <a:endParaRPr lang="en-US" sz="1500" dirty="0"/>
           </a:p>

--- a/output/NL_GooglePhotos.pptx
+++ b/output/NL_GooglePhotos.pptx
@@ -1731,7 +1731,7 @@
                   <a:srgbClr val="1A73E8"/>
                 </a:solidFill>
               </a:rPr>
-              <a:t>1. TITLE &amp; DEPLOYED AI-NATIVE MVP</a:t>
+              <a:t>1. TITLE &amp; DEPLOYED AI-NATIVE MVP SUITE</a:t>
             </a:r>
             <a:endParaRPr lang="en-US" sz="1400" dirty="0"/>
           </a:p>
@@ -1803,7 +1803,7 @@
                   <a:srgbClr val="1A73E8"/>
                 </a:solidFill>
               </a:rPr>
-              <a:t>Executive Overview &amp; Production App Deployments</a:t>
+              <a:t>Executive System Architecture, Empirical Metrics (N=1,000 / N=34) &amp; Live Deployments</a:t>
             </a:r>
             <a:endParaRPr lang="en-US" sz="1500" dirty="0"/>
           </a:p>
@@ -1832,10 +1832,11 @@
             <a:tbl>
               <a:tblPr/>
               <a:tblGrid>
-                <a:gridCol w="2011680"/>
-                <a:gridCol w="3017520"/>
-                <a:gridCol w="3017520"/>
-                <a:gridCol w="1097280"/>
+                <a:gridCol w="1828800"/>
+                <a:gridCol w="2286000"/>
+                <a:gridCol w="1828800"/>
+                <a:gridCol w="1828800"/>
+                <a:gridCol w="457200"/>
               </a:tblGrid>
               <a:tr h="0">
                 <a:tc>
@@ -1974,6 +1975,67 @@
                             <a:srgbClr val="1A73E8"/>
                           </a:solidFill>
                         </a:rPr>
+                        <a:t>Key Metrics / Benchmark Scope</a:t>
+                      </a:r>
+                      <a:endParaRPr lang="en-US" sz="1400" dirty="0"/>
+                    </a:p>
+                  </a:txBody>
+                  <a:tcPr marL="91440" marR="91440" marT="45720" marB="45720" anchor="ctr">
+                    <a:lnL w="12700" cap="flat" cmpd="sng" algn="ctr">
+                      <a:solidFill>
+                        <a:srgbClr val="DADCE0"/>
+                      </a:solidFill>
+                      <a:prstDash val="solid"/>
+                      <a:round/>
+                      <a:headEnd type="none" w="med" len="med"/>
+                      <a:tailEnd type="none" w="med" len="med"/>
+                    </a:lnL>
+                    <a:lnR w="12700" cap="flat" cmpd="sng" algn="ctr">
+                      <a:solidFill>
+                        <a:srgbClr val="DADCE0"/>
+                      </a:solidFill>
+                      <a:prstDash val="solid"/>
+                      <a:round/>
+                      <a:headEnd type="none" w="med" len="med"/>
+                      <a:tailEnd type="none" w="med" len="med"/>
+                    </a:lnR>
+                    <a:lnT w="12700" cap="flat" cmpd="sng" algn="ctr">
+                      <a:solidFill>
+                        <a:srgbClr val="DADCE0"/>
+                      </a:solidFill>
+                      <a:prstDash val="solid"/>
+                      <a:round/>
+                      <a:headEnd type="none" w="med" len="med"/>
+                      <a:tailEnd type="none" w="med" len="med"/>
+                    </a:lnT>
+                    <a:lnB w="12700" cap="flat" cmpd="sng" algn="ctr">
+                      <a:solidFill>
+                        <a:srgbClr val="DADCE0"/>
+                      </a:solidFill>
+                      <a:prstDash val="solid"/>
+                      <a:round/>
+                      <a:headEnd type="none" w="med" len="med"/>
+                      <a:tailEnd type="none" w="med" len="med"/>
+                    </a:lnB>
+                    <a:solidFill>
+                      <a:srgbClr val="E8F0FE"/>
+                    </a:solidFill>
+                  </a:tcPr>
+                </a:tc>
+                <a:tc>
+                  <a:txBody>
+                    <a:bodyPr/>
+                    <a:lstStyle/>
+                    <a:p>
+                      <a:pPr algn="l" indent="0" marL="0">
+                        <a:buNone/>
+                      </a:pPr>
+                      <a:r>
+                        <a:rPr lang="en-US" sz="1400" b="1" dirty="0">
+                          <a:solidFill>
+                            <a:srgbClr val="1A73E8"/>
+                          </a:solidFill>
+                        </a:rPr>
                         <a:t>Public Deployed Link / Hyperlink</a:t>
                       </a:r>
                       <a:endParaRPr lang="en-US" sz="1400" dirty="0"/>
@@ -2159,7 +2221,68 @@
                             <a:srgbClr val="202124"/>
                           </a:solidFill>
                         </a:rPr>
-                        <a:t>Gemini AI Search &amp; 1-Tap Timeline Context Jump</a:t>
+                        <a:t>Gemini AI Search &amp; 1-Tap Context Jump</a:t>
+                      </a:r>
+                      <a:endParaRPr lang="en-US" sz="1400" dirty="0"/>
+                    </a:p>
+                  </a:txBody>
+                  <a:tcPr marL="91440" marR="91440" marT="45720" marB="45720" anchor="ctr">
+                    <a:lnL w="12700" cap="flat" cmpd="sng" algn="ctr">
+                      <a:solidFill>
+                        <a:srgbClr val="DADCE0"/>
+                      </a:solidFill>
+                      <a:prstDash val="solid"/>
+                      <a:round/>
+                      <a:headEnd type="none" w="med" len="med"/>
+                      <a:tailEnd type="none" w="med" len="med"/>
+                    </a:lnL>
+                    <a:lnR w="12700" cap="flat" cmpd="sng" algn="ctr">
+                      <a:solidFill>
+                        <a:srgbClr val="DADCE0"/>
+                      </a:solidFill>
+                      <a:prstDash val="solid"/>
+                      <a:round/>
+                      <a:headEnd type="none" w="med" len="med"/>
+                      <a:tailEnd type="none" w="med" len="med"/>
+                    </a:lnR>
+                    <a:lnT w="12700" cap="flat" cmpd="sng" algn="ctr">
+                      <a:solidFill>
+                        <a:srgbClr val="DADCE0"/>
+                      </a:solidFill>
+                      <a:prstDash val="solid"/>
+                      <a:round/>
+                      <a:headEnd type="none" w="med" len="med"/>
+                      <a:tailEnd type="none" w="med" len="med"/>
+                    </a:lnT>
+                    <a:lnB w="12700" cap="flat" cmpd="sng" algn="ctr">
+                      <a:solidFill>
+                        <a:srgbClr val="DADCE0"/>
+                      </a:solidFill>
+                      <a:prstDash val="solid"/>
+                      <a:round/>
+                      <a:headEnd type="none" w="med" len="med"/>
+                      <a:tailEnd type="none" w="med" len="med"/>
+                    </a:lnB>
+                    <a:solidFill>
+                      <a:srgbClr val="FFFFFF"/>
+                    </a:solidFill>
+                  </a:tcPr>
+                </a:tc>
+                <a:tc>
+                  <a:txBody>
+                    <a:bodyPr/>
+                    <a:lstStyle/>
+                    <a:p>
+                      <a:pPr algn="l" indent="0" marL="0">
+                        <a:buNone/>
+                      </a:pPr>
+                      <a:r>
+                        <a:rPr lang="en-US" sz="1400" dirty="0">
+                          <a:solidFill>
+                            <a:srgbClr val="202124"/>
+                          </a:solidFill>
+                        </a:rPr>
+                        <a:t>N=120 benchmark items, &lt;100ms latency</a:t>
                       </a:r>
                       <a:endParaRPr lang="en-US" sz="1400" dirty="0"/>
                     </a:p>
@@ -2281,7 +2404,7 @@
                             <a:srgbClr val="202124"/>
                           </a:solidFill>
                         </a:rPr>
-                        <a:t>LIVE (Vercel)</a:t>
+                        <a:t>LIVE</a:t>
                       </a:r>
                       <a:endParaRPr lang="en-US" sz="1400" dirty="0"/>
                     </a:p>
@@ -2405,7 +2528,68 @@
                             <a:srgbClr val="202124"/>
                           </a:solidFill>
                         </a:rPr>
-                        <a:t>Public Review Analytics &amp; Gemini 2.5 Flash API</a:t>
+                        <a:t>Public Review Analytics &amp; Gemini 2.5 API</a:t>
+                      </a:r>
+                      <a:endParaRPr lang="en-US" sz="1400" dirty="0"/>
+                    </a:p>
+                  </a:txBody>
+                  <a:tcPr marL="91440" marR="91440" marT="45720" marB="45720" anchor="ctr">
+                    <a:lnL w="12700" cap="flat" cmpd="sng" algn="ctr">
+                      <a:solidFill>
+                        <a:srgbClr val="DADCE0"/>
+                      </a:solidFill>
+                      <a:prstDash val="solid"/>
+                      <a:round/>
+                      <a:headEnd type="none" w="med" len="med"/>
+                      <a:tailEnd type="none" w="med" len="med"/>
+                    </a:lnL>
+                    <a:lnR w="12700" cap="flat" cmpd="sng" algn="ctr">
+                      <a:solidFill>
+                        <a:srgbClr val="DADCE0"/>
+                      </a:solidFill>
+                      <a:prstDash val="solid"/>
+                      <a:round/>
+                      <a:headEnd type="none" w="med" len="med"/>
+                      <a:tailEnd type="none" w="med" len="med"/>
+                    </a:lnR>
+                    <a:lnT w="12700" cap="flat" cmpd="sng" algn="ctr">
+                      <a:solidFill>
+                        <a:srgbClr val="DADCE0"/>
+                      </a:solidFill>
+                      <a:prstDash val="solid"/>
+                      <a:round/>
+                      <a:headEnd type="none" w="med" len="med"/>
+                      <a:tailEnd type="none" w="med" len="med"/>
+                    </a:lnT>
+                    <a:lnB w="12700" cap="flat" cmpd="sng" algn="ctr">
+                      <a:solidFill>
+                        <a:srgbClr val="DADCE0"/>
+                      </a:solidFill>
+                      <a:prstDash val="solid"/>
+                      <a:round/>
+                      <a:headEnd type="none" w="med" len="med"/>
+                      <a:tailEnd type="none" w="med" len="med"/>
+                    </a:lnB>
+                    <a:solidFill>
+                      <a:srgbClr val="FFFFFF"/>
+                    </a:solidFill>
+                  </a:tcPr>
+                </a:tc>
+                <a:tc>
+                  <a:txBody>
+                    <a:bodyPr/>
+                    <a:lstStyle/>
+                    <a:p>
+                      <a:pPr algn="l" indent="0" marL="0">
+                        <a:buNone/>
+                      </a:pPr>
+                      <a:r>
+                        <a:rPr lang="en-US" sz="1400" dirty="0">
+                          <a:solidFill>
+                            <a:srgbClr val="202124"/>
+                          </a:solidFill>
+                        </a:rPr>
+                        <a:t>N=1,000 public reviews mined</a:t>
                       </a:r>
                       <a:endParaRPr lang="en-US" sz="1400" dirty="0"/>
                     </a:p>
@@ -2527,7 +2711,7 @@
                             <a:srgbClr val="202124"/>
                           </a:solidFill>
                         </a:rPr>
-                        <a:t>LIVE (Vercel)</a:t>
+                        <a:t>LIVE</a:t>
                       </a:r>
                       <a:endParaRPr lang="en-US" sz="1400" dirty="0"/>
                     </a:p>
@@ -2651,7 +2835,68 @@
                             <a:srgbClr val="202124"/>
                           </a:solidFill>
                         </a:rPr>
-                        <a:t>N=34 Primary Research Raw Response Sheet</a:t>
+                        <a:t>Primary Research Raw Response Sheet</a:t>
+                      </a:r>
+                      <a:endParaRPr lang="en-US" sz="1400" dirty="0"/>
+                    </a:p>
+                  </a:txBody>
+                  <a:tcPr marL="91440" marR="91440" marT="45720" marB="45720" anchor="ctr">
+                    <a:lnL w="12700" cap="flat" cmpd="sng" algn="ctr">
+                      <a:solidFill>
+                        <a:srgbClr val="DADCE0"/>
+                      </a:solidFill>
+                      <a:prstDash val="solid"/>
+                      <a:round/>
+                      <a:headEnd type="none" w="med" len="med"/>
+                      <a:tailEnd type="none" w="med" len="med"/>
+                    </a:lnL>
+                    <a:lnR w="12700" cap="flat" cmpd="sng" algn="ctr">
+                      <a:solidFill>
+                        <a:srgbClr val="DADCE0"/>
+                      </a:solidFill>
+                      <a:prstDash val="solid"/>
+                      <a:round/>
+                      <a:headEnd type="none" w="med" len="med"/>
+                      <a:tailEnd type="none" w="med" len="med"/>
+                    </a:lnR>
+                    <a:lnT w="12700" cap="flat" cmpd="sng" algn="ctr">
+                      <a:solidFill>
+                        <a:srgbClr val="DADCE0"/>
+                      </a:solidFill>
+                      <a:prstDash val="solid"/>
+                      <a:round/>
+                      <a:headEnd type="none" w="med" len="med"/>
+                      <a:tailEnd type="none" w="med" len="med"/>
+                    </a:lnT>
+                    <a:lnB w="12700" cap="flat" cmpd="sng" algn="ctr">
+                      <a:solidFill>
+                        <a:srgbClr val="DADCE0"/>
+                      </a:solidFill>
+                      <a:prstDash val="solid"/>
+                      <a:round/>
+                      <a:headEnd type="none" w="med" len="med"/>
+                      <a:tailEnd type="none" w="med" len="med"/>
+                    </a:lnB>
+                    <a:solidFill>
+                      <a:srgbClr val="FFFFFF"/>
+                    </a:solidFill>
+                  </a:tcPr>
+                </a:tc>
+                <a:tc>
+                  <a:txBody>
+                    <a:bodyPr/>
+                    <a:lstStyle/>
+                    <a:p>
+                      <a:pPr algn="l" indent="0" marL="0">
+                        <a:buNone/>
+                      </a:pPr>
+                      <a:r>
+                        <a:rPr lang="en-US" sz="1400" dirty="0">
+                          <a:solidFill>
+                            <a:srgbClr val="202124"/>
+                          </a:solidFill>
+                        </a:rPr>
+                        <a:t>N=34 respondents, 15 questions</a:t>
                       </a:r>
                       <a:endParaRPr lang="en-US" sz="1400" dirty="0"/>
                     </a:p>
@@ -2773,7 +3018,7 @@
                             <a:srgbClr val="202124"/>
                           </a:solidFill>
                         </a:rPr>
-                        <a:t>LIVE SHEET</a:t>
+                        <a:t>LIVE</a:t>
                       </a:r>
                       <a:endParaRPr lang="en-US" sz="1400" dirty="0"/>
                     </a:p>
@@ -2897,7 +3142,68 @@
                             <a:srgbClr val="202124"/>
                           </a:solidFill>
                         </a:rPr>
-                        <a:t>15-Question User Research Automation Tool</a:t>
+                        <a:t>User Research Automation Tool</a:t>
+                      </a:r>
+                      <a:endParaRPr lang="en-US" sz="1400" dirty="0"/>
+                    </a:p>
+                  </a:txBody>
+                  <a:tcPr marL="91440" marR="91440" marT="45720" marB="45720" anchor="ctr">
+                    <a:lnL w="12700" cap="flat" cmpd="sng" algn="ctr">
+                      <a:solidFill>
+                        <a:srgbClr val="DADCE0"/>
+                      </a:solidFill>
+                      <a:prstDash val="solid"/>
+                      <a:round/>
+                      <a:headEnd type="none" w="med" len="med"/>
+                      <a:tailEnd type="none" w="med" len="med"/>
+                    </a:lnL>
+                    <a:lnR w="12700" cap="flat" cmpd="sng" algn="ctr">
+                      <a:solidFill>
+                        <a:srgbClr val="DADCE0"/>
+                      </a:solidFill>
+                      <a:prstDash val="solid"/>
+                      <a:round/>
+                      <a:headEnd type="none" w="med" len="med"/>
+                      <a:tailEnd type="none" w="med" len="med"/>
+                    </a:lnR>
+                    <a:lnT w="12700" cap="flat" cmpd="sng" algn="ctr">
+                      <a:solidFill>
+                        <a:srgbClr val="DADCE0"/>
+                      </a:solidFill>
+                      <a:prstDash val="solid"/>
+                      <a:round/>
+                      <a:headEnd type="none" w="med" len="med"/>
+                      <a:tailEnd type="none" w="med" len="med"/>
+                    </a:lnT>
+                    <a:lnB w="12700" cap="flat" cmpd="sng" algn="ctr">
+                      <a:solidFill>
+                        <a:srgbClr val="DADCE0"/>
+                      </a:solidFill>
+                      <a:prstDash val="solid"/>
+                      <a:round/>
+                      <a:headEnd type="none" w="med" len="med"/>
+                      <a:tailEnd type="none" w="med" len="med"/>
+                    </a:lnB>
+                    <a:solidFill>
+                      <a:srgbClr val="FFFFFF"/>
+                    </a:solidFill>
+                  </a:tcPr>
+                </a:tc>
+                <a:tc>
+                  <a:txBody>
+                    <a:bodyPr/>
+                    <a:lstStyle/>
+                    <a:p>
+                      <a:pPr algn="l" indent="0" marL="0">
+                        <a:buNone/>
+                      </a:pPr>
+                      <a:r>
+                        <a:rPr lang="en-US" sz="1400" dirty="0">
+                          <a:solidFill>
+                            <a:srgbClr val="202124"/>
+                          </a:solidFill>
+                        </a:rPr>
+                        <a:t>15-Question Survey Protocol</a:t>
                       </a:r>
                       <a:endParaRPr lang="en-US" sz="1400" dirty="0"/>
                     </a:p>
@@ -3019,7 +3325,7 @@
                             <a:srgbClr val="202124"/>
                           </a:solidFill>
                         </a:rPr>
-                        <a:t>LIVE FORM</a:t>
+                        <a:t>LIVE</a:t>
                       </a:r>
                       <a:endParaRPr lang="en-US" sz="1400" dirty="0"/>
                     </a:p>
@@ -3143,7 +3449,68 @@
                             <a:srgbClr val="202124"/>
                           </a:solidFill>
                         </a:rPr>
-                        <a:t>Public Codebase, Datasets &amp; Integration Suite</a:t>
+                        <a:t>Public Codebase &amp; Integration Suite</a:t>
+                      </a:r>
+                      <a:endParaRPr lang="en-US" sz="1400" dirty="0"/>
+                    </a:p>
+                  </a:txBody>
+                  <a:tcPr marL="91440" marR="91440" marT="45720" marB="45720" anchor="ctr">
+                    <a:lnL w="12700" cap="flat" cmpd="sng" algn="ctr">
+                      <a:solidFill>
+                        <a:srgbClr val="DADCE0"/>
+                      </a:solidFill>
+                      <a:prstDash val="solid"/>
+                      <a:round/>
+                      <a:headEnd type="none" w="med" len="med"/>
+                      <a:tailEnd type="none" w="med" len="med"/>
+                    </a:lnL>
+                    <a:lnR w="12700" cap="flat" cmpd="sng" algn="ctr">
+                      <a:solidFill>
+                        <a:srgbClr val="DADCE0"/>
+                      </a:solidFill>
+                      <a:prstDash val="solid"/>
+                      <a:round/>
+                      <a:headEnd type="none" w="med" len="med"/>
+                      <a:tailEnd type="none" w="med" len="med"/>
+                    </a:lnR>
+                    <a:lnT w="12700" cap="flat" cmpd="sng" algn="ctr">
+                      <a:solidFill>
+                        <a:srgbClr val="DADCE0"/>
+                      </a:solidFill>
+                      <a:prstDash val="solid"/>
+                      <a:round/>
+                      <a:headEnd type="none" w="med" len="med"/>
+                      <a:tailEnd type="none" w="med" len="med"/>
+                    </a:lnT>
+                    <a:lnB w="12700" cap="flat" cmpd="sng" algn="ctr">
+                      <a:solidFill>
+                        <a:srgbClr val="DADCE0"/>
+                      </a:solidFill>
+                      <a:prstDash val="solid"/>
+                      <a:round/>
+                      <a:headEnd type="none" w="med" len="med"/>
+                      <a:tailEnd type="none" w="med" len="med"/>
+                    </a:lnB>
+                    <a:solidFill>
+                      <a:srgbClr val="FFFFFF"/>
+                    </a:solidFill>
+                  </a:tcPr>
+                </a:tc>
+                <a:tc>
+                  <a:txBody>
+                    <a:bodyPr/>
+                    <a:lstStyle/>
+                    <a:p>
+                      <a:pPr algn="l" indent="0" marL="0">
+                        <a:buNone/>
+                      </a:pPr>
+                      <a:r>
+                        <a:rPr lang="en-US" sz="1400" dirty="0">
+                          <a:solidFill>
+                            <a:srgbClr val="202124"/>
+                          </a:solidFill>
+                        </a:rPr>
+                        <a:t>Full source code, scripts, tests</a:t>
                       </a:r>
                       <a:endParaRPr lang="en-US" sz="1400" dirty="0"/>
                     </a:p>
@@ -3440,7 +3807,7 @@
                   <a:srgbClr val="1A73E8"/>
                 </a:solidFill>
               </a:rPr>
-              <a:t>10. RISKS, LIMITATIONS &amp; EXPERIMENTATION ROADMAP</a:t>
+              <a:t>10. RISKS, GOVERNANCE &amp; A/B ROLLOUT ROADMAP</a:t>
             </a:r>
             <a:endParaRPr lang="en-US" sz="1400" dirty="0"/>
           </a:p>
@@ -3476,7 +3843,7 @@
                   <a:srgbClr val="202124"/>
                 </a:solidFill>
               </a:rPr>
-              <a:t>Phased 1% to 100% Rollout Guarded by Spatial-Temporal Filters and Kill-Switches</a:t>
+              <a:t>Phased 1% to 100% Rollout Guarded by Spatial Filters, Privacy &amp; Remote Kill-Switches</a:t>
             </a:r>
             <a:endParaRPr lang="en-US" sz="2000" dirty="0"/>
           </a:p>
@@ -3512,7 +3879,7 @@
                   <a:srgbClr val="1A73E8"/>
                 </a:solidFill>
               </a:rPr>
-              <a:t>Production Risk Mitigation, Governance &amp; Rollout Ramp</a:t>
+              <a:t>Production Risk Mitigation, On-Device Governance &amp; 4-Phase Experimentation Ramp</a:t>
             </a:r>
             <a:endParaRPr lang="en-US" sz="1500" dirty="0"/>
           </a:p>
@@ -3541,11 +3908,11 @@
             <a:tbl>
               <a:tblPr/>
               <a:tblGrid>
-                <a:gridCol w="1645920"/>
-                <a:gridCol w="1371600"/>
-                <a:gridCol w="1920240"/>
-                <a:gridCol w="1920240"/>
-                <a:gridCol w="2286000"/>
+                <a:gridCol w="1463040"/>
+                <a:gridCol w="1188720"/>
+                <a:gridCol w="1737360"/>
+                <a:gridCol w="2011680"/>
+                <a:gridCol w="1828800"/>
               </a:tblGrid>
               <a:tr h="0">
                 <a:tc>
@@ -3745,7 +4112,7 @@
                             <a:srgbClr val="1A73E8"/>
                           </a:solidFill>
                         </a:rPr>
-                        <a:t>Guardrail Monitoring</a:t>
+                        <a:t>Guardrail Monitoring Parameter</a:t>
                       </a:r>
                       <a:endParaRPr lang="en-US" sz="1400" dirty="0"/>
                     </a:p>
@@ -3869,7 +4236,7 @@
                             <a:srgbClr val="202124"/>
                           </a:solidFill>
                         </a:rPr>
-                        <a:t>Phase 1: Internal Canary</a:t>
+                        <a:t>Phase 1: Canary</a:t>
                       </a:r>
                       <a:endParaRPr lang="en-US" sz="1400" dirty="0"/>
                     </a:p>
@@ -4298,7 +4665,7 @@
                             <a:srgbClr val="202124"/>
                           </a:solidFill>
                         </a:rPr>
-                        <a:t>User VMRSR Lift ≥ 25%</a:t>
+                        <a:t>User SSR Lift ≥ 25%</a:t>
                       </a:r>
                       <a:endParaRPr lang="en-US" sz="1400" dirty="0"/>
                     </a:p>
@@ -4605,7 +4972,7 @@
                             <a:srgbClr val="202124"/>
                           </a:solidFill>
                         </a:rPr>
-                        <a:t>User VMRSR Lift ≥ 40%</a:t>
+                        <a:t>User SSR Lift ≥ 40%</a:t>
                       </a:r>
                       <a:endParaRPr lang="en-US" sz="1400" dirty="0"/>
                     </a:p>
@@ -4912,129 +5279,129 @@
                             <a:srgbClr val="202124"/>
                           </a:solidFill>
                         </a:rPr>
-                        <a:t>User VMRSR Lift ≥ 50%</a:t>
-                      </a:r>
-                      <a:endParaRPr lang="en-US" sz="1400" dirty="0"/>
-                    </a:p>
-                  </a:txBody>
-                  <a:tcPr marL="91440" marR="91440" marT="45720" marB="45720" anchor="ctr">
-                    <a:lnL w="12700" cap="flat" cmpd="sng" algn="ctr">
-                      <a:solidFill>
-                        <a:srgbClr val="DADCE0"/>
-                      </a:solidFill>
-                      <a:prstDash val="solid"/>
-                      <a:round/>
-                      <a:headEnd type="none" w="med" len="med"/>
-                      <a:tailEnd type="none" w="med" len="med"/>
-                    </a:lnL>
-                    <a:lnR w="12700" cap="flat" cmpd="sng" algn="ctr">
-                      <a:solidFill>
-                        <a:srgbClr val="DADCE0"/>
-                      </a:solidFill>
-                      <a:prstDash val="solid"/>
-                      <a:round/>
-                      <a:headEnd type="none" w="med" len="med"/>
-                      <a:tailEnd type="none" w="med" len="med"/>
-                    </a:lnR>
-                    <a:lnT w="12700" cap="flat" cmpd="sng" algn="ctr">
-                      <a:solidFill>
-                        <a:srgbClr val="DADCE0"/>
-                      </a:solidFill>
-                      <a:prstDash val="solid"/>
-                      <a:round/>
-                      <a:headEnd type="none" w="med" len="med"/>
-                      <a:tailEnd type="none" w="med" len="med"/>
-                    </a:lnT>
-                    <a:lnB w="12700" cap="flat" cmpd="sng" algn="ctr">
-                      <a:solidFill>
-                        <a:srgbClr val="DADCE0"/>
-                      </a:solidFill>
-                      <a:prstDash val="solid"/>
-                      <a:round/>
-                      <a:headEnd type="none" w="med" len="med"/>
-                      <a:tailEnd type="none" w="med" len="med"/>
-                    </a:lnB>
-                    <a:solidFill>
-                      <a:srgbClr val="FFFFFF"/>
-                    </a:solidFill>
-                  </a:tcPr>
-                </a:tc>
-                <a:tc>
-                  <a:txBody>
-                    <a:bodyPr/>
-                    <a:lstStyle/>
-                    <a:p>
-                      <a:pPr algn="l" indent="0" marL="0">
-                        <a:buNone/>
-                      </a:pPr>
-                      <a:r>
-                        <a:rPr lang="en-US" sz="1400" dirty="0">
-                          <a:solidFill>
-                            <a:srgbClr val="202124"/>
-                          </a:solidFill>
-                        </a:rPr>
-                        <a:t>Continuous Feedback Loop</a:t>
-                      </a:r>
-                      <a:endParaRPr lang="en-US" sz="1400" dirty="0"/>
-                    </a:p>
-                  </a:txBody>
-                  <a:tcPr marL="91440" marR="91440" marT="45720" marB="45720" anchor="ctr">
-                    <a:lnL w="12700" cap="flat" cmpd="sng" algn="ctr">
-                      <a:solidFill>
-                        <a:srgbClr val="DADCE0"/>
-                      </a:solidFill>
-                      <a:prstDash val="solid"/>
-                      <a:round/>
-                      <a:headEnd type="none" w="med" len="med"/>
-                      <a:tailEnd type="none" w="med" len="med"/>
-                    </a:lnL>
-                    <a:lnR w="12700" cap="flat" cmpd="sng" algn="ctr">
-                      <a:solidFill>
-                        <a:srgbClr val="DADCE0"/>
-                      </a:solidFill>
-                      <a:prstDash val="solid"/>
-                      <a:round/>
-                      <a:headEnd type="none" w="med" len="med"/>
-                      <a:tailEnd type="none" w="med" len="med"/>
-                    </a:lnR>
-                    <a:lnT w="12700" cap="flat" cmpd="sng" algn="ctr">
-                      <a:solidFill>
-                        <a:srgbClr val="DADCE0"/>
-                      </a:solidFill>
-                      <a:prstDash val="solid"/>
-                      <a:round/>
-                      <a:headEnd type="none" w="med" len="med"/>
-                      <a:tailEnd type="none" w="med" len="med"/>
-                    </a:lnT>
-                    <a:lnB w="12700" cap="flat" cmpd="sng" algn="ctr">
-                      <a:solidFill>
-                        <a:srgbClr val="DADCE0"/>
-                      </a:solidFill>
-                      <a:prstDash val="solid"/>
-                      <a:round/>
-                      <a:headEnd type="none" w="med" len="med"/>
-                      <a:tailEnd type="none" w="med" len="med"/>
-                    </a:lnB>
-                    <a:solidFill>
-                      <a:srgbClr val="FFFFFF"/>
-                    </a:solidFill>
-                  </a:tcPr>
-                </a:tc>
-                <a:tc>
-                  <a:txBody>
-                    <a:bodyPr/>
-                    <a:lstStyle/>
-                    <a:p>
-                      <a:pPr algn="l" indent="0" marL="0">
-                        <a:buNone/>
-                      </a:pPr>
-                      <a:r>
-                        <a:rPr lang="en-US" sz="1400" dirty="0">
-                          <a:solidFill>
-                            <a:srgbClr val="202124"/>
-                          </a:solidFill>
-                        </a:rPr>
-                        <a:t>Automated Remote Kill-Switch</a:t>
+                        <a:t>User SSR Lift ≥ 50%</a:t>
+                      </a:r>
+                      <a:endParaRPr lang="en-US" sz="1400" dirty="0"/>
+                    </a:p>
+                  </a:txBody>
+                  <a:tcPr marL="91440" marR="91440" marT="45720" marB="45720" anchor="ctr">
+                    <a:lnL w="12700" cap="flat" cmpd="sng" algn="ctr">
+                      <a:solidFill>
+                        <a:srgbClr val="DADCE0"/>
+                      </a:solidFill>
+                      <a:prstDash val="solid"/>
+                      <a:round/>
+                      <a:headEnd type="none" w="med" len="med"/>
+                      <a:tailEnd type="none" w="med" len="med"/>
+                    </a:lnL>
+                    <a:lnR w="12700" cap="flat" cmpd="sng" algn="ctr">
+                      <a:solidFill>
+                        <a:srgbClr val="DADCE0"/>
+                      </a:solidFill>
+                      <a:prstDash val="solid"/>
+                      <a:round/>
+                      <a:headEnd type="none" w="med" len="med"/>
+                      <a:tailEnd type="none" w="med" len="med"/>
+                    </a:lnR>
+                    <a:lnT w="12700" cap="flat" cmpd="sng" algn="ctr">
+                      <a:solidFill>
+                        <a:srgbClr val="DADCE0"/>
+                      </a:solidFill>
+                      <a:prstDash val="solid"/>
+                      <a:round/>
+                      <a:headEnd type="none" w="med" len="med"/>
+                      <a:tailEnd type="none" w="med" len="med"/>
+                    </a:lnT>
+                    <a:lnB w="12700" cap="flat" cmpd="sng" algn="ctr">
+                      <a:solidFill>
+                        <a:srgbClr val="DADCE0"/>
+                      </a:solidFill>
+                      <a:prstDash val="solid"/>
+                      <a:round/>
+                      <a:headEnd type="none" w="med" len="med"/>
+                      <a:tailEnd type="none" w="med" len="med"/>
+                    </a:lnB>
+                    <a:solidFill>
+                      <a:srgbClr val="FFFFFF"/>
+                    </a:solidFill>
+                  </a:tcPr>
+                </a:tc>
+                <a:tc>
+                  <a:txBody>
+                    <a:bodyPr/>
+                    <a:lstStyle/>
+                    <a:p>
+                      <a:pPr algn="l" indent="0" marL="0">
+                        <a:buNone/>
+                      </a:pPr>
+                      <a:r>
+                        <a:rPr lang="en-US" sz="1400" dirty="0">
+                          <a:solidFill>
+                            <a:srgbClr val="202124"/>
+                          </a:solidFill>
+                        </a:rPr>
+                        <a:t>Continuous Quality &amp; Latency Loop</a:t>
+                      </a:r>
+                      <a:endParaRPr lang="en-US" sz="1400" dirty="0"/>
+                    </a:p>
+                  </a:txBody>
+                  <a:tcPr marL="91440" marR="91440" marT="45720" marB="45720" anchor="ctr">
+                    <a:lnL w="12700" cap="flat" cmpd="sng" algn="ctr">
+                      <a:solidFill>
+                        <a:srgbClr val="DADCE0"/>
+                      </a:solidFill>
+                      <a:prstDash val="solid"/>
+                      <a:round/>
+                      <a:headEnd type="none" w="med" len="med"/>
+                      <a:tailEnd type="none" w="med" len="med"/>
+                    </a:lnL>
+                    <a:lnR w="12700" cap="flat" cmpd="sng" algn="ctr">
+                      <a:solidFill>
+                        <a:srgbClr val="DADCE0"/>
+                      </a:solidFill>
+                      <a:prstDash val="solid"/>
+                      <a:round/>
+                      <a:headEnd type="none" w="med" len="med"/>
+                      <a:tailEnd type="none" w="med" len="med"/>
+                    </a:lnR>
+                    <a:lnT w="12700" cap="flat" cmpd="sng" algn="ctr">
+                      <a:solidFill>
+                        <a:srgbClr val="DADCE0"/>
+                      </a:solidFill>
+                      <a:prstDash val="solid"/>
+                      <a:round/>
+                      <a:headEnd type="none" w="med" len="med"/>
+                      <a:tailEnd type="none" w="med" len="med"/>
+                    </a:lnT>
+                    <a:lnB w="12700" cap="flat" cmpd="sng" algn="ctr">
+                      <a:solidFill>
+                        <a:srgbClr val="DADCE0"/>
+                      </a:solidFill>
+                      <a:prstDash val="solid"/>
+                      <a:round/>
+                      <a:headEnd type="none" w="med" len="med"/>
+                      <a:tailEnd type="none" w="med" len="med"/>
+                    </a:lnB>
+                    <a:solidFill>
+                      <a:srgbClr val="FFFFFF"/>
+                    </a:solidFill>
+                  </a:tcPr>
+                </a:tc>
+                <a:tc>
+                  <a:txBody>
+                    <a:bodyPr/>
+                    <a:lstStyle/>
+                    <a:p>
+                      <a:pPr algn="l" indent="0" marL="0">
+                        <a:buNone/>
+                      </a:pPr>
+                      <a:r>
+                        <a:rPr lang="en-US" sz="1400" dirty="0">
+                          <a:solidFill>
+                            <a:srgbClr val="202124"/>
+                          </a:solidFill>
+                        </a:rPr>
+                        <a:t>Remote Kill-Switch Active</a:t>
                       </a:r>
                       <a:endParaRPr lang="en-US" sz="1400" dirty="0"/>
                     </a:p>
@@ -5219,7 +5586,7 @@
                             <a:srgbClr val="202124"/>
                           </a:solidFill>
                         </a:rPr>
-                        <a:t>Full Source Code &amp; Tests</a:t>
+                        <a:t>Full Codebase, Tests &amp; Models</a:t>
                       </a:r>
                       <a:endParaRPr lang="en-US" sz="1400" dirty="0"/>
                     </a:p>
@@ -5516,7 +5883,7 @@
                   <a:srgbClr val="1A73E8"/>
                 </a:solidFill>
               </a:rPr>
-              <a:t>2. BUSINESS METRIC DECOMPOSITION</a:t>
+              <a:t>2. BUSINESS METRIC DECOMPOSITION TREE</a:t>
             </a:r>
             <a:endParaRPr lang="en-US" sz="1400" dirty="0"/>
           </a:p>
@@ -5552,7 +5919,7 @@
                   <a:srgbClr val="202124"/>
                 </a:solidFill>
               </a:rPr>
-              <a:t>Decomposing User VMRSR into Anchor Discovery &amp; Target Reachability Rates</a:t>
+              <a:t>Decomposing Vague Retrieval Failure into Metric Tree &amp; ARR Retention Impact</a:t>
             </a:r>
             <a:endParaRPr lang="en-US" sz="2000" dirty="0"/>
           </a:p>
@@ -5588,7 +5955,7 @@
                   <a:srgbClr val="1A73E8"/>
                 </a:solidFill>
               </a:rPr>
-              <a:t>Canonical North-Star Metric Tree Architecture &amp; Empirical Lift Targets</a:t>
+              <a:t>Canonical North-Star Metric Decomposition Tree &amp; Strategic Financial Lifts</a:t>
             </a:r>
             <a:endParaRPr lang="en-US" sz="1500" dirty="0"/>
           </a:p>
@@ -5617,10 +5984,10 @@
             <a:tbl>
               <a:tblPr/>
               <a:tblGrid>
+                <a:gridCol w="1463040"/>
+                <a:gridCol w="1828800"/>
                 <a:gridCol w="1645920"/>
-                <a:gridCol w="2011680"/>
-                <a:gridCol w="1828800"/>
-                <a:gridCol w="2560320"/>
+                <a:gridCol w="2194560"/>
                 <a:gridCol w="1097280"/>
               </a:tblGrid>
               <a:tr h="0">
@@ -5821,7 +6188,7 @@
                             <a:srgbClr val="1A73E8"/>
                           </a:solidFill>
                         </a:rPr>
-                        <a:t>Mathematical Definition / Formula</a:t>
+                        <a:t>Mathematical Formula / Operational Definition</a:t>
                       </a:r>
                       <a:endParaRPr lang="en-US" sz="1400" dirty="0"/>
                     </a:p>
@@ -5882,7 +6249,7 @@
                             <a:srgbClr val="1A73E8"/>
                           </a:solidFill>
                         </a:rPr>
-                        <a:t>Strategic Lift</a:t>
+                        <a:t>ARR &amp; Product Impact</a:t>
                       </a:r>
                       <a:endParaRPr lang="en-US" sz="1400" dirty="0"/>
                     </a:p>
@@ -5945,251 +6312,251 @@
                             <a:srgbClr val="202124"/>
                           </a:solidFill>
                         </a:rPr>
-                        <a:t>North-Star Metric</a:t>
-                      </a:r>
-                      <a:endParaRPr lang="en-US" sz="1400" dirty="0"/>
-                    </a:p>
-                  </a:txBody>
-                  <a:tcPr marL="91440" marR="91440" marT="45720" marB="45720" anchor="ctr">
-                    <a:lnL w="12700" cap="flat" cmpd="sng" algn="ctr">
-                      <a:solidFill>
-                        <a:srgbClr val="DADCE0"/>
-                      </a:solidFill>
-                      <a:prstDash val="solid"/>
-                      <a:round/>
-                      <a:headEnd type="none" w="med" len="med"/>
-                      <a:tailEnd type="none" w="med" len="med"/>
-                    </a:lnL>
-                    <a:lnR w="12700" cap="flat" cmpd="sng" algn="ctr">
-                      <a:solidFill>
-                        <a:srgbClr val="DADCE0"/>
-                      </a:solidFill>
-                      <a:prstDash val="solid"/>
-                      <a:round/>
-                      <a:headEnd type="none" w="med" len="med"/>
-                      <a:tailEnd type="none" w="med" len="med"/>
-                    </a:lnR>
-                    <a:lnT w="12700" cap="flat" cmpd="sng" algn="ctr">
-                      <a:solidFill>
-                        <a:srgbClr val="DADCE0"/>
-                      </a:solidFill>
-                      <a:prstDash val="solid"/>
-                      <a:round/>
-                      <a:headEnd type="none" w="med" len="med"/>
-                      <a:tailEnd type="none" w="med" len="med"/>
-                    </a:lnT>
-                    <a:lnB w="12700" cap="flat" cmpd="sng" algn="ctr">
-                      <a:solidFill>
-                        <a:srgbClr val="DADCE0"/>
-                      </a:solidFill>
-                      <a:prstDash val="solid"/>
-                      <a:round/>
-                      <a:headEnd type="none" w="med" len="med"/>
-                      <a:tailEnd type="none" w="med" len="med"/>
-                    </a:lnB>
-                    <a:solidFill>
-                      <a:srgbClr val="FFFFFF"/>
-                    </a:solidFill>
-                  </a:tcPr>
-                </a:tc>
-                <a:tc>
-                  <a:txBody>
-                    <a:bodyPr/>
-                    <a:lstStyle/>
-                    <a:p>
-                      <a:pPr algn="l" indent="0" marL="0">
-                        <a:buNone/>
-                      </a:pPr>
-                      <a:r>
-                        <a:rPr lang="en-US" sz="1400" dirty="0">
-                          <a:solidFill>
-                            <a:srgbClr val="202124"/>
-                          </a:solidFill>
-                        </a:rPr>
-                        <a:t>User VMRSR</a:t>
-                      </a:r>
-                      <a:endParaRPr lang="en-US" sz="1400" dirty="0"/>
-                    </a:p>
-                  </a:txBody>
-                  <a:tcPr marL="91440" marR="91440" marT="45720" marB="45720" anchor="ctr">
-                    <a:lnL w="12700" cap="flat" cmpd="sng" algn="ctr">
-                      <a:solidFill>
-                        <a:srgbClr val="DADCE0"/>
-                      </a:solidFill>
-                      <a:prstDash val="solid"/>
-                      <a:round/>
-                      <a:headEnd type="none" w="med" len="med"/>
-                      <a:tailEnd type="none" w="med" len="med"/>
-                    </a:lnL>
-                    <a:lnR w="12700" cap="flat" cmpd="sng" algn="ctr">
-                      <a:solidFill>
-                        <a:srgbClr val="DADCE0"/>
-                      </a:solidFill>
-                      <a:prstDash val="solid"/>
-                      <a:round/>
-                      <a:headEnd type="none" w="med" len="med"/>
-                      <a:tailEnd type="none" w="med" len="med"/>
-                    </a:lnR>
-                    <a:lnT w="12700" cap="flat" cmpd="sng" algn="ctr">
-                      <a:solidFill>
-                        <a:srgbClr val="DADCE0"/>
-                      </a:solidFill>
-                      <a:prstDash val="solid"/>
-                      <a:round/>
-                      <a:headEnd type="none" w="med" len="med"/>
-                      <a:tailEnd type="none" w="med" len="med"/>
-                    </a:lnT>
-                    <a:lnB w="12700" cap="flat" cmpd="sng" algn="ctr">
-                      <a:solidFill>
-                        <a:srgbClr val="DADCE0"/>
-                      </a:solidFill>
-                      <a:prstDash val="solid"/>
-                      <a:round/>
-                      <a:headEnd type="none" w="med" len="med"/>
-                      <a:tailEnd type="none" w="med" len="med"/>
-                    </a:lnB>
-                    <a:solidFill>
-                      <a:srgbClr val="FFFFFF"/>
-                    </a:solidFill>
-                  </a:tcPr>
-                </a:tc>
-                <a:tc>
-                  <a:txBody>
-                    <a:bodyPr/>
-                    <a:lstStyle/>
-                    <a:p>
-                      <a:pPr algn="l" indent="0" marL="0">
-                        <a:buNone/>
-                      </a:pPr>
-                      <a:r>
-                        <a:rPr lang="en-US" sz="1400" dirty="0">
-                          <a:solidFill>
-                            <a:srgbClr val="202124"/>
-                          </a:solidFill>
-                        </a:rPr>
-                        <a:t>32.4% → 85.0%+</a:t>
-                      </a:r>
-                      <a:endParaRPr lang="en-US" sz="1400" dirty="0"/>
-                    </a:p>
-                  </a:txBody>
-                  <a:tcPr marL="91440" marR="91440" marT="45720" marB="45720" anchor="ctr">
-                    <a:lnL w="12700" cap="flat" cmpd="sng" algn="ctr">
-                      <a:solidFill>
-                        <a:srgbClr val="DADCE0"/>
-                      </a:solidFill>
-                      <a:prstDash val="solid"/>
-                      <a:round/>
-                      <a:headEnd type="none" w="med" len="med"/>
-                      <a:tailEnd type="none" w="med" len="med"/>
-                    </a:lnL>
-                    <a:lnR w="12700" cap="flat" cmpd="sng" algn="ctr">
-                      <a:solidFill>
-                        <a:srgbClr val="DADCE0"/>
-                      </a:solidFill>
-                      <a:prstDash val="solid"/>
-                      <a:round/>
-                      <a:headEnd type="none" w="med" len="med"/>
-                      <a:tailEnd type="none" w="med" len="med"/>
-                    </a:lnR>
-                    <a:lnT w="12700" cap="flat" cmpd="sng" algn="ctr">
-                      <a:solidFill>
-                        <a:srgbClr val="DADCE0"/>
-                      </a:solidFill>
-                      <a:prstDash val="solid"/>
-                      <a:round/>
-                      <a:headEnd type="none" w="med" len="med"/>
-                      <a:tailEnd type="none" w="med" len="med"/>
-                    </a:lnT>
-                    <a:lnB w="12700" cap="flat" cmpd="sng" algn="ctr">
-                      <a:solidFill>
-                        <a:srgbClr val="DADCE0"/>
-                      </a:solidFill>
-                      <a:prstDash val="solid"/>
-                      <a:round/>
-                      <a:headEnd type="none" w="med" len="med"/>
-                      <a:tailEnd type="none" w="med" len="med"/>
-                    </a:lnB>
-                    <a:solidFill>
-                      <a:srgbClr val="FFFFFF"/>
-                    </a:solidFill>
-                  </a:tcPr>
-                </a:tc>
-                <a:tc>
-                  <a:txBody>
-                    <a:bodyPr/>
-                    <a:lstStyle/>
-                    <a:p>
-                      <a:pPr algn="l" indent="0" marL="0">
-                        <a:buNone/>
-                      </a:pPr>
-                      <a:r>
-                        <a:rPr lang="en-US" sz="1400" dirty="0">
-                          <a:solidFill>
-                            <a:srgbClr val="202124"/>
-                          </a:solidFill>
-                        </a:rPr>
-                        <a:t>Unique Users with ≥1 Retrieval Success / Total Vague Search Users</a:t>
-                      </a:r>
-                      <a:endParaRPr lang="en-US" sz="1400" dirty="0"/>
-                    </a:p>
-                  </a:txBody>
-                  <a:tcPr marL="91440" marR="91440" marT="45720" marB="45720" anchor="ctr">
-                    <a:lnL w="12700" cap="flat" cmpd="sng" algn="ctr">
-                      <a:solidFill>
-                        <a:srgbClr val="DADCE0"/>
-                      </a:solidFill>
-                      <a:prstDash val="solid"/>
-                      <a:round/>
-                      <a:headEnd type="none" w="med" len="med"/>
-                      <a:tailEnd type="none" w="med" len="med"/>
-                    </a:lnL>
-                    <a:lnR w="12700" cap="flat" cmpd="sng" algn="ctr">
-                      <a:solidFill>
-                        <a:srgbClr val="DADCE0"/>
-                      </a:solidFill>
-                      <a:prstDash val="solid"/>
-                      <a:round/>
-                      <a:headEnd type="none" w="med" len="med"/>
-                      <a:tailEnd type="none" w="med" len="med"/>
-                    </a:lnR>
-                    <a:lnT w="12700" cap="flat" cmpd="sng" algn="ctr">
-                      <a:solidFill>
-                        <a:srgbClr val="DADCE0"/>
-                      </a:solidFill>
-                      <a:prstDash val="solid"/>
-                      <a:round/>
-                      <a:headEnd type="none" w="med" len="med"/>
-                      <a:tailEnd type="none" w="med" len="med"/>
-                    </a:lnT>
-                    <a:lnB w="12700" cap="flat" cmpd="sng" algn="ctr">
-                      <a:solidFill>
-                        <a:srgbClr val="DADCE0"/>
-                      </a:solidFill>
-                      <a:prstDash val="solid"/>
-                      <a:round/>
-                      <a:headEnd type="none" w="med" len="med"/>
-                      <a:tailEnd type="none" w="med" len="med"/>
-                    </a:lnB>
-                    <a:solidFill>
-                      <a:srgbClr val="FFFFFF"/>
-                    </a:solidFill>
-                  </a:tcPr>
-                </a:tc>
-                <a:tc>
-                  <a:txBody>
-                    <a:bodyPr/>
-                    <a:lstStyle/>
-                    <a:p>
-                      <a:pPr algn="l" indent="0" marL="0">
-                        <a:buNone/>
-                      </a:pPr>
-                      <a:r>
-                        <a:rPr lang="en-US" sz="1400" dirty="0">
-                          <a:solidFill>
-                            <a:srgbClr val="202124"/>
-                          </a:solidFill>
-                        </a:rPr>
-                        <a:t>Primary Lift</a:t>
+                        <a:t>North-Star (L0)</a:t>
+                      </a:r>
+                      <a:endParaRPr lang="en-US" sz="1400" dirty="0"/>
+                    </a:p>
+                  </a:txBody>
+                  <a:tcPr marL="91440" marR="91440" marT="45720" marB="45720" anchor="ctr">
+                    <a:lnL w="12700" cap="flat" cmpd="sng" algn="ctr">
+                      <a:solidFill>
+                        <a:srgbClr val="DADCE0"/>
+                      </a:solidFill>
+                      <a:prstDash val="solid"/>
+                      <a:round/>
+                      <a:headEnd type="none" w="med" len="med"/>
+                      <a:tailEnd type="none" w="med" len="med"/>
+                    </a:lnL>
+                    <a:lnR w="12700" cap="flat" cmpd="sng" algn="ctr">
+                      <a:solidFill>
+                        <a:srgbClr val="DADCE0"/>
+                      </a:solidFill>
+                      <a:prstDash val="solid"/>
+                      <a:round/>
+                      <a:headEnd type="none" w="med" len="med"/>
+                      <a:tailEnd type="none" w="med" len="med"/>
+                    </a:lnR>
+                    <a:lnT w="12700" cap="flat" cmpd="sng" algn="ctr">
+                      <a:solidFill>
+                        <a:srgbClr val="DADCE0"/>
+                      </a:solidFill>
+                      <a:prstDash val="solid"/>
+                      <a:round/>
+                      <a:headEnd type="none" w="med" len="med"/>
+                      <a:tailEnd type="none" w="med" len="med"/>
+                    </a:lnT>
+                    <a:lnB w="12700" cap="flat" cmpd="sng" algn="ctr">
+                      <a:solidFill>
+                        <a:srgbClr val="DADCE0"/>
+                      </a:solidFill>
+                      <a:prstDash val="solid"/>
+                      <a:round/>
+                      <a:headEnd type="none" w="med" len="med"/>
+                      <a:tailEnd type="none" w="med" len="med"/>
+                    </a:lnB>
+                    <a:solidFill>
+                      <a:srgbClr val="FFFFFF"/>
+                    </a:solidFill>
+                  </a:tcPr>
+                </a:tc>
+                <a:tc>
+                  <a:txBody>
+                    <a:bodyPr/>
+                    <a:lstStyle/>
+                    <a:p>
+                      <a:pPr algn="l" indent="0" marL="0">
+                        <a:buNone/>
+                      </a:pPr>
+                      <a:r>
+                        <a:rPr lang="en-US" sz="1400" dirty="0">
+                          <a:solidFill>
+                            <a:srgbClr val="202124"/>
+                          </a:solidFill>
+                        </a:rPr>
+                        <a:t>Monthly Active Search Retained Users (MASRU)</a:t>
+                      </a:r>
+                      <a:endParaRPr lang="en-US" sz="1400" dirty="0"/>
+                    </a:p>
+                  </a:txBody>
+                  <a:tcPr marL="91440" marR="91440" marT="45720" marB="45720" anchor="ctr">
+                    <a:lnL w="12700" cap="flat" cmpd="sng" algn="ctr">
+                      <a:solidFill>
+                        <a:srgbClr val="DADCE0"/>
+                      </a:solidFill>
+                      <a:prstDash val="solid"/>
+                      <a:round/>
+                      <a:headEnd type="none" w="med" len="med"/>
+                      <a:tailEnd type="none" w="med" len="med"/>
+                    </a:lnL>
+                    <a:lnR w="12700" cap="flat" cmpd="sng" algn="ctr">
+                      <a:solidFill>
+                        <a:srgbClr val="DADCE0"/>
+                      </a:solidFill>
+                      <a:prstDash val="solid"/>
+                      <a:round/>
+                      <a:headEnd type="none" w="med" len="med"/>
+                      <a:tailEnd type="none" w="med" len="med"/>
+                    </a:lnR>
+                    <a:lnT w="12700" cap="flat" cmpd="sng" algn="ctr">
+                      <a:solidFill>
+                        <a:srgbClr val="DADCE0"/>
+                      </a:solidFill>
+                      <a:prstDash val="solid"/>
+                      <a:round/>
+                      <a:headEnd type="none" w="med" len="med"/>
+                      <a:tailEnd type="none" w="med" len="med"/>
+                    </a:lnT>
+                    <a:lnB w="12700" cap="flat" cmpd="sng" algn="ctr">
+                      <a:solidFill>
+                        <a:srgbClr val="DADCE0"/>
+                      </a:solidFill>
+                      <a:prstDash val="solid"/>
+                      <a:round/>
+                      <a:headEnd type="none" w="med" len="med"/>
+                      <a:tailEnd type="none" w="med" len="med"/>
+                    </a:lnB>
+                    <a:solidFill>
+                      <a:srgbClr val="FFFFFF"/>
+                    </a:solidFill>
+                  </a:tcPr>
+                </a:tc>
+                <a:tc>
+                  <a:txBody>
+                    <a:bodyPr/>
+                    <a:lstStyle/>
+                    <a:p>
+                      <a:pPr algn="l" indent="0" marL="0">
+                        <a:buNone/>
+                      </a:pPr>
+                      <a:r>
+                        <a:rPr lang="en-US" sz="1400" dirty="0">
+                          <a:solidFill>
+                            <a:srgbClr val="202124"/>
+                          </a:solidFill>
+                        </a:rPr>
+                        <a:t>+14.2% Growth</a:t>
+                      </a:r>
+                      <a:endParaRPr lang="en-US" sz="1400" dirty="0"/>
+                    </a:p>
+                  </a:txBody>
+                  <a:tcPr marL="91440" marR="91440" marT="45720" marB="45720" anchor="ctr">
+                    <a:lnL w="12700" cap="flat" cmpd="sng" algn="ctr">
+                      <a:solidFill>
+                        <a:srgbClr val="DADCE0"/>
+                      </a:solidFill>
+                      <a:prstDash val="solid"/>
+                      <a:round/>
+                      <a:headEnd type="none" w="med" len="med"/>
+                      <a:tailEnd type="none" w="med" len="med"/>
+                    </a:lnL>
+                    <a:lnR w="12700" cap="flat" cmpd="sng" algn="ctr">
+                      <a:solidFill>
+                        <a:srgbClr val="DADCE0"/>
+                      </a:solidFill>
+                      <a:prstDash val="solid"/>
+                      <a:round/>
+                      <a:headEnd type="none" w="med" len="med"/>
+                      <a:tailEnd type="none" w="med" len="med"/>
+                    </a:lnR>
+                    <a:lnT w="12700" cap="flat" cmpd="sng" algn="ctr">
+                      <a:solidFill>
+                        <a:srgbClr val="DADCE0"/>
+                      </a:solidFill>
+                      <a:prstDash val="solid"/>
+                      <a:round/>
+                      <a:headEnd type="none" w="med" len="med"/>
+                      <a:tailEnd type="none" w="med" len="med"/>
+                    </a:lnT>
+                    <a:lnB w="12700" cap="flat" cmpd="sng" algn="ctr">
+                      <a:solidFill>
+                        <a:srgbClr val="DADCE0"/>
+                      </a:solidFill>
+                      <a:prstDash val="solid"/>
+                      <a:round/>
+                      <a:headEnd type="none" w="med" len="med"/>
+                      <a:tailEnd type="none" w="med" len="med"/>
+                    </a:lnB>
+                    <a:solidFill>
+                      <a:srgbClr val="FFFFFF"/>
+                    </a:solidFill>
+                  </a:tcPr>
+                </a:tc>
+                <a:tc>
+                  <a:txBody>
+                    <a:bodyPr/>
+                    <a:lstStyle/>
+                    <a:p>
+                      <a:pPr algn="l" indent="0" marL="0">
+                        <a:buNone/>
+                      </a:pPr>
+                      <a:r>
+                        <a:rPr lang="en-US" sz="1400" dirty="0">
+                          <a:solidFill>
+                            <a:srgbClr val="202124"/>
+                          </a:solidFill>
+                        </a:rPr>
+                        <a:t>Unique Users with ≥1 Successful Vague Search / Active Searchers</a:t>
+                      </a:r>
+                      <a:endParaRPr lang="en-US" sz="1400" dirty="0"/>
+                    </a:p>
+                  </a:txBody>
+                  <a:tcPr marL="91440" marR="91440" marT="45720" marB="45720" anchor="ctr">
+                    <a:lnL w="12700" cap="flat" cmpd="sng" algn="ctr">
+                      <a:solidFill>
+                        <a:srgbClr val="DADCE0"/>
+                      </a:solidFill>
+                      <a:prstDash val="solid"/>
+                      <a:round/>
+                      <a:headEnd type="none" w="med" len="med"/>
+                      <a:tailEnd type="none" w="med" len="med"/>
+                    </a:lnL>
+                    <a:lnR w="12700" cap="flat" cmpd="sng" algn="ctr">
+                      <a:solidFill>
+                        <a:srgbClr val="DADCE0"/>
+                      </a:solidFill>
+                      <a:prstDash val="solid"/>
+                      <a:round/>
+                      <a:headEnd type="none" w="med" len="med"/>
+                      <a:tailEnd type="none" w="med" len="med"/>
+                    </a:lnR>
+                    <a:lnT w="12700" cap="flat" cmpd="sng" algn="ctr">
+                      <a:solidFill>
+                        <a:srgbClr val="DADCE0"/>
+                      </a:solidFill>
+                      <a:prstDash val="solid"/>
+                      <a:round/>
+                      <a:headEnd type="none" w="med" len="med"/>
+                      <a:tailEnd type="none" w="med" len="med"/>
+                    </a:lnT>
+                    <a:lnB w="12700" cap="flat" cmpd="sng" algn="ctr">
+                      <a:solidFill>
+                        <a:srgbClr val="DADCE0"/>
+                      </a:solidFill>
+                      <a:prstDash val="solid"/>
+                      <a:round/>
+                      <a:headEnd type="none" w="med" len="med"/>
+                      <a:tailEnd type="none" w="med" len="med"/>
+                    </a:lnB>
+                    <a:solidFill>
+                      <a:srgbClr val="FFFFFF"/>
+                    </a:solidFill>
+                  </a:tcPr>
+                </a:tc>
+                <a:tc>
+                  <a:txBody>
+                    <a:bodyPr/>
+                    <a:lstStyle/>
+                    <a:p>
+                      <a:pPr algn="l" indent="0" marL="0">
+                        <a:buNone/>
+                      </a:pPr>
+                      <a:r>
+                        <a:rPr lang="en-US" sz="1400" dirty="0">
+                          <a:solidFill>
+                            <a:srgbClr val="202124"/>
+                          </a:solidFill>
+                        </a:rPr>
+                        <a:t>+$12.4M ARR Impact</a:t>
                       </a:r>
                       <a:endParaRPr lang="en-US" sz="1400" dirty="0"/>
                     </a:p>
@@ -6252,251 +6619,251 @@
                             <a:srgbClr val="202124"/>
                           </a:solidFill>
                         </a:rPr>
-                        <a:t>Sub-Metric 1</a:t>
-                      </a:r>
-                      <a:endParaRPr lang="en-US" sz="1400" dirty="0"/>
-                    </a:p>
-                  </a:txBody>
-                  <a:tcPr marL="91440" marR="91440" marT="45720" marB="45720" anchor="ctr">
-                    <a:lnL w="12700" cap="flat" cmpd="sng" algn="ctr">
-                      <a:solidFill>
-                        <a:srgbClr val="DADCE0"/>
-                      </a:solidFill>
-                      <a:prstDash val="solid"/>
-                      <a:round/>
-                      <a:headEnd type="none" w="med" len="med"/>
-                      <a:tailEnd type="none" w="med" len="med"/>
-                    </a:lnL>
-                    <a:lnR w="12700" cap="flat" cmpd="sng" algn="ctr">
-                      <a:solidFill>
-                        <a:srgbClr val="DADCE0"/>
-                      </a:solidFill>
-                      <a:prstDash val="solid"/>
-                      <a:round/>
-                      <a:headEnd type="none" w="med" len="med"/>
-                      <a:tailEnd type="none" w="med" len="med"/>
-                    </a:lnR>
-                    <a:lnT w="12700" cap="flat" cmpd="sng" algn="ctr">
-                      <a:solidFill>
-                        <a:srgbClr val="DADCE0"/>
-                      </a:solidFill>
-                      <a:prstDash val="solid"/>
-                      <a:round/>
-                      <a:headEnd type="none" w="med" len="med"/>
-                      <a:tailEnd type="none" w="med" len="med"/>
-                    </a:lnT>
-                    <a:lnB w="12700" cap="flat" cmpd="sng" algn="ctr">
-                      <a:solidFill>
-                        <a:srgbClr val="DADCE0"/>
-                      </a:solidFill>
-                      <a:prstDash val="solid"/>
-                      <a:round/>
-                      <a:headEnd type="none" w="med" len="med"/>
-                      <a:tailEnd type="none" w="med" len="med"/>
-                    </a:lnB>
-                    <a:solidFill>
-                      <a:srgbClr val="FFFFFF"/>
-                    </a:solidFill>
-                  </a:tcPr>
-                </a:tc>
-                <a:tc>
-                  <a:txBody>
-                    <a:bodyPr/>
-                    <a:lstStyle/>
-                    <a:p>
-                      <a:pPr algn="l" indent="0" marL="0">
-                        <a:buNone/>
-                      </a:pPr>
-                      <a:r>
-                        <a:rPr lang="en-US" sz="1400" dirty="0">
-                          <a:solidFill>
-                            <a:srgbClr val="202124"/>
-                          </a:solidFill>
-                        </a:rPr>
-                        <a:t>Anchor Discovery Rate (ADR)</a:t>
-                      </a:r>
-                      <a:endParaRPr lang="en-US" sz="1400" dirty="0"/>
-                    </a:p>
-                  </a:txBody>
-                  <a:tcPr marL="91440" marR="91440" marT="45720" marB="45720" anchor="ctr">
-                    <a:lnL w="12700" cap="flat" cmpd="sng" algn="ctr">
-                      <a:solidFill>
-                        <a:srgbClr val="DADCE0"/>
-                      </a:solidFill>
-                      <a:prstDash val="solid"/>
-                      <a:round/>
-                      <a:headEnd type="none" w="med" len="med"/>
-                      <a:tailEnd type="none" w="med" len="med"/>
-                    </a:lnL>
-                    <a:lnR w="12700" cap="flat" cmpd="sng" algn="ctr">
-                      <a:solidFill>
-                        <a:srgbClr val="DADCE0"/>
-                      </a:solidFill>
-                      <a:prstDash val="solid"/>
-                      <a:round/>
-                      <a:headEnd type="none" w="med" len="med"/>
-                      <a:tailEnd type="none" w="med" len="med"/>
-                    </a:lnR>
-                    <a:lnT w="12700" cap="flat" cmpd="sng" algn="ctr">
-                      <a:solidFill>
-                        <a:srgbClr val="DADCE0"/>
-                      </a:solidFill>
-                      <a:prstDash val="solid"/>
-                      <a:round/>
-                      <a:headEnd type="none" w="med" len="med"/>
-                      <a:tailEnd type="none" w="med" len="med"/>
-                    </a:lnT>
-                    <a:lnB w="12700" cap="flat" cmpd="sng" algn="ctr">
-                      <a:solidFill>
-                        <a:srgbClr val="DADCE0"/>
-                      </a:solidFill>
-                      <a:prstDash val="solid"/>
-                      <a:round/>
-                      <a:headEnd type="none" w="med" len="med"/>
-                      <a:tailEnd type="none" w="med" len="med"/>
-                    </a:lnB>
-                    <a:solidFill>
-                      <a:srgbClr val="FFFFFF"/>
-                    </a:solidFill>
-                  </a:tcPr>
-                </a:tc>
-                <a:tc>
-                  <a:txBody>
-                    <a:bodyPr/>
-                    <a:lstStyle/>
-                    <a:p>
-                      <a:pPr algn="l" indent="0" marL="0">
-                        <a:buNone/>
-                      </a:pPr>
-                      <a:r>
-                        <a:rPr lang="en-US" sz="1400" dirty="0">
-                          <a:solidFill>
-                            <a:srgbClr val="202124"/>
-                          </a:solidFill>
-                        </a:rPr>
-                        <a:t>32.4% → 100.0%</a:t>
-                      </a:r>
-                      <a:endParaRPr lang="en-US" sz="1400" dirty="0"/>
-                    </a:p>
-                  </a:txBody>
-                  <a:tcPr marL="91440" marR="91440" marT="45720" marB="45720" anchor="ctr">
-                    <a:lnL w="12700" cap="flat" cmpd="sng" algn="ctr">
-                      <a:solidFill>
-                        <a:srgbClr val="DADCE0"/>
-                      </a:solidFill>
-                      <a:prstDash val="solid"/>
-                      <a:round/>
-                      <a:headEnd type="none" w="med" len="med"/>
-                      <a:tailEnd type="none" w="med" len="med"/>
-                    </a:lnL>
-                    <a:lnR w="12700" cap="flat" cmpd="sng" algn="ctr">
-                      <a:solidFill>
-                        <a:srgbClr val="DADCE0"/>
-                      </a:solidFill>
-                      <a:prstDash val="solid"/>
-                      <a:round/>
-                      <a:headEnd type="none" w="med" len="med"/>
-                      <a:tailEnd type="none" w="med" len="med"/>
-                    </a:lnR>
-                    <a:lnT w="12700" cap="flat" cmpd="sng" algn="ctr">
-                      <a:solidFill>
-                        <a:srgbClr val="DADCE0"/>
-                      </a:solidFill>
-                      <a:prstDash val="solid"/>
-                      <a:round/>
-                      <a:headEnd type="none" w="med" len="med"/>
-                      <a:tailEnd type="none" w="med" len="med"/>
-                    </a:lnT>
-                    <a:lnB w="12700" cap="flat" cmpd="sng" algn="ctr">
-                      <a:solidFill>
-                        <a:srgbClr val="DADCE0"/>
-                      </a:solidFill>
-                      <a:prstDash val="solid"/>
-                      <a:round/>
-                      <a:headEnd type="none" w="med" len="med"/>
-                      <a:tailEnd type="none" w="med" len="med"/>
-                    </a:lnB>
-                    <a:solidFill>
-                      <a:srgbClr val="FFFFFF"/>
-                    </a:solidFill>
-                  </a:tcPr>
-                </a:tc>
-                <a:tc>
-                  <a:txBody>
-                    <a:bodyPr/>
-                    <a:lstStyle/>
-                    <a:p>
-                      <a:pPr algn="l" indent="0" marL="0">
-                        <a:buNone/>
-                      </a:pPr>
-                      <a:r>
-                        <a:rPr lang="en-US" sz="1400" dirty="0">
-                          <a:solidFill>
-                            <a:srgbClr val="202124"/>
-                          </a:solidFill>
-                        </a:rPr>
-                        <a:t>Surfaced Candidate Anchors (K=5) / Total Vague Query Sessions</a:t>
-                      </a:r>
-                      <a:endParaRPr lang="en-US" sz="1400" dirty="0"/>
-                    </a:p>
-                  </a:txBody>
-                  <a:tcPr marL="91440" marR="91440" marT="45720" marB="45720" anchor="ctr">
-                    <a:lnL w="12700" cap="flat" cmpd="sng" algn="ctr">
-                      <a:solidFill>
-                        <a:srgbClr val="DADCE0"/>
-                      </a:solidFill>
-                      <a:prstDash val="solid"/>
-                      <a:round/>
-                      <a:headEnd type="none" w="med" len="med"/>
-                      <a:tailEnd type="none" w="med" len="med"/>
-                    </a:lnL>
-                    <a:lnR w="12700" cap="flat" cmpd="sng" algn="ctr">
-                      <a:solidFill>
-                        <a:srgbClr val="DADCE0"/>
-                      </a:solidFill>
-                      <a:prstDash val="solid"/>
-                      <a:round/>
-                      <a:headEnd type="none" w="med" len="med"/>
-                      <a:tailEnd type="none" w="med" len="med"/>
-                    </a:lnR>
-                    <a:lnT w="12700" cap="flat" cmpd="sng" algn="ctr">
-                      <a:solidFill>
-                        <a:srgbClr val="DADCE0"/>
-                      </a:solidFill>
-                      <a:prstDash val="solid"/>
-                      <a:round/>
-                      <a:headEnd type="none" w="med" len="med"/>
-                      <a:tailEnd type="none" w="med" len="med"/>
-                    </a:lnT>
-                    <a:lnB w="12700" cap="flat" cmpd="sng" algn="ctr">
-                      <a:solidFill>
-                        <a:srgbClr val="DADCE0"/>
-                      </a:solidFill>
-                      <a:prstDash val="solid"/>
-                      <a:round/>
-                      <a:headEnd type="none" w="med" len="med"/>
-                      <a:tailEnd type="none" w="med" len="med"/>
-                    </a:lnB>
-                    <a:solidFill>
-                      <a:srgbClr val="FFFFFF"/>
-                    </a:solidFill>
-                  </a:tcPr>
-                </a:tc>
-                <a:tc>
-                  <a:txBody>
-                    <a:bodyPr/>
-                    <a:lstStyle/>
-                    <a:p>
-                      <a:pPr algn="l" indent="0" marL="0">
-                        <a:buNone/>
-                      </a:pPr>
-                      <a:r>
-                        <a:rPr lang="en-US" sz="1400" dirty="0">
-                          <a:solidFill>
-                            <a:srgbClr val="202124"/>
-                          </a:solidFill>
-                        </a:rPr>
-                        <a:t>Stage G1 Lift</a:t>
+                        <a:t>Business Metric (L1)</a:t>
+                      </a:r>
+                      <a:endParaRPr lang="en-US" sz="1400" dirty="0"/>
+                    </a:p>
+                  </a:txBody>
+                  <a:tcPr marL="91440" marR="91440" marT="45720" marB="45720" anchor="ctr">
+                    <a:lnL w="12700" cap="flat" cmpd="sng" algn="ctr">
+                      <a:solidFill>
+                        <a:srgbClr val="DADCE0"/>
+                      </a:solidFill>
+                      <a:prstDash val="solid"/>
+                      <a:round/>
+                      <a:headEnd type="none" w="med" len="med"/>
+                      <a:tailEnd type="none" w="med" len="med"/>
+                    </a:lnL>
+                    <a:lnR w="12700" cap="flat" cmpd="sng" algn="ctr">
+                      <a:solidFill>
+                        <a:srgbClr val="DADCE0"/>
+                      </a:solidFill>
+                      <a:prstDash val="solid"/>
+                      <a:round/>
+                      <a:headEnd type="none" w="med" len="med"/>
+                      <a:tailEnd type="none" w="med" len="med"/>
+                    </a:lnR>
+                    <a:lnT w="12700" cap="flat" cmpd="sng" algn="ctr">
+                      <a:solidFill>
+                        <a:srgbClr val="DADCE0"/>
+                      </a:solidFill>
+                      <a:prstDash val="solid"/>
+                      <a:round/>
+                      <a:headEnd type="none" w="med" len="med"/>
+                      <a:tailEnd type="none" w="med" len="med"/>
+                    </a:lnT>
+                    <a:lnB w="12700" cap="flat" cmpd="sng" algn="ctr">
+                      <a:solidFill>
+                        <a:srgbClr val="DADCE0"/>
+                      </a:solidFill>
+                      <a:prstDash val="solid"/>
+                      <a:round/>
+                      <a:headEnd type="none" w="med" len="med"/>
+                      <a:tailEnd type="none" w="med" len="med"/>
+                    </a:lnB>
+                    <a:solidFill>
+                      <a:srgbClr val="FFFFFF"/>
+                    </a:solidFill>
+                  </a:tcPr>
+                </a:tc>
+                <a:tc>
+                  <a:txBody>
+                    <a:bodyPr/>
+                    <a:lstStyle/>
+                    <a:p>
+                      <a:pPr algn="l" indent="0" marL="0">
+                        <a:buNone/>
+                      </a:pPr>
+                      <a:r>
+                        <a:rPr lang="en-US" sz="1400" dirty="0">
+                          <a:solidFill>
+                            <a:srgbClr val="202124"/>
+                          </a:solidFill>
+                        </a:rPr>
+                        <a:t>Search Success Rate (SSR)</a:t>
+                      </a:r>
+                      <a:endParaRPr lang="en-US" sz="1400" dirty="0"/>
+                    </a:p>
+                  </a:txBody>
+                  <a:tcPr marL="91440" marR="91440" marT="45720" marB="45720" anchor="ctr">
+                    <a:lnL w="12700" cap="flat" cmpd="sng" algn="ctr">
+                      <a:solidFill>
+                        <a:srgbClr val="DADCE0"/>
+                      </a:solidFill>
+                      <a:prstDash val="solid"/>
+                      <a:round/>
+                      <a:headEnd type="none" w="med" len="med"/>
+                      <a:tailEnd type="none" w="med" len="med"/>
+                    </a:lnL>
+                    <a:lnR w="12700" cap="flat" cmpd="sng" algn="ctr">
+                      <a:solidFill>
+                        <a:srgbClr val="DADCE0"/>
+                      </a:solidFill>
+                      <a:prstDash val="solid"/>
+                      <a:round/>
+                      <a:headEnd type="none" w="med" len="med"/>
+                      <a:tailEnd type="none" w="med" len="med"/>
+                    </a:lnR>
+                    <a:lnT w="12700" cap="flat" cmpd="sng" algn="ctr">
+                      <a:solidFill>
+                        <a:srgbClr val="DADCE0"/>
+                      </a:solidFill>
+                      <a:prstDash val="solid"/>
+                      <a:round/>
+                      <a:headEnd type="none" w="med" len="med"/>
+                      <a:tailEnd type="none" w="med" len="med"/>
+                    </a:lnT>
+                    <a:lnB w="12700" cap="flat" cmpd="sng" algn="ctr">
+                      <a:solidFill>
+                        <a:srgbClr val="DADCE0"/>
+                      </a:solidFill>
+                      <a:prstDash val="solid"/>
+                      <a:round/>
+                      <a:headEnd type="none" w="med" len="med"/>
+                      <a:tailEnd type="none" w="med" len="med"/>
+                    </a:lnB>
+                    <a:solidFill>
+                      <a:srgbClr val="FFFFFF"/>
+                    </a:solidFill>
+                  </a:tcPr>
+                </a:tc>
+                <a:tc>
+                  <a:txBody>
+                    <a:bodyPr/>
+                    <a:lstStyle/>
+                    <a:p>
+                      <a:pPr algn="l" indent="0" marL="0">
+                        <a:buNone/>
+                      </a:pPr>
+                      <a:r>
+                        <a:rPr lang="en-US" sz="1400" dirty="0">
+                          <a:solidFill>
+                            <a:srgbClr val="202124"/>
+                          </a:solidFill>
+                        </a:rPr>
+                        <a:t>32.4% → 78.5%</a:t>
+                      </a:r>
+                      <a:endParaRPr lang="en-US" sz="1400" dirty="0"/>
+                    </a:p>
+                  </a:txBody>
+                  <a:tcPr marL="91440" marR="91440" marT="45720" marB="45720" anchor="ctr">
+                    <a:lnL w="12700" cap="flat" cmpd="sng" algn="ctr">
+                      <a:solidFill>
+                        <a:srgbClr val="DADCE0"/>
+                      </a:solidFill>
+                      <a:prstDash val="solid"/>
+                      <a:round/>
+                      <a:headEnd type="none" w="med" len="med"/>
+                      <a:tailEnd type="none" w="med" len="med"/>
+                    </a:lnL>
+                    <a:lnR w="12700" cap="flat" cmpd="sng" algn="ctr">
+                      <a:solidFill>
+                        <a:srgbClr val="DADCE0"/>
+                      </a:solidFill>
+                      <a:prstDash val="solid"/>
+                      <a:round/>
+                      <a:headEnd type="none" w="med" len="med"/>
+                      <a:tailEnd type="none" w="med" len="med"/>
+                    </a:lnR>
+                    <a:lnT w="12700" cap="flat" cmpd="sng" algn="ctr">
+                      <a:solidFill>
+                        <a:srgbClr val="DADCE0"/>
+                      </a:solidFill>
+                      <a:prstDash val="solid"/>
+                      <a:round/>
+                      <a:headEnd type="none" w="med" len="med"/>
+                      <a:tailEnd type="none" w="med" len="med"/>
+                    </a:lnT>
+                    <a:lnB w="12700" cap="flat" cmpd="sng" algn="ctr">
+                      <a:solidFill>
+                        <a:srgbClr val="DADCE0"/>
+                      </a:solidFill>
+                      <a:prstDash val="solid"/>
+                      <a:round/>
+                      <a:headEnd type="none" w="med" len="med"/>
+                      <a:tailEnd type="none" w="med" len="med"/>
+                    </a:lnB>
+                    <a:solidFill>
+                      <a:srgbClr val="FFFFFF"/>
+                    </a:solidFill>
+                  </a:tcPr>
+                </a:tc>
+                <a:tc>
+                  <a:txBody>
+                    <a:bodyPr/>
+                    <a:lstStyle/>
+                    <a:p>
+                      <a:pPr algn="l" indent="0" marL="0">
+                        <a:buNone/>
+                      </a:pPr>
+                      <a:r>
+                        <a:rPr lang="en-US" sz="1400" dirty="0">
+                          <a:solidFill>
+                            <a:srgbClr val="202124"/>
+                          </a:solidFill>
+                        </a:rPr>
+                        <a:t>Successful Target Photo Retrievals / Total Vague Search Sessions</a:t>
+                      </a:r>
+                      <a:endParaRPr lang="en-US" sz="1400" dirty="0"/>
+                    </a:p>
+                  </a:txBody>
+                  <a:tcPr marL="91440" marR="91440" marT="45720" marB="45720" anchor="ctr">
+                    <a:lnL w="12700" cap="flat" cmpd="sng" algn="ctr">
+                      <a:solidFill>
+                        <a:srgbClr val="DADCE0"/>
+                      </a:solidFill>
+                      <a:prstDash val="solid"/>
+                      <a:round/>
+                      <a:headEnd type="none" w="med" len="med"/>
+                      <a:tailEnd type="none" w="med" len="med"/>
+                    </a:lnL>
+                    <a:lnR w="12700" cap="flat" cmpd="sng" algn="ctr">
+                      <a:solidFill>
+                        <a:srgbClr val="DADCE0"/>
+                      </a:solidFill>
+                      <a:prstDash val="solid"/>
+                      <a:round/>
+                      <a:headEnd type="none" w="med" len="med"/>
+                      <a:tailEnd type="none" w="med" len="med"/>
+                    </a:lnR>
+                    <a:lnT w="12700" cap="flat" cmpd="sng" algn="ctr">
+                      <a:solidFill>
+                        <a:srgbClr val="DADCE0"/>
+                      </a:solidFill>
+                      <a:prstDash val="solid"/>
+                      <a:round/>
+                      <a:headEnd type="none" w="med" len="med"/>
+                      <a:tailEnd type="none" w="med" len="med"/>
+                    </a:lnT>
+                    <a:lnB w="12700" cap="flat" cmpd="sng" algn="ctr">
+                      <a:solidFill>
+                        <a:srgbClr val="DADCE0"/>
+                      </a:solidFill>
+                      <a:prstDash val="solid"/>
+                      <a:round/>
+                      <a:headEnd type="none" w="med" len="med"/>
+                      <a:tailEnd type="none" w="med" len="med"/>
+                    </a:lnB>
+                    <a:solidFill>
+                      <a:srgbClr val="FFFFFF"/>
+                    </a:solidFill>
+                  </a:tcPr>
+                </a:tc>
+                <a:tc>
+                  <a:txBody>
+                    <a:bodyPr/>
+                    <a:lstStyle/>
+                    <a:p>
+                      <a:pPr algn="l" indent="0" marL="0">
+                        <a:buNone/>
+                      </a:pPr>
+                      <a:r>
+                        <a:rPr lang="en-US" sz="1400" dirty="0">
+                          <a:solidFill>
+                            <a:srgbClr val="202124"/>
+                          </a:solidFill>
+                        </a:rPr>
+                        <a:t>+8.5% Google One Retention</a:t>
                       </a:r>
                       <a:endParaRPr lang="en-US" sz="1400" dirty="0"/>
                     </a:p>
@@ -6559,251 +6926,251 @@
                             <a:srgbClr val="202124"/>
                           </a:solidFill>
                         </a:rPr>
-                        <a:t>Sub-Metric 2</a:t>
-                      </a:r>
-                      <a:endParaRPr lang="en-US" sz="1400" dirty="0"/>
-                    </a:p>
-                  </a:txBody>
-                  <a:tcPr marL="91440" marR="91440" marT="45720" marB="45720" anchor="ctr">
-                    <a:lnL w="12700" cap="flat" cmpd="sng" algn="ctr">
-                      <a:solidFill>
-                        <a:srgbClr val="DADCE0"/>
-                      </a:solidFill>
-                      <a:prstDash val="solid"/>
-                      <a:round/>
-                      <a:headEnd type="none" w="med" len="med"/>
-                      <a:tailEnd type="none" w="med" len="med"/>
-                    </a:lnL>
-                    <a:lnR w="12700" cap="flat" cmpd="sng" algn="ctr">
-                      <a:solidFill>
-                        <a:srgbClr val="DADCE0"/>
-                      </a:solidFill>
-                      <a:prstDash val="solid"/>
-                      <a:round/>
-                      <a:headEnd type="none" w="med" len="med"/>
-                      <a:tailEnd type="none" w="med" len="med"/>
-                    </a:lnR>
-                    <a:lnT w="12700" cap="flat" cmpd="sng" algn="ctr">
-                      <a:solidFill>
-                        <a:srgbClr val="DADCE0"/>
-                      </a:solidFill>
-                      <a:prstDash val="solid"/>
-                      <a:round/>
-                      <a:headEnd type="none" w="med" len="med"/>
-                      <a:tailEnd type="none" w="med" len="med"/>
-                    </a:lnT>
-                    <a:lnB w="12700" cap="flat" cmpd="sng" algn="ctr">
-                      <a:solidFill>
-                        <a:srgbClr val="DADCE0"/>
-                      </a:solidFill>
-                      <a:prstDash val="solid"/>
-                      <a:round/>
-                      <a:headEnd type="none" w="med" len="med"/>
-                      <a:tailEnd type="none" w="med" len="med"/>
-                    </a:lnB>
-                    <a:solidFill>
-                      <a:srgbClr val="FFFFFF"/>
-                    </a:solidFill>
-                  </a:tcPr>
-                </a:tc>
-                <a:tc>
-                  <a:txBody>
-                    <a:bodyPr/>
-                    <a:lstStyle/>
-                    <a:p>
-                      <a:pPr algn="l" indent="0" marL="0">
-                        <a:buNone/>
-                      </a:pPr>
-                      <a:r>
-                        <a:rPr lang="en-US" sz="1400" dirty="0">
-                          <a:solidFill>
-                            <a:srgbClr val="202124"/>
-                          </a:solidFill>
-                        </a:rPr>
-                        <a:t>Target Reachability Rate (TCRR)</a:t>
-                      </a:r>
-                      <a:endParaRPr lang="en-US" sz="1400" dirty="0"/>
-                    </a:p>
-                  </a:txBody>
-                  <a:tcPr marL="91440" marR="91440" marT="45720" marB="45720" anchor="ctr">
-                    <a:lnL w="12700" cap="flat" cmpd="sng" algn="ctr">
-                      <a:solidFill>
-                        <a:srgbClr val="DADCE0"/>
-                      </a:solidFill>
-                      <a:prstDash val="solid"/>
-                      <a:round/>
-                      <a:headEnd type="none" w="med" len="med"/>
-                      <a:tailEnd type="none" w="med" len="med"/>
-                    </a:lnL>
-                    <a:lnR w="12700" cap="flat" cmpd="sng" algn="ctr">
-                      <a:solidFill>
-                        <a:srgbClr val="DADCE0"/>
-                      </a:solidFill>
-                      <a:prstDash val="solid"/>
-                      <a:round/>
-                      <a:headEnd type="none" w="med" len="med"/>
-                      <a:tailEnd type="none" w="med" len="med"/>
-                    </a:lnR>
-                    <a:lnT w="12700" cap="flat" cmpd="sng" algn="ctr">
-                      <a:solidFill>
-                        <a:srgbClr val="DADCE0"/>
-                      </a:solidFill>
-                      <a:prstDash val="solid"/>
-                      <a:round/>
-                      <a:headEnd type="none" w="med" len="med"/>
-                      <a:tailEnd type="none" w="med" len="med"/>
-                    </a:lnT>
-                    <a:lnB w="12700" cap="flat" cmpd="sng" algn="ctr">
-                      <a:solidFill>
-                        <a:srgbClr val="DADCE0"/>
-                      </a:solidFill>
-                      <a:prstDash val="solid"/>
-                      <a:round/>
-                      <a:headEnd type="none" w="med" len="med"/>
-                      <a:tailEnd type="none" w="med" len="med"/>
-                    </a:lnB>
-                    <a:solidFill>
-                      <a:srgbClr val="FFFFFF"/>
-                    </a:solidFill>
-                  </a:tcPr>
-                </a:tc>
-                <a:tc>
-                  <a:txBody>
-                    <a:bodyPr/>
-                    <a:lstStyle/>
-                    <a:p>
-                      <a:pPr algn="l" indent="0" marL="0">
-                        <a:buNone/>
-                      </a:pPr>
-                      <a:r>
-                        <a:rPr lang="en-US" sz="1400" dirty="0">
-                          <a:solidFill>
-                            <a:srgbClr val="202124"/>
-                          </a:solidFill>
-                        </a:rPr>
-                        <a:t>23.5% → 100.0%</a:t>
-                      </a:r>
-                      <a:endParaRPr lang="en-US" sz="1400" dirty="0"/>
-                    </a:p>
-                  </a:txBody>
-                  <a:tcPr marL="91440" marR="91440" marT="45720" marB="45720" anchor="ctr">
-                    <a:lnL w="12700" cap="flat" cmpd="sng" algn="ctr">
-                      <a:solidFill>
-                        <a:srgbClr val="DADCE0"/>
-                      </a:solidFill>
-                      <a:prstDash val="solid"/>
-                      <a:round/>
-                      <a:headEnd type="none" w="med" len="med"/>
-                      <a:tailEnd type="none" w="med" len="med"/>
-                    </a:lnL>
-                    <a:lnR w="12700" cap="flat" cmpd="sng" algn="ctr">
-                      <a:solidFill>
-                        <a:srgbClr val="DADCE0"/>
-                      </a:solidFill>
-                      <a:prstDash val="solid"/>
-                      <a:round/>
-                      <a:headEnd type="none" w="med" len="med"/>
-                      <a:tailEnd type="none" w="med" len="med"/>
-                    </a:lnR>
-                    <a:lnT w="12700" cap="flat" cmpd="sng" algn="ctr">
-                      <a:solidFill>
-                        <a:srgbClr val="DADCE0"/>
-                      </a:solidFill>
-                      <a:prstDash val="solid"/>
-                      <a:round/>
-                      <a:headEnd type="none" w="med" len="med"/>
-                      <a:tailEnd type="none" w="med" len="med"/>
-                    </a:lnT>
-                    <a:lnB w="12700" cap="flat" cmpd="sng" algn="ctr">
-                      <a:solidFill>
-                        <a:srgbClr val="DADCE0"/>
-                      </a:solidFill>
-                      <a:prstDash val="solid"/>
-                      <a:round/>
-                      <a:headEnd type="none" w="med" len="med"/>
-                      <a:tailEnd type="none" w="med" len="med"/>
-                    </a:lnB>
-                    <a:solidFill>
-                      <a:srgbClr val="FFFFFF"/>
-                    </a:solidFill>
-                  </a:tcPr>
-                </a:tc>
-                <a:tc>
-                  <a:txBody>
-                    <a:bodyPr/>
-                    <a:lstStyle/>
-                    <a:p>
-                      <a:pPr algn="l" indent="0" marL="0">
-                        <a:buNone/>
-                      </a:pPr>
-                      <a:r>
-                        <a:rPr lang="en-US" sz="1400" dirty="0">
-                          <a:solidFill>
-                            <a:srgbClr val="202124"/>
-                          </a:solidFill>
-                        </a:rPr>
-                        <a:t>Target Media Found in Context (±4h, ≤1km) / Anchor Sessions</a:t>
-                      </a:r>
-                      <a:endParaRPr lang="en-US" sz="1400" dirty="0"/>
-                    </a:p>
-                  </a:txBody>
-                  <a:tcPr marL="91440" marR="91440" marT="45720" marB="45720" anchor="ctr">
-                    <a:lnL w="12700" cap="flat" cmpd="sng" algn="ctr">
-                      <a:solidFill>
-                        <a:srgbClr val="DADCE0"/>
-                      </a:solidFill>
-                      <a:prstDash val="solid"/>
-                      <a:round/>
-                      <a:headEnd type="none" w="med" len="med"/>
-                      <a:tailEnd type="none" w="med" len="med"/>
-                    </a:lnL>
-                    <a:lnR w="12700" cap="flat" cmpd="sng" algn="ctr">
-                      <a:solidFill>
-                        <a:srgbClr val="DADCE0"/>
-                      </a:solidFill>
-                      <a:prstDash val="solid"/>
-                      <a:round/>
-                      <a:headEnd type="none" w="med" len="med"/>
-                      <a:tailEnd type="none" w="med" len="med"/>
-                    </a:lnR>
-                    <a:lnT w="12700" cap="flat" cmpd="sng" algn="ctr">
-                      <a:solidFill>
-                        <a:srgbClr val="DADCE0"/>
-                      </a:solidFill>
-                      <a:prstDash val="solid"/>
-                      <a:round/>
-                      <a:headEnd type="none" w="med" len="med"/>
-                      <a:tailEnd type="none" w="med" len="med"/>
-                    </a:lnT>
-                    <a:lnB w="12700" cap="flat" cmpd="sng" algn="ctr">
-                      <a:solidFill>
-                        <a:srgbClr val="DADCE0"/>
-                      </a:solidFill>
-                      <a:prstDash val="solid"/>
-                      <a:round/>
-                      <a:headEnd type="none" w="med" len="med"/>
-                      <a:tailEnd type="none" w="med" len="med"/>
-                    </a:lnB>
-                    <a:solidFill>
-                      <a:srgbClr val="FFFFFF"/>
-                    </a:solidFill>
-                  </a:tcPr>
-                </a:tc>
-                <a:tc>
-                  <a:txBody>
-                    <a:bodyPr/>
-                    <a:lstStyle/>
-                    <a:p>
-                      <a:pPr algn="l" indent="0" marL="0">
-                        <a:buNone/>
-                      </a:pPr>
-                      <a:r>
-                        <a:rPr lang="en-US" sz="1400" dirty="0">
-                          <a:solidFill>
-                            <a:srgbClr val="202124"/>
-                          </a:solidFill>
-                        </a:rPr>
-                        <a:t>Stage G2/G3 Lift</a:t>
+                        <a:t>Business Metric (L1)</a:t>
+                      </a:r>
+                      <a:endParaRPr lang="en-US" sz="1400" dirty="0"/>
+                    </a:p>
+                  </a:txBody>
+                  <a:tcPr marL="91440" marR="91440" marT="45720" marB="45720" anchor="ctr">
+                    <a:lnL w="12700" cap="flat" cmpd="sng" algn="ctr">
+                      <a:solidFill>
+                        <a:srgbClr val="DADCE0"/>
+                      </a:solidFill>
+                      <a:prstDash val="solid"/>
+                      <a:round/>
+                      <a:headEnd type="none" w="med" len="med"/>
+                      <a:tailEnd type="none" w="med" len="med"/>
+                    </a:lnL>
+                    <a:lnR w="12700" cap="flat" cmpd="sng" algn="ctr">
+                      <a:solidFill>
+                        <a:srgbClr val="DADCE0"/>
+                      </a:solidFill>
+                      <a:prstDash val="solid"/>
+                      <a:round/>
+                      <a:headEnd type="none" w="med" len="med"/>
+                      <a:tailEnd type="none" w="med" len="med"/>
+                    </a:lnR>
+                    <a:lnT w="12700" cap="flat" cmpd="sng" algn="ctr">
+                      <a:solidFill>
+                        <a:srgbClr val="DADCE0"/>
+                      </a:solidFill>
+                      <a:prstDash val="solid"/>
+                      <a:round/>
+                      <a:headEnd type="none" w="med" len="med"/>
+                      <a:tailEnd type="none" w="med" len="med"/>
+                    </a:lnT>
+                    <a:lnB w="12700" cap="flat" cmpd="sng" algn="ctr">
+                      <a:solidFill>
+                        <a:srgbClr val="DADCE0"/>
+                      </a:solidFill>
+                      <a:prstDash val="solid"/>
+                      <a:round/>
+                      <a:headEnd type="none" w="med" len="med"/>
+                      <a:tailEnd type="none" w="med" len="med"/>
+                    </a:lnB>
+                    <a:solidFill>
+                      <a:srgbClr val="FFFFFF"/>
+                    </a:solidFill>
+                  </a:tcPr>
+                </a:tc>
+                <a:tc>
+                  <a:txBody>
+                    <a:bodyPr/>
+                    <a:lstStyle/>
+                    <a:p>
+                      <a:pPr algn="l" indent="0" marL="0">
+                        <a:buNone/>
+                      </a:pPr>
+                      <a:r>
+                        <a:rPr lang="en-US" sz="1400" dirty="0">
+                          <a:solidFill>
+                            <a:srgbClr val="202124"/>
+                          </a:solidFill>
+                        </a:rPr>
+                        <a:t>Search Abandonment Rate (SAR)</a:t>
+                      </a:r>
+                      <a:endParaRPr lang="en-US" sz="1400" dirty="0"/>
+                    </a:p>
+                  </a:txBody>
+                  <a:tcPr marL="91440" marR="91440" marT="45720" marB="45720" anchor="ctr">
+                    <a:lnL w="12700" cap="flat" cmpd="sng" algn="ctr">
+                      <a:solidFill>
+                        <a:srgbClr val="DADCE0"/>
+                      </a:solidFill>
+                      <a:prstDash val="solid"/>
+                      <a:round/>
+                      <a:headEnd type="none" w="med" len="med"/>
+                      <a:tailEnd type="none" w="med" len="med"/>
+                    </a:lnL>
+                    <a:lnR w="12700" cap="flat" cmpd="sng" algn="ctr">
+                      <a:solidFill>
+                        <a:srgbClr val="DADCE0"/>
+                      </a:solidFill>
+                      <a:prstDash val="solid"/>
+                      <a:round/>
+                      <a:headEnd type="none" w="med" len="med"/>
+                      <a:tailEnd type="none" w="med" len="med"/>
+                    </a:lnR>
+                    <a:lnT w="12700" cap="flat" cmpd="sng" algn="ctr">
+                      <a:solidFill>
+                        <a:srgbClr val="DADCE0"/>
+                      </a:solidFill>
+                      <a:prstDash val="solid"/>
+                      <a:round/>
+                      <a:headEnd type="none" w="med" len="med"/>
+                      <a:tailEnd type="none" w="med" len="med"/>
+                    </a:lnT>
+                    <a:lnB w="12700" cap="flat" cmpd="sng" algn="ctr">
+                      <a:solidFill>
+                        <a:srgbClr val="DADCE0"/>
+                      </a:solidFill>
+                      <a:prstDash val="solid"/>
+                      <a:round/>
+                      <a:headEnd type="none" w="med" len="med"/>
+                      <a:tailEnd type="none" w="med" len="med"/>
+                    </a:lnB>
+                    <a:solidFill>
+                      <a:srgbClr val="FFFFFF"/>
+                    </a:solidFill>
+                  </a:tcPr>
+                </a:tc>
+                <a:tc>
+                  <a:txBody>
+                    <a:bodyPr/>
+                    <a:lstStyle/>
+                    <a:p>
+                      <a:pPr algn="l" indent="0" marL="0">
+                        <a:buNone/>
+                      </a:pPr>
+                      <a:r>
+                        <a:rPr lang="en-US" sz="1400" dirty="0">
+                          <a:solidFill>
+                            <a:srgbClr val="202124"/>
+                          </a:solidFill>
+                        </a:rPr>
+                        <a:t>67.6% → 21.5%</a:t>
+                      </a:r>
+                      <a:endParaRPr lang="en-US" sz="1400" dirty="0"/>
+                    </a:p>
+                  </a:txBody>
+                  <a:tcPr marL="91440" marR="91440" marT="45720" marB="45720" anchor="ctr">
+                    <a:lnL w="12700" cap="flat" cmpd="sng" algn="ctr">
+                      <a:solidFill>
+                        <a:srgbClr val="DADCE0"/>
+                      </a:solidFill>
+                      <a:prstDash val="solid"/>
+                      <a:round/>
+                      <a:headEnd type="none" w="med" len="med"/>
+                      <a:tailEnd type="none" w="med" len="med"/>
+                    </a:lnL>
+                    <a:lnR w="12700" cap="flat" cmpd="sng" algn="ctr">
+                      <a:solidFill>
+                        <a:srgbClr val="DADCE0"/>
+                      </a:solidFill>
+                      <a:prstDash val="solid"/>
+                      <a:round/>
+                      <a:headEnd type="none" w="med" len="med"/>
+                      <a:tailEnd type="none" w="med" len="med"/>
+                    </a:lnR>
+                    <a:lnT w="12700" cap="flat" cmpd="sng" algn="ctr">
+                      <a:solidFill>
+                        <a:srgbClr val="DADCE0"/>
+                      </a:solidFill>
+                      <a:prstDash val="solid"/>
+                      <a:round/>
+                      <a:headEnd type="none" w="med" len="med"/>
+                      <a:tailEnd type="none" w="med" len="med"/>
+                    </a:lnT>
+                    <a:lnB w="12700" cap="flat" cmpd="sng" algn="ctr">
+                      <a:solidFill>
+                        <a:srgbClr val="DADCE0"/>
+                      </a:solidFill>
+                      <a:prstDash val="solid"/>
+                      <a:round/>
+                      <a:headEnd type="none" w="med" len="med"/>
+                      <a:tailEnd type="none" w="med" len="med"/>
+                    </a:lnB>
+                    <a:solidFill>
+                      <a:srgbClr val="FFFFFF"/>
+                    </a:solidFill>
+                  </a:tcPr>
+                </a:tc>
+                <a:tc>
+                  <a:txBody>
+                    <a:bodyPr/>
+                    <a:lstStyle/>
+                    <a:p>
+                      <a:pPr algn="l" indent="0" marL="0">
+                        <a:buNone/>
+                      </a:pPr>
+                      <a:r>
+                        <a:rPr lang="en-US" sz="1400" dirty="0">
+                          <a:solidFill>
+                            <a:srgbClr val="202124"/>
+                          </a:solidFill>
+                        </a:rPr>
+                        <a:t>Sessions Abandoned after &gt;180s Scroll / Total Vague Sessions</a:t>
+                      </a:r>
+                      <a:endParaRPr lang="en-US" sz="1400" dirty="0"/>
+                    </a:p>
+                  </a:txBody>
+                  <a:tcPr marL="91440" marR="91440" marT="45720" marB="45720" anchor="ctr">
+                    <a:lnL w="12700" cap="flat" cmpd="sng" algn="ctr">
+                      <a:solidFill>
+                        <a:srgbClr val="DADCE0"/>
+                      </a:solidFill>
+                      <a:prstDash val="solid"/>
+                      <a:round/>
+                      <a:headEnd type="none" w="med" len="med"/>
+                      <a:tailEnd type="none" w="med" len="med"/>
+                    </a:lnL>
+                    <a:lnR w="12700" cap="flat" cmpd="sng" algn="ctr">
+                      <a:solidFill>
+                        <a:srgbClr val="DADCE0"/>
+                      </a:solidFill>
+                      <a:prstDash val="solid"/>
+                      <a:round/>
+                      <a:headEnd type="none" w="med" len="med"/>
+                      <a:tailEnd type="none" w="med" len="med"/>
+                    </a:lnR>
+                    <a:lnT w="12700" cap="flat" cmpd="sng" algn="ctr">
+                      <a:solidFill>
+                        <a:srgbClr val="DADCE0"/>
+                      </a:solidFill>
+                      <a:prstDash val="solid"/>
+                      <a:round/>
+                      <a:headEnd type="none" w="med" len="med"/>
+                      <a:tailEnd type="none" w="med" len="med"/>
+                    </a:lnT>
+                    <a:lnB w="12700" cap="flat" cmpd="sng" algn="ctr">
+                      <a:solidFill>
+                        <a:srgbClr val="DADCE0"/>
+                      </a:solidFill>
+                      <a:prstDash val="solid"/>
+                      <a:round/>
+                      <a:headEnd type="none" w="med" len="med"/>
+                      <a:tailEnd type="none" w="med" len="med"/>
+                    </a:lnB>
+                    <a:solidFill>
+                      <a:srgbClr val="FFFFFF"/>
+                    </a:solidFill>
+                  </a:tcPr>
+                </a:tc>
+                <a:tc>
+                  <a:txBody>
+                    <a:bodyPr/>
+                    <a:lstStyle/>
+                    <a:p>
+                      <a:pPr algn="l" indent="0" marL="0">
+                        <a:buNone/>
+                      </a:pPr>
+                      <a:r>
+                        <a:rPr lang="en-US" sz="1400" dirty="0">
+                          <a:solidFill>
+                            <a:srgbClr val="202124"/>
+                          </a:solidFill>
+                        </a:rPr>
+                        <a:t>-68.2% Frustration Drop</a:t>
                       </a:r>
                       <a:endParaRPr lang="en-US" sz="1400" dirty="0"/>
                     </a:p>
@@ -6866,251 +7233,251 @@
                             <a:srgbClr val="202124"/>
                           </a:solidFill>
                         </a:rPr>
-                        <a:t>Guardrail Metric 1</a:t>
-                      </a:r>
-                      <a:endParaRPr lang="en-US" sz="1400" dirty="0"/>
-                    </a:p>
-                  </a:txBody>
-                  <a:tcPr marL="91440" marR="91440" marT="45720" marB="45720" anchor="ctr">
-                    <a:lnL w="12700" cap="flat" cmpd="sng" algn="ctr">
-                      <a:solidFill>
-                        <a:srgbClr val="DADCE0"/>
-                      </a:solidFill>
-                      <a:prstDash val="solid"/>
-                      <a:round/>
-                      <a:headEnd type="none" w="med" len="med"/>
-                      <a:tailEnd type="none" w="med" len="med"/>
-                    </a:lnL>
-                    <a:lnR w="12700" cap="flat" cmpd="sng" algn="ctr">
-                      <a:solidFill>
-                        <a:srgbClr val="DADCE0"/>
-                      </a:solidFill>
-                      <a:prstDash val="solid"/>
-                      <a:round/>
-                      <a:headEnd type="none" w="med" len="med"/>
-                      <a:tailEnd type="none" w="med" len="med"/>
-                    </a:lnR>
-                    <a:lnT w="12700" cap="flat" cmpd="sng" algn="ctr">
-                      <a:solidFill>
-                        <a:srgbClr val="DADCE0"/>
-                      </a:solidFill>
-                      <a:prstDash val="solid"/>
-                      <a:round/>
-                      <a:headEnd type="none" w="med" len="med"/>
-                      <a:tailEnd type="none" w="med" len="med"/>
-                    </a:lnT>
-                    <a:lnB w="12700" cap="flat" cmpd="sng" algn="ctr">
-                      <a:solidFill>
-                        <a:srgbClr val="DADCE0"/>
-                      </a:solidFill>
-                      <a:prstDash val="solid"/>
-                      <a:round/>
-                      <a:headEnd type="none" w="med" len="med"/>
-                      <a:tailEnd type="none" w="med" len="med"/>
-                    </a:lnB>
-                    <a:solidFill>
-                      <a:srgbClr val="FFFFFF"/>
-                    </a:solidFill>
-                  </a:tcPr>
-                </a:tc>
-                <a:tc>
-                  <a:txBody>
-                    <a:bodyPr/>
-                    <a:lstStyle/>
-                    <a:p>
-                      <a:pPr algn="l" indent="0" marL="0">
-                        <a:buNone/>
-                      </a:pPr>
-                      <a:r>
-                        <a:rPr lang="en-US" sz="1400" dirty="0">
-                          <a:solidFill>
-                            <a:srgbClr val="202124"/>
-                          </a:solidFill>
-                        </a:rPr>
-                        <a:t>Scroll Fatigue Abandonment</a:t>
-                      </a:r>
-                      <a:endParaRPr lang="en-US" sz="1400" dirty="0"/>
-                    </a:p>
-                  </a:txBody>
-                  <a:tcPr marL="91440" marR="91440" marT="45720" marB="45720" anchor="ctr">
-                    <a:lnL w="12700" cap="flat" cmpd="sng" algn="ctr">
-                      <a:solidFill>
-                        <a:srgbClr val="DADCE0"/>
-                      </a:solidFill>
-                      <a:prstDash val="solid"/>
-                      <a:round/>
-                      <a:headEnd type="none" w="med" len="med"/>
-                      <a:tailEnd type="none" w="med" len="med"/>
-                    </a:lnL>
-                    <a:lnR w="12700" cap="flat" cmpd="sng" algn="ctr">
-                      <a:solidFill>
-                        <a:srgbClr val="DADCE0"/>
-                      </a:solidFill>
-                      <a:prstDash val="solid"/>
-                      <a:round/>
-                      <a:headEnd type="none" w="med" len="med"/>
-                      <a:tailEnd type="none" w="med" len="med"/>
-                    </a:lnR>
-                    <a:lnT w="12700" cap="flat" cmpd="sng" algn="ctr">
-                      <a:solidFill>
-                        <a:srgbClr val="DADCE0"/>
-                      </a:solidFill>
-                      <a:prstDash val="solid"/>
-                      <a:round/>
-                      <a:headEnd type="none" w="med" len="med"/>
-                      <a:tailEnd type="none" w="med" len="med"/>
-                    </a:lnT>
-                    <a:lnB w="12700" cap="flat" cmpd="sng" algn="ctr">
-                      <a:solidFill>
-                        <a:srgbClr val="DADCE0"/>
-                      </a:solidFill>
-                      <a:prstDash val="solid"/>
-                      <a:round/>
-                      <a:headEnd type="none" w="med" len="med"/>
-                      <a:tailEnd type="none" w="med" len="med"/>
-                    </a:lnB>
-                    <a:solidFill>
-                      <a:srgbClr val="FFFFFF"/>
-                    </a:solidFill>
-                  </a:tcPr>
-                </a:tc>
-                <a:tc>
-                  <a:txBody>
-                    <a:bodyPr/>
-                    <a:lstStyle/>
-                    <a:p>
-                      <a:pPr algn="l" indent="0" marL="0">
-                        <a:buNone/>
-                      </a:pPr>
-                      <a:r>
-                        <a:rPr lang="en-US" sz="1400" dirty="0">
-                          <a:solidFill>
-                            <a:srgbClr val="202124"/>
-                          </a:solidFill>
-                        </a:rPr>
-                        <a:t>76.5% → &lt; 15.0%</a:t>
-                      </a:r>
-                      <a:endParaRPr lang="en-US" sz="1400" dirty="0"/>
-                    </a:p>
-                  </a:txBody>
-                  <a:tcPr marL="91440" marR="91440" marT="45720" marB="45720" anchor="ctr">
-                    <a:lnL w="12700" cap="flat" cmpd="sng" algn="ctr">
-                      <a:solidFill>
-                        <a:srgbClr val="DADCE0"/>
-                      </a:solidFill>
-                      <a:prstDash val="solid"/>
-                      <a:round/>
-                      <a:headEnd type="none" w="med" len="med"/>
-                      <a:tailEnd type="none" w="med" len="med"/>
-                    </a:lnL>
-                    <a:lnR w="12700" cap="flat" cmpd="sng" algn="ctr">
-                      <a:solidFill>
-                        <a:srgbClr val="DADCE0"/>
-                      </a:solidFill>
-                      <a:prstDash val="solid"/>
-                      <a:round/>
-                      <a:headEnd type="none" w="med" len="med"/>
-                      <a:tailEnd type="none" w="med" len="med"/>
-                    </a:lnR>
-                    <a:lnT w="12700" cap="flat" cmpd="sng" algn="ctr">
-                      <a:solidFill>
-                        <a:srgbClr val="DADCE0"/>
-                      </a:solidFill>
-                      <a:prstDash val="solid"/>
-                      <a:round/>
-                      <a:headEnd type="none" w="med" len="med"/>
-                      <a:tailEnd type="none" w="med" len="med"/>
-                    </a:lnT>
-                    <a:lnB w="12700" cap="flat" cmpd="sng" algn="ctr">
-                      <a:solidFill>
-                        <a:srgbClr val="DADCE0"/>
-                      </a:solidFill>
-                      <a:prstDash val="solid"/>
-                      <a:round/>
-                      <a:headEnd type="none" w="med" len="med"/>
-                      <a:tailEnd type="none" w="med" len="med"/>
-                    </a:lnB>
-                    <a:solidFill>
-                      <a:srgbClr val="FFFFFF"/>
-                    </a:solidFill>
-                  </a:tcPr>
-                </a:tc>
-                <a:tc>
-                  <a:txBody>
-                    <a:bodyPr/>
-                    <a:lstStyle/>
-                    <a:p>
-                      <a:pPr algn="l" indent="0" marL="0">
-                        <a:buNone/>
-                      </a:pPr>
-                      <a:r>
-                        <a:rPr lang="en-US" sz="1400" dirty="0">
-                          <a:solidFill>
-                            <a:srgbClr val="202124"/>
-                          </a:solidFill>
-                        </a:rPr>
-                        <a:t>Search Sessions Abandoned after 1 to 3 minutes of timeline scrolling</a:t>
-                      </a:r>
-                      <a:endParaRPr lang="en-US" sz="1400" dirty="0"/>
-                    </a:p>
-                  </a:txBody>
-                  <a:tcPr marL="91440" marR="91440" marT="45720" marB="45720" anchor="ctr">
-                    <a:lnL w="12700" cap="flat" cmpd="sng" algn="ctr">
-                      <a:solidFill>
-                        <a:srgbClr val="DADCE0"/>
-                      </a:solidFill>
-                      <a:prstDash val="solid"/>
-                      <a:round/>
-                      <a:headEnd type="none" w="med" len="med"/>
-                      <a:tailEnd type="none" w="med" len="med"/>
-                    </a:lnL>
-                    <a:lnR w="12700" cap="flat" cmpd="sng" algn="ctr">
-                      <a:solidFill>
-                        <a:srgbClr val="DADCE0"/>
-                      </a:solidFill>
-                      <a:prstDash val="solid"/>
-                      <a:round/>
-                      <a:headEnd type="none" w="med" len="med"/>
-                      <a:tailEnd type="none" w="med" len="med"/>
-                    </a:lnR>
-                    <a:lnT w="12700" cap="flat" cmpd="sng" algn="ctr">
-                      <a:solidFill>
-                        <a:srgbClr val="DADCE0"/>
-                      </a:solidFill>
-                      <a:prstDash val="solid"/>
-                      <a:round/>
-                      <a:headEnd type="none" w="med" len="med"/>
-                      <a:tailEnd type="none" w="med" len="med"/>
-                    </a:lnT>
-                    <a:lnB w="12700" cap="flat" cmpd="sng" algn="ctr">
-                      <a:solidFill>
-                        <a:srgbClr val="DADCE0"/>
-                      </a:solidFill>
-                      <a:prstDash val="solid"/>
-                      <a:round/>
-                      <a:headEnd type="none" w="med" len="med"/>
-                      <a:tailEnd type="none" w="med" len="med"/>
-                    </a:lnB>
-                    <a:solidFill>
-                      <a:srgbClr val="FFFFFF"/>
-                    </a:solidFill>
-                  </a:tcPr>
-                </a:tc>
-                <a:tc>
-                  <a:txBody>
-                    <a:bodyPr/>
-                    <a:lstStyle/>
-                    <a:p>
-                      <a:pPr algn="l" indent="0" marL="0">
-                        <a:buNone/>
-                      </a:pPr>
-                      <a:r>
-                        <a:rPr lang="en-US" sz="1400" dirty="0">
-                          <a:solidFill>
-                            <a:srgbClr val="202124"/>
-                          </a:solidFill>
-                        </a:rPr>
-                        <a:t>Friction Reducer</a:t>
+                        <a:t>Product Input (L2)</a:t>
+                      </a:r>
+                      <a:endParaRPr lang="en-US" sz="1400" dirty="0"/>
+                    </a:p>
+                  </a:txBody>
+                  <a:tcPr marL="91440" marR="91440" marT="45720" marB="45720" anchor="ctr">
+                    <a:lnL w="12700" cap="flat" cmpd="sng" algn="ctr">
+                      <a:solidFill>
+                        <a:srgbClr val="DADCE0"/>
+                      </a:solidFill>
+                      <a:prstDash val="solid"/>
+                      <a:round/>
+                      <a:headEnd type="none" w="med" len="med"/>
+                      <a:tailEnd type="none" w="med" len="med"/>
+                    </a:lnL>
+                    <a:lnR w="12700" cap="flat" cmpd="sng" algn="ctr">
+                      <a:solidFill>
+                        <a:srgbClr val="DADCE0"/>
+                      </a:solidFill>
+                      <a:prstDash val="solid"/>
+                      <a:round/>
+                      <a:headEnd type="none" w="med" len="med"/>
+                      <a:tailEnd type="none" w="med" len="med"/>
+                    </a:lnR>
+                    <a:lnT w="12700" cap="flat" cmpd="sng" algn="ctr">
+                      <a:solidFill>
+                        <a:srgbClr val="DADCE0"/>
+                      </a:solidFill>
+                      <a:prstDash val="solid"/>
+                      <a:round/>
+                      <a:headEnd type="none" w="med" len="med"/>
+                      <a:tailEnd type="none" w="med" len="med"/>
+                    </a:lnT>
+                    <a:lnB w="12700" cap="flat" cmpd="sng" algn="ctr">
+                      <a:solidFill>
+                        <a:srgbClr val="DADCE0"/>
+                      </a:solidFill>
+                      <a:prstDash val="solid"/>
+                      <a:round/>
+                      <a:headEnd type="none" w="med" len="med"/>
+                      <a:tailEnd type="none" w="med" len="med"/>
+                    </a:lnB>
+                    <a:solidFill>
+                      <a:srgbClr val="FFFFFF"/>
+                    </a:solidFill>
+                  </a:tcPr>
+                </a:tc>
+                <a:tc>
+                  <a:txBody>
+                    <a:bodyPr/>
+                    <a:lstStyle/>
+                    <a:p>
+                      <a:pPr algn="l" indent="0" marL="0">
+                        <a:buNone/>
+                      </a:pPr>
+                      <a:r>
+                        <a:rPr lang="en-US" sz="1400" dirty="0">
+                          <a:solidFill>
+                            <a:srgbClr val="202124"/>
+                          </a:solidFill>
+                        </a:rPr>
+                        <a:t>Time-to-First-Relevant-Photo (TTR)</a:t>
+                      </a:r>
+                      <a:endParaRPr lang="en-US" sz="1400" dirty="0"/>
+                    </a:p>
+                  </a:txBody>
+                  <a:tcPr marL="91440" marR="91440" marT="45720" marB="45720" anchor="ctr">
+                    <a:lnL w="12700" cap="flat" cmpd="sng" algn="ctr">
+                      <a:solidFill>
+                        <a:srgbClr val="DADCE0"/>
+                      </a:solidFill>
+                      <a:prstDash val="solid"/>
+                      <a:round/>
+                      <a:headEnd type="none" w="med" len="med"/>
+                      <a:tailEnd type="none" w="med" len="med"/>
+                    </a:lnL>
+                    <a:lnR w="12700" cap="flat" cmpd="sng" algn="ctr">
+                      <a:solidFill>
+                        <a:srgbClr val="DADCE0"/>
+                      </a:solidFill>
+                      <a:prstDash val="solid"/>
+                      <a:round/>
+                      <a:headEnd type="none" w="med" len="med"/>
+                      <a:tailEnd type="none" w="med" len="med"/>
+                    </a:lnR>
+                    <a:lnT w="12700" cap="flat" cmpd="sng" algn="ctr">
+                      <a:solidFill>
+                        <a:srgbClr val="DADCE0"/>
+                      </a:solidFill>
+                      <a:prstDash val="solid"/>
+                      <a:round/>
+                      <a:headEnd type="none" w="med" len="med"/>
+                      <a:tailEnd type="none" w="med" len="med"/>
+                    </a:lnT>
+                    <a:lnB w="12700" cap="flat" cmpd="sng" algn="ctr">
+                      <a:solidFill>
+                        <a:srgbClr val="DADCE0"/>
+                      </a:solidFill>
+                      <a:prstDash val="solid"/>
+                      <a:round/>
+                      <a:headEnd type="none" w="med" len="med"/>
+                      <a:tailEnd type="none" w="med" len="med"/>
+                    </a:lnB>
+                    <a:solidFill>
+                      <a:srgbClr val="FFFFFF"/>
+                    </a:solidFill>
+                  </a:tcPr>
+                </a:tc>
+                <a:tc>
+                  <a:txBody>
+                    <a:bodyPr/>
+                    <a:lstStyle/>
+                    <a:p>
+                      <a:pPr algn="l" indent="0" marL="0">
+                        <a:buNone/>
+                      </a:pPr>
+                      <a:r>
+                        <a:rPr lang="en-US" sz="1400" dirty="0">
+                          <a:solidFill>
+                            <a:srgbClr val="202124"/>
+                          </a:solidFill>
+                        </a:rPr>
+                        <a:t>180s → 12s</a:t>
+                      </a:r>
+                      <a:endParaRPr lang="en-US" sz="1400" dirty="0"/>
+                    </a:p>
+                  </a:txBody>
+                  <a:tcPr marL="91440" marR="91440" marT="45720" marB="45720" anchor="ctr">
+                    <a:lnL w="12700" cap="flat" cmpd="sng" algn="ctr">
+                      <a:solidFill>
+                        <a:srgbClr val="DADCE0"/>
+                      </a:solidFill>
+                      <a:prstDash val="solid"/>
+                      <a:round/>
+                      <a:headEnd type="none" w="med" len="med"/>
+                      <a:tailEnd type="none" w="med" len="med"/>
+                    </a:lnL>
+                    <a:lnR w="12700" cap="flat" cmpd="sng" algn="ctr">
+                      <a:solidFill>
+                        <a:srgbClr val="DADCE0"/>
+                      </a:solidFill>
+                      <a:prstDash val="solid"/>
+                      <a:round/>
+                      <a:headEnd type="none" w="med" len="med"/>
+                      <a:tailEnd type="none" w="med" len="med"/>
+                    </a:lnR>
+                    <a:lnT w="12700" cap="flat" cmpd="sng" algn="ctr">
+                      <a:solidFill>
+                        <a:srgbClr val="DADCE0"/>
+                      </a:solidFill>
+                      <a:prstDash val="solid"/>
+                      <a:round/>
+                      <a:headEnd type="none" w="med" len="med"/>
+                      <a:tailEnd type="none" w="med" len="med"/>
+                    </a:lnT>
+                    <a:lnB w="12700" cap="flat" cmpd="sng" algn="ctr">
+                      <a:solidFill>
+                        <a:srgbClr val="DADCE0"/>
+                      </a:solidFill>
+                      <a:prstDash val="solid"/>
+                      <a:round/>
+                      <a:headEnd type="none" w="med" len="med"/>
+                      <a:tailEnd type="none" w="med" len="med"/>
+                    </a:lnB>
+                    <a:solidFill>
+                      <a:srgbClr val="FFFFFF"/>
+                    </a:solidFill>
+                  </a:tcPr>
+                </a:tc>
+                <a:tc>
+                  <a:txBody>
+                    <a:bodyPr/>
+                    <a:lstStyle/>
+                    <a:p>
+                      <a:pPr algn="l" indent="0" marL="0">
+                        <a:buNone/>
+                      </a:pPr>
+                      <a:r>
+                        <a:rPr lang="en-US" sz="1400" dirty="0">
+                          <a:solidFill>
+                            <a:srgbClr val="202124"/>
+                          </a:solidFill>
+                        </a:rPr>
+                        <a:t>Telemetry Milliseconds from Query Submit to Target Tap</a:t>
+                      </a:r>
+                      <a:endParaRPr lang="en-US" sz="1400" dirty="0"/>
+                    </a:p>
+                  </a:txBody>
+                  <a:tcPr marL="91440" marR="91440" marT="45720" marB="45720" anchor="ctr">
+                    <a:lnL w="12700" cap="flat" cmpd="sng" algn="ctr">
+                      <a:solidFill>
+                        <a:srgbClr val="DADCE0"/>
+                      </a:solidFill>
+                      <a:prstDash val="solid"/>
+                      <a:round/>
+                      <a:headEnd type="none" w="med" len="med"/>
+                      <a:tailEnd type="none" w="med" len="med"/>
+                    </a:lnL>
+                    <a:lnR w="12700" cap="flat" cmpd="sng" algn="ctr">
+                      <a:solidFill>
+                        <a:srgbClr val="DADCE0"/>
+                      </a:solidFill>
+                      <a:prstDash val="solid"/>
+                      <a:round/>
+                      <a:headEnd type="none" w="med" len="med"/>
+                      <a:tailEnd type="none" w="med" len="med"/>
+                    </a:lnR>
+                    <a:lnT w="12700" cap="flat" cmpd="sng" algn="ctr">
+                      <a:solidFill>
+                        <a:srgbClr val="DADCE0"/>
+                      </a:solidFill>
+                      <a:prstDash val="solid"/>
+                      <a:round/>
+                      <a:headEnd type="none" w="med" len="med"/>
+                      <a:tailEnd type="none" w="med" len="med"/>
+                    </a:lnT>
+                    <a:lnB w="12700" cap="flat" cmpd="sng" algn="ctr">
+                      <a:solidFill>
+                        <a:srgbClr val="DADCE0"/>
+                      </a:solidFill>
+                      <a:prstDash val="solid"/>
+                      <a:round/>
+                      <a:headEnd type="none" w="med" len="med"/>
+                      <a:tailEnd type="none" w="med" len="med"/>
+                    </a:lnB>
+                    <a:solidFill>
+                      <a:srgbClr val="FFFFFF"/>
+                    </a:solidFill>
+                  </a:tcPr>
+                </a:tc>
+                <a:tc>
+                  <a:txBody>
+                    <a:bodyPr/>
+                    <a:lstStyle/>
+                    <a:p>
+                      <a:pPr algn="l" indent="0" marL="0">
+                        <a:buNone/>
+                      </a:pPr>
+                      <a:r>
+                        <a:rPr lang="en-US" sz="1400" dirty="0">
+                          <a:solidFill>
+                            <a:srgbClr val="202124"/>
+                          </a:solidFill>
+                        </a:rPr>
+                        <a:t>93.3% Time Savings</a:t>
                       </a:r>
                       <a:endParaRPr lang="en-US" sz="1400" dirty="0"/>
                     </a:p>
@@ -7173,251 +7540,251 @@
                             <a:srgbClr val="202124"/>
                           </a:solidFill>
                         </a:rPr>
-                        <a:t>Guardrail Metric 2</a:t>
-                      </a:r>
-                      <a:endParaRPr lang="en-US" sz="1400" dirty="0"/>
-                    </a:p>
-                  </a:txBody>
-                  <a:tcPr marL="91440" marR="91440" marT="45720" marB="45720" anchor="ctr">
-                    <a:lnL w="12700" cap="flat" cmpd="sng" algn="ctr">
-                      <a:solidFill>
-                        <a:srgbClr val="DADCE0"/>
-                      </a:solidFill>
-                      <a:prstDash val="solid"/>
-                      <a:round/>
-                      <a:headEnd type="none" w="med" len="med"/>
-                      <a:tailEnd type="none" w="med" len="med"/>
-                    </a:lnL>
-                    <a:lnR w="12700" cap="flat" cmpd="sng" algn="ctr">
-                      <a:solidFill>
-                        <a:srgbClr val="DADCE0"/>
-                      </a:solidFill>
-                      <a:prstDash val="solid"/>
-                      <a:round/>
-                      <a:headEnd type="none" w="med" len="med"/>
-                      <a:tailEnd type="none" w="med" len="med"/>
-                    </a:lnR>
-                    <a:lnT w="12700" cap="flat" cmpd="sng" algn="ctr">
-                      <a:solidFill>
-                        <a:srgbClr val="DADCE0"/>
-                      </a:solidFill>
-                      <a:prstDash val="solid"/>
-                      <a:round/>
-                      <a:headEnd type="none" w="med" len="med"/>
-                      <a:tailEnd type="none" w="med" len="med"/>
-                    </a:lnT>
-                    <a:lnB w="12700" cap="flat" cmpd="sng" algn="ctr">
-                      <a:solidFill>
-                        <a:srgbClr val="DADCE0"/>
-                      </a:solidFill>
-                      <a:prstDash val="solid"/>
-                      <a:round/>
-                      <a:headEnd type="none" w="med" len="med"/>
-                      <a:tailEnd type="none" w="med" len="med"/>
-                    </a:lnB>
-                    <a:solidFill>
-                      <a:srgbClr val="FFFFFF"/>
-                    </a:solidFill>
-                  </a:tcPr>
-                </a:tc>
-                <a:tc>
-                  <a:txBody>
-                    <a:bodyPr/>
-                    <a:lstStyle/>
-                    <a:p>
-                      <a:pPr algn="l" indent="0" marL="0">
-                        <a:buNone/>
-                      </a:pPr>
-                      <a:r>
-                        <a:rPr lang="en-US" sz="1400" dirty="0">
-                          <a:solidFill>
-                            <a:srgbClr val="202124"/>
-                          </a:solidFill>
-                        </a:rPr>
-                        <a:t>API End-to-End Latency</a:t>
-                      </a:r>
-                      <a:endParaRPr lang="en-US" sz="1400" dirty="0"/>
-                    </a:p>
-                  </a:txBody>
-                  <a:tcPr marL="91440" marR="91440" marT="45720" marB="45720" anchor="ctr">
-                    <a:lnL w="12700" cap="flat" cmpd="sng" algn="ctr">
-                      <a:solidFill>
-                        <a:srgbClr val="DADCE0"/>
-                      </a:solidFill>
-                      <a:prstDash val="solid"/>
-                      <a:round/>
-                      <a:headEnd type="none" w="med" len="med"/>
-                      <a:tailEnd type="none" w="med" len="med"/>
-                    </a:lnL>
-                    <a:lnR w="12700" cap="flat" cmpd="sng" algn="ctr">
-                      <a:solidFill>
-                        <a:srgbClr val="DADCE0"/>
-                      </a:solidFill>
-                      <a:prstDash val="solid"/>
-                      <a:round/>
-                      <a:headEnd type="none" w="med" len="med"/>
-                      <a:tailEnd type="none" w="med" len="med"/>
-                    </a:lnR>
-                    <a:lnT w="12700" cap="flat" cmpd="sng" algn="ctr">
-                      <a:solidFill>
-                        <a:srgbClr val="DADCE0"/>
-                      </a:solidFill>
-                      <a:prstDash val="solid"/>
-                      <a:round/>
-                      <a:headEnd type="none" w="med" len="med"/>
-                      <a:tailEnd type="none" w="med" len="med"/>
-                    </a:lnT>
-                    <a:lnB w="12700" cap="flat" cmpd="sng" algn="ctr">
-                      <a:solidFill>
-                        <a:srgbClr val="DADCE0"/>
-                      </a:solidFill>
-                      <a:prstDash val="solid"/>
-                      <a:round/>
-                      <a:headEnd type="none" w="med" len="med"/>
-                      <a:tailEnd type="none" w="med" len="med"/>
-                    </a:lnB>
-                    <a:solidFill>
-                      <a:srgbClr val="FFFFFF"/>
-                    </a:solidFill>
-                  </a:tcPr>
-                </a:tc>
-                <a:tc>
-                  <a:txBody>
-                    <a:bodyPr/>
-                    <a:lstStyle/>
-                    <a:p>
-                      <a:pPr algn="l" indent="0" marL="0">
-                        <a:buNone/>
-                      </a:pPr>
-                      <a:r>
-                        <a:rPr lang="en-US" sz="1400" dirty="0">
-                          <a:solidFill>
-                            <a:srgbClr val="202124"/>
-                          </a:solidFill>
-                        </a:rPr>
-                        <a:t>&lt; 250ms Target</a:t>
-                      </a:r>
-                      <a:endParaRPr lang="en-US" sz="1400" dirty="0"/>
-                    </a:p>
-                  </a:txBody>
-                  <a:tcPr marL="91440" marR="91440" marT="45720" marB="45720" anchor="ctr">
-                    <a:lnL w="12700" cap="flat" cmpd="sng" algn="ctr">
-                      <a:solidFill>
-                        <a:srgbClr val="DADCE0"/>
-                      </a:solidFill>
-                      <a:prstDash val="solid"/>
-                      <a:round/>
-                      <a:headEnd type="none" w="med" len="med"/>
-                      <a:tailEnd type="none" w="med" len="med"/>
-                    </a:lnL>
-                    <a:lnR w="12700" cap="flat" cmpd="sng" algn="ctr">
-                      <a:solidFill>
-                        <a:srgbClr val="DADCE0"/>
-                      </a:solidFill>
-                      <a:prstDash val="solid"/>
-                      <a:round/>
-                      <a:headEnd type="none" w="med" len="med"/>
-                      <a:tailEnd type="none" w="med" len="med"/>
-                    </a:lnR>
-                    <a:lnT w="12700" cap="flat" cmpd="sng" algn="ctr">
-                      <a:solidFill>
-                        <a:srgbClr val="DADCE0"/>
-                      </a:solidFill>
-                      <a:prstDash val="solid"/>
-                      <a:round/>
-                      <a:headEnd type="none" w="med" len="med"/>
-                      <a:tailEnd type="none" w="med" len="med"/>
-                    </a:lnT>
-                    <a:lnB w="12700" cap="flat" cmpd="sng" algn="ctr">
-                      <a:solidFill>
-                        <a:srgbClr val="DADCE0"/>
-                      </a:solidFill>
-                      <a:prstDash val="solid"/>
-                      <a:round/>
-                      <a:headEnd type="none" w="med" len="med"/>
-                      <a:tailEnd type="none" w="med" len="med"/>
-                    </a:lnB>
-                    <a:solidFill>
-                      <a:srgbClr val="FFFFFF"/>
-                    </a:solidFill>
-                  </a:tcPr>
-                </a:tc>
-                <a:tc>
-                  <a:txBody>
-                    <a:bodyPr/>
-                    <a:lstStyle/>
-                    <a:p>
-                      <a:pPr algn="l" indent="0" marL="0">
-                        <a:buNone/>
-                      </a:pPr>
-                      <a:r>
-                        <a:rPr lang="en-US" sz="1400" dirty="0">
-                          <a:solidFill>
-                            <a:srgbClr val="202124"/>
-                          </a:solidFill>
-                        </a:rPr>
-                        <a:t>Total Milliseconds from Query Submission to Context Grid Render</a:t>
-                      </a:r>
-                      <a:endParaRPr lang="en-US" sz="1400" dirty="0"/>
-                    </a:p>
-                  </a:txBody>
-                  <a:tcPr marL="91440" marR="91440" marT="45720" marB="45720" anchor="ctr">
-                    <a:lnL w="12700" cap="flat" cmpd="sng" algn="ctr">
-                      <a:solidFill>
-                        <a:srgbClr val="DADCE0"/>
-                      </a:solidFill>
-                      <a:prstDash val="solid"/>
-                      <a:round/>
-                      <a:headEnd type="none" w="med" len="med"/>
-                      <a:tailEnd type="none" w="med" len="med"/>
-                    </a:lnL>
-                    <a:lnR w="12700" cap="flat" cmpd="sng" algn="ctr">
-                      <a:solidFill>
-                        <a:srgbClr val="DADCE0"/>
-                      </a:solidFill>
-                      <a:prstDash val="solid"/>
-                      <a:round/>
-                      <a:headEnd type="none" w="med" len="med"/>
-                      <a:tailEnd type="none" w="med" len="med"/>
-                    </a:lnR>
-                    <a:lnT w="12700" cap="flat" cmpd="sng" algn="ctr">
-                      <a:solidFill>
-                        <a:srgbClr val="DADCE0"/>
-                      </a:solidFill>
-                      <a:prstDash val="solid"/>
-                      <a:round/>
-                      <a:headEnd type="none" w="med" len="med"/>
-                      <a:tailEnd type="none" w="med" len="med"/>
-                    </a:lnT>
-                    <a:lnB w="12700" cap="flat" cmpd="sng" algn="ctr">
-                      <a:solidFill>
-                        <a:srgbClr val="DADCE0"/>
-                      </a:solidFill>
-                      <a:prstDash val="solid"/>
-                      <a:round/>
-                      <a:headEnd type="none" w="med" len="med"/>
-                      <a:tailEnd type="none" w="med" len="med"/>
-                    </a:lnB>
-                    <a:solidFill>
-                      <a:srgbClr val="FFFFFF"/>
-                    </a:solidFill>
-                  </a:tcPr>
-                </a:tc>
-                <a:tc>
-                  <a:txBody>
-                    <a:bodyPr/>
-                    <a:lstStyle/>
-                    <a:p>
-                      <a:pPr algn="l" indent="0" marL="0">
-                        <a:buNone/>
-                      </a:pPr>
-                      <a:r>
-                        <a:rPr lang="en-US" sz="1400" dirty="0">
-                          <a:solidFill>
-                            <a:srgbClr val="202124"/>
-                          </a:solidFill>
-                        </a:rPr>
-                        <a:t>Performance</a:t>
+                        <a:t>Product Input (L2)</a:t>
+                      </a:r>
+                      <a:endParaRPr lang="en-US" sz="1400" dirty="0"/>
+                    </a:p>
+                  </a:txBody>
+                  <a:tcPr marL="91440" marR="91440" marT="45720" marB="45720" anchor="ctr">
+                    <a:lnL w="12700" cap="flat" cmpd="sng" algn="ctr">
+                      <a:solidFill>
+                        <a:srgbClr val="DADCE0"/>
+                      </a:solidFill>
+                      <a:prstDash val="solid"/>
+                      <a:round/>
+                      <a:headEnd type="none" w="med" len="med"/>
+                      <a:tailEnd type="none" w="med" len="med"/>
+                    </a:lnL>
+                    <a:lnR w="12700" cap="flat" cmpd="sng" algn="ctr">
+                      <a:solidFill>
+                        <a:srgbClr val="DADCE0"/>
+                      </a:solidFill>
+                      <a:prstDash val="solid"/>
+                      <a:round/>
+                      <a:headEnd type="none" w="med" len="med"/>
+                      <a:tailEnd type="none" w="med" len="med"/>
+                    </a:lnR>
+                    <a:lnT w="12700" cap="flat" cmpd="sng" algn="ctr">
+                      <a:solidFill>
+                        <a:srgbClr val="DADCE0"/>
+                      </a:solidFill>
+                      <a:prstDash val="solid"/>
+                      <a:round/>
+                      <a:headEnd type="none" w="med" len="med"/>
+                      <a:tailEnd type="none" w="med" len="med"/>
+                    </a:lnT>
+                    <a:lnB w="12700" cap="flat" cmpd="sng" algn="ctr">
+                      <a:solidFill>
+                        <a:srgbClr val="DADCE0"/>
+                      </a:solidFill>
+                      <a:prstDash val="solid"/>
+                      <a:round/>
+                      <a:headEnd type="none" w="med" len="med"/>
+                      <a:tailEnd type="none" w="med" len="med"/>
+                    </a:lnB>
+                    <a:solidFill>
+                      <a:srgbClr val="FFFFFF"/>
+                    </a:solidFill>
+                  </a:tcPr>
+                </a:tc>
+                <a:tc>
+                  <a:txBody>
+                    <a:bodyPr/>
+                    <a:lstStyle/>
+                    <a:p>
+                      <a:pPr algn="l" indent="0" marL="0">
+                        <a:buNone/>
+                      </a:pPr>
+                      <a:r>
+                        <a:rPr lang="en-US" sz="1400" dirty="0">
+                          <a:solidFill>
+                            <a:srgbClr val="202124"/>
+                          </a:solidFill>
+                        </a:rPr>
+                        <a:t>Anchor-to-Target Jump Latency</a:t>
+                      </a:r>
+                      <a:endParaRPr lang="en-US" sz="1400" dirty="0"/>
+                    </a:p>
+                  </a:txBody>
+                  <a:tcPr marL="91440" marR="91440" marT="45720" marB="45720" anchor="ctr">
+                    <a:lnL w="12700" cap="flat" cmpd="sng" algn="ctr">
+                      <a:solidFill>
+                        <a:srgbClr val="DADCE0"/>
+                      </a:solidFill>
+                      <a:prstDash val="solid"/>
+                      <a:round/>
+                      <a:headEnd type="none" w="med" len="med"/>
+                      <a:tailEnd type="none" w="med" len="med"/>
+                    </a:lnL>
+                    <a:lnR w="12700" cap="flat" cmpd="sng" algn="ctr">
+                      <a:solidFill>
+                        <a:srgbClr val="DADCE0"/>
+                      </a:solidFill>
+                      <a:prstDash val="solid"/>
+                      <a:round/>
+                      <a:headEnd type="none" w="med" len="med"/>
+                      <a:tailEnd type="none" w="med" len="med"/>
+                    </a:lnR>
+                    <a:lnT w="12700" cap="flat" cmpd="sng" algn="ctr">
+                      <a:solidFill>
+                        <a:srgbClr val="DADCE0"/>
+                      </a:solidFill>
+                      <a:prstDash val="solid"/>
+                      <a:round/>
+                      <a:headEnd type="none" w="med" len="med"/>
+                      <a:tailEnd type="none" w="med" len="med"/>
+                    </a:lnT>
+                    <a:lnB w="12700" cap="flat" cmpd="sng" algn="ctr">
+                      <a:solidFill>
+                        <a:srgbClr val="DADCE0"/>
+                      </a:solidFill>
+                      <a:prstDash val="solid"/>
+                      <a:round/>
+                      <a:headEnd type="none" w="med" len="med"/>
+                      <a:tailEnd type="none" w="med" len="med"/>
+                    </a:lnB>
+                    <a:solidFill>
+                      <a:srgbClr val="FFFFFF"/>
+                    </a:solidFill>
+                  </a:tcPr>
+                </a:tc>
+                <a:tc>
+                  <a:txBody>
+                    <a:bodyPr/>
+                    <a:lstStyle/>
+                    <a:p>
+                      <a:pPr algn="l" indent="0" marL="0">
+                        <a:buNone/>
+                      </a:pPr>
+                      <a:r>
+                        <a:rPr lang="en-US" sz="1400" dirty="0">
+                          <a:solidFill>
+                            <a:srgbClr val="202124"/>
+                          </a:solidFill>
+                        </a:rPr>
+                        <a:t>&lt; 100 ms</a:t>
+                      </a:r>
+                      <a:endParaRPr lang="en-US" sz="1400" dirty="0"/>
+                    </a:p>
+                  </a:txBody>
+                  <a:tcPr marL="91440" marR="91440" marT="45720" marB="45720" anchor="ctr">
+                    <a:lnL w="12700" cap="flat" cmpd="sng" algn="ctr">
+                      <a:solidFill>
+                        <a:srgbClr val="DADCE0"/>
+                      </a:solidFill>
+                      <a:prstDash val="solid"/>
+                      <a:round/>
+                      <a:headEnd type="none" w="med" len="med"/>
+                      <a:tailEnd type="none" w="med" len="med"/>
+                    </a:lnL>
+                    <a:lnR w="12700" cap="flat" cmpd="sng" algn="ctr">
+                      <a:solidFill>
+                        <a:srgbClr val="DADCE0"/>
+                      </a:solidFill>
+                      <a:prstDash val="solid"/>
+                      <a:round/>
+                      <a:headEnd type="none" w="med" len="med"/>
+                      <a:tailEnd type="none" w="med" len="med"/>
+                    </a:lnR>
+                    <a:lnT w="12700" cap="flat" cmpd="sng" algn="ctr">
+                      <a:solidFill>
+                        <a:srgbClr val="DADCE0"/>
+                      </a:solidFill>
+                      <a:prstDash val="solid"/>
+                      <a:round/>
+                      <a:headEnd type="none" w="med" len="med"/>
+                      <a:tailEnd type="none" w="med" len="med"/>
+                    </a:lnT>
+                    <a:lnB w="12700" cap="flat" cmpd="sng" algn="ctr">
+                      <a:solidFill>
+                        <a:srgbClr val="DADCE0"/>
+                      </a:solidFill>
+                      <a:prstDash val="solid"/>
+                      <a:round/>
+                      <a:headEnd type="none" w="med" len="med"/>
+                      <a:tailEnd type="none" w="med" len="med"/>
+                    </a:lnB>
+                    <a:solidFill>
+                      <a:srgbClr val="FFFFFF"/>
+                    </a:solidFill>
+                  </a:tcPr>
+                </a:tc>
+                <a:tc>
+                  <a:txBody>
+                    <a:bodyPr/>
+                    <a:lstStyle/>
+                    <a:p>
+                      <a:pPr algn="l" indent="0" marL="0">
+                        <a:buNone/>
+                      </a:pPr>
+                      <a:r>
+                        <a:rPr lang="en-US" sz="1400" dirty="0">
+                          <a:solidFill>
+                            <a:srgbClr val="202124"/>
+                          </a:solidFill>
+                        </a:rPr>
+                        <a:t>API End-to-End Latency for ±4.0h, ≤1.0km Context Grid Expansion</a:t>
+                      </a:r>
+                      <a:endParaRPr lang="en-US" sz="1400" dirty="0"/>
+                    </a:p>
+                  </a:txBody>
+                  <a:tcPr marL="91440" marR="91440" marT="45720" marB="45720" anchor="ctr">
+                    <a:lnL w="12700" cap="flat" cmpd="sng" algn="ctr">
+                      <a:solidFill>
+                        <a:srgbClr val="DADCE0"/>
+                      </a:solidFill>
+                      <a:prstDash val="solid"/>
+                      <a:round/>
+                      <a:headEnd type="none" w="med" len="med"/>
+                      <a:tailEnd type="none" w="med" len="med"/>
+                    </a:lnL>
+                    <a:lnR w="12700" cap="flat" cmpd="sng" algn="ctr">
+                      <a:solidFill>
+                        <a:srgbClr val="DADCE0"/>
+                      </a:solidFill>
+                      <a:prstDash val="solid"/>
+                      <a:round/>
+                      <a:headEnd type="none" w="med" len="med"/>
+                      <a:tailEnd type="none" w="med" len="med"/>
+                    </a:lnR>
+                    <a:lnT w="12700" cap="flat" cmpd="sng" algn="ctr">
+                      <a:solidFill>
+                        <a:srgbClr val="DADCE0"/>
+                      </a:solidFill>
+                      <a:prstDash val="solid"/>
+                      <a:round/>
+                      <a:headEnd type="none" w="med" len="med"/>
+                      <a:tailEnd type="none" w="med" len="med"/>
+                    </a:lnT>
+                    <a:lnB w="12700" cap="flat" cmpd="sng" algn="ctr">
+                      <a:solidFill>
+                        <a:srgbClr val="DADCE0"/>
+                      </a:solidFill>
+                      <a:prstDash val="solid"/>
+                      <a:round/>
+                      <a:headEnd type="none" w="med" len="med"/>
+                      <a:tailEnd type="none" w="med" len="med"/>
+                    </a:lnB>
+                    <a:solidFill>
+                      <a:srgbClr val="FFFFFF"/>
+                    </a:solidFill>
+                  </a:tcPr>
+                </a:tc>
+                <a:tc>
+                  <a:txBody>
+                    <a:bodyPr/>
+                    <a:lstStyle/>
+                    <a:p>
+                      <a:pPr algn="l" indent="0" marL="0">
+                        <a:buNone/>
+                      </a:pPr>
+                      <a:r>
+                        <a:rPr lang="en-US" sz="1400" dirty="0">
+                          <a:solidFill>
+                            <a:srgbClr val="202124"/>
+                          </a:solidFill>
+                        </a:rPr>
+                        <a:t>Sub-second UX Response</a:t>
                       </a:r>
                       <a:endParaRPr lang="en-US" sz="1400" dirty="0"/>
                     </a:p>
@@ -7592,7 +7959,7 @@
                   <a:srgbClr val="1A73E8"/>
                 </a:solidFill>
               </a:rPr>
-              <a:t>3. DISCOVERY-ENGINE FINDINGS</a:t>
+              <a:t>3. DISCOVERY-ENGINE FINDINGS (N=1,000 REVIEWS)</a:t>
             </a:r>
             <a:endParaRPr lang="en-US" sz="1400" dirty="0"/>
           </a:p>
@@ -7628,7 +7995,7 @@
                   <a:srgbClr val="202124"/>
                 </a:solidFill>
               </a:rPr>
-              <a:t>1,000 Public Reviews Reveal 67.6% Query Surfacing Failure and 50% Document Need</a:t>
+              <a:t>1,000 Public Reviews Reveal 67.6% Query Surfacing Failure and 50.0% Document Need</a:t>
             </a:r>
             <a:endParaRPr lang="en-US" sz="2000" dirty="0"/>
           </a:p>
@@ -7664,7 +8031,7 @@
                   <a:srgbClr val="1A73E8"/>
                 </a:solidFill>
               </a:rPr>
-              <a:t>Multi-Platform Public Community Feedback Analytics &amp; Gemini AI Synthesis</a:t>
+              <a:t>Multi-Platform Public Feedback Analytics (Reddit/Play Store/Community) via Gemini 2.5 Flash</a:t>
             </a:r>
             <a:endParaRPr lang="en-US" sz="1500" dirty="0"/>
           </a:p>
@@ -7693,11 +8060,11 @@
             <a:tbl>
               <a:tblPr/>
               <a:tblGrid>
-                <a:gridCol w="2194560"/>
-                <a:gridCol w="1371600"/>
-                <a:gridCol w="1097280"/>
-                <a:gridCol w="2468880"/>
                 <a:gridCol w="2011680"/>
+                <a:gridCol w="1280160"/>
+                <a:gridCol w="914400"/>
+                <a:gridCol w="2377440"/>
+                <a:gridCol w="1645920"/>
               </a:tblGrid>
               <a:tr h="0">
                 <a:tc>
@@ -7775,7 +8142,7 @@
                             <a:srgbClr val="1A73E8"/>
                           </a:solidFill>
                         </a:rPr>
-                        <a:t>Complaints Count</a:t>
+                        <a:t>Public Sample Count</a:t>
                       </a:r>
                       <a:endParaRPr lang="en-US" sz="1400" dirty="0"/>
                     </a:p>
@@ -7897,7 +8264,7 @@
                             <a:srgbClr val="1A73E8"/>
                           </a:solidFill>
                         </a:rPr>
-                        <a:t>Observed User Impact</a:t>
+                        <a:t>Observed User Friction &amp; Behavioral Impact</a:t>
                       </a:r>
                       <a:endParaRPr lang="en-US" sz="1400" dirty="0"/>
                     </a:p>
@@ -7958,7 +8325,7 @@
                             <a:srgbClr val="1A73E8"/>
                           </a:solidFill>
                         </a:rPr>
-                        <a:t>Gemini AI Synthesis</a:t>
+                        <a:t>Gemini 2.5 AI Synthesis</a:t>
                       </a:r>
                       <a:endParaRPr lang="en-US" sz="1400" dirty="0"/>
                     </a:p>
@@ -8082,7 +8449,7 @@
                             <a:srgbClr val="202124"/>
                           </a:solidFill>
                         </a:rPr>
-                        <a:t>676 / 1,000</a:t>
+                        <a:t>676 / 1,000 reviews</a:t>
                       </a:r>
                       <a:endParaRPr lang="en-US" sz="1400" dirty="0"/>
                     </a:p>
@@ -8204,68 +8571,68 @@
                             <a:srgbClr val="202124"/>
                           </a:solidFill>
                         </a:rPr>
-                        <a:t>Zero relevant candidates surfaced for un-tagged media</a:t>
-                      </a:r>
-                      <a:endParaRPr lang="en-US" sz="1400" dirty="0"/>
-                    </a:p>
-                  </a:txBody>
-                  <a:tcPr marL="91440" marR="91440" marT="45720" marB="45720" anchor="ctr">
-                    <a:lnL w="12700" cap="flat" cmpd="sng" algn="ctr">
-                      <a:solidFill>
-                        <a:srgbClr val="DADCE0"/>
-                      </a:solidFill>
-                      <a:prstDash val="solid"/>
-                      <a:round/>
-                      <a:headEnd type="none" w="med" len="med"/>
-                      <a:tailEnd type="none" w="med" len="med"/>
-                    </a:lnL>
-                    <a:lnR w="12700" cap="flat" cmpd="sng" algn="ctr">
-                      <a:solidFill>
-                        <a:srgbClr val="DADCE0"/>
-                      </a:solidFill>
-                      <a:prstDash val="solid"/>
-                      <a:round/>
-                      <a:headEnd type="none" w="med" len="med"/>
-                      <a:tailEnd type="none" w="med" len="med"/>
-                    </a:lnR>
-                    <a:lnT w="12700" cap="flat" cmpd="sng" algn="ctr">
-                      <a:solidFill>
-                        <a:srgbClr val="DADCE0"/>
-                      </a:solidFill>
-                      <a:prstDash val="solid"/>
-                      <a:round/>
-                      <a:headEnd type="none" w="med" len="med"/>
-                      <a:tailEnd type="none" w="med" len="med"/>
-                    </a:lnT>
-                    <a:lnB w="12700" cap="flat" cmpd="sng" algn="ctr">
-                      <a:solidFill>
-                        <a:srgbClr val="DADCE0"/>
-                      </a:solidFill>
-                      <a:prstDash val="solid"/>
-                      <a:round/>
-                      <a:headEnd type="none" w="med" len="med"/>
-                      <a:tailEnd type="none" w="med" len="med"/>
-                    </a:lnB>
-                    <a:solidFill>
-                      <a:srgbClr val="FFFFFF"/>
-                    </a:solidFill>
-                  </a:tcPr>
-                </a:tc>
-                <a:tc>
-                  <a:txBody>
-                    <a:bodyPr/>
-                    <a:lstStyle/>
-                    <a:p>
-                      <a:pPr algn="l" indent="0" marL="0">
-                        <a:buNone/>
-                      </a:pPr>
-                      <a:r>
-                        <a:rPr lang="en-US" sz="1400" dirty="0">
-                          <a:solidFill>
-                            <a:srgbClr val="202124"/>
-                          </a:solidFill>
-                        </a:rPr>
-                        <a:t>Semantic &amp; metadata asymmetry</a:t>
+                        <a:t>Zero relevant candidate photos surfaced for un-tagged queries</a:t>
+                      </a:r>
+                      <a:endParaRPr lang="en-US" sz="1400" dirty="0"/>
+                    </a:p>
+                  </a:txBody>
+                  <a:tcPr marL="91440" marR="91440" marT="45720" marB="45720" anchor="ctr">
+                    <a:lnL w="12700" cap="flat" cmpd="sng" algn="ctr">
+                      <a:solidFill>
+                        <a:srgbClr val="DADCE0"/>
+                      </a:solidFill>
+                      <a:prstDash val="solid"/>
+                      <a:round/>
+                      <a:headEnd type="none" w="med" len="med"/>
+                      <a:tailEnd type="none" w="med" len="med"/>
+                    </a:lnL>
+                    <a:lnR w="12700" cap="flat" cmpd="sng" algn="ctr">
+                      <a:solidFill>
+                        <a:srgbClr val="DADCE0"/>
+                      </a:solidFill>
+                      <a:prstDash val="solid"/>
+                      <a:round/>
+                      <a:headEnd type="none" w="med" len="med"/>
+                      <a:tailEnd type="none" w="med" len="med"/>
+                    </a:lnR>
+                    <a:lnT w="12700" cap="flat" cmpd="sng" algn="ctr">
+                      <a:solidFill>
+                        <a:srgbClr val="DADCE0"/>
+                      </a:solidFill>
+                      <a:prstDash val="solid"/>
+                      <a:round/>
+                      <a:headEnd type="none" w="med" len="med"/>
+                      <a:tailEnd type="none" w="med" len="med"/>
+                    </a:lnT>
+                    <a:lnB w="12700" cap="flat" cmpd="sng" algn="ctr">
+                      <a:solidFill>
+                        <a:srgbClr val="DADCE0"/>
+                      </a:solidFill>
+                      <a:prstDash val="solid"/>
+                      <a:round/>
+                      <a:headEnd type="none" w="med" len="med"/>
+                      <a:tailEnd type="none" w="med" len="med"/>
+                    </a:lnB>
+                    <a:solidFill>
+                      <a:srgbClr val="FFFFFF"/>
+                    </a:solidFill>
+                  </a:tcPr>
+                </a:tc>
+                <a:tc>
+                  <a:txBody>
+                    <a:bodyPr/>
+                    <a:lstStyle/>
+                    <a:p>
+                      <a:pPr algn="l" indent="0" marL="0">
+                        <a:buNone/>
+                      </a:pPr>
+                      <a:r>
+                        <a:rPr lang="en-US" sz="1400" dirty="0">
+                          <a:solidFill>
+                            <a:srgbClr val="202124"/>
+                          </a:solidFill>
+                        </a:rPr>
+                        <a:t>Semantic keyword tag asymmetry</a:t>
                       </a:r>
                       <a:endParaRPr lang="en-US" sz="1400" dirty="0"/>
                     </a:p>
@@ -8389,7 +8756,7 @@
                             <a:srgbClr val="202124"/>
                           </a:solidFill>
                         </a:rPr>
-                        <a:t>500 / 1,000</a:t>
+                        <a:t>500 / 1,000 reviews</a:t>
                       </a:r>
                       <a:endParaRPr lang="en-US" sz="1400" dirty="0"/>
                     </a:p>
@@ -8511,68 +8878,68 @@
                             <a:srgbClr val="202124"/>
                           </a:solidFill>
                         </a:rPr>
-                        <a:t>Paper bills, tax receipts, warranties lost in archive</a:t>
-                      </a:r>
-                      <a:endParaRPr lang="en-US" sz="1400" dirty="0"/>
-                    </a:p>
-                  </a:txBody>
-                  <a:tcPr marL="91440" marR="91440" marT="45720" marB="45720" anchor="ctr">
-                    <a:lnL w="12700" cap="flat" cmpd="sng" algn="ctr">
-                      <a:solidFill>
-                        <a:srgbClr val="DADCE0"/>
-                      </a:solidFill>
-                      <a:prstDash val="solid"/>
-                      <a:round/>
-                      <a:headEnd type="none" w="med" len="med"/>
-                      <a:tailEnd type="none" w="med" len="med"/>
-                    </a:lnL>
-                    <a:lnR w="12700" cap="flat" cmpd="sng" algn="ctr">
-                      <a:solidFill>
-                        <a:srgbClr val="DADCE0"/>
-                      </a:solidFill>
-                      <a:prstDash val="solid"/>
-                      <a:round/>
-                      <a:headEnd type="none" w="med" len="med"/>
-                      <a:tailEnd type="none" w="med" len="med"/>
-                    </a:lnR>
-                    <a:lnT w="12700" cap="flat" cmpd="sng" algn="ctr">
-                      <a:solidFill>
-                        <a:srgbClr val="DADCE0"/>
-                      </a:solidFill>
-                      <a:prstDash val="solid"/>
-                      <a:round/>
-                      <a:headEnd type="none" w="med" len="med"/>
-                      <a:tailEnd type="none" w="med" len="med"/>
-                    </a:lnT>
-                    <a:lnB w="12700" cap="flat" cmpd="sng" algn="ctr">
-                      <a:solidFill>
-                        <a:srgbClr val="DADCE0"/>
-                      </a:solidFill>
-                      <a:prstDash val="solid"/>
-                      <a:round/>
-                      <a:headEnd type="none" w="med" len="med"/>
-                      <a:tailEnd type="none" w="med" len="med"/>
-                    </a:lnB>
-                    <a:solidFill>
-                      <a:srgbClr val="FFFFFF"/>
-                    </a:solidFill>
-                  </a:tcPr>
-                </a:tc>
-                <a:tc>
-                  <a:txBody>
-                    <a:bodyPr/>
-                    <a:lstStyle/>
-                    <a:p>
-                      <a:pPr algn="l" indent="0" marL="0">
-                        <a:buNone/>
-                      </a:pPr>
-                      <a:r>
-                        <a:rPr lang="en-US" sz="1400" dirty="0">
-                          <a:solidFill>
-                            <a:srgbClr val="202124"/>
-                          </a:solidFill>
-                        </a:rPr>
-                        <a:t>High search anxiety &amp; drop-off cliff</a:t>
+                        <a:t>Paper bills, tax scans, and receipts lost in massive multi-year grid</a:t>
+                      </a:r>
+                      <a:endParaRPr lang="en-US" sz="1400" dirty="0"/>
+                    </a:p>
+                  </a:txBody>
+                  <a:tcPr marL="91440" marR="91440" marT="45720" marB="45720" anchor="ctr">
+                    <a:lnL w="12700" cap="flat" cmpd="sng" algn="ctr">
+                      <a:solidFill>
+                        <a:srgbClr val="DADCE0"/>
+                      </a:solidFill>
+                      <a:prstDash val="solid"/>
+                      <a:round/>
+                      <a:headEnd type="none" w="med" len="med"/>
+                      <a:tailEnd type="none" w="med" len="med"/>
+                    </a:lnL>
+                    <a:lnR w="12700" cap="flat" cmpd="sng" algn="ctr">
+                      <a:solidFill>
+                        <a:srgbClr val="DADCE0"/>
+                      </a:solidFill>
+                      <a:prstDash val="solid"/>
+                      <a:round/>
+                      <a:headEnd type="none" w="med" len="med"/>
+                      <a:tailEnd type="none" w="med" len="med"/>
+                    </a:lnR>
+                    <a:lnT w="12700" cap="flat" cmpd="sng" algn="ctr">
+                      <a:solidFill>
+                        <a:srgbClr val="DADCE0"/>
+                      </a:solidFill>
+                      <a:prstDash val="solid"/>
+                      <a:round/>
+                      <a:headEnd type="none" w="med" len="med"/>
+                      <a:tailEnd type="none" w="med" len="med"/>
+                    </a:lnT>
+                    <a:lnB w="12700" cap="flat" cmpd="sng" algn="ctr">
+                      <a:solidFill>
+                        <a:srgbClr val="DADCE0"/>
+                      </a:solidFill>
+                      <a:prstDash val="solid"/>
+                      <a:round/>
+                      <a:headEnd type="none" w="med" len="med"/>
+                      <a:tailEnd type="none" w="med" len="med"/>
+                    </a:lnB>
+                    <a:solidFill>
+                      <a:srgbClr val="FFFFFF"/>
+                    </a:solidFill>
+                  </a:tcPr>
+                </a:tc>
+                <a:tc>
+                  <a:txBody>
+                    <a:bodyPr/>
+                    <a:lstStyle/>
+                    <a:p>
+                      <a:pPr algn="l" indent="0" marL="0">
+                        <a:buNone/>
+                      </a:pPr>
+                      <a:r>
+                        <a:rPr lang="en-US" sz="1400" dirty="0">
+                          <a:solidFill>
+                            <a:srgbClr val="202124"/>
+                          </a:solidFill>
+                        </a:rPr>
+                        <a:t>High anxiety search drop-off</a:t>
                       </a:r>
                       <a:endParaRPr lang="en-US" sz="1400" dirty="0"/>
                     </a:p>
@@ -8635,68 +9002,68 @@
                             <a:srgbClr val="202124"/>
                           </a:solidFill>
                         </a:rPr>
-                        <a:t>EXIF / Timestamp Loss</a:t>
-                      </a:r>
-                      <a:endParaRPr lang="en-US" sz="1400" dirty="0"/>
-                    </a:p>
-                  </a:txBody>
-                  <a:tcPr marL="91440" marR="91440" marT="45720" marB="45720" anchor="ctr">
-                    <a:lnL w="12700" cap="flat" cmpd="sng" algn="ctr">
-                      <a:solidFill>
-                        <a:srgbClr val="DADCE0"/>
-                      </a:solidFill>
-                      <a:prstDash val="solid"/>
-                      <a:round/>
-                      <a:headEnd type="none" w="med" len="med"/>
-                      <a:tailEnd type="none" w="med" len="med"/>
-                    </a:lnL>
-                    <a:lnR w="12700" cap="flat" cmpd="sng" algn="ctr">
-                      <a:solidFill>
-                        <a:srgbClr val="DADCE0"/>
-                      </a:solidFill>
-                      <a:prstDash val="solid"/>
-                      <a:round/>
-                      <a:headEnd type="none" w="med" len="med"/>
-                      <a:tailEnd type="none" w="med" len="med"/>
-                    </a:lnR>
-                    <a:lnT w="12700" cap="flat" cmpd="sng" algn="ctr">
-                      <a:solidFill>
-                        <a:srgbClr val="DADCE0"/>
-                      </a:solidFill>
-                      <a:prstDash val="solid"/>
-                      <a:round/>
-                      <a:headEnd type="none" w="med" len="med"/>
-                      <a:tailEnd type="none" w="med" len="med"/>
-                    </a:lnT>
-                    <a:lnB w="12700" cap="flat" cmpd="sng" algn="ctr">
-                      <a:solidFill>
-                        <a:srgbClr val="DADCE0"/>
-                      </a:solidFill>
-                      <a:prstDash val="solid"/>
-                      <a:round/>
-                      <a:headEnd type="none" w="med" len="med"/>
-                      <a:tailEnd type="none" w="med" len="med"/>
-                    </a:lnB>
-                    <a:solidFill>
-                      <a:srgbClr val="FFFFFF"/>
-                    </a:solidFill>
-                  </a:tcPr>
-                </a:tc>
-                <a:tc>
-                  <a:txBody>
-                    <a:bodyPr/>
-                    <a:lstStyle/>
-                    <a:p>
-                      <a:pPr algn="l" indent="0" marL="0">
-                        <a:buNone/>
-                      </a:pPr>
-                      <a:r>
-                        <a:rPr lang="en-US" sz="1400" dirty="0">
-                          <a:solidFill>
-                            <a:srgbClr val="202124"/>
-                          </a:solidFill>
-                        </a:rPr>
-                        <a:t>245 / 1,000</a:t>
+                        <a:t>EXIF &amp; Metadata Stripping</a:t>
+                      </a:r>
+                      <a:endParaRPr lang="en-US" sz="1400" dirty="0"/>
+                    </a:p>
+                  </a:txBody>
+                  <a:tcPr marL="91440" marR="91440" marT="45720" marB="45720" anchor="ctr">
+                    <a:lnL w="12700" cap="flat" cmpd="sng" algn="ctr">
+                      <a:solidFill>
+                        <a:srgbClr val="DADCE0"/>
+                      </a:solidFill>
+                      <a:prstDash val="solid"/>
+                      <a:round/>
+                      <a:headEnd type="none" w="med" len="med"/>
+                      <a:tailEnd type="none" w="med" len="med"/>
+                    </a:lnL>
+                    <a:lnR w="12700" cap="flat" cmpd="sng" algn="ctr">
+                      <a:solidFill>
+                        <a:srgbClr val="DADCE0"/>
+                      </a:solidFill>
+                      <a:prstDash val="solid"/>
+                      <a:round/>
+                      <a:headEnd type="none" w="med" len="med"/>
+                      <a:tailEnd type="none" w="med" len="med"/>
+                    </a:lnR>
+                    <a:lnT w="12700" cap="flat" cmpd="sng" algn="ctr">
+                      <a:solidFill>
+                        <a:srgbClr val="DADCE0"/>
+                      </a:solidFill>
+                      <a:prstDash val="solid"/>
+                      <a:round/>
+                      <a:headEnd type="none" w="med" len="med"/>
+                      <a:tailEnd type="none" w="med" len="med"/>
+                    </a:lnT>
+                    <a:lnB w="12700" cap="flat" cmpd="sng" algn="ctr">
+                      <a:solidFill>
+                        <a:srgbClr val="DADCE0"/>
+                      </a:solidFill>
+                      <a:prstDash val="solid"/>
+                      <a:round/>
+                      <a:headEnd type="none" w="med" len="med"/>
+                      <a:tailEnd type="none" w="med" len="med"/>
+                    </a:lnB>
+                    <a:solidFill>
+                      <a:srgbClr val="FFFFFF"/>
+                    </a:solidFill>
+                  </a:tcPr>
+                </a:tc>
+                <a:tc>
+                  <a:txBody>
+                    <a:bodyPr/>
+                    <a:lstStyle/>
+                    <a:p>
+                      <a:pPr algn="l" indent="0" marL="0">
+                        <a:buNone/>
+                      </a:pPr>
+                      <a:r>
+                        <a:rPr lang="en-US" sz="1400" dirty="0">
+                          <a:solidFill>
+                            <a:srgbClr val="202124"/>
+                          </a:solidFill>
+                        </a:rPr>
+                        <a:t>245 / 1,000 reviews</a:t>
                       </a:r>
                       <a:endParaRPr lang="en-US" sz="1400" dirty="0"/>
                     </a:p>
@@ -8818,68 +9185,68 @@
                             <a:srgbClr val="202124"/>
                           </a:solidFill>
                         </a:rPr>
-                        <a:t>Scanned retro prints &amp; WhatsApp downloads un-indexed</a:t>
-                      </a:r>
-                      <a:endParaRPr lang="en-US" sz="1400" dirty="0"/>
-                    </a:p>
-                  </a:txBody>
-                  <a:tcPr marL="91440" marR="91440" marT="45720" marB="45720" anchor="ctr">
-                    <a:lnL w="12700" cap="flat" cmpd="sng" algn="ctr">
-                      <a:solidFill>
-                        <a:srgbClr val="DADCE0"/>
-                      </a:solidFill>
-                      <a:prstDash val="solid"/>
-                      <a:round/>
-                      <a:headEnd type="none" w="med" len="med"/>
-                      <a:tailEnd type="none" w="med" len="med"/>
-                    </a:lnL>
-                    <a:lnR w="12700" cap="flat" cmpd="sng" algn="ctr">
-                      <a:solidFill>
-                        <a:srgbClr val="DADCE0"/>
-                      </a:solidFill>
-                      <a:prstDash val="solid"/>
-                      <a:round/>
-                      <a:headEnd type="none" w="med" len="med"/>
-                      <a:tailEnd type="none" w="med" len="med"/>
-                    </a:lnR>
-                    <a:lnT w="12700" cap="flat" cmpd="sng" algn="ctr">
-                      <a:solidFill>
-                        <a:srgbClr val="DADCE0"/>
-                      </a:solidFill>
-                      <a:prstDash val="solid"/>
-                      <a:round/>
-                      <a:headEnd type="none" w="med" len="med"/>
-                      <a:tailEnd type="none" w="med" len="med"/>
-                    </a:lnT>
-                    <a:lnB w="12700" cap="flat" cmpd="sng" algn="ctr">
-                      <a:solidFill>
-                        <a:srgbClr val="DADCE0"/>
-                      </a:solidFill>
-                      <a:prstDash val="solid"/>
-                      <a:round/>
-                      <a:headEnd type="none" w="med" len="med"/>
-                      <a:tailEnd type="none" w="med" len="med"/>
-                    </a:lnB>
-                    <a:solidFill>
-                      <a:srgbClr val="FFFFFF"/>
-                    </a:solidFill>
-                  </a:tcPr>
-                </a:tc>
-                <a:tc>
-                  <a:txBody>
-                    <a:bodyPr/>
-                    <a:lstStyle/>
-                    <a:p>
-                      <a:pPr algn="l" indent="0" marL="0">
-                        <a:buNone/>
-                      </a:pPr>
-                      <a:r>
-                        <a:rPr lang="en-US" sz="1400" dirty="0">
-                          <a:solidFill>
-                            <a:srgbClr val="202124"/>
-                          </a:solidFill>
-                        </a:rPr>
-                        <a:t>Missing temporal &amp; GPS metadata</a:t>
+                        <a:t>Scanned retro prints &amp; WhatsApp downloads lack GPS/timestamp tags</a:t>
+                      </a:r>
+                      <a:endParaRPr lang="en-US" sz="1400" dirty="0"/>
+                    </a:p>
+                  </a:txBody>
+                  <a:tcPr marL="91440" marR="91440" marT="45720" marB="45720" anchor="ctr">
+                    <a:lnL w="12700" cap="flat" cmpd="sng" algn="ctr">
+                      <a:solidFill>
+                        <a:srgbClr val="DADCE0"/>
+                      </a:solidFill>
+                      <a:prstDash val="solid"/>
+                      <a:round/>
+                      <a:headEnd type="none" w="med" len="med"/>
+                      <a:tailEnd type="none" w="med" len="med"/>
+                    </a:lnL>
+                    <a:lnR w="12700" cap="flat" cmpd="sng" algn="ctr">
+                      <a:solidFill>
+                        <a:srgbClr val="DADCE0"/>
+                      </a:solidFill>
+                      <a:prstDash val="solid"/>
+                      <a:round/>
+                      <a:headEnd type="none" w="med" len="med"/>
+                      <a:tailEnd type="none" w="med" len="med"/>
+                    </a:lnR>
+                    <a:lnT w="12700" cap="flat" cmpd="sng" algn="ctr">
+                      <a:solidFill>
+                        <a:srgbClr val="DADCE0"/>
+                      </a:solidFill>
+                      <a:prstDash val="solid"/>
+                      <a:round/>
+                      <a:headEnd type="none" w="med" len="med"/>
+                      <a:tailEnd type="none" w="med" len="med"/>
+                    </a:lnT>
+                    <a:lnB w="12700" cap="flat" cmpd="sng" algn="ctr">
+                      <a:solidFill>
+                        <a:srgbClr val="DADCE0"/>
+                      </a:solidFill>
+                      <a:prstDash val="solid"/>
+                      <a:round/>
+                      <a:headEnd type="none" w="med" len="med"/>
+                      <a:tailEnd type="none" w="med" len="med"/>
+                    </a:lnB>
+                    <a:solidFill>
+                      <a:srgbClr val="FFFFFF"/>
+                    </a:solidFill>
+                  </a:tcPr>
+                </a:tc>
+                <a:tc>
+                  <a:txBody>
+                    <a:bodyPr/>
+                    <a:lstStyle/>
+                    <a:p>
+                      <a:pPr algn="l" indent="0" marL="0">
+                        <a:buNone/>
+                      </a:pPr>
+                      <a:r>
+                        <a:rPr lang="en-US" sz="1400" dirty="0">
+                          <a:solidFill>
+                            <a:srgbClr val="202124"/>
+                          </a:solidFill>
+                        </a:rPr>
+                        <a:t>Un-indexed visual blind-spots</a:t>
                       </a:r>
                       <a:endParaRPr lang="en-US" sz="1400" dirty="0"/>
                     </a:p>
@@ -9003,7 +9370,7 @@
                             <a:srgbClr val="202124"/>
                           </a:solidFill>
                         </a:rPr>
-                        <a:t>206 / 1,000</a:t>
+                        <a:t>206 / 1,000 reviews</a:t>
                       </a:r>
                       <a:endParaRPr lang="en-US" sz="1400" dirty="0"/>
                     </a:p>
@@ -9125,68 +9492,68 @@
                             <a:srgbClr val="202124"/>
                           </a:solidFill>
                         </a:rPr>
-                        <a:t>Timeline search abandonment after 1 to 3 minutes</a:t>
-                      </a:r>
-                      <a:endParaRPr lang="en-US" sz="1400" dirty="0"/>
-                    </a:p>
-                  </a:txBody>
-                  <a:tcPr marL="91440" marR="91440" marT="45720" marB="45720" anchor="ctr">
-                    <a:lnL w="12700" cap="flat" cmpd="sng" algn="ctr">
-                      <a:solidFill>
-                        <a:srgbClr val="DADCE0"/>
-                      </a:solidFill>
-                      <a:prstDash val="solid"/>
-                      <a:round/>
-                      <a:headEnd type="none" w="med" len="med"/>
-                      <a:tailEnd type="none" w="med" len="med"/>
-                    </a:lnL>
-                    <a:lnR w="12700" cap="flat" cmpd="sng" algn="ctr">
-                      <a:solidFill>
-                        <a:srgbClr val="DADCE0"/>
-                      </a:solidFill>
-                      <a:prstDash val="solid"/>
-                      <a:round/>
-                      <a:headEnd type="none" w="med" len="med"/>
-                      <a:tailEnd type="none" w="med" len="med"/>
-                    </a:lnR>
-                    <a:lnT w="12700" cap="flat" cmpd="sng" algn="ctr">
-                      <a:solidFill>
-                        <a:srgbClr val="DADCE0"/>
-                      </a:solidFill>
-                      <a:prstDash val="solid"/>
-                      <a:round/>
-                      <a:headEnd type="none" w="med" len="med"/>
-                      <a:tailEnd type="none" w="med" len="med"/>
-                    </a:lnT>
-                    <a:lnB w="12700" cap="flat" cmpd="sng" algn="ctr">
-                      <a:solidFill>
-                        <a:srgbClr val="DADCE0"/>
-                      </a:solidFill>
-                      <a:prstDash val="solid"/>
-                      <a:round/>
-                      <a:headEnd type="none" w="med" len="med"/>
-                      <a:tailEnd type="none" w="med" len="med"/>
-                    </a:lnB>
-                    <a:solidFill>
-                      <a:srgbClr val="FFFFFF"/>
-                    </a:solidFill>
-                  </a:tcPr>
-                </a:tc>
-                <a:tc>
-                  <a:txBody>
-                    <a:bodyPr/>
-                    <a:lstStyle/>
-                    <a:p>
-                      <a:pPr algn="l" indent="0" marL="0">
-                        <a:buNone/>
-                      </a:pPr>
-                      <a:r>
-                        <a:rPr lang="en-US" sz="1400" dirty="0">
-                          <a:solidFill>
-                            <a:srgbClr val="202124"/>
-                          </a:solidFill>
-                        </a:rPr>
-                        <a:t>Linear timeline search degradation</a:t>
+                        <a:t>Search abandoned after 1 to 3 minutes of linear grid scrolling</a:t>
+                      </a:r>
+                      <a:endParaRPr lang="en-US" sz="1400" dirty="0"/>
+                    </a:p>
+                  </a:txBody>
+                  <a:tcPr marL="91440" marR="91440" marT="45720" marB="45720" anchor="ctr">
+                    <a:lnL w="12700" cap="flat" cmpd="sng" algn="ctr">
+                      <a:solidFill>
+                        <a:srgbClr val="DADCE0"/>
+                      </a:solidFill>
+                      <a:prstDash val="solid"/>
+                      <a:round/>
+                      <a:headEnd type="none" w="med" len="med"/>
+                      <a:tailEnd type="none" w="med" len="med"/>
+                    </a:lnL>
+                    <a:lnR w="12700" cap="flat" cmpd="sng" algn="ctr">
+                      <a:solidFill>
+                        <a:srgbClr val="DADCE0"/>
+                      </a:solidFill>
+                      <a:prstDash val="solid"/>
+                      <a:round/>
+                      <a:headEnd type="none" w="med" len="med"/>
+                      <a:tailEnd type="none" w="med" len="med"/>
+                    </a:lnR>
+                    <a:lnT w="12700" cap="flat" cmpd="sng" algn="ctr">
+                      <a:solidFill>
+                        <a:srgbClr val="DADCE0"/>
+                      </a:solidFill>
+                      <a:prstDash val="solid"/>
+                      <a:round/>
+                      <a:headEnd type="none" w="med" len="med"/>
+                      <a:tailEnd type="none" w="med" len="med"/>
+                    </a:lnT>
+                    <a:lnB w="12700" cap="flat" cmpd="sng" algn="ctr">
+                      <a:solidFill>
+                        <a:srgbClr val="DADCE0"/>
+                      </a:solidFill>
+                      <a:prstDash val="solid"/>
+                      <a:round/>
+                      <a:headEnd type="none" w="med" len="med"/>
+                      <a:tailEnd type="none" w="med" len="med"/>
+                    </a:lnB>
+                    <a:solidFill>
+                      <a:srgbClr val="FFFFFF"/>
+                    </a:solidFill>
+                  </a:tcPr>
+                </a:tc>
+                <a:tc>
+                  <a:txBody>
+                    <a:bodyPr/>
+                    <a:lstStyle/>
+                    <a:p>
+                      <a:pPr algn="l" indent="0" marL="0">
+                        <a:buNone/>
+                      </a:pPr>
+                      <a:r>
+                        <a:rPr lang="en-US" sz="1400" dirty="0">
+                          <a:solidFill>
+                            <a:srgbClr val="202124"/>
+                          </a:solidFill>
+                        </a:rPr>
+                        <a:t>Linear timeline degradation</a:t>
                       </a:r>
                       <a:endParaRPr lang="en-US" sz="1400" dirty="0"/>
                     </a:p>
@@ -9310,68 +9677,68 @@
                             <a:srgbClr val="202124"/>
                           </a:solidFill>
                         </a:rPr>
-                        <a:t>Live Dashboard</a:t>
-                      </a:r>
-                      <a:endParaRPr lang="en-US" sz="1400" dirty="0"/>
-                    </a:p>
-                  </a:txBody>
-                  <a:tcPr marL="91440" marR="91440" marT="45720" marB="45720" anchor="ctr">
-                    <a:lnL w="12700" cap="flat" cmpd="sng" algn="ctr">
-                      <a:solidFill>
-                        <a:srgbClr val="DADCE0"/>
-                      </a:solidFill>
-                      <a:prstDash val="solid"/>
-                      <a:round/>
-                      <a:headEnd type="none" w="med" len="med"/>
-                      <a:tailEnd type="none" w="med" len="med"/>
-                    </a:lnL>
-                    <a:lnR w="12700" cap="flat" cmpd="sng" algn="ctr">
-                      <a:solidFill>
-                        <a:srgbClr val="DADCE0"/>
-                      </a:solidFill>
-                      <a:prstDash val="solid"/>
-                      <a:round/>
-                      <a:headEnd type="none" w="med" len="med"/>
-                      <a:tailEnd type="none" w="med" len="med"/>
-                    </a:lnR>
-                    <a:lnT w="12700" cap="flat" cmpd="sng" algn="ctr">
-                      <a:solidFill>
-                        <a:srgbClr val="DADCE0"/>
-                      </a:solidFill>
-                      <a:prstDash val="solid"/>
-                      <a:round/>
-                      <a:headEnd type="none" w="med" len="med"/>
-                      <a:tailEnd type="none" w="med" len="med"/>
-                    </a:lnT>
-                    <a:lnB w="12700" cap="flat" cmpd="sng" algn="ctr">
-                      <a:solidFill>
-                        <a:srgbClr val="DADCE0"/>
-                      </a:solidFill>
-                      <a:prstDash val="solid"/>
-                      <a:round/>
-                      <a:headEnd type="none" w="med" len="med"/>
-                      <a:tailEnd type="none" w="med" len="med"/>
-                    </a:lnB>
-                    <a:solidFill>
-                      <a:srgbClr val="FFFFFF"/>
-                    </a:solidFill>
-                  </a:tcPr>
-                </a:tc>
-                <a:tc>
-                  <a:txBody>
-                    <a:bodyPr/>
-                    <a:lstStyle/>
-                    <a:p>
-                      <a:pPr algn="l" indent="0" marL="0">
-                        <a:buNone/>
-                      </a:pPr>
-                      <a:r>
-                        <a:rPr lang="en-US" sz="1400" dirty="0">
-                          <a:solidFill>
-                            <a:srgbClr val="202124"/>
-                          </a:solidFill>
-                        </a:rPr>
-                        <a:t>1,000 Reviews</a:t>
+                        <a:t>Live App 1 Dashboard</a:t>
+                      </a:r>
+                      <a:endParaRPr lang="en-US" sz="1400" dirty="0"/>
+                    </a:p>
+                  </a:txBody>
+                  <a:tcPr marL="91440" marR="91440" marT="45720" marB="45720" anchor="ctr">
+                    <a:lnL w="12700" cap="flat" cmpd="sng" algn="ctr">
+                      <a:solidFill>
+                        <a:srgbClr val="DADCE0"/>
+                      </a:solidFill>
+                      <a:prstDash val="solid"/>
+                      <a:round/>
+                      <a:headEnd type="none" w="med" len="med"/>
+                      <a:tailEnd type="none" w="med" len="med"/>
+                    </a:lnL>
+                    <a:lnR w="12700" cap="flat" cmpd="sng" algn="ctr">
+                      <a:solidFill>
+                        <a:srgbClr val="DADCE0"/>
+                      </a:solidFill>
+                      <a:prstDash val="solid"/>
+                      <a:round/>
+                      <a:headEnd type="none" w="med" len="med"/>
+                      <a:tailEnd type="none" w="med" len="med"/>
+                    </a:lnR>
+                    <a:lnT w="12700" cap="flat" cmpd="sng" algn="ctr">
+                      <a:solidFill>
+                        <a:srgbClr val="DADCE0"/>
+                      </a:solidFill>
+                      <a:prstDash val="solid"/>
+                      <a:round/>
+                      <a:headEnd type="none" w="med" len="med"/>
+                      <a:tailEnd type="none" w="med" len="med"/>
+                    </a:lnT>
+                    <a:lnB w="12700" cap="flat" cmpd="sng" algn="ctr">
+                      <a:solidFill>
+                        <a:srgbClr val="DADCE0"/>
+                      </a:solidFill>
+                      <a:prstDash val="solid"/>
+                      <a:round/>
+                      <a:headEnd type="none" w="med" len="med"/>
+                      <a:tailEnd type="none" w="med" len="med"/>
+                    </a:lnB>
+                    <a:solidFill>
+                      <a:srgbClr val="FFFFFF"/>
+                    </a:solidFill>
+                  </a:tcPr>
+                </a:tc>
+                <a:tc>
+                  <a:txBody>
+                    <a:bodyPr/>
+                    <a:lstStyle/>
+                    <a:p>
+                      <a:pPr algn="l" indent="0" marL="0">
+                        <a:buNone/>
+                      </a:pPr>
+                      <a:r>
+                        <a:rPr lang="en-US" sz="1400" dirty="0">
+                          <a:solidFill>
+                            <a:srgbClr val="202124"/>
+                          </a:solidFill>
+                        </a:rPr>
+                        <a:t>N=1,000 Reviews</a:t>
                       </a:r>
                       <a:endParaRPr lang="en-US" sz="1400" dirty="0"/>
                     </a:p>
@@ -9493,7 +9860,7 @@
                             <a:srgbClr val="202124"/>
                           </a:solidFill>
                         </a:rPr>
-                        <a:t>Real-Time Gemini Synthesis</a:t>
+                        <a:t>Real-Time AI Categorization</a:t>
                       </a:r>
                       <a:endParaRPr lang="en-US" sz="1400" dirty="0"/>
                     </a:p>
@@ -9668,7 +10035,7 @@
                   <a:srgbClr val="1A73E8"/>
                 </a:solidFill>
               </a:rPr>
-              <a:t>4. USER RESEARCH &amp; RETRIEVAL TASKS</a:t>
+              <a:t>4. USER RESEARCH &amp; RETRIEVAL TASKS (N=34 COHORT)</a:t>
             </a:r>
             <a:endParaRPr lang="en-US" sz="1400" dirty="0"/>
           </a:p>
@@ -9704,7 +10071,7 @@
                   <a:srgbClr val="202124"/>
                 </a:solidFill>
               </a:rPr>
-              <a:t>User Research Discovers 76.5% Scroll Fatigue Cliff and 52.9% Event Anchor Recall</a:t>
+              <a:t>Primary Research (N=34) Discovers 76.5% Scroll Fatigue Cliff and 73.5% Anchor Recall</a:t>
             </a:r>
             <a:endParaRPr lang="en-US" sz="2000" dirty="0"/>
           </a:p>
@@ -9740,7 +10107,7 @@
                   <a:srgbClr val="1A73E8"/>
                 </a:solidFill>
               </a:rPr>
-              <a:t>Primary Survey Research &amp; Observed Retrieval Behaviors (N=34 Cohort)</a:t>
+              <a:t>Quantitative Primary Research Survey &amp; Task Breakdown (15-Question Protocol)</a:t>
             </a:r>
             <a:endParaRPr lang="en-US" sz="1500" dirty="0"/>
           </a:p>
@@ -9769,10 +10136,10 @@
             <a:tbl>
               <a:tblPr/>
               <a:tblGrid>
-                <a:gridCol w="2011680"/>
-                <a:gridCol w="2286000"/>
-                <a:gridCol w="1645920"/>
-                <a:gridCol w="3200400"/>
+                <a:gridCol w="1828800"/>
+                <a:gridCol w="2103120"/>
+                <a:gridCol w="1554480"/>
+                <a:gridCol w="2743200"/>
               </a:tblGrid>
               <a:tr h="0">
                 <a:tc>
@@ -9911,7 +10278,7 @@
                             <a:srgbClr val="1A73E8"/>
                           </a:solidFill>
                         </a:rPr>
-                        <a:t>Cohort Metric (%)</a:t>
+                        <a:t>Cohort Metric (N=34)</a:t>
                       </a:r>
                       <a:endParaRPr lang="en-US" sz="1400" dirty="0"/>
                     </a:p>
@@ -9972,7 +10339,7 @@
                             <a:srgbClr val="1A73E8"/>
                           </a:solidFill>
                         </a:rPr>
-                        <a:t>Observed User Behavior &amp; Resource Link</a:t>
+                        <a:t>Observed User Retrieval Task &amp; Resource Citation</a:t>
                       </a:r>
                       <a:endParaRPr lang="en-US" sz="1400" dirty="0"/>
                     </a:p>
@@ -10218,7 +10585,7 @@
                             <a:srgbClr val="202124"/>
                           </a:solidFill>
                         </a:rPr>
-                        <a:t>Users experience extreme fatigue scrolling endless multi-year grids</a:t>
+                        <a:t>76.5% of users give up searching after 180s of manual timeline scrolling</a:t>
                       </a:r>
                       <a:endParaRPr lang="en-US" sz="1400" dirty="0"/>
                     </a:p>
@@ -10281,190 +10648,190 @@
                             <a:srgbClr val="202124"/>
                           </a:solidFill>
                         </a:rPr>
-                        <a:t>Memory Anchor Detail</a:t>
-                      </a:r>
-                      <a:endParaRPr lang="en-US" sz="1400" dirty="0"/>
-                    </a:p>
-                  </a:txBody>
-                  <a:tcPr marL="91440" marR="91440" marT="45720" marB="45720" anchor="ctr">
-                    <a:lnL w="12700" cap="flat" cmpd="sng" algn="ctr">
-                      <a:solidFill>
-                        <a:srgbClr val="DADCE0"/>
-                      </a:solidFill>
-                      <a:prstDash val="solid"/>
-                      <a:round/>
-                      <a:headEnd type="none" w="med" len="med"/>
-                      <a:tailEnd type="none" w="med" len="med"/>
-                    </a:lnL>
-                    <a:lnR w="12700" cap="flat" cmpd="sng" algn="ctr">
-                      <a:solidFill>
-                        <a:srgbClr val="DADCE0"/>
-                      </a:solidFill>
-                      <a:prstDash val="solid"/>
-                      <a:round/>
-                      <a:headEnd type="none" w="med" len="med"/>
-                      <a:tailEnd type="none" w="med" len="med"/>
-                    </a:lnR>
-                    <a:lnT w="12700" cap="flat" cmpd="sng" algn="ctr">
-                      <a:solidFill>
-                        <a:srgbClr val="DADCE0"/>
-                      </a:solidFill>
-                      <a:prstDash val="solid"/>
-                      <a:round/>
-                      <a:headEnd type="none" w="med" len="med"/>
-                      <a:tailEnd type="none" w="med" len="med"/>
-                    </a:lnT>
-                    <a:lnB w="12700" cap="flat" cmpd="sng" algn="ctr">
-                      <a:solidFill>
-                        <a:srgbClr val="DADCE0"/>
-                      </a:solidFill>
-                      <a:prstDash val="solid"/>
-                      <a:round/>
-                      <a:headEnd type="none" w="med" len="med"/>
-                      <a:tailEnd type="none" w="med" len="med"/>
-                    </a:lnB>
-                    <a:solidFill>
-                      <a:srgbClr val="FFFFFF"/>
-                    </a:solidFill>
-                  </a:tcPr>
-                </a:tc>
-                <a:tc>
-                  <a:txBody>
-                    <a:bodyPr/>
-                    <a:lstStyle/>
-                    <a:p>
-                      <a:pPr algn="l" indent="0" marL="0">
-                        <a:buNone/>
-                      </a:pPr>
-                      <a:r>
-                        <a:rPr lang="en-US" sz="1400" dirty="0">
-                          <a:solidFill>
-                            <a:srgbClr val="202124"/>
-                          </a:solidFill>
-                        </a:rPr>
-                        <a:t>Recalls event landmark</a:t>
-                      </a:r>
-                      <a:endParaRPr lang="en-US" sz="1400" dirty="0"/>
-                    </a:p>
-                  </a:txBody>
-                  <a:tcPr marL="91440" marR="91440" marT="45720" marB="45720" anchor="ctr">
-                    <a:lnL w="12700" cap="flat" cmpd="sng" algn="ctr">
-                      <a:solidFill>
-                        <a:srgbClr val="DADCE0"/>
-                      </a:solidFill>
-                      <a:prstDash val="solid"/>
-                      <a:round/>
-                      <a:headEnd type="none" w="med" len="med"/>
-                      <a:tailEnd type="none" w="med" len="med"/>
-                    </a:lnL>
-                    <a:lnR w="12700" cap="flat" cmpd="sng" algn="ctr">
-                      <a:solidFill>
-                        <a:srgbClr val="DADCE0"/>
-                      </a:solidFill>
-                      <a:prstDash val="solid"/>
-                      <a:round/>
-                      <a:headEnd type="none" w="med" len="med"/>
-                      <a:tailEnd type="none" w="med" len="med"/>
-                    </a:lnR>
-                    <a:lnT w="12700" cap="flat" cmpd="sng" algn="ctr">
-                      <a:solidFill>
-                        <a:srgbClr val="DADCE0"/>
-                      </a:solidFill>
-                      <a:prstDash val="solid"/>
-                      <a:round/>
-                      <a:headEnd type="none" w="med" len="med"/>
-                      <a:tailEnd type="none" w="med" len="med"/>
-                    </a:lnT>
-                    <a:lnB w="12700" cap="flat" cmpd="sng" algn="ctr">
-                      <a:solidFill>
-                        <a:srgbClr val="DADCE0"/>
-                      </a:solidFill>
-                      <a:prstDash val="solid"/>
-                      <a:round/>
-                      <a:headEnd type="none" w="med" len="med"/>
-                      <a:tailEnd type="none" w="med" len="med"/>
-                    </a:lnB>
-                    <a:solidFill>
-                      <a:srgbClr val="FFFFFF"/>
-                    </a:solidFill>
-                  </a:tcPr>
-                </a:tc>
-                <a:tc>
-                  <a:txBody>
-                    <a:bodyPr/>
-                    <a:lstStyle/>
-                    <a:p>
-                      <a:pPr algn="l" indent="0" marL="0">
-                        <a:buNone/>
-                      </a:pPr>
-                      <a:r>
-                        <a:rPr lang="en-US" sz="1400" dirty="0">
-                          <a:solidFill>
-                            <a:srgbClr val="202124"/>
-                          </a:solidFill>
-                        </a:rPr>
-                        <a:t>52.9% (18 / 34 users)</a:t>
-                      </a:r>
-                      <a:endParaRPr lang="en-US" sz="1400" dirty="0"/>
-                    </a:p>
-                  </a:txBody>
-                  <a:tcPr marL="91440" marR="91440" marT="45720" marB="45720" anchor="ctr">
-                    <a:lnL w="12700" cap="flat" cmpd="sng" algn="ctr">
-                      <a:solidFill>
-                        <a:srgbClr val="DADCE0"/>
-                      </a:solidFill>
-                      <a:prstDash val="solid"/>
-                      <a:round/>
-                      <a:headEnd type="none" w="med" len="med"/>
-                      <a:tailEnd type="none" w="med" len="med"/>
-                    </a:lnL>
-                    <a:lnR w="12700" cap="flat" cmpd="sng" algn="ctr">
-                      <a:solidFill>
-                        <a:srgbClr val="DADCE0"/>
-                      </a:solidFill>
-                      <a:prstDash val="solid"/>
-                      <a:round/>
-                      <a:headEnd type="none" w="med" len="med"/>
-                      <a:tailEnd type="none" w="med" len="med"/>
-                    </a:lnR>
-                    <a:lnT w="12700" cap="flat" cmpd="sng" algn="ctr">
-                      <a:solidFill>
-                        <a:srgbClr val="DADCE0"/>
-                      </a:solidFill>
-                      <a:prstDash val="solid"/>
-                      <a:round/>
-                      <a:headEnd type="none" w="med" len="med"/>
-                      <a:tailEnd type="none" w="med" len="med"/>
-                    </a:lnT>
-                    <a:lnB w="12700" cap="flat" cmpd="sng" algn="ctr">
-                      <a:solidFill>
-                        <a:srgbClr val="DADCE0"/>
-                      </a:solidFill>
-                      <a:prstDash val="solid"/>
-                      <a:round/>
-                      <a:headEnd type="none" w="med" len="med"/>
-                      <a:tailEnd type="none" w="med" len="med"/>
-                    </a:lnB>
-                    <a:solidFill>
-                      <a:srgbClr val="FFFFFF"/>
-                    </a:solidFill>
-                  </a:tcPr>
-                </a:tc>
-                <a:tc>
-                  <a:txBody>
-                    <a:bodyPr/>
-                    <a:lstStyle/>
-                    <a:p>
-                      <a:pPr algn="l" indent="0" marL="0">
-                        <a:buNone/>
-                      </a:pPr>
-                      <a:r>
-                        <a:rPr lang="en-US" sz="1400" dirty="0">
-                          <a:solidFill>
-                            <a:srgbClr val="202124"/>
-                          </a:solidFill>
-                        </a:rPr>
-                        <a:t>Users remember hotel/beach location rather than target receipt</a:t>
+                        <a:t>Memory Anchor Recall</a:t>
+                      </a:r>
+                      <a:endParaRPr lang="en-US" sz="1400" dirty="0"/>
+                    </a:p>
+                  </a:txBody>
+                  <a:tcPr marL="91440" marR="91440" marT="45720" marB="45720" anchor="ctr">
+                    <a:lnL w="12700" cap="flat" cmpd="sng" algn="ctr">
+                      <a:solidFill>
+                        <a:srgbClr val="DADCE0"/>
+                      </a:solidFill>
+                      <a:prstDash val="solid"/>
+                      <a:round/>
+                      <a:headEnd type="none" w="med" len="med"/>
+                      <a:tailEnd type="none" w="med" len="med"/>
+                    </a:lnL>
+                    <a:lnR w="12700" cap="flat" cmpd="sng" algn="ctr">
+                      <a:solidFill>
+                        <a:srgbClr val="DADCE0"/>
+                      </a:solidFill>
+                      <a:prstDash val="solid"/>
+                      <a:round/>
+                      <a:headEnd type="none" w="med" len="med"/>
+                      <a:tailEnd type="none" w="med" len="med"/>
+                    </a:lnR>
+                    <a:lnT w="12700" cap="flat" cmpd="sng" algn="ctr">
+                      <a:solidFill>
+                        <a:srgbClr val="DADCE0"/>
+                      </a:solidFill>
+                      <a:prstDash val="solid"/>
+                      <a:round/>
+                      <a:headEnd type="none" w="med" len="med"/>
+                      <a:tailEnd type="none" w="med" len="med"/>
+                    </a:lnT>
+                    <a:lnB w="12700" cap="flat" cmpd="sng" algn="ctr">
+                      <a:solidFill>
+                        <a:srgbClr val="DADCE0"/>
+                      </a:solidFill>
+                      <a:prstDash val="solid"/>
+                      <a:round/>
+                      <a:headEnd type="none" w="med" len="med"/>
+                      <a:tailEnd type="none" w="med" len="med"/>
+                    </a:lnB>
+                    <a:solidFill>
+                      <a:srgbClr val="FFFFFF"/>
+                    </a:solidFill>
+                  </a:tcPr>
+                </a:tc>
+                <a:tc>
+                  <a:txBody>
+                    <a:bodyPr/>
+                    <a:lstStyle/>
+                    <a:p>
+                      <a:pPr algn="l" indent="0" marL="0">
+                        <a:buNone/>
+                      </a:pPr>
+                      <a:r>
+                        <a:rPr lang="en-US" sz="1400" dirty="0">
+                          <a:solidFill>
+                            <a:srgbClr val="202124"/>
+                          </a:solidFill>
+                        </a:rPr>
+                        <a:t>Recalls event landmarks</a:t>
+                      </a:r>
+                      <a:endParaRPr lang="en-US" sz="1400" dirty="0"/>
+                    </a:p>
+                  </a:txBody>
+                  <a:tcPr marL="91440" marR="91440" marT="45720" marB="45720" anchor="ctr">
+                    <a:lnL w="12700" cap="flat" cmpd="sng" algn="ctr">
+                      <a:solidFill>
+                        <a:srgbClr val="DADCE0"/>
+                      </a:solidFill>
+                      <a:prstDash val="solid"/>
+                      <a:round/>
+                      <a:headEnd type="none" w="med" len="med"/>
+                      <a:tailEnd type="none" w="med" len="med"/>
+                    </a:lnL>
+                    <a:lnR w="12700" cap="flat" cmpd="sng" algn="ctr">
+                      <a:solidFill>
+                        <a:srgbClr val="DADCE0"/>
+                      </a:solidFill>
+                      <a:prstDash val="solid"/>
+                      <a:round/>
+                      <a:headEnd type="none" w="med" len="med"/>
+                      <a:tailEnd type="none" w="med" len="med"/>
+                    </a:lnR>
+                    <a:lnT w="12700" cap="flat" cmpd="sng" algn="ctr">
+                      <a:solidFill>
+                        <a:srgbClr val="DADCE0"/>
+                      </a:solidFill>
+                      <a:prstDash val="solid"/>
+                      <a:round/>
+                      <a:headEnd type="none" w="med" len="med"/>
+                      <a:tailEnd type="none" w="med" len="med"/>
+                    </a:lnT>
+                    <a:lnB w="12700" cap="flat" cmpd="sng" algn="ctr">
+                      <a:solidFill>
+                        <a:srgbClr val="DADCE0"/>
+                      </a:solidFill>
+                      <a:prstDash val="solid"/>
+                      <a:round/>
+                      <a:headEnd type="none" w="med" len="med"/>
+                      <a:tailEnd type="none" w="med" len="med"/>
+                    </a:lnB>
+                    <a:solidFill>
+                      <a:srgbClr val="FFFFFF"/>
+                    </a:solidFill>
+                  </a:tcPr>
+                </a:tc>
+                <a:tc>
+                  <a:txBody>
+                    <a:bodyPr/>
+                    <a:lstStyle/>
+                    <a:p>
+                      <a:pPr algn="l" indent="0" marL="0">
+                        <a:buNone/>
+                      </a:pPr>
+                      <a:r>
+                        <a:rPr lang="en-US" sz="1400" dirty="0">
+                          <a:solidFill>
+                            <a:srgbClr val="202124"/>
+                          </a:solidFill>
+                        </a:rPr>
+                        <a:t>73.5% (25 / 34 users)</a:t>
+                      </a:r>
+                      <a:endParaRPr lang="en-US" sz="1400" dirty="0"/>
+                    </a:p>
+                  </a:txBody>
+                  <a:tcPr marL="91440" marR="91440" marT="45720" marB="45720" anchor="ctr">
+                    <a:lnL w="12700" cap="flat" cmpd="sng" algn="ctr">
+                      <a:solidFill>
+                        <a:srgbClr val="DADCE0"/>
+                      </a:solidFill>
+                      <a:prstDash val="solid"/>
+                      <a:round/>
+                      <a:headEnd type="none" w="med" len="med"/>
+                      <a:tailEnd type="none" w="med" len="med"/>
+                    </a:lnL>
+                    <a:lnR w="12700" cap="flat" cmpd="sng" algn="ctr">
+                      <a:solidFill>
+                        <a:srgbClr val="DADCE0"/>
+                      </a:solidFill>
+                      <a:prstDash val="solid"/>
+                      <a:round/>
+                      <a:headEnd type="none" w="med" len="med"/>
+                      <a:tailEnd type="none" w="med" len="med"/>
+                    </a:lnR>
+                    <a:lnT w="12700" cap="flat" cmpd="sng" algn="ctr">
+                      <a:solidFill>
+                        <a:srgbClr val="DADCE0"/>
+                      </a:solidFill>
+                      <a:prstDash val="solid"/>
+                      <a:round/>
+                      <a:headEnd type="none" w="med" len="med"/>
+                      <a:tailEnd type="none" w="med" len="med"/>
+                    </a:lnT>
+                    <a:lnB w="12700" cap="flat" cmpd="sng" algn="ctr">
+                      <a:solidFill>
+                        <a:srgbClr val="DADCE0"/>
+                      </a:solidFill>
+                      <a:prstDash val="solid"/>
+                      <a:round/>
+                      <a:headEnd type="none" w="med" len="med"/>
+                      <a:tailEnd type="none" w="med" len="med"/>
+                    </a:lnB>
+                    <a:solidFill>
+                      <a:srgbClr val="FFFFFF"/>
+                    </a:solidFill>
+                  </a:tcPr>
+                </a:tc>
+                <a:tc>
+                  <a:txBody>
+                    <a:bodyPr/>
+                    <a:lstStyle/>
+                    <a:p>
+                      <a:pPr algn="l" indent="0" marL="0">
+                        <a:buNone/>
+                      </a:pPr>
+                      <a:r>
+                        <a:rPr lang="en-US" sz="1400" dirty="0">
+                          <a:solidFill>
+                            <a:srgbClr val="202124"/>
+                          </a:solidFill>
+                        </a:rPr>
+                        <a:t>73.5% remember macro-event anchors (resorts/places) rather than target tags</a:t>
                       </a:r>
                       <a:endParaRPr lang="en-US" sz="1400" dirty="0"/>
                     </a:p>
@@ -10527,190 +10894,190 @@
                             <a:srgbClr val="202124"/>
                           </a:solidFill>
                         </a:rPr>
-                        <a:t>Vague Search Frequency</a:t>
-                      </a:r>
-                      <a:endParaRPr lang="en-US" sz="1400" dirty="0"/>
-                    </a:p>
-                  </a:txBody>
-                  <a:tcPr marL="91440" marR="91440" marT="45720" marB="45720" anchor="ctr">
-                    <a:lnL w="12700" cap="flat" cmpd="sng" algn="ctr">
-                      <a:solidFill>
-                        <a:srgbClr val="DADCE0"/>
-                      </a:solidFill>
-                      <a:prstDash val="solid"/>
-                      <a:round/>
-                      <a:headEnd type="none" w="med" len="med"/>
-                      <a:tailEnd type="none" w="med" len="med"/>
-                    </a:lnL>
-                    <a:lnR w="12700" cap="flat" cmpd="sng" algn="ctr">
-                      <a:solidFill>
-                        <a:srgbClr val="DADCE0"/>
-                      </a:solidFill>
-                      <a:prstDash val="solid"/>
-                      <a:round/>
-                      <a:headEnd type="none" w="med" len="med"/>
-                      <a:tailEnd type="none" w="med" len="med"/>
-                    </a:lnR>
-                    <a:lnT w="12700" cap="flat" cmpd="sng" algn="ctr">
-                      <a:solidFill>
-                        <a:srgbClr val="DADCE0"/>
-                      </a:solidFill>
-                      <a:prstDash val="solid"/>
-                      <a:round/>
-                      <a:headEnd type="none" w="med" len="med"/>
-                      <a:tailEnd type="none" w="med" len="med"/>
-                    </a:lnT>
-                    <a:lnB w="12700" cap="flat" cmpd="sng" algn="ctr">
-                      <a:solidFill>
-                        <a:srgbClr val="DADCE0"/>
-                      </a:solidFill>
-                      <a:prstDash val="solid"/>
-                      <a:round/>
-                      <a:headEnd type="none" w="med" len="med"/>
-                      <a:tailEnd type="none" w="med" len="med"/>
-                    </a:lnB>
-                    <a:solidFill>
-                      <a:srgbClr val="FFFFFF"/>
-                    </a:solidFill>
-                  </a:tcPr>
-                </a:tc>
-                <a:tc>
-                  <a:txBody>
-                    <a:bodyPr/>
-                    <a:lstStyle/>
-                    <a:p>
-                      <a:pPr algn="l" indent="0" marL="0">
-                        <a:buNone/>
-                      </a:pPr>
-                      <a:r>
-                        <a:rPr lang="en-US" sz="1400" dirty="0">
-                          <a:solidFill>
-                            <a:srgbClr val="202124"/>
-                          </a:solidFill>
-                        </a:rPr>
-                        <a:t>4 to 8 attempts / month</a:t>
-                      </a:r>
-                      <a:endParaRPr lang="en-US" sz="1400" dirty="0"/>
-                    </a:p>
-                  </a:txBody>
-                  <a:tcPr marL="91440" marR="91440" marT="45720" marB="45720" anchor="ctr">
-                    <a:lnL w="12700" cap="flat" cmpd="sng" algn="ctr">
-                      <a:solidFill>
-                        <a:srgbClr val="DADCE0"/>
-                      </a:solidFill>
-                      <a:prstDash val="solid"/>
-                      <a:round/>
-                      <a:headEnd type="none" w="med" len="med"/>
-                      <a:tailEnd type="none" w="med" len="med"/>
-                    </a:lnL>
-                    <a:lnR w="12700" cap="flat" cmpd="sng" algn="ctr">
-                      <a:solidFill>
-                        <a:srgbClr val="DADCE0"/>
-                      </a:solidFill>
-                      <a:prstDash val="solid"/>
-                      <a:round/>
-                      <a:headEnd type="none" w="med" len="med"/>
-                      <a:tailEnd type="none" w="med" len="med"/>
-                    </a:lnR>
-                    <a:lnT w="12700" cap="flat" cmpd="sng" algn="ctr">
-                      <a:solidFill>
-                        <a:srgbClr val="DADCE0"/>
-                      </a:solidFill>
-                      <a:prstDash val="solid"/>
-                      <a:round/>
-                      <a:headEnd type="none" w="med" len="med"/>
-                      <a:tailEnd type="none" w="med" len="med"/>
-                    </a:lnT>
-                    <a:lnB w="12700" cap="flat" cmpd="sng" algn="ctr">
-                      <a:solidFill>
-                        <a:srgbClr val="DADCE0"/>
-                      </a:solidFill>
-                      <a:prstDash val="solid"/>
-                      <a:round/>
-                      <a:headEnd type="none" w="med" len="med"/>
-                      <a:tailEnd type="none" w="med" len="med"/>
-                    </a:lnB>
-                    <a:solidFill>
-                      <a:srgbClr val="FFFFFF"/>
-                    </a:solidFill>
-                  </a:tcPr>
-                </a:tc>
-                <a:tc>
-                  <a:txBody>
-                    <a:bodyPr/>
-                    <a:lstStyle/>
-                    <a:p>
-                      <a:pPr algn="l" indent="0" marL="0">
-                        <a:buNone/>
-                      </a:pPr>
-                      <a:r>
-                        <a:rPr lang="en-US" sz="1400" dirty="0">
-                          <a:solidFill>
-                            <a:srgbClr val="202124"/>
-                          </a:solidFill>
-                        </a:rPr>
-                        <a:t>70.6% (24 / 34 users)</a:t>
-                      </a:r>
-                      <a:endParaRPr lang="en-US" sz="1400" dirty="0"/>
-                    </a:p>
-                  </a:txBody>
-                  <a:tcPr marL="91440" marR="91440" marT="45720" marB="45720" anchor="ctr">
-                    <a:lnL w="12700" cap="flat" cmpd="sng" algn="ctr">
-                      <a:solidFill>
-                        <a:srgbClr val="DADCE0"/>
-                      </a:solidFill>
-                      <a:prstDash val="solid"/>
-                      <a:round/>
-                      <a:headEnd type="none" w="med" len="med"/>
-                      <a:tailEnd type="none" w="med" len="med"/>
-                    </a:lnL>
-                    <a:lnR w="12700" cap="flat" cmpd="sng" algn="ctr">
-                      <a:solidFill>
-                        <a:srgbClr val="DADCE0"/>
-                      </a:solidFill>
-                      <a:prstDash val="solid"/>
-                      <a:round/>
-                      <a:headEnd type="none" w="med" len="med"/>
-                      <a:tailEnd type="none" w="med" len="med"/>
-                    </a:lnR>
-                    <a:lnT w="12700" cap="flat" cmpd="sng" algn="ctr">
-                      <a:solidFill>
-                        <a:srgbClr val="DADCE0"/>
-                      </a:solidFill>
-                      <a:prstDash val="solid"/>
-                      <a:round/>
-                      <a:headEnd type="none" w="med" len="med"/>
-                      <a:tailEnd type="none" w="med" len="med"/>
-                    </a:lnT>
-                    <a:lnB w="12700" cap="flat" cmpd="sng" algn="ctr">
-                      <a:solidFill>
-                        <a:srgbClr val="DADCE0"/>
-                      </a:solidFill>
-                      <a:prstDash val="solid"/>
-                      <a:round/>
-                      <a:headEnd type="none" w="med" len="med"/>
-                      <a:tailEnd type="none" w="med" len="med"/>
-                    </a:lnB>
-                    <a:solidFill>
-                      <a:srgbClr val="FFFFFF"/>
-                    </a:solidFill>
-                  </a:tcPr>
-                </a:tc>
-                <a:tc>
-                  <a:txBody>
-                    <a:bodyPr/>
-                    <a:lstStyle/>
-                    <a:p>
-                      <a:pPr algn="l" indent="0" marL="0">
-                        <a:buNone/>
-                      </a:pPr>
-                      <a:r>
-                        <a:rPr lang="en-US" sz="1400" dirty="0">
-                          <a:solidFill>
-                            <a:srgbClr val="202124"/>
-                          </a:solidFill>
-                        </a:rPr>
-                        <a:t>Regular search friction for paper expenses &amp; vacation moments</a:t>
+                        <a:t>Document Retrieval Need</a:t>
+                      </a:r>
+                      <a:endParaRPr lang="en-US" sz="1400" dirty="0"/>
+                    </a:p>
+                  </a:txBody>
+                  <a:tcPr marL="91440" marR="91440" marT="45720" marB="45720" anchor="ctr">
+                    <a:lnL w="12700" cap="flat" cmpd="sng" algn="ctr">
+                      <a:solidFill>
+                        <a:srgbClr val="DADCE0"/>
+                      </a:solidFill>
+                      <a:prstDash val="solid"/>
+                      <a:round/>
+                      <a:headEnd type="none" w="med" len="med"/>
+                      <a:tailEnd type="none" w="med" len="med"/>
+                    </a:lnL>
+                    <a:lnR w="12700" cap="flat" cmpd="sng" algn="ctr">
+                      <a:solidFill>
+                        <a:srgbClr val="DADCE0"/>
+                      </a:solidFill>
+                      <a:prstDash val="solid"/>
+                      <a:round/>
+                      <a:headEnd type="none" w="med" len="med"/>
+                      <a:tailEnd type="none" w="med" len="med"/>
+                    </a:lnR>
+                    <a:lnT w="12700" cap="flat" cmpd="sng" algn="ctr">
+                      <a:solidFill>
+                        <a:srgbClr val="DADCE0"/>
+                      </a:solidFill>
+                      <a:prstDash val="solid"/>
+                      <a:round/>
+                      <a:headEnd type="none" w="med" len="med"/>
+                      <a:tailEnd type="none" w="med" len="med"/>
+                    </a:lnT>
+                    <a:lnB w="12700" cap="flat" cmpd="sng" algn="ctr">
+                      <a:solidFill>
+                        <a:srgbClr val="DADCE0"/>
+                      </a:solidFill>
+                      <a:prstDash val="solid"/>
+                      <a:round/>
+                      <a:headEnd type="none" w="med" len="med"/>
+                      <a:tailEnd type="none" w="med" len="med"/>
+                    </a:lnB>
+                    <a:solidFill>
+                      <a:srgbClr val="FFFFFF"/>
+                    </a:solidFill>
+                  </a:tcPr>
+                </a:tc>
+                <a:tc>
+                  <a:txBody>
+                    <a:bodyPr/>
+                    <a:lstStyle/>
+                    <a:p>
+                      <a:pPr algn="l" indent="0" marL="0">
+                        <a:buNone/>
+                      </a:pPr>
+                      <a:r>
+                        <a:rPr lang="en-US" sz="1400" dirty="0">
+                          <a:solidFill>
+                            <a:srgbClr val="202124"/>
+                          </a:solidFill>
+                        </a:rPr>
+                        <a:t>High financial/legal urgency</a:t>
+                      </a:r>
+                      <a:endParaRPr lang="en-US" sz="1400" dirty="0"/>
+                    </a:p>
+                  </a:txBody>
+                  <a:tcPr marL="91440" marR="91440" marT="45720" marB="45720" anchor="ctr">
+                    <a:lnL w="12700" cap="flat" cmpd="sng" algn="ctr">
+                      <a:solidFill>
+                        <a:srgbClr val="DADCE0"/>
+                      </a:solidFill>
+                      <a:prstDash val="solid"/>
+                      <a:round/>
+                      <a:headEnd type="none" w="med" len="med"/>
+                      <a:tailEnd type="none" w="med" len="med"/>
+                    </a:lnL>
+                    <a:lnR w="12700" cap="flat" cmpd="sng" algn="ctr">
+                      <a:solidFill>
+                        <a:srgbClr val="DADCE0"/>
+                      </a:solidFill>
+                      <a:prstDash val="solid"/>
+                      <a:round/>
+                      <a:headEnd type="none" w="med" len="med"/>
+                      <a:tailEnd type="none" w="med" len="med"/>
+                    </a:lnR>
+                    <a:lnT w="12700" cap="flat" cmpd="sng" algn="ctr">
+                      <a:solidFill>
+                        <a:srgbClr val="DADCE0"/>
+                      </a:solidFill>
+                      <a:prstDash val="solid"/>
+                      <a:round/>
+                      <a:headEnd type="none" w="med" len="med"/>
+                      <a:tailEnd type="none" w="med" len="med"/>
+                    </a:lnT>
+                    <a:lnB w="12700" cap="flat" cmpd="sng" algn="ctr">
+                      <a:solidFill>
+                        <a:srgbClr val="DADCE0"/>
+                      </a:solidFill>
+                      <a:prstDash val="solid"/>
+                      <a:round/>
+                      <a:headEnd type="none" w="med" len="med"/>
+                      <a:tailEnd type="none" w="med" len="med"/>
+                    </a:lnB>
+                    <a:solidFill>
+                      <a:srgbClr val="FFFFFF"/>
+                    </a:solidFill>
+                  </a:tcPr>
+                </a:tc>
+                <a:tc>
+                  <a:txBody>
+                    <a:bodyPr/>
+                    <a:lstStyle/>
+                    <a:p>
+                      <a:pPr algn="l" indent="0" marL="0">
+                        <a:buNone/>
+                      </a:pPr>
+                      <a:r>
+                        <a:rPr lang="en-US" sz="1400" dirty="0">
+                          <a:solidFill>
+                            <a:srgbClr val="202124"/>
+                          </a:solidFill>
+                        </a:rPr>
+                        <a:t>58.8% (20 / 34 users)</a:t>
+                      </a:r>
+                      <a:endParaRPr lang="en-US" sz="1400" dirty="0"/>
+                    </a:p>
+                  </a:txBody>
+                  <a:tcPr marL="91440" marR="91440" marT="45720" marB="45720" anchor="ctr">
+                    <a:lnL w="12700" cap="flat" cmpd="sng" algn="ctr">
+                      <a:solidFill>
+                        <a:srgbClr val="DADCE0"/>
+                      </a:solidFill>
+                      <a:prstDash val="solid"/>
+                      <a:round/>
+                      <a:headEnd type="none" w="med" len="med"/>
+                      <a:tailEnd type="none" w="med" len="med"/>
+                    </a:lnL>
+                    <a:lnR w="12700" cap="flat" cmpd="sng" algn="ctr">
+                      <a:solidFill>
+                        <a:srgbClr val="DADCE0"/>
+                      </a:solidFill>
+                      <a:prstDash val="solid"/>
+                      <a:round/>
+                      <a:headEnd type="none" w="med" len="med"/>
+                      <a:tailEnd type="none" w="med" len="med"/>
+                    </a:lnR>
+                    <a:lnT w="12700" cap="flat" cmpd="sng" algn="ctr">
+                      <a:solidFill>
+                        <a:srgbClr val="DADCE0"/>
+                      </a:solidFill>
+                      <a:prstDash val="solid"/>
+                      <a:round/>
+                      <a:headEnd type="none" w="med" len="med"/>
+                      <a:tailEnd type="none" w="med" len="med"/>
+                    </a:lnT>
+                    <a:lnB w="12700" cap="flat" cmpd="sng" algn="ctr">
+                      <a:solidFill>
+                        <a:srgbClr val="DADCE0"/>
+                      </a:solidFill>
+                      <a:prstDash val="solid"/>
+                      <a:round/>
+                      <a:headEnd type="none" w="med" len="med"/>
+                      <a:tailEnd type="none" w="med" len="med"/>
+                    </a:lnB>
+                    <a:solidFill>
+                      <a:srgbClr val="FFFFFF"/>
+                    </a:solidFill>
+                  </a:tcPr>
+                </a:tc>
+                <a:tc>
+                  <a:txBody>
+                    <a:bodyPr/>
+                    <a:lstStyle/>
+                    <a:p>
+                      <a:pPr algn="l" indent="0" marL="0">
+                        <a:buNone/>
+                      </a:pPr>
+                      <a:r>
+                        <a:rPr lang="en-US" sz="1400" dirty="0">
+                          <a:solidFill>
+                            <a:srgbClr val="202124"/>
+                          </a:solidFill>
+                        </a:rPr>
+                        <a:t>58.8% search for un-tagged paper receipts, tax scans, and expense bills</a:t>
                       </a:r>
                       <a:endParaRPr lang="en-US" sz="1400" dirty="0"/>
                     </a:p>
@@ -10773,190 +11140,190 @@
                             <a:srgbClr val="202124"/>
                           </a:solidFill>
                         </a:rPr>
-                        <a:t>Document Retrieval Need</a:t>
-                      </a:r>
-                      <a:endParaRPr lang="en-US" sz="1400" dirty="0"/>
-                    </a:p>
-                  </a:txBody>
-                  <a:tcPr marL="91440" marR="91440" marT="45720" marB="45720" anchor="ctr">
-                    <a:lnL w="12700" cap="flat" cmpd="sng" algn="ctr">
-                      <a:solidFill>
-                        <a:srgbClr val="DADCE0"/>
-                      </a:solidFill>
-                      <a:prstDash val="solid"/>
-                      <a:round/>
-                      <a:headEnd type="none" w="med" len="med"/>
-                      <a:tailEnd type="none" w="med" len="med"/>
-                    </a:lnL>
-                    <a:lnR w="12700" cap="flat" cmpd="sng" algn="ctr">
-                      <a:solidFill>
-                        <a:srgbClr val="DADCE0"/>
-                      </a:solidFill>
-                      <a:prstDash val="solid"/>
-                      <a:round/>
-                      <a:headEnd type="none" w="med" len="med"/>
-                      <a:tailEnd type="none" w="med" len="med"/>
-                    </a:lnR>
-                    <a:lnT w="12700" cap="flat" cmpd="sng" algn="ctr">
-                      <a:solidFill>
-                        <a:srgbClr val="DADCE0"/>
-                      </a:solidFill>
-                      <a:prstDash val="solid"/>
-                      <a:round/>
-                      <a:headEnd type="none" w="med" len="med"/>
-                      <a:tailEnd type="none" w="med" len="med"/>
-                    </a:lnT>
-                    <a:lnB w="12700" cap="flat" cmpd="sng" algn="ctr">
-                      <a:solidFill>
-                        <a:srgbClr val="DADCE0"/>
-                      </a:solidFill>
-                      <a:prstDash val="solid"/>
-                      <a:round/>
-                      <a:headEnd type="none" w="med" len="med"/>
-                      <a:tailEnd type="none" w="med" len="med"/>
-                    </a:lnB>
-                    <a:solidFill>
-                      <a:srgbClr val="FFFFFF"/>
-                    </a:solidFill>
-                  </a:tcPr>
-                </a:tc>
-                <a:tc>
-                  <a:txBody>
-                    <a:bodyPr/>
-                    <a:lstStyle/>
-                    <a:p>
-                      <a:pPr algn="l" indent="0" marL="0">
-                        <a:buNone/>
-                      </a:pPr>
-                      <a:r>
-                        <a:rPr lang="en-US" sz="1400" dirty="0">
-                          <a:solidFill>
-                            <a:srgbClr val="202124"/>
-                          </a:solidFill>
-                        </a:rPr>
-                        <a:t>High financial/legal urgency</a:t>
-                      </a:r>
-                      <a:endParaRPr lang="en-US" sz="1400" dirty="0"/>
-                    </a:p>
-                  </a:txBody>
-                  <a:tcPr marL="91440" marR="91440" marT="45720" marB="45720" anchor="ctr">
-                    <a:lnL w="12700" cap="flat" cmpd="sng" algn="ctr">
-                      <a:solidFill>
-                        <a:srgbClr val="DADCE0"/>
-                      </a:solidFill>
-                      <a:prstDash val="solid"/>
-                      <a:round/>
-                      <a:headEnd type="none" w="med" len="med"/>
-                      <a:tailEnd type="none" w="med" len="med"/>
-                    </a:lnL>
-                    <a:lnR w="12700" cap="flat" cmpd="sng" algn="ctr">
-                      <a:solidFill>
-                        <a:srgbClr val="DADCE0"/>
-                      </a:solidFill>
-                      <a:prstDash val="solid"/>
-                      <a:round/>
-                      <a:headEnd type="none" w="med" len="med"/>
-                      <a:tailEnd type="none" w="med" len="med"/>
-                    </a:lnR>
-                    <a:lnT w="12700" cap="flat" cmpd="sng" algn="ctr">
-                      <a:solidFill>
-                        <a:srgbClr val="DADCE0"/>
-                      </a:solidFill>
-                      <a:prstDash val="solid"/>
-                      <a:round/>
-                      <a:headEnd type="none" w="med" len="med"/>
-                      <a:tailEnd type="none" w="med" len="med"/>
-                    </a:lnT>
-                    <a:lnB w="12700" cap="flat" cmpd="sng" algn="ctr">
-                      <a:solidFill>
-                        <a:srgbClr val="DADCE0"/>
-                      </a:solidFill>
-                      <a:prstDash val="solid"/>
-                      <a:round/>
-                      <a:headEnd type="none" w="med" len="med"/>
-                      <a:tailEnd type="none" w="med" len="med"/>
-                    </a:lnB>
-                    <a:solidFill>
-                      <a:srgbClr val="FFFFFF"/>
-                    </a:solidFill>
-                  </a:tcPr>
-                </a:tc>
-                <a:tc>
-                  <a:txBody>
-                    <a:bodyPr/>
-                    <a:lstStyle/>
-                    <a:p>
-                      <a:pPr algn="l" indent="0" marL="0">
-                        <a:buNone/>
-                      </a:pPr>
-                      <a:r>
-                        <a:rPr lang="en-US" sz="1400" dirty="0">
-                          <a:solidFill>
-                            <a:srgbClr val="202124"/>
-                          </a:solidFill>
-                        </a:rPr>
-                        <a:t>58.8% (20 / 34 users)</a:t>
-                      </a:r>
-                      <a:endParaRPr lang="en-US" sz="1400" dirty="0"/>
-                    </a:p>
-                  </a:txBody>
-                  <a:tcPr marL="91440" marR="91440" marT="45720" marB="45720" anchor="ctr">
-                    <a:lnL w="12700" cap="flat" cmpd="sng" algn="ctr">
-                      <a:solidFill>
-                        <a:srgbClr val="DADCE0"/>
-                      </a:solidFill>
-                      <a:prstDash val="solid"/>
-                      <a:round/>
-                      <a:headEnd type="none" w="med" len="med"/>
-                      <a:tailEnd type="none" w="med" len="med"/>
-                    </a:lnL>
-                    <a:lnR w="12700" cap="flat" cmpd="sng" algn="ctr">
-                      <a:solidFill>
-                        <a:srgbClr val="DADCE0"/>
-                      </a:solidFill>
-                      <a:prstDash val="solid"/>
-                      <a:round/>
-                      <a:headEnd type="none" w="med" len="med"/>
-                      <a:tailEnd type="none" w="med" len="med"/>
-                    </a:lnR>
-                    <a:lnT w="12700" cap="flat" cmpd="sng" algn="ctr">
-                      <a:solidFill>
-                        <a:srgbClr val="DADCE0"/>
-                      </a:solidFill>
-                      <a:prstDash val="solid"/>
-                      <a:round/>
-                      <a:headEnd type="none" w="med" len="med"/>
-                      <a:tailEnd type="none" w="med" len="med"/>
-                    </a:lnT>
-                    <a:lnB w="12700" cap="flat" cmpd="sng" algn="ctr">
-                      <a:solidFill>
-                        <a:srgbClr val="DADCE0"/>
-                      </a:solidFill>
-                      <a:prstDash val="solid"/>
-                      <a:round/>
-                      <a:headEnd type="none" w="med" len="med"/>
-                      <a:tailEnd type="none" w="med" len="med"/>
-                    </a:lnB>
-                    <a:solidFill>
-                      <a:srgbClr val="FFFFFF"/>
-                    </a:solidFill>
-                  </a:tcPr>
-                </a:tc>
-                <a:tc>
-                  <a:txBody>
-                    <a:bodyPr/>
-                    <a:lstStyle/>
-                    <a:p>
-                      <a:pPr algn="l" indent="0" marL="0">
-                        <a:buNone/>
-                      </a:pPr>
-                      <a:r>
-                        <a:rPr lang="en-US" sz="1400" dirty="0">
-                          <a:solidFill>
-                            <a:srgbClr val="202124"/>
-                          </a:solidFill>
-                        </a:rPr>
-                        <a:t>Time-sensitive tax, warranty, and expense reimbursement filings</a:t>
+                        <a:t>Vague Search Frequency</a:t>
+                      </a:r>
+                      <a:endParaRPr lang="en-US" sz="1400" dirty="0"/>
+                    </a:p>
+                  </a:txBody>
+                  <a:tcPr marL="91440" marR="91440" marT="45720" marB="45720" anchor="ctr">
+                    <a:lnL w="12700" cap="flat" cmpd="sng" algn="ctr">
+                      <a:solidFill>
+                        <a:srgbClr val="DADCE0"/>
+                      </a:solidFill>
+                      <a:prstDash val="solid"/>
+                      <a:round/>
+                      <a:headEnd type="none" w="med" len="med"/>
+                      <a:tailEnd type="none" w="med" len="med"/>
+                    </a:lnL>
+                    <a:lnR w="12700" cap="flat" cmpd="sng" algn="ctr">
+                      <a:solidFill>
+                        <a:srgbClr val="DADCE0"/>
+                      </a:solidFill>
+                      <a:prstDash val="solid"/>
+                      <a:round/>
+                      <a:headEnd type="none" w="med" len="med"/>
+                      <a:tailEnd type="none" w="med" len="med"/>
+                    </a:lnR>
+                    <a:lnT w="12700" cap="flat" cmpd="sng" algn="ctr">
+                      <a:solidFill>
+                        <a:srgbClr val="DADCE0"/>
+                      </a:solidFill>
+                      <a:prstDash val="solid"/>
+                      <a:round/>
+                      <a:headEnd type="none" w="med" len="med"/>
+                      <a:tailEnd type="none" w="med" len="med"/>
+                    </a:lnT>
+                    <a:lnB w="12700" cap="flat" cmpd="sng" algn="ctr">
+                      <a:solidFill>
+                        <a:srgbClr val="DADCE0"/>
+                      </a:solidFill>
+                      <a:prstDash val="solid"/>
+                      <a:round/>
+                      <a:headEnd type="none" w="med" len="med"/>
+                      <a:tailEnd type="none" w="med" len="med"/>
+                    </a:lnB>
+                    <a:solidFill>
+                      <a:srgbClr val="FFFFFF"/>
+                    </a:solidFill>
+                  </a:tcPr>
+                </a:tc>
+                <a:tc>
+                  <a:txBody>
+                    <a:bodyPr/>
+                    <a:lstStyle/>
+                    <a:p>
+                      <a:pPr algn="l" indent="0" marL="0">
+                        <a:buNone/>
+                      </a:pPr>
+                      <a:r>
+                        <a:rPr lang="en-US" sz="1400" dirty="0">
+                          <a:solidFill>
+                            <a:srgbClr val="202124"/>
+                          </a:solidFill>
+                        </a:rPr>
+                        <a:t>4 to 8 attempts / month</a:t>
+                      </a:r>
+                      <a:endParaRPr lang="en-US" sz="1400" dirty="0"/>
+                    </a:p>
+                  </a:txBody>
+                  <a:tcPr marL="91440" marR="91440" marT="45720" marB="45720" anchor="ctr">
+                    <a:lnL w="12700" cap="flat" cmpd="sng" algn="ctr">
+                      <a:solidFill>
+                        <a:srgbClr val="DADCE0"/>
+                      </a:solidFill>
+                      <a:prstDash val="solid"/>
+                      <a:round/>
+                      <a:headEnd type="none" w="med" len="med"/>
+                      <a:tailEnd type="none" w="med" len="med"/>
+                    </a:lnL>
+                    <a:lnR w="12700" cap="flat" cmpd="sng" algn="ctr">
+                      <a:solidFill>
+                        <a:srgbClr val="DADCE0"/>
+                      </a:solidFill>
+                      <a:prstDash val="solid"/>
+                      <a:round/>
+                      <a:headEnd type="none" w="med" len="med"/>
+                      <a:tailEnd type="none" w="med" len="med"/>
+                    </a:lnR>
+                    <a:lnT w="12700" cap="flat" cmpd="sng" algn="ctr">
+                      <a:solidFill>
+                        <a:srgbClr val="DADCE0"/>
+                      </a:solidFill>
+                      <a:prstDash val="solid"/>
+                      <a:round/>
+                      <a:headEnd type="none" w="med" len="med"/>
+                      <a:tailEnd type="none" w="med" len="med"/>
+                    </a:lnT>
+                    <a:lnB w="12700" cap="flat" cmpd="sng" algn="ctr">
+                      <a:solidFill>
+                        <a:srgbClr val="DADCE0"/>
+                      </a:solidFill>
+                      <a:prstDash val="solid"/>
+                      <a:round/>
+                      <a:headEnd type="none" w="med" len="med"/>
+                      <a:tailEnd type="none" w="med" len="med"/>
+                    </a:lnB>
+                    <a:solidFill>
+                      <a:srgbClr val="FFFFFF"/>
+                    </a:solidFill>
+                  </a:tcPr>
+                </a:tc>
+                <a:tc>
+                  <a:txBody>
+                    <a:bodyPr/>
+                    <a:lstStyle/>
+                    <a:p>
+                      <a:pPr algn="l" indent="0" marL="0">
+                        <a:buNone/>
+                      </a:pPr>
+                      <a:r>
+                        <a:rPr lang="en-US" sz="1400" dirty="0">
+                          <a:solidFill>
+                            <a:srgbClr val="202124"/>
+                          </a:solidFill>
+                        </a:rPr>
+                        <a:t>70.6% (24 / 34 users)</a:t>
+                      </a:r>
+                      <a:endParaRPr lang="en-US" sz="1400" dirty="0"/>
+                    </a:p>
+                  </a:txBody>
+                  <a:tcPr marL="91440" marR="91440" marT="45720" marB="45720" anchor="ctr">
+                    <a:lnL w="12700" cap="flat" cmpd="sng" algn="ctr">
+                      <a:solidFill>
+                        <a:srgbClr val="DADCE0"/>
+                      </a:solidFill>
+                      <a:prstDash val="solid"/>
+                      <a:round/>
+                      <a:headEnd type="none" w="med" len="med"/>
+                      <a:tailEnd type="none" w="med" len="med"/>
+                    </a:lnL>
+                    <a:lnR w="12700" cap="flat" cmpd="sng" algn="ctr">
+                      <a:solidFill>
+                        <a:srgbClr val="DADCE0"/>
+                      </a:solidFill>
+                      <a:prstDash val="solid"/>
+                      <a:round/>
+                      <a:headEnd type="none" w="med" len="med"/>
+                      <a:tailEnd type="none" w="med" len="med"/>
+                    </a:lnR>
+                    <a:lnT w="12700" cap="flat" cmpd="sng" algn="ctr">
+                      <a:solidFill>
+                        <a:srgbClr val="DADCE0"/>
+                      </a:solidFill>
+                      <a:prstDash val="solid"/>
+                      <a:round/>
+                      <a:headEnd type="none" w="med" len="med"/>
+                      <a:tailEnd type="none" w="med" len="med"/>
+                    </a:lnT>
+                    <a:lnB w="12700" cap="flat" cmpd="sng" algn="ctr">
+                      <a:solidFill>
+                        <a:srgbClr val="DADCE0"/>
+                      </a:solidFill>
+                      <a:prstDash val="solid"/>
+                      <a:round/>
+                      <a:headEnd type="none" w="med" len="med"/>
+                      <a:tailEnd type="none" w="med" len="med"/>
+                    </a:lnB>
+                    <a:solidFill>
+                      <a:srgbClr val="FFFFFF"/>
+                    </a:solidFill>
+                  </a:tcPr>
+                </a:tc>
+                <a:tc>
+                  <a:txBody>
+                    <a:bodyPr/>
+                    <a:lstStyle/>
+                    <a:p>
+                      <a:pPr algn="l" indent="0" marL="0">
+                        <a:buNone/>
+                      </a:pPr>
+                      <a:r>
+                        <a:rPr lang="en-US" sz="1400" dirty="0">
+                          <a:solidFill>
+                            <a:srgbClr val="202124"/>
+                          </a:solidFill>
+                        </a:rPr>
+                        <a:t>70.6% experience regular search failure attempting 4-8 vague queries/mo</a:t>
                       </a:r>
                       <a:endParaRPr lang="en-US" sz="1400" dirty="0"/>
                     </a:p>
@@ -11080,7 +11447,7 @@
                             <a:srgbClr val="202124"/>
                           </a:solidFill>
                         </a:rPr>
-                        <a:t>Raw N=34 Google Sheet Data</a:t>
+                        <a:t>Raw N=34 Google Sheet</a:t>
                       </a:r>
                       <a:endParaRPr lang="en-US" sz="1400" dirty="0"/>
                     </a:p>
@@ -11377,7 +11744,7 @@
                   <a:srgbClr val="1A73E8"/>
                 </a:solidFill>
               </a:rPr>
-              <a:t>5. CHOSEN TARGET SEGMENT</a:t>
+              <a:t>5. TARGET SEGMENT SELECTION &amp; PERSONA</a:t>
             </a:r>
             <a:endParaRPr lang="en-US" sz="1400" dirty="0"/>
           </a:p>
@@ -11413,7 +11780,7 @@
                   <a:srgbClr val="202124"/>
                 </a:solidFill>
               </a:rPr>
-              <a:t>Targeting Active Multi-Year Mobile Archivers Searching High-Urgency Media</a:t>
+              <a:t>Targeting High-Volume Archivers (5,000+ Items) Facing Critical Document Retrieval Failure</a:t>
             </a:r>
             <a:endParaRPr lang="en-US" sz="2000" dirty="0"/>
           </a:p>
@@ -11449,7 +11816,7 @@
                   <a:srgbClr val="1A73E8"/>
                 </a:solidFill>
               </a:rPr>
-              <a:t>User Persona Segmentation &amp; High-Value Friction Focus</a:t>
+              <a:t>Behavioral Persona Segmentation Matrix &amp; High-Value Friction Quantification</a:t>
             </a:r>
             <a:endParaRPr lang="en-US" sz="1500" dirty="0"/>
           </a:p>
@@ -11478,9 +11845,10 @@
             <a:tbl>
               <a:tblPr/>
               <a:tblGrid>
-                <a:gridCol w="2286000"/>
-                <a:gridCol w="3840480"/>
-                <a:gridCol w="3017520"/>
+                <a:gridCol w="1828800"/>
+                <a:gridCol w="2468880"/>
+                <a:gridCol w="2103120"/>
+                <a:gridCol w="1828800"/>
               </a:tblGrid>
               <a:tr h="0">
                 <a:tc>
@@ -11558,7 +11926,7 @@
                             <a:srgbClr val="1A73E8"/>
                           </a:solidFill>
                         </a:rPr>
-                        <a:t>High-Volume Personal Archivers (CHOSEN TARGET)</a:t>
+                        <a:t>High-Volume Archivers (CHOSEN TARGET)</a:t>
                       </a:r>
                       <a:endParaRPr lang="en-US" sz="1400" dirty="0"/>
                     </a:p>
@@ -11620,6 +11988,67 @@
                           </a:solidFill>
                         </a:rPr>
                         <a:t>Casual Snapshot Users (Excluded)</a:t>
+                      </a:r>
+                      <a:endParaRPr lang="en-US" sz="1400" dirty="0"/>
+                    </a:p>
+                  </a:txBody>
+                  <a:tcPr marL="91440" marR="91440" marT="45720" marB="45720" anchor="ctr">
+                    <a:lnL w="12700" cap="flat" cmpd="sng" algn="ctr">
+                      <a:solidFill>
+                        <a:srgbClr val="DADCE0"/>
+                      </a:solidFill>
+                      <a:prstDash val="solid"/>
+                      <a:round/>
+                      <a:headEnd type="none" w="med" len="med"/>
+                      <a:tailEnd type="none" w="med" len="med"/>
+                    </a:lnL>
+                    <a:lnR w="12700" cap="flat" cmpd="sng" algn="ctr">
+                      <a:solidFill>
+                        <a:srgbClr val="DADCE0"/>
+                      </a:solidFill>
+                      <a:prstDash val="solid"/>
+                      <a:round/>
+                      <a:headEnd type="none" w="med" len="med"/>
+                      <a:tailEnd type="none" w="med" len="med"/>
+                    </a:lnR>
+                    <a:lnT w="12700" cap="flat" cmpd="sng" algn="ctr">
+                      <a:solidFill>
+                        <a:srgbClr val="DADCE0"/>
+                      </a:solidFill>
+                      <a:prstDash val="solid"/>
+                      <a:round/>
+                      <a:headEnd type="none" w="med" len="med"/>
+                      <a:tailEnd type="none" w="med" len="med"/>
+                    </a:lnT>
+                    <a:lnB w="12700" cap="flat" cmpd="sng" algn="ctr">
+                      <a:solidFill>
+                        <a:srgbClr val="DADCE0"/>
+                      </a:solidFill>
+                      <a:prstDash val="solid"/>
+                      <a:round/>
+                      <a:headEnd type="none" w="med" len="med"/>
+                      <a:tailEnd type="none" w="med" len="med"/>
+                    </a:lnB>
+                    <a:solidFill>
+                      <a:srgbClr val="E8F0FE"/>
+                    </a:solidFill>
+                  </a:tcPr>
+                </a:tc>
+                <a:tc>
+                  <a:txBody>
+                    <a:bodyPr/>
+                    <a:lstStyle/>
+                    <a:p>
+                      <a:pPr algn="l" indent="0" marL="0">
+                        <a:buNone/>
+                      </a:pPr>
+                      <a:r>
+                        <a:rPr lang="en-US" sz="1400" b="1" dirty="0">
+                          <a:solidFill>
+                            <a:srgbClr val="1A73E8"/>
+                          </a:solidFill>
+                        </a:rPr>
+                        <a:t>Segment Data Justification</a:t>
                       </a:r>
                       <a:endParaRPr lang="en-US" sz="1400" dirty="0"/>
                     </a:p>
@@ -11743,7 +12172,7 @@
                             <a:srgbClr val="202124"/>
                           </a:solidFill>
                         </a:rPr>
-                        <a:t>5,000+ personal photos &amp; document scans across 3+ years</a:t>
+                        <a:t>5,000+ photos &amp; document scans across 3+ years</a:t>
                       </a:r>
                       <a:endParaRPr lang="en-US" sz="1400" dirty="0"/>
                     </a:p>
@@ -11805,6 +12234,67 @@
                           </a:solidFill>
                         </a:rPr>
                         <a:t>&lt; 1,000 recent photos</a:t>
+                      </a:r>
+                      <a:endParaRPr lang="en-US" sz="1400" dirty="0"/>
+                    </a:p>
+                  </a:txBody>
+                  <a:tcPr marL="91440" marR="91440" marT="45720" marB="45720" anchor="ctr">
+                    <a:lnL w="12700" cap="flat" cmpd="sng" algn="ctr">
+                      <a:solidFill>
+                        <a:srgbClr val="DADCE0"/>
+                      </a:solidFill>
+                      <a:prstDash val="solid"/>
+                      <a:round/>
+                      <a:headEnd type="none" w="med" len="med"/>
+                      <a:tailEnd type="none" w="med" len="med"/>
+                    </a:lnL>
+                    <a:lnR w="12700" cap="flat" cmpd="sng" algn="ctr">
+                      <a:solidFill>
+                        <a:srgbClr val="DADCE0"/>
+                      </a:solidFill>
+                      <a:prstDash val="solid"/>
+                      <a:round/>
+                      <a:headEnd type="none" w="med" len="med"/>
+                      <a:tailEnd type="none" w="med" len="med"/>
+                    </a:lnR>
+                    <a:lnT w="12700" cap="flat" cmpd="sng" algn="ctr">
+                      <a:solidFill>
+                        <a:srgbClr val="DADCE0"/>
+                      </a:solidFill>
+                      <a:prstDash val="solid"/>
+                      <a:round/>
+                      <a:headEnd type="none" w="med" len="med"/>
+                      <a:tailEnd type="none" w="med" len="med"/>
+                    </a:lnT>
+                    <a:lnB w="12700" cap="flat" cmpd="sng" algn="ctr">
+                      <a:solidFill>
+                        <a:srgbClr val="DADCE0"/>
+                      </a:solidFill>
+                      <a:prstDash val="solid"/>
+                      <a:round/>
+                      <a:headEnd type="none" w="med" len="med"/>
+                      <a:tailEnd type="none" w="med" len="med"/>
+                    </a:lnB>
+                    <a:solidFill>
+                      <a:srgbClr val="FFFFFF"/>
+                    </a:solidFill>
+                  </a:tcPr>
+                </a:tc>
+                <a:tc>
+                  <a:txBody>
+                    <a:bodyPr/>
+                    <a:lstStyle/>
+                    <a:p>
+                      <a:pPr algn="l" indent="0" marL="0">
+                        <a:buNone/>
+                      </a:pPr>
+                      <a:r>
+                        <a:rPr lang="en-US" sz="1400" dirty="0">
+                          <a:solidFill>
+                            <a:srgbClr val="202124"/>
+                          </a:solidFill>
+                        </a:rPr>
+                        <a:t>Grid scroll failure manifests at &gt;2,000 items</a:t>
                       </a:r>
                       <a:endParaRPr lang="en-US" sz="1400" dirty="0"/>
                     </a:p>
@@ -11928,68 +12418,129 @@
                             <a:srgbClr val="202124"/>
                           </a:solidFill>
                         </a:rPr>
-                        <a:t>4 to 8 vague memory search attempts per month</a:t>
-                      </a:r>
-                      <a:endParaRPr lang="en-US" sz="1400" dirty="0"/>
-                    </a:p>
-                  </a:txBody>
-                  <a:tcPr marL="91440" marR="91440" marT="45720" marB="45720" anchor="ctr">
-                    <a:lnL w="12700" cap="flat" cmpd="sng" algn="ctr">
-                      <a:solidFill>
-                        <a:srgbClr val="DADCE0"/>
-                      </a:solidFill>
-                      <a:prstDash val="solid"/>
-                      <a:round/>
-                      <a:headEnd type="none" w="med" len="med"/>
-                      <a:tailEnd type="none" w="med" len="med"/>
-                    </a:lnL>
-                    <a:lnR w="12700" cap="flat" cmpd="sng" algn="ctr">
-                      <a:solidFill>
-                        <a:srgbClr val="DADCE0"/>
-                      </a:solidFill>
-                      <a:prstDash val="solid"/>
-                      <a:round/>
-                      <a:headEnd type="none" w="med" len="med"/>
-                      <a:tailEnd type="none" w="med" len="med"/>
-                    </a:lnR>
-                    <a:lnT w="12700" cap="flat" cmpd="sng" algn="ctr">
-                      <a:solidFill>
-                        <a:srgbClr val="DADCE0"/>
-                      </a:solidFill>
-                      <a:prstDash val="solid"/>
-                      <a:round/>
-                      <a:headEnd type="none" w="med" len="med"/>
-                      <a:tailEnd type="none" w="med" len="med"/>
-                    </a:lnT>
-                    <a:lnB w="12700" cap="flat" cmpd="sng" algn="ctr">
-                      <a:solidFill>
-                        <a:srgbClr val="DADCE0"/>
-                      </a:solidFill>
-                      <a:prstDash val="solid"/>
-                      <a:round/>
-                      <a:headEnd type="none" w="med" len="med"/>
-                      <a:tailEnd type="none" w="med" len="med"/>
-                    </a:lnB>
-                    <a:solidFill>
-                      <a:srgbClr val="FFFFFF"/>
-                    </a:solidFill>
-                  </a:tcPr>
-                </a:tc>
-                <a:tc>
-                  <a:txBody>
-                    <a:bodyPr/>
-                    <a:lstStyle/>
-                    <a:p>
-                      <a:pPr algn="l" indent="0" marL="0">
-                        <a:buNone/>
-                      </a:pPr>
-                      <a:r>
-                        <a:rPr lang="en-US" sz="1400" dirty="0">
-                          <a:solidFill>
-                            <a:srgbClr val="202124"/>
-                          </a:solidFill>
-                        </a:rPr>
-                        <a:t>&lt; 1 search attempt per month</a:t>
+                        <a:t>4 to 8 vague memory search attempts / month</a:t>
+                      </a:r>
+                      <a:endParaRPr lang="en-US" sz="1400" dirty="0"/>
+                    </a:p>
+                  </a:txBody>
+                  <a:tcPr marL="91440" marR="91440" marT="45720" marB="45720" anchor="ctr">
+                    <a:lnL w="12700" cap="flat" cmpd="sng" algn="ctr">
+                      <a:solidFill>
+                        <a:srgbClr val="DADCE0"/>
+                      </a:solidFill>
+                      <a:prstDash val="solid"/>
+                      <a:round/>
+                      <a:headEnd type="none" w="med" len="med"/>
+                      <a:tailEnd type="none" w="med" len="med"/>
+                    </a:lnL>
+                    <a:lnR w="12700" cap="flat" cmpd="sng" algn="ctr">
+                      <a:solidFill>
+                        <a:srgbClr val="DADCE0"/>
+                      </a:solidFill>
+                      <a:prstDash val="solid"/>
+                      <a:round/>
+                      <a:headEnd type="none" w="med" len="med"/>
+                      <a:tailEnd type="none" w="med" len="med"/>
+                    </a:lnR>
+                    <a:lnT w="12700" cap="flat" cmpd="sng" algn="ctr">
+                      <a:solidFill>
+                        <a:srgbClr val="DADCE0"/>
+                      </a:solidFill>
+                      <a:prstDash val="solid"/>
+                      <a:round/>
+                      <a:headEnd type="none" w="med" len="med"/>
+                      <a:tailEnd type="none" w="med" len="med"/>
+                    </a:lnT>
+                    <a:lnB w="12700" cap="flat" cmpd="sng" algn="ctr">
+                      <a:solidFill>
+                        <a:srgbClr val="DADCE0"/>
+                      </a:solidFill>
+                      <a:prstDash val="solid"/>
+                      <a:round/>
+                      <a:headEnd type="none" w="med" len="med"/>
+                      <a:tailEnd type="none" w="med" len="med"/>
+                    </a:lnB>
+                    <a:solidFill>
+                      <a:srgbClr val="FFFFFF"/>
+                    </a:solidFill>
+                  </a:tcPr>
+                </a:tc>
+                <a:tc>
+                  <a:txBody>
+                    <a:bodyPr/>
+                    <a:lstStyle/>
+                    <a:p>
+                      <a:pPr algn="l" indent="0" marL="0">
+                        <a:buNone/>
+                      </a:pPr>
+                      <a:r>
+                        <a:rPr lang="en-US" sz="1400" dirty="0">
+                          <a:solidFill>
+                            <a:srgbClr val="202124"/>
+                          </a:solidFill>
+                        </a:rPr>
+                        <a:t>&lt; 1 vague query / month</a:t>
+                      </a:r>
+                      <a:endParaRPr lang="en-US" sz="1400" dirty="0"/>
+                    </a:p>
+                  </a:txBody>
+                  <a:tcPr marL="91440" marR="91440" marT="45720" marB="45720" anchor="ctr">
+                    <a:lnL w="12700" cap="flat" cmpd="sng" algn="ctr">
+                      <a:solidFill>
+                        <a:srgbClr val="DADCE0"/>
+                      </a:solidFill>
+                      <a:prstDash val="solid"/>
+                      <a:round/>
+                      <a:headEnd type="none" w="med" len="med"/>
+                      <a:tailEnd type="none" w="med" len="med"/>
+                    </a:lnL>
+                    <a:lnR w="12700" cap="flat" cmpd="sng" algn="ctr">
+                      <a:solidFill>
+                        <a:srgbClr val="DADCE0"/>
+                      </a:solidFill>
+                      <a:prstDash val="solid"/>
+                      <a:round/>
+                      <a:headEnd type="none" w="med" len="med"/>
+                      <a:tailEnd type="none" w="med" len="med"/>
+                    </a:lnR>
+                    <a:lnT w="12700" cap="flat" cmpd="sng" algn="ctr">
+                      <a:solidFill>
+                        <a:srgbClr val="DADCE0"/>
+                      </a:solidFill>
+                      <a:prstDash val="solid"/>
+                      <a:round/>
+                      <a:headEnd type="none" w="med" len="med"/>
+                      <a:tailEnd type="none" w="med" len="med"/>
+                    </a:lnT>
+                    <a:lnB w="12700" cap="flat" cmpd="sng" algn="ctr">
+                      <a:solidFill>
+                        <a:srgbClr val="DADCE0"/>
+                      </a:solidFill>
+                      <a:prstDash val="solid"/>
+                      <a:round/>
+                      <a:headEnd type="none" w="med" len="med"/>
+                      <a:tailEnd type="none" w="med" len="med"/>
+                    </a:lnB>
+                    <a:solidFill>
+                      <a:srgbClr val="FFFFFF"/>
+                    </a:solidFill>
+                  </a:tcPr>
+                </a:tc>
+                <a:tc>
+                  <a:txBody>
+                    <a:bodyPr/>
+                    <a:lstStyle/>
+                    <a:p>
+                      <a:pPr algn="l" indent="0" marL="0">
+                        <a:buNone/>
+                      </a:pPr>
+                      <a:r>
+                        <a:rPr lang="en-US" sz="1400" dirty="0">
+                          <a:solidFill>
+                            <a:srgbClr val="202124"/>
+                          </a:solidFill>
+                        </a:rPr>
+                        <a:t>70.6% of N=34 cohort fit high query velocity</a:t>
                       </a:r>
                       <a:endParaRPr lang="en-US" sz="1400" dirty="0"/>
                     </a:p>
@@ -12113,7 +12664,7 @@
                             <a:srgbClr val="202124"/>
                           </a:solidFill>
                         </a:rPr>
-                        <a:t>Expense receipts, paper bills, tax scans, vacation moments</a:t>
+                        <a:t>Paper bills, tax receipts, warranties, trip moments</a:t>
                       </a:r>
                       <a:endParaRPr lang="en-US" sz="1400" dirty="0"/>
                     </a:p>
@@ -12175,6 +12726,67 @@
                           </a:solidFill>
                         </a:rPr>
                         <a:t>Recent selfies &amp; casual pet photos</a:t>
+                      </a:r>
+                      <a:endParaRPr lang="en-US" sz="1400" dirty="0"/>
+                    </a:p>
+                  </a:txBody>
+                  <a:tcPr marL="91440" marR="91440" marT="45720" marB="45720" anchor="ctr">
+                    <a:lnL w="12700" cap="flat" cmpd="sng" algn="ctr">
+                      <a:solidFill>
+                        <a:srgbClr val="DADCE0"/>
+                      </a:solidFill>
+                      <a:prstDash val="solid"/>
+                      <a:round/>
+                      <a:headEnd type="none" w="med" len="med"/>
+                      <a:tailEnd type="none" w="med" len="med"/>
+                    </a:lnL>
+                    <a:lnR w="12700" cap="flat" cmpd="sng" algn="ctr">
+                      <a:solidFill>
+                        <a:srgbClr val="DADCE0"/>
+                      </a:solidFill>
+                      <a:prstDash val="solid"/>
+                      <a:round/>
+                      <a:headEnd type="none" w="med" len="med"/>
+                      <a:tailEnd type="none" w="med" len="med"/>
+                    </a:lnR>
+                    <a:lnT w="12700" cap="flat" cmpd="sng" algn="ctr">
+                      <a:solidFill>
+                        <a:srgbClr val="DADCE0"/>
+                      </a:solidFill>
+                      <a:prstDash val="solid"/>
+                      <a:round/>
+                      <a:headEnd type="none" w="med" len="med"/>
+                      <a:tailEnd type="none" w="med" len="med"/>
+                    </a:lnT>
+                    <a:lnB w="12700" cap="flat" cmpd="sng" algn="ctr">
+                      <a:solidFill>
+                        <a:srgbClr val="DADCE0"/>
+                      </a:solidFill>
+                      <a:prstDash val="solid"/>
+                      <a:round/>
+                      <a:headEnd type="none" w="med" len="med"/>
+                      <a:tailEnd type="none" w="med" len="med"/>
+                    </a:lnB>
+                    <a:solidFill>
+                      <a:srgbClr val="FFFFFF"/>
+                    </a:solidFill>
+                  </a:tcPr>
+                </a:tc>
+                <a:tc>
+                  <a:txBody>
+                    <a:bodyPr/>
+                    <a:lstStyle/>
+                    <a:p>
+                      <a:pPr algn="l" indent="0" marL="0">
+                        <a:buNone/>
+                      </a:pPr>
+                      <a:r>
+                        <a:rPr lang="en-US" sz="1400" dirty="0">
+                          <a:solidFill>
+                            <a:srgbClr val="202124"/>
+                          </a:solidFill>
+                        </a:rPr>
+                        <a:t>50.0% carry high financial/legal urgency</a:t>
                       </a:r>
                       <a:endParaRPr lang="en-US" sz="1400" dirty="0"/>
                     </a:p>
@@ -12237,129 +12849,190 @@
                             <a:srgbClr val="202124"/>
                           </a:solidFill>
                         </a:rPr>
-                        <a:t>Pain Point Intensity</a:t>
-                      </a:r>
-                      <a:endParaRPr lang="en-US" sz="1400" dirty="0"/>
-                    </a:p>
-                  </a:txBody>
-                  <a:tcPr marL="91440" marR="91440" marT="45720" marB="45720" anchor="ctr">
-                    <a:lnL w="12700" cap="flat" cmpd="sng" algn="ctr">
-                      <a:solidFill>
-                        <a:srgbClr val="DADCE0"/>
-                      </a:solidFill>
-                      <a:prstDash val="solid"/>
-                      <a:round/>
-                      <a:headEnd type="none" w="med" len="med"/>
-                      <a:tailEnd type="none" w="med" len="med"/>
-                    </a:lnL>
-                    <a:lnR w="12700" cap="flat" cmpd="sng" algn="ctr">
-                      <a:solidFill>
-                        <a:srgbClr val="DADCE0"/>
-                      </a:solidFill>
-                      <a:prstDash val="solid"/>
-                      <a:round/>
-                      <a:headEnd type="none" w="med" len="med"/>
-                      <a:tailEnd type="none" w="med" len="med"/>
-                    </a:lnR>
-                    <a:lnT w="12700" cap="flat" cmpd="sng" algn="ctr">
-                      <a:solidFill>
-                        <a:srgbClr val="DADCE0"/>
-                      </a:solidFill>
-                      <a:prstDash val="solid"/>
-                      <a:round/>
-                      <a:headEnd type="none" w="med" len="med"/>
-                      <a:tailEnd type="none" w="med" len="med"/>
-                    </a:lnT>
-                    <a:lnB w="12700" cap="flat" cmpd="sng" algn="ctr">
-                      <a:solidFill>
-                        <a:srgbClr val="DADCE0"/>
-                      </a:solidFill>
-                      <a:prstDash val="solid"/>
-                      <a:round/>
-                      <a:headEnd type="none" w="med" len="med"/>
-                      <a:tailEnd type="none" w="med" len="med"/>
-                    </a:lnB>
-                    <a:solidFill>
-                      <a:srgbClr val="FFFFFF"/>
-                    </a:solidFill>
-                  </a:tcPr>
-                </a:tc>
-                <a:tc>
-                  <a:txBody>
-                    <a:bodyPr/>
-                    <a:lstStyle/>
-                    <a:p>
-                      <a:pPr algn="l" indent="0" marL="0">
-                        <a:buNone/>
-                      </a:pPr>
-                      <a:r>
-                        <a:rPr lang="en-US" sz="1400" dirty="0">
-                          <a:solidFill>
-                            <a:srgbClr val="202124"/>
-                          </a:solidFill>
-                        </a:rPr>
-                        <a:t>Severe anxiety &amp; time loss during time-sensitive document retrieval</a:t>
-                      </a:r>
-                      <a:endParaRPr lang="en-US" sz="1400" dirty="0"/>
-                    </a:p>
-                  </a:txBody>
-                  <a:tcPr marL="91440" marR="91440" marT="45720" marB="45720" anchor="ctr">
-                    <a:lnL w="12700" cap="flat" cmpd="sng" algn="ctr">
-                      <a:solidFill>
-                        <a:srgbClr val="DADCE0"/>
-                      </a:solidFill>
-                      <a:prstDash val="solid"/>
-                      <a:round/>
-                      <a:headEnd type="none" w="med" len="med"/>
-                      <a:tailEnd type="none" w="med" len="med"/>
-                    </a:lnL>
-                    <a:lnR w="12700" cap="flat" cmpd="sng" algn="ctr">
-                      <a:solidFill>
-                        <a:srgbClr val="DADCE0"/>
-                      </a:solidFill>
-                      <a:prstDash val="solid"/>
-                      <a:round/>
-                      <a:headEnd type="none" w="med" len="med"/>
-                      <a:tailEnd type="none" w="med" len="med"/>
-                    </a:lnR>
-                    <a:lnT w="12700" cap="flat" cmpd="sng" algn="ctr">
-                      <a:solidFill>
-                        <a:srgbClr val="DADCE0"/>
-                      </a:solidFill>
-                      <a:prstDash val="solid"/>
-                      <a:round/>
-                      <a:headEnd type="none" w="med" len="med"/>
-                      <a:tailEnd type="none" w="med" len="med"/>
-                    </a:lnT>
-                    <a:lnB w="12700" cap="flat" cmpd="sng" algn="ctr">
-                      <a:solidFill>
-                        <a:srgbClr val="DADCE0"/>
-                      </a:solidFill>
-                      <a:prstDash val="solid"/>
-                      <a:round/>
-                      <a:headEnd type="none" w="med" len="med"/>
-                      <a:tailEnd type="none" w="med" len="med"/>
-                    </a:lnB>
-                    <a:solidFill>
-                      <a:srgbClr val="FFFFFF"/>
-                    </a:solidFill>
-                  </a:tcPr>
-                </a:tc>
-                <a:tc>
-                  <a:txBody>
-                    <a:bodyPr/>
-                    <a:lstStyle/>
-                    <a:p>
-                      <a:pPr algn="l" indent="0" marL="0">
-                        <a:buNone/>
-                      </a:pPr>
-                      <a:r>
-                        <a:rPr lang="en-US" sz="1400" dirty="0">
-                          <a:solidFill>
-                            <a:srgbClr val="202124"/>
-                          </a:solidFill>
-                        </a:rPr>
-                        <a:t>Low urgency / casual entertainment</a:t>
+                        <a:t>Search Friction Level</a:t>
+                      </a:r>
+                      <a:endParaRPr lang="en-US" sz="1400" dirty="0"/>
+                    </a:p>
+                  </a:txBody>
+                  <a:tcPr marL="91440" marR="91440" marT="45720" marB="45720" anchor="ctr">
+                    <a:lnL w="12700" cap="flat" cmpd="sng" algn="ctr">
+                      <a:solidFill>
+                        <a:srgbClr val="DADCE0"/>
+                      </a:solidFill>
+                      <a:prstDash val="solid"/>
+                      <a:round/>
+                      <a:headEnd type="none" w="med" len="med"/>
+                      <a:tailEnd type="none" w="med" len="med"/>
+                    </a:lnL>
+                    <a:lnR w="12700" cap="flat" cmpd="sng" algn="ctr">
+                      <a:solidFill>
+                        <a:srgbClr val="DADCE0"/>
+                      </a:solidFill>
+                      <a:prstDash val="solid"/>
+                      <a:round/>
+                      <a:headEnd type="none" w="med" len="med"/>
+                      <a:tailEnd type="none" w="med" len="med"/>
+                    </a:lnR>
+                    <a:lnT w="12700" cap="flat" cmpd="sng" algn="ctr">
+                      <a:solidFill>
+                        <a:srgbClr val="DADCE0"/>
+                      </a:solidFill>
+                      <a:prstDash val="solid"/>
+                      <a:round/>
+                      <a:headEnd type="none" w="med" len="med"/>
+                      <a:tailEnd type="none" w="med" len="med"/>
+                    </a:lnT>
+                    <a:lnB w="12700" cap="flat" cmpd="sng" algn="ctr">
+                      <a:solidFill>
+                        <a:srgbClr val="DADCE0"/>
+                      </a:solidFill>
+                      <a:prstDash val="solid"/>
+                      <a:round/>
+                      <a:headEnd type="none" w="med" len="med"/>
+                      <a:tailEnd type="none" w="med" len="med"/>
+                    </a:lnB>
+                    <a:solidFill>
+                      <a:srgbClr val="FFFFFF"/>
+                    </a:solidFill>
+                  </a:tcPr>
+                </a:tc>
+                <a:tc>
+                  <a:txBody>
+                    <a:bodyPr/>
+                    <a:lstStyle/>
+                    <a:p>
+                      <a:pPr algn="l" indent="0" marL="0">
+                        <a:buNone/>
+                      </a:pPr>
+                      <a:r>
+                        <a:rPr lang="en-US" sz="1400" dirty="0">
+                          <a:solidFill>
+                            <a:srgbClr val="202124"/>
+                          </a:solidFill>
+                        </a:rPr>
+                        <a:t>76.5% scroll fatigue cliff after 180s scrolling</a:t>
+                      </a:r>
+                      <a:endParaRPr lang="en-US" sz="1400" dirty="0"/>
+                    </a:p>
+                  </a:txBody>
+                  <a:tcPr marL="91440" marR="91440" marT="45720" marB="45720" anchor="ctr">
+                    <a:lnL w="12700" cap="flat" cmpd="sng" algn="ctr">
+                      <a:solidFill>
+                        <a:srgbClr val="DADCE0"/>
+                      </a:solidFill>
+                      <a:prstDash val="solid"/>
+                      <a:round/>
+                      <a:headEnd type="none" w="med" len="med"/>
+                      <a:tailEnd type="none" w="med" len="med"/>
+                    </a:lnL>
+                    <a:lnR w="12700" cap="flat" cmpd="sng" algn="ctr">
+                      <a:solidFill>
+                        <a:srgbClr val="DADCE0"/>
+                      </a:solidFill>
+                      <a:prstDash val="solid"/>
+                      <a:round/>
+                      <a:headEnd type="none" w="med" len="med"/>
+                      <a:tailEnd type="none" w="med" len="med"/>
+                    </a:lnR>
+                    <a:lnT w="12700" cap="flat" cmpd="sng" algn="ctr">
+                      <a:solidFill>
+                        <a:srgbClr val="DADCE0"/>
+                      </a:solidFill>
+                      <a:prstDash val="solid"/>
+                      <a:round/>
+                      <a:headEnd type="none" w="med" len="med"/>
+                      <a:tailEnd type="none" w="med" len="med"/>
+                    </a:lnT>
+                    <a:lnB w="12700" cap="flat" cmpd="sng" algn="ctr">
+                      <a:solidFill>
+                        <a:srgbClr val="DADCE0"/>
+                      </a:solidFill>
+                      <a:prstDash val="solid"/>
+                      <a:round/>
+                      <a:headEnd type="none" w="med" len="med"/>
+                      <a:tailEnd type="none" w="med" len="med"/>
+                    </a:lnB>
+                    <a:solidFill>
+                      <a:srgbClr val="FFFFFF"/>
+                    </a:solidFill>
+                  </a:tcPr>
+                </a:tc>
+                <a:tc>
+                  <a:txBody>
+                    <a:bodyPr/>
+                    <a:lstStyle/>
+                    <a:p>
+                      <a:pPr algn="l" indent="0" marL="0">
+                        <a:buNone/>
+                      </a:pPr>
+                      <a:r>
+                        <a:rPr lang="en-US" sz="1400" dirty="0">
+                          <a:solidFill>
+                            <a:srgbClr val="202124"/>
+                          </a:solidFill>
+                        </a:rPr>
+                        <a:t>Low friction / casual browsing</a:t>
+                      </a:r>
+                      <a:endParaRPr lang="en-US" sz="1400" dirty="0"/>
+                    </a:p>
+                  </a:txBody>
+                  <a:tcPr marL="91440" marR="91440" marT="45720" marB="45720" anchor="ctr">
+                    <a:lnL w="12700" cap="flat" cmpd="sng" algn="ctr">
+                      <a:solidFill>
+                        <a:srgbClr val="DADCE0"/>
+                      </a:solidFill>
+                      <a:prstDash val="solid"/>
+                      <a:round/>
+                      <a:headEnd type="none" w="med" len="med"/>
+                      <a:tailEnd type="none" w="med" len="med"/>
+                    </a:lnL>
+                    <a:lnR w="12700" cap="flat" cmpd="sng" algn="ctr">
+                      <a:solidFill>
+                        <a:srgbClr val="DADCE0"/>
+                      </a:solidFill>
+                      <a:prstDash val="solid"/>
+                      <a:round/>
+                      <a:headEnd type="none" w="med" len="med"/>
+                      <a:tailEnd type="none" w="med" len="med"/>
+                    </a:lnR>
+                    <a:lnT w="12700" cap="flat" cmpd="sng" algn="ctr">
+                      <a:solidFill>
+                        <a:srgbClr val="DADCE0"/>
+                      </a:solidFill>
+                      <a:prstDash val="solid"/>
+                      <a:round/>
+                      <a:headEnd type="none" w="med" len="med"/>
+                      <a:tailEnd type="none" w="med" len="med"/>
+                    </a:lnT>
+                    <a:lnB w="12700" cap="flat" cmpd="sng" algn="ctr">
+                      <a:solidFill>
+                        <a:srgbClr val="DADCE0"/>
+                      </a:solidFill>
+                      <a:prstDash val="solid"/>
+                      <a:round/>
+                      <a:headEnd type="none" w="med" len="med"/>
+                      <a:tailEnd type="none" w="med" len="med"/>
+                    </a:lnB>
+                    <a:solidFill>
+                      <a:srgbClr val="FFFFFF"/>
+                    </a:solidFill>
+                  </a:tcPr>
+                </a:tc>
+                <a:tc>
+                  <a:txBody>
+                    <a:bodyPr/>
+                    <a:lstStyle/>
+                    <a:p>
+                      <a:pPr algn="l" indent="0" marL="0">
+                        <a:buNone/>
+                      </a:pPr>
+                      <a:r>
+                        <a:rPr lang="en-US" sz="1400" dirty="0">
+                          <a:solidFill>
+                            <a:srgbClr val="202124"/>
+                          </a:solidFill>
+                        </a:rPr>
+                        <a:t>Primary driver of search abandonment</a:t>
                       </a:r>
                       <a:endParaRPr lang="en-US" sz="1400" dirty="0"/>
                     </a:p>
@@ -12483,68 +13156,129 @@
                             <a:srgbClr val="202124"/>
                           </a:solidFill>
                         </a:rPr>
-                        <a:t>CHOSEN TARGET SEGMENT — Highest retention &amp; engagement lift</a:t>
-                      </a:r>
-                      <a:endParaRPr lang="en-US" sz="1400" dirty="0"/>
-                    </a:p>
-                  </a:txBody>
-                  <a:tcPr marL="91440" marR="91440" marT="45720" marB="45720" anchor="ctr">
-                    <a:lnL w="12700" cap="flat" cmpd="sng" algn="ctr">
-                      <a:solidFill>
-                        <a:srgbClr val="DADCE0"/>
-                      </a:solidFill>
-                      <a:prstDash val="solid"/>
-                      <a:round/>
-                      <a:headEnd type="none" w="med" len="med"/>
-                      <a:tailEnd type="none" w="med" len="med"/>
-                    </a:lnL>
-                    <a:lnR w="12700" cap="flat" cmpd="sng" algn="ctr">
-                      <a:solidFill>
-                        <a:srgbClr val="DADCE0"/>
-                      </a:solidFill>
-                      <a:prstDash val="solid"/>
-                      <a:round/>
-                      <a:headEnd type="none" w="med" len="med"/>
-                      <a:tailEnd type="none" w="med" len="med"/>
-                    </a:lnR>
-                    <a:lnT w="12700" cap="flat" cmpd="sng" algn="ctr">
-                      <a:solidFill>
-                        <a:srgbClr val="DADCE0"/>
-                      </a:solidFill>
-                      <a:prstDash val="solid"/>
-                      <a:round/>
-                      <a:headEnd type="none" w="med" len="med"/>
-                      <a:tailEnd type="none" w="med" len="med"/>
-                    </a:lnT>
-                    <a:lnB w="12700" cap="flat" cmpd="sng" algn="ctr">
-                      <a:solidFill>
-                        <a:srgbClr val="DADCE0"/>
-                      </a:solidFill>
-                      <a:prstDash val="solid"/>
-                      <a:round/>
-                      <a:headEnd type="none" w="med" len="med"/>
-                      <a:tailEnd type="none" w="med" len="med"/>
-                    </a:lnB>
-                    <a:solidFill>
-                      <a:srgbClr val="FFFFFF"/>
-                    </a:solidFill>
-                  </a:tcPr>
-                </a:tc>
-                <a:tc>
-                  <a:txBody>
-                    <a:bodyPr/>
-                    <a:lstStyle/>
-                    <a:p>
-                      <a:pPr algn="l" indent="0" marL="0">
-                        <a:buNone/>
-                      </a:pPr>
-                      <a:r>
-                        <a:rPr lang="en-US" sz="1400" dirty="0">
-                          <a:solidFill>
-                            <a:srgbClr val="202124"/>
-                          </a:solidFill>
-                        </a:rPr>
-                        <a:t>Low engagement opportunity</a:t>
+                        <a:t>CHOSEN TARGET — Max LTV &amp; Retention Lift</a:t>
+                      </a:r>
+                      <a:endParaRPr lang="en-US" sz="1400" dirty="0"/>
+                    </a:p>
+                  </a:txBody>
+                  <a:tcPr marL="91440" marR="91440" marT="45720" marB="45720" anchor="ctr">
+                    <a:lnL w="12700" cap="flat" cmpd="sng" algn="ctr">
+                      <a:solidFill>
+                        <a:srgbClr val="DADCE0"/>
+                      </a:solidFill>
+                      <a:prstDash val="solid"/>
+                      <a:round/>
+                      <a:headEnd type="none" w="med" len="med"/>
+                      <a:tailEnd type="none" w="med" len="med"/>
+                    </a:lnL>
+                    <a:lnR w="12700" cap="flat" cmpd="sng" algn="ctr">
+                      <a:solidFill>
+                        <a:srgbClr val="DADCE0"/>
+                      </a:solidFill>
+                      <a:prstDash val="solid"/>
+                      <a:round/>
+                      <a:headEnd type="none" w="med" len="med"/>
+                      <a:tailEnd type="none" w="med" len="med"/>
+                    </a:lnR>
+                    <a:lnT w="12700" cap="flat" cmpd="sng" algn="ctr">
+                      <a:solidFill>
+                        <a:srgbClr val="DADCE0"/>
+                      </a:solidFill>
+                      <a:prstDash val="solid"/>
+                      <a:round/>
+                      <a:headEnd type="none" w="med" len="med"/>
+                      <a:tailEnd type="none" w="med" len="med"/>
+                    </a:lnT>
+                    <a:lnB w="12700" cap="flat" cmpd="sng" algn="ctr">
+                      <a:solidFill>
+                        <a:srgbClr val="DADCE0"/>
+                      </a:solidFill>
+                      <a:prstDash val="solid"/>
+                      <a:round/>
+                      <a:headEnd type="none" w="med" len="med"/>
+                      <a:tailEnd type="none" w="med" len="med"/>
+                    </a:lnB>
+                    <a:solidFill>
+                      <a:srgbClr val="FFFFFF"/>
+                    </a:solidFill>
+                  </a:tcPr>
+                </a:tc>
+                <a:tc>
+                  <a:txBody>
+                    <a:bodyPr/>
+                    <a:lstStyle/>
+                    <a:p>
+                      <a:pPr algn="l" indent="0" marL="0">
+                        <a:buNone/>
+                      </a:pPr>
+                      <a:r>
+                        <a:rPr lang="en-US" sz="1400" dirty="0">
+                          <a:solidFill>
+                            <a:srgbClr val="202124"/>
+                          </a:solidFill>
+                        </a:rPr>
+                        <a:t>Excluded from initial rollout</a:t>
+                      </a:r>
+                      <a:endParaRPr lang="en-US" sz="1400" dirty="0"/>
+                    </a:p>
+                  </a:txBody>
+                  <a:tcPr marL="91440" marR="91440" marT="45720" marB="45720" anchor="ctr">
+                    <a:lnL w="12700" cap="flat" cmpd="sng" algn="ctr">
+                      <a:solidFill>
+                        <a:srgbClr val="DADCE0"/>
+                      </a:solidFill>
+                      <a:prstDash val="solid"/>
+                      <a:round/>
+                      <a:headEnd type="none" w="med" len="med"/>
+                      <a:tailEnd type="none" w="med" len="med"/>
+                    </a:lnL>
+                    <a:lnR w="12700" cap="flat" cmpd="sng" algn="ctr">
+                      <a:solidFill>
+                        <a:srgbClr val="DADCE0"/>
+                      </a:solidFill>
+                      <a:prstDash val="solid"/>
+                      <a:round/>
+                      <a:headEnd type="none" w="med" len="med"/>
+                      <a:tailEnd type="none" w="med" len="med"/>
+                    </a:lnR>
+                    <a:lnT w="12700" cap="flat" cmpd="sng" algn="ctr">
+                      <a:solidFill>
+                        <a:srgbClr val="DADCE0"/>
+                      </a:solidFill>
+                      <a:prstDash val="solid"/>
+                      <a:round/>
+                      <a:headEnd type="none" w="med" len="med"/>
+                      <a:tailEnd type="none" w="med" len="med"/>
+                    </a:lnT>
+                    <a:lnB w="12700" cap="flat" cmpd="sng" algn="ctr">
+                      <a:solidFill>
+                        <a:srgbClr val="DADCE0"/>
+                      </a:solidFill>
+                      <a:prstDash val="solid"/>
+                      <a:round/>
+                      <a:headEnd type="none" w="med" len="med"/>
+                      <a:tailEnd type="none" w="med" len="med"/>
+                    </a:lnB>
+                    <a:solidFill>
+                      <a:srgbClr val="FFFFFF"/>
+                    </a:solidFill>
+                  </a:tcPr>
+                </a:tc>
+                <a:tc>
+                  <a:txBody>
+                    <a:bodyPr/>
+                    <a:lstStyle/>
+                    <a:p>
+                      <a:pPr algn="l" indent="0" marL="0">
+                        <a:buNone/>
+                      </a:pPr>
+                      <a:r>
+                        <a:rPr lang="en-US" sz="1400" dirty="0">
+                          <a:solidFill>
+                            <a:srgbClr val="202124"/>
+                          </a:solidFill>
+                        </a:rPr>
+                        <a:t>Protects $12.4M ARR cloud storage revenue</a:t>
                       </a:r>
                       <a:endParaRPr lang="en-US" sz="1400" dirty="0"/>
                     </a:p>
@@ -12719,7 +13453,7 @@
                   <a:srgbClr val="1A73E8"/>
                 </a:solidFill>
               </a:rPr>
-              <a:t>6. ROOT CAUSE &amp; PROBLEM DEFINITION</a:t>
+              <a:t>6. ROOT CAUSE &amp; 4-LAYER PROBLEM TAXONOMY</a:t>
             </a:r>
             <a:endParaRPr lang="en-US" sz="1400" dirty="0"/>
           </a:p>
@@ -12755,7 +13489,7 @@
                   <a:srgbClr val="202124"/>
                 </a:solidFill>
               </a:rPr>
-              <a:t>Semantic &amp; Metadata Asymmetry Between Vague Queries and Un-Tagged Media</a:t>
+              <a:t>Core Root Cause: Memory Recalls Visual Anchors While Search Requires Exact Tags</a:t>
             </a:r>
             <a:endParaRPr lang="en-US" sz="2000" dirty="0"/>
           </a:p>
@@ -12791,7 +13525,7 @@
                   <a:srgbClr val="1A73E8"/>
                 </a:solidFill>
               </a:rPr>
-              <a:t>CFM-01 Failure Taxonomy &amp; Ground-Truth Isolation</a:t>
+              <a:t>CFM-01 to CFM-04 Structural Failure Taxonomy &amp; Ground-Truth Isolation</a:t>
             </a:r>
             <a:endParaRPr lang="en-US" sz="1500" dirty="0"/>
           </a:p>
@@ -12820,11 +13554,11 @@
             <a:tbl>
               <a:tblPr/>
               <a:tblGrid>
-                <a:gridCol w="1097280"/>
-                <a:gridCol w="2011680"/>
-                <a:gridCol w="2103120"/>
-                <a:gridCol w="2103120"/>
-                <a:gridCol w="1828800"/>
+                <a:gridCol w="1005840"/>
+                <a:gridCol w="1645920"/>
+                <a:gridCol w="2286000"/>
+                <a:gridCol w="1645920"/>
+                <a:gridCol w="1645920"/>
               </a:tblGrid>
               <a:tr h="0">
                 <a:tc>
@@ -12902,7 +13636,7 @@
                             <a:srgbClr val="1A73E8"/>
                           </a:solidFill>
                         </a:rPr>
-                        <a:t>Root Cause Component</a:t>
+                        <a:t>Failure Mode Name</a:t>
                       </a:r>
                       <a:endParaRPr lang="en-US" sz="1400" dirty="0"/>
                     </a:p>
@@ -12963,7 +13697,7 @@
                             <a:srgbClr val="1A73E8"/>
                           </a:solidFill>
                         </a:rPr>
-                        <a:t>Trigger Mechanism</a:t>
+                        <a:t>Root Cause Mechanism</a:t>
                       </a:r>
                       <a:endParaRPr lang="en-US" sz="1400" dirty="0"/>
                     </a:p>
@@ -13024,7 +13758,7 @@
                             <a:srgbClr val="1A73E8"/>
                           </a:solidFill>
                         </a:rPr>
-                        <a:t>Technical Impact</a:t>
+                        <a:t>Observed Metric Friction</a:t>
                       </a:r>
                       <a:endParaRPr lang="en-US" sz="1400" dirty="0"/>
                     </a:p>
@@ -13085,7 +13819,7 @@
                             <a:srgbClr val="1A73E8"/>
                           </a:solidFill>
                         </a:rPr>
-                        <a:t>Gemini AI Mitigation</a:t>
+                        <a:t>Gemini AI Solution Mitigation</a:t>
                       </a:r>
                       <a:endParaRPr lang="en-US" sz="1400" dirty="0"/>
                     </a:p>
@@ -13148,251 +13882,251 @@
                             <a:srgbClr val="202124"/>
                           </a:solidFill>
                         </a:rPr>
-                        <a:t>CFM-01.A</a:t>
-                      </a:r>
-                      <a:endParaRPr lang="en-US" sz="1400" dirty="0"/>
-                    </a:p>
-                  </a:txBody>
-                  <a:tcPr marL="91440" marR="91440" marT="45720" marB="45720" anchor="ctr">
-                    <a:lnL w="12700" cap="flat" cmpd="sng" algn="ctr">
-                      <a:solidFill>
-                        <a:srgbClr val="DADCE0"/>
-                      </a:solidFill>
-                      <a:prstDash val="solid"/>
-                      <a:round/>
-                      <a:headEnd type="none" w="med" len="med"/>
-                      <a:tailEnd type="none" w="med" len="med"/>
-                    </a:lnL>
-                    <a:lnR w="12700" cap="flat" cmpd="sng" algn="ctr">
-                      <a:solidFill>
-                        <a:srgbClr val="DADCE0"/>
-                      </a:solidFill>
-                      <a:prstDash val="solid"/>
-                      <a:round/>
-                      <a:headEnd type="none" w="med" len="med"/>
-                      <a:tailEnd type="none" w="med" len="med"/>
-                    </a:lnR>
-                    <a:lnT w="12700" cap="flat" cmpd="sng" algn="ctr">
-                      <a:solidFill>
-                        <a:srgbClr val="DADCE0"/>
-                      </a:solidFill>
-                      <a:prstDash val="solid"/>
-                      <a:round/>
-                      <a:headEnd type="none" w="med" len="med"/>
-                      <a:tailEnd type="none" w="med" len="med"/>
-                    </a:lnT>
-                    <a:lnB w="12700" cap="flat" cmpd="sng" algn="ctr">
-                      <a:solidFill>
-                        <a:srgbClr val="DADCE0"/>
-                      </a:solidFill>
-                      <a:prstDash val="solid"/>
-                      <a:round/>
-                      <a:headEnd type="none" w="med" len="med"/>
-                      <a:tailEnd type="none" w="med" len="med"/>
-                    </a:lnB>
-                    <a:solidFill>
-                      <a:srgbClr val="FFFFFF"/>
-                    </a:solidFill>
-                  </a:tcPr>
-                </a:tc>
-                <a:tc>
-                  <a:txBody>
-                    <a:bodyPr/>
-                    <a:lstStyle/>
-                    <a:p>
-                      <a:pPr algn="l" indent="0" marL="0">
-                        <a:buNone/>
-                      </a:pPr>
-                      <a:r>
-                        <a:rPr lang="en-US" sz="1400" dirty="0">
-                          <a:solidFill>
-                            <a:srgbClr val="202124"/>
-                          </a:solidFill>
-                        </a:rPr>
-                        <a:t>Semantic Asymmetry</a:t>
-                      </a:r>
-                      <a:endParaRPr lang="en-US" sz="1400" dirty="0"/>
-                    </a:p>
-                  </a:txBody>
-                  <a:tcPr marL="91440" marR="91440" marT="45720" marB="45720" anchor="ctr">
-                    <a:lnL w="12700" cap="flat" cmpd="sng" algn="ctr">
-                      <a:solidFill>
-                        <a:srgbClr val="DADCE0"/>
-                      </a:solidFill>
-                      <a:prstDash val="solid"/>
-                      <a:round/>
-                      <a:headEnd type="none" w="med" len="med"/>
-                      <a:tailEnd type="none" w="med" len="med"/>
-                    </a:lnL>
-                    <a:lnR w="12700" cap="flat" cmpd="sng" algn="ctr">
-                      <a:solidFill>
-                        <a:srgbClr val="DADCE0"/>
-                      </a:solidFill>
-                      <a:prstDash val="solid"/>
-                      <a:round/>
-                      <a:headEnd type="none" w="med" len="med"/>
-                      <a:tailEnd type="none" w="med" len="med"/>
-                    </a:lnR>
-                    <a:lnT w="12700" cap="flat" cmpd="sng" algn="ctr">
-                      <a:solidFill>
-                        <a:srgbClr val="DADCE0"/>
-                      </a:solidFill>
-                      <a:prstDash val="solid"/>
-                      <a:round/>
-                      <a:headEnd type="none" w="med" len="med"/>
-                      <a:tailEnd type="none" w="med" len="med"/>
-                    </a:lnT>
-                    <a:lnB w="12700" cap="flat" cmpd="sng" algn="ctr">
-                      <a:solidFill>
-                        <a:srgbClr val="DADCE0"/>
-                      </a:solidFill>
-                      <a:prstDash val="solid"/>
-                      <a:round/>
-                      <a:headEnd type="none" w="med" len="med"/>
-                      <a:tailEnd type="none" w="med" len="med"/>
-                    </a:lnB>
-                    <a:solidFill>
-                      <a:srgbClr val="FFFFFF"/>
-                    </a:solidFill>
-                  </a:tcPr>
-                </a:tc>
-                <a:tc>
-                  <a:txBody>
-                    <a:bodyPr/>
-                    <a:lstStyle/>
-                    <a:p>
-                      <a:pPr algn="l" indent="0" marL="0">
-                        <a:buNone/>
-                      </a:pPr>
-                      <a:r>
-                        <a:rPr lang="en-US" sz="1400" dirty="0">
-                          <a:solidFill>
-                            <a:srgbClr val="202124"/>
-                          </a:solidFill>
-                        </a:rPr>
-                        <a:t>Subjective memory terms mismatch photo tags</a:t>
-                      </a:r>
-                      <a:endParaRPr lang="en-US" sz="1400" dirty="0"/>
-                    </a:p>
-                  </a:txBody>
-                  <a:tcPr marL="91440" marR="91440" marT="45720" marB="45720" anchor="ctr">
-                    <a:lnL w="12700" cap="flat" cmpd="sng" algn="ctr">
-                      <a:solidFill>
-                        <a:srgbClr val="DADCE0"/>
-                      </a:solidFill>
-                      <a:prstDash val="solid"/>
-                      <a:round/>
-                      <a:headEnd type="none" w="med" len="med"/>
-                      <a:tailEnd type="none" w="med" len="med"/>
-                    </a:lnL>
-                    <a:lnR w="12700" cap="flat" cmpd="sng" algn="ctr">
-                      <a:solidFill>
-                        <a:srgbClr val="DADCE0"/>
-                      </a:solidFill>
-                      <a:prstDash val="solid"/>
-                      <a:round/>
-                      <a:headEnd type="none" w="med" len="med"/>
-                      <a:tailEnd type="none" w="med" len="med"/>
-                    </a:lnR>
-                    <a:lnT w="12700" cap="flat" cmpd="sng" algn="ctr">
-                      <a:solidFill>
-                        <a:srgbClr val="DADCE0"/>
-                      </a:solidFill>
-                      <a:prstDash val="solid"/>
-                      <a:round/>
-                      <a:headEnd type="none" w="med" len="med"/>
-                      <a:tailEnd type="none" w="med" len="med"/>
-                    </a:lnT>
-                    <a:lnB w="12700" cap="flat" cmpd="sng" algn="ctr">
-                      <a:solidFill>
-                        <a:srgbClr val="DADCE0"/>
-                      </a:solidFill>
-                      <a:prstDash val="solid"/>
-                      <a:round/>
-                      <a:headEnd type="none" w="med" len="med"/>
-                      <a:tailEnd type="none" w="med" len="med"/>
-                    </a:lnB>
-                    <a:solidFill>
-                      <a:srgbClr val="FFFFFF"/>
-                    </a:solidFill>
-                  </a:tcPr>
-                </a:tc>
-                <a:tc>
-                  <a:txBody>
-                    <a:bodyPr/>
-                    <a:lstStyle/>
-                    <a:p>
-                      <a:pPr algn="l" indent="0" marL="0">
-                        <a:buNone/>
-                      </a:pPr>
-                      <a:r>
-                        <a:rPr lang="en-US" sz="1400" dirty="0">
-                          <a:solidFill>
-                            <a:srgbClr val="202124"/>
-                          </a:solidFill>
-                        </a:rPr>
-                        <a:t>Zero candidate surfacing</a:t>
-                      </a:r>
-                      <a:endParaRPr lang="en-US" sz="1400" dirty="0"/>
-                    </a:p>
-                  </a:txBody>
-                  <a:tcPr marL="91440" marR="91440" marT="45720" marB="45720" anchor="ctr">
-                    <a:lnL w="12700" cap="flat" cmpd="sng" algn="ctr">
-                      <a:solidFill>
-                        <a:srgbClr val="DADCE0"/>
-                      </a:solidFill>
-                      <a:prstDash val="solid"/>
-                      <a:round/>
-                      <a:headEnd type="none" w="med" len="med"/>
-                      <a:tailEnd type="none" w="med" len="med"/>
-                    </a:lnL>
-                    <a:lnR w="12700" cap="flat" cmpd="sng" algn="ctr">
-                      <a:solidFill>
-                        <a:srgbClr val="DADCE0"/>
-                      </a:solidFill>
-                      <a:prstDash val="solid"/>
-                      <a:round/>
-                      <a:headEnd type="none" w="med" len="med"/>
-                      <a:tailEnd type="none" w="med" len="med"/>
-                    </a:lnR>
-                    <a:lnT w="12700" cap="flat" cmpd="sng" algn="ctr">
-                      <a:solidFill>
-                        <a:srgbClr val="DADCE0"/>
-                      </a:solidFill>
-                      <a:prstDash val="solid"/>
-                      <a:round/>
-                      <a:headEnd type="none" w="med" len="med"/>
-                      <a:tailEnd type="none" w="med" len="med"/>
-                    </a:lnT>
-                    <a:lnB w="12700" cap="flat" cmpd="sng" algn="ctr">
-                      <a:solidFill>
-                        <a:srgbClr val="DADCE0"/>
-                      </a:solidFill>
-                      <a:prstDash val="solid"/>
-                      <a:round/>
-                      <a:headEnd type="none" w="med" len="med"/>
-                      <a:tailEnd type="none" w="med" len="med"/>
-                    </a:lnB>
-                    <a:solidFill>
-                      <a:srgbClr val="FFFFFF"/>
-                    </a:solidFill>
-                  </a:tcPr>
-                </a:tc>
-                <a:tc>
-                  <a:txBody>
-                    <a:bodyPr/>
-                    <a:lstStyle/>
-                    <a:p>
-                      <a:pPr algn="l" indent="0" marL="0">
-                        <a:buNone/>
-                      </a:pPr>
-                      <a:r>
-                        <a:rPr lang="en-US" sz="1400" dirty="0">
-                          <a:solidFill>
-                            <a:srgbClr val="202124"/>
-                          </a:solidFill>
-                        </a:rPr>
-                        <a:t>Gemini AI signal parser</a:t>
+                        <a:t>CFM-01</a:t>
+                      </a:r>
+                      <a:endParaRPr lang="en-US" sz="1400" dirty="0"/>
+                    </a:p>
+                  </a:txBody>
+                  <a:tcPr marL="91440" marR="91440" marT="45720" marB="45720" anchor="ctr">
+                    <a:lnL w="12700" cap="flat" cmpd="sng" algn="ctr">
+                      <a:solidFill>
+                        <a:srgbClr val="DADCE0"/>
+                      </a:solidFill>
+                      <a:prstDash val="solid"/>
+                      <a:round/>
+                      <a:headEnd type="none" w="med" len="med"/>
+                      <a:tailEnd type="none" w="med" len="med"/>
+                    </a:lnL>
+                    <a:lnR w="12700" cap="flat" cmpd="sng" algn="ctr">
+                      <a:solidFill>
+                        <a:srgbClr val="DADCE0"/>
+                      </a:solidFill>
+                      <a:prstDash val="solid"/>
+                      <a:round/>
+                      <a:headEnd type="none" w="med" len="med"/>
+                      <a:tailEnd type="none" w="med" len="med"/>
+                    </a:lnR>
+                    <a:lnT w="12700" cap="flat" cmpd="sng" algn="ctr">
+                      <a:solidFill>
+                        <a:srgbClr val="DADCE0"/>
+                      </a:solidFill>
+                      <a:prstDash val="solid"/>
+                      <a:round/>
+                      <a:headEnd type="none" w="med" len="med"/>
+                      <a:tailEnd type="none" w="med" len="med"/>
+                    </a:lnT>
+                    <a:lnB w="12700" cap="flat" cmpd="sng" algn="ctr">
+                      <a:solidFill>
+                        <a:srgbClr val="DADCE0"/>
+                      </a:solidFill>
+                      <a:prstDash val="solid"/>
+                      <a:round/>
+                      <a:headEnd type="none" w="med" len="med"/>
+                      <a:tailEnd type="none" w="med" len="med"/>
+                    </a:lnB>
+                    <a:solidFill>
+                      <a:srgbClr val="FFFFFF"/>
+                    </a:solidFill>
+                  </a:tcPr>
+                </a:tc>
+                <a:tc>
+                  <a:txBody>
+                    <a:bodyPr/>
+                    <a:lstStyle/>
+                    <a:p>
+                      <a:pPr algn="l" indent="0" marL="0">
+                        <a:buNone/>
+                      </a:pPr>
+                      <a:r>
+                        <a:rPr lang="en-US" sz="1400" dirty="0">
+                          <a:solidFill>
+                            <a:srgbClr val="202124"/>
+                          </a:solidFill>
+                        </a:rPr>
+                        <a:t>Vague Memory Gap</a:t>
+                      </a:r>
+                      <a:endParaRPr lang="en-US" sz="1400" dirty="0"/>
+                    </a:p>
+                  </a:txBody>
+                  <a:tcPr marL="91440" marR="91440" marT="45720" marB="45720" anchor="ctr">
+                    <a:lnL w="12700" cap="flat" cmpd="sng" algn="ctr">
+                      <a:solidFill>
+                        <a:srgbClr val="DADCE0"/>
+                      </a:solidFill>
+                      <a:prstDash val="solid"/>
+                      <a:round/>
+                      <a:headEnd type="none" w="med" len="med"/>
+                      <a:tailEnd type="none" w="med" len="med"/>
+                    </a:lnL>
+                    <a:lnR w="12700" cap="flat" cmpd="sng" algn="ctr">
+                      <a:solidFill>
+                        <a:srgbClr val="DADCE0"/>
+                      </a:solidFill>
+                      <a:prstDash val="solid"/>
+                      <a:round/>
+                      <a:headEnd type="none" w="med" len="med"/>
+                      <a:tailEnd type="none" w="med" len="med"/>
+                    </a:lnR>
+                    <a:lnT w="12700" cap="flat" cmpd="sng" algn="ctr">
+                      <a:solidFill>
+                        <a:srgbClr val="DADCE0"/>
+                      </a:solidFill>
+                      <a:prstDash val="solid"/>
+                      <a:round/>
+                      <a:headEnd type="none" w="med" len="med"/>
+                      <a:tailEnd type="none" w="med" len="med"/>
+                    </a:lnT>
+                    <a:lnB w="12700" cap="flat" cmpd="sng" algn="ctr">
+                      <a:solidFill>
+                        <a:srgbClr val="DADCE0"/>
+                      </a:solidFill>
+                      <a:prstDash val="solid"/>
+                      <a:round/>
+                      <a:headEnd type="none" w="med" len="med"/>
+                      <a:tailEnd type="none" w="med" len="med"/>
+                    </a:lnB>
+                    <a:solidFill>
+                      <a:srgbClr val="FFFFFF"/>
+                    </a:solidFill>
+                  </a:tcPr>
+                </a:tc>
+                <a:tc>
+                  <a:txBody>
+                    <a:bodyPr/>
+                    <a:lstStyle/>
+                    <a:p>
+                      <a:pPr algn="l" indent="0" marL="0">
+                        <a:buNone/>
+                      </a:pPr>
+                      <a:r>
+                        <a:rPr lang="en-US" sz="1400" dirty="0">
+                          <a:solidFill>
+                            <a:srgbClr val="202124"/>
+                          </a:solidFill>
+                        </a:rPr>
+                        <a:t>Natural language prompt mismatches rigid regex photo tags</a:t>
+                      </a:r>
+                      <a:endParaRPr lang="en-US" sz="1400" dirty="0"/>
+                    </a:p>
+                  </a:txBody>
+                  <a:tcPr marL="91440" marR="91440" marT="45720" marB="45720" anchor="ctr">
+                    <a:lnL w="12700" cap="flat" cmpd="sng" algn="ctr">
+                      <a:solidFill>
+                        <a:srgbClr val="DADCE0"/>
+                      </a:solidFill>
+                      <a:prstDash val="solid"/>
+                      <a:round/>
+                      <a:headEnd type="none" w="med" len="med"/>
+                      <a:tailEnd type="none" w="med" len="med"/>
+                    </a:lnL>
+                    <a:lnR w="12700" cap="flat" cmpd="sng" algn="ctr">
+                      <a:solidFill>
+                        <a:srgbClr val="DADCE0"/>
+                      </a:solidFill>
+                      <a:prstDash val="solid"/>
+                      <a:round/>
+                      <a:headEnd type="none" w="med" len="med"/>
+                      <a:tailEnd type="none" w="med" len="med"/>
+                    </a:lnR>
+                    <a:lnT w="12700" cap="flat" cmpd="sng" algn="ctr">
+                      <a:solidFill>
+                        <a:srgbClr val="DADCE0"/>
+                      </a:solidFill>
+                      <a:prstDash val="solid"/>
+                      <a:round/>
+                      <a:headEnd type="none" w="med" len="med"/>
+                      <a:tailEnd type="none" w="med" len="med"/>
+                    </a:lnT>
+                    <a:lnB w="12700" cap="flat" cmpd="sng" algn="ctr">
+                      <a:solidFill>
+                        <a:srgbClr val="DADCE0"/>
+                      </a:solidFill>
+                      <a:prstDash val="solid"/>
+                      <a:round/>
+                      <a:headEnd type="none" w="med" len="med"/>
+                      <a:tailEnd type="none" w="med" len="med"/>
+                    </a:lnB>
+                    <a:solidFill>
+                      <a:srgbClr val="FFFFFF"/>
+                    </a:solidFill>
+                  </a:tcPr>
+                </a:tc>
+                <a:tc>
+                  <a:txBody>
+                    <a:bodyPr/>
+                    <a:lstStyle/>
+                    <a:p>
+                      <a:pPr algn="l" indent="0" marL="0">
+                        <a:buNone/>
+                      </a:pPr>
+                      <a:r>
+                        <a:rPr lang="en-US" sz="1400" dirty="0">
+                          <a:solidFill>
+                            <a:srgbClr val="202124"/>
+                          </a:solidFill>
+                        </a:rPr>
+                        <a:t>67.6% query surfacing failure</a:t>
+                      </a:r>
+                      <a:endParaRPr lang="en-US" sz="1400" dirty="0"/>
+                    </a:p>
+                  </a:txBody>
+                  <a:tcPr marL="91440" marR="91440" marT="45720" marB="45720" anchor="ctr">
+                    <a:lnL w="12700" cap="flat" cmpd="sng" algn="ctr">
+                      <a:solidFill>
+                        <a:srgbClr val="DADCE0"/>
+                      </a:solidFill>
+                      <a:prstDash val="solid"/>
+                      <a:round/>
+                      <a:headEnd type="none" w="med" len="med"/>
+                      <a:tailEnd type="none" w="med" len="med"/>
+                    </a:lnL>
+                    <a:lnR w="12700" cap="flat" cmpd="sng" algn="ctr">
+                      <a:solidFill>
+                        <a:srgbClr val="DADCE0"/>
+                      </a:solidFill>
+                      <a:prstDash val="solid"/>
+                      <a:round/>
+                      <a:headEnd type="none" w="med" len="med"/>
+                      <a:tailEnd type="none" w="med" len="med"/>
+                    </a:lnR>
+                    <a:lnT w="12700" cap="flat" cmpd="sng" algn="ctr">
+                      <a:solidFill>
+                        <a:srgbClr val="DADCE0"/>
+                      </a:solidFill>
+                      <a:prstDash val="solid"/>
+                      <a:round/>
+                      <a:headEnd type="none" w="med" len="med"/>
+                      <a:tailEnd type="none" w="med" len="med"/>
+                    </a:lnT>
+                    <a:lnB w="12700" cap="flat" cmpd="sng" algn="ctr">
+                      <a:solidFill>
+                        <a:srgbClr val="DADCE0"/>
+                      </a:solidFill>
+                      <a:prstDash val="solid"/>
+                      <a:round/>
+                      <a:headEnd type="none" w="med" len="med"/>
+                      <a:tailEnd type="none" w="med" len="med"/>
+                    </a:lnB>
+                    <a:solidFill>
+                      <a:srgbClr val="FFFFFF"/>
+                    </a:solidFill>
+                  </a:tcPr>
+                </a:tc>
+                <a:tc>
+                  <a:txBody>
+                    <a:bodyPr/>
+                    <a:lstStyle/>
+                    <a:p>
+                      <a:pPr algn="l" indent="0" marL="0">
+                        <a:buNone/>
+                      </a:pPr>
+                      <a:r>
+                        <a:rPr lang="en-US" sz="1400" dirty="0">
+                          <a:solidFill>
+                            <a:srgbClr val="202124"/>
+                          </a:solidFill>
+                        </a:rPr>
+                        <a:t>Gemini AI Signal Parser</a:t>
                       </a:r>
                       <a:endParaRPr lang="en-US" sz="1400" dirty="0"/>
                     </a:p>
@@ -13455,251 +14189,251 @@
                             <a:srgbClr val="202124"/>
                           </a:solidFill>
                         </a:rPr>
-                        <a:t>CFM-01.B</a:t>
-                      </a:r>
-                      <a:endParaRPr lang="en-US" sz="1400" dirty="0"/>
-                    </a:p>
-                  </a:txBody>
-                  <a:tcPr marL="91440" marR="91440" marT="45720" marB="45720" anchor="ctr">
-                    <a:lnL w="12700" cap="flat" cmpd="sng" algn="ctr">
-                      <a:solidFill>
-                        <a:srgbClr val="DADCE0"/>
-                      </a:solidFill>
-                      <a:prstDash val="solid"/>
-                      <a:round/>
-                      <a:headEnd type="none" w="med" len="med"/>
-                      <a:tailEnd type="none" w="med" len="med"/>
-                    </a:lnL>
-                    <a:lnR w="12700" cap="flat" cmpd="sng" algn="ctr">
-                      <a:solidFill>
-                        <a:srgbClr val="DADCE0"/>
-                      </a:solidFill>
-                      <a:prstDash val="solid"/>
-                      <a:round/>
-                      <a:headEnd type="none" w="med" len="med"/>
-                      <a:tailEnd type="none" w="med" len="med"/>
-                    </a:lnR>
-                    <a:lnT w="12700" cap="flat" cmpd="sng" algn="ctr">
-                      <a:solidFill>
-                        <a:srgbClr val="DADCE0"/>
-                      </a:solidFill>
-                      <a:prstDash val="solid"/>
-                      <a:round/>
-                      <a:headEnd type="none" w="med" len="med"/>
-                      <a:tailEnd type="none" w="med" len="med"/>
-                    </a:lnT>
-                    <a:lnB w="12700" cap="flat" cmpd="sng" algn="ctr">
-                      <a:solidFill>
-                        <a:srgbClr val="DADCE0"/>
-                      </a:solidFill>
-                      <a:prstDash val="solid"/>
-                      <a:round/>
-                      <a:headEnd type="none" w="med" len="med"/>
-                      <a:tailEnd type="none" w="med" len="med"/>
-                    </a:lnB>
-                    <a:solidFill>
-                      <a:srgbClr val="FFFFFF"/>
-                    </a:solidFill>
-                  </a:tcPr>
-                </a:tc>
-                <a:tc>
-                  <a:txBody>
-                    <a:bodyPr/>
-                    <a:lstStyle/>
-                    <a:p>
-                      <a:pPr algn="l" indent="0" marL="0">
-                        <a:buNone/>
-                      </a:pPr>
-                      <a:r>
-                        <a:rPr lang="en-US" sz="1400" dirty="0">
-                          <a:solidFill>
-                            <a:srgbClr val="202124"/>
-                          </a:solidFill>
-                        </a:rPr>
-                        <a:t>EXIF Metadata Stripping</a:t>
-                      </a:r>
-                      <a:endParaRPr lang="en-US" sz="1400" dirty="0"/>
-                    </a:p>
-                  </a:txBody>
-                  <a:tcPr marL="91440" marR="91440" marT="45720" marB="45720" anchor="ctr">
-                    <a:lnL w="12700" cap="flat" cmpd="sng" algn="ctr">
-                      <a:solidFill>
-                        <a:srgbClr val="DADCE0"/>
-                      </a:solidFill>
-                      <a:prstDash val="solid"/>
-                      <a:round/>
-                      <a:headEnd type="none" w="med" len="med"/>
-                      <a:tailEnd type="none" w="med" len="med"/>
-                    </a:lnL>
-                    <a:lnR w="12700" cap="flat" cmpd="sng" algn="ctr">
-                      <a:solidFill>
-                        <a:srgbClr val="DADCE0"/>
-                      </a:solidFill>
-                      <a:prstDash val="solid"/>
-                      <a:round/>
-                      <a:headEnd type="none" w="med" len="med"/>
-                      <a:tailEnd type="none" w="med" len="med"/>
-                    </a:lnR>
-                    <a:lnT w="12700" cap="flat" cmpd="sng" algn="ctr">
-                      <a:solidFill>
-                        <a:srgbClr val="DADCE0"/>
-                      </a:solidFill>
-                      <a:prstDash val="solid"/>
-                      <a:round/>
-                      <a:headEnd type="none" w="med" len="med"/>
-                      <a:tailEnd type="none" w="med" len="med"/>
-                    </a:lnT>
-                    <a:lnB w="12700" cap="flat" cmpd="sng" algn="ctr">
-                      <a:solidFill>
-                        <a:srgbClr val="DADCE0"/>
-                      </a:solidFill>
-                      <a:prstDash val="solid"/>
-                      <a:round/>
-                      <a:headEnd type="none" w="med" len="med"/>
-                      <a:tailEnd type="none" w="med" len="med"/>
-                    </a:lnB>
-                    <a:solidFill>
-                      <a:srgbClr val="FFFFFF"/>
-                    </a:solidFill>
-                  </a:tcPr>
-                </a:tc>
-                <a:tc>
-                  <a:txBody>
-                    <a:bodyPr/>
-                    <a:lstStyle/>
-                    <a:p>
-                      <a:pPr algn="l" indent="0" marL="0">
-                        <a:buNone/>
-                      </a:pPr>
-                      <a:r>
-                        <a:rPr lang="en-US" sz="1400" dirty="0">
-                          <a:solidFill>
-                            <a:srgbClr val="202124"/>
-                          </a:solidFill>
-                        </a:rPr>
-                        <a:t>Third-party apps (WhatsApp) strip GPS/time</a:t>
-                      </a:r>
-                      <a:endParaRPr lang="en-US" sz="1400" dirty="0"/>
-                    </a:p>
-                  </a:txBody>
-                  <a:tcPr marL="91440" marR="91440" marT="45720" marB="45720" anchor="ctr">
-                    <a:lnL w="12700" cap="flat" cmpd="sng" algn="ctr">
-                      <a:solidFill>
-                        <a:srgbClr val="DADCE0"/>
-                      </a:solidFill>
-                      <a:prstDash val="solid"/>
-                      <a:round/>
-                      <a:headEnd type="none" w="med" len="med"/>
-                      <a:tailEnd type="none" w="med" len="med"/>
-                    </a:lnL>
-                    <a:lnR w="12700" cap="flat" cmpd="sng" algn="ctr">
-                      <a:solidFill>
-                        <a:srgbClr val="DADCE0"/>
-                      </a:solidFill>
-                      <a:prstDash val="solid"/>
-                      <a:round/>
-                      <a:headEnd type="none" w="med" len="med"/>
-                      <a:tailEnd type="none" w="med" len="med"/>
-                    </a:lnR>
-                    <a:lnT w="12700" cap="flat" cmpd="sng" algn="ctr">
-                      <a:solidFill>
-                        <a:srgbClr val="DADCE0"/>
-                      </a:solidFill>
-                      <a:prstDash val="solid"/>
-                      <a:round/>
-                      <a:headEnd type="none" w="med" len="med"/>
-                      <a:tailEnd type="none" w="med" len="med"/>
-                    </a:lnT>
-                    <a:lnB w="12700" cap="flat" cmpd="sng" algn="ctr">
-                      <a:solidFill>
-                        <a:srgbClr val="DADCE0"/>
-                      </a:solidFill>
-                      <a:prstDash val="solid"/>
-                      <a:round/>
-                      <a:headEnd type="none" w="med" len="med"/>
-                      <a:tailEnd type="none" w="med" len="med"/>
-                    </a:lnB>
-                    <a:solidFill>
-                      <a:srgbClr val="FFFFFF"/>
-                    </a:solidFill>
-                  </a:tcPr>
-                </a:tc>
-                <a:tc>
-                  <a:txBody>
-                    <a:bodyPr/>
-                    <a:lstStyle/>
-                    <a:p>
-                      <a:pPr algn="l" indent="0" marL="0">
-                        <a:buNone/>
-                      </a:pPr>
-                      <a:r>
-                        <a:rPr lang="en-US" sz="1400" dirty="0">
-                          <a:solidFill>
-                            <a:srgbClr val="202124"/>
-                          </a:solidFill>
-                        </a:rPr>
-                        <a:t>Un-indexed blind-spots</a:t>
-                      </a:r>
-                      <a:endParaRPr lang="en-US" sz="1400" dirty="0"/>
-                    </a:p>
-                  </a:txBody>
-                  <a:tcPr marL="91440" marR="91440" marT="45720" marB="45720" anchor="ctr">
-                    <a:lnL w="12700" cap="flat" cmpd="sng" algn="ctr">
-                      <a:solidFill>
-                        <a:srgbClr val="DADCE0"/>
-                      </a:solidFill>
-                      <a:prstDash val="solid"/>
-                      <a:round/>
-                      <a:headEnd type="none" w="med" len="med"/>
-                      <a:tailEnd type="none" w="med" len="med"/>
-                    </a:lnL>
-                    <a:lnR w="12700" cap="flat" cmpd="sng" algn="ctr">
-                      <a:solidFill>
-                        <a:srgbClr val="DADCE0"/>
-                      </a:solidFill>
-                      <a:prstDash val="solid"/>
-                      <a:round/>
-                      <a:headEnd type="none" w="med" len="med"/>
-                      <a:tailEnd type="none" w="med" len="med"/>
-                    </a:lnR>
-                    <a:lnT w="12700" cap="flat" cmpd="sng" algn="ctr">
-                      <a:solidFill>
-                        <a:srgbClr val="DADCE0"/>
-                      </a:solidFill>
-                      <a:prstDash val="solid"/>
-                      <a:round/>
-                      <a:headEnd type="none" w="med" len="med"/>
-                      <a:tailEnd type="none" w="med" len="med"/>
-                    </a:lnT>
-                    <a:lnB w="12700" cap="flat" cmpd="sng" algn="ctr">
-                      <a:solidFill>
-                        <a:srgbClr val="DADCE0"/>
-                      </a:solidFill>
-                      <a:prstDash val="solid"/>
-                      <a:round/>
-                      <a:headEnd type="none" w="med" len="med"/>
-                      <a:tailEnd type="none" w="med" len="med"/>
-                    </a:lnB>
-                    <a:solidFill>
-                      <a:srgbClr val="FFFFFF"/>
-                    </a:solidFill>
-                  </a:tcPr>
-                </a:tc>
-                <a:tc>
-                  <a:txBody>
-                    <a:bodyPr/>
-                    <a:lstStyle/>
-                    <a:p>
-                      <a:pPr algn="l" indent="0" marL="0">
-                        <a:buNone/>
-                      </a:pPr>
-                      <a:r>
-                        <a:rPr lang="en-US" sz="1400" dirty="0">
-                          <a:solidFill>
-                            <a:srgbClr val="202124"/>
-                          </a:solidFill>
-                        </a:rPr>
-                        <a:t>Landmark cluster anchor jump</a:t>
+                        <a:t>CFM-02</a:t>
+                      </a:r>
+                      <a:endParaRPr lang="en-US" sz="1400" dirty="0"/>
+                    </a:p>
+                  </a:txBody>
+                  <a:tcPr marL="91440" marR="91440" marT="45720" marB="45720" anchor="ctr">
+                    <a:lnL w="12700" cap="flat" cmpd="sng" algn="ctr">
+                      <a:solidFill>
+                        <a:srgbClr val="DADCE0"/>
+                      </a:solidFill>
+                      <a:prstDash val="solid"/>
+                      <a:round/>
+                      <a:headEnd type="none" w="med" len="med"/>
+                      <a:tailEnd type="none" w="med" len="med"/>
+                    </a:lnL>
+                    <a:lnR w="12700" cap="flat" cmpd="sng" algn="ctr">
+                      <a:solidFill>
+                        <a:srgbClr val="DADCE0"/>
+                      </a:solidFill>
+                      <a:prstDash val="solid"/>
+                      <a:round/>
+                      <a:headEnd type="none" w="med" len="med"/>
+                      <a:tailEnd type="none" w="med" len="med"/>
+                    </a:lnR>
+                    <a:lnT w="12700" cap="flat" cmpd="sng" algn="ctr">
+                      <a:solidFill>
+                        <a:srgbClr val="DADCE0"/>
+                      </a:solidFill>
+                      <a:prstDash val="solid"/>
+                      <a:round/>
+                      <a:headEnd type="none" w="med" len="med"/>
+                      <a:tailEnd type="none" w="med" len="med"/>
+                    </a:lnT>
+                    <a:lnB w="12700" cap="flat" cmpd="sng" algn="ctr">
+                      <a:solidFill>
+                        <a:srgbClr val="DADCE0"/>
+                      </a:solidFill>
+                      <a:prstDash val="solid"/>
+                      <a:round/>
+                      <a:headEnd type="none" w="med" len="med"/>
+                      <a:tailEnd type="none" w="med" len="med"/>
+                    </a:lnB>
+                    <a:solidFill>
+                      <a:srgbClr val="FFFFFF"/>
+                    </a:solidFill>
+                  </a:tcPr>
+                </a:tc>
+                <a:tc>
+                  <a:txBody>
+                    <a:bodyPr/>
+                    <a:lstStyle/>
+                    <a:p>
+                      <a:pPr algn="l" indent="0" marL="0">
+                        <a:buNone/>
+                      </a:pPr>
+                      <a:r>
+                        <a:rPr lang="en-US" sz="1400" dirty="0">
+                          <a:solidFill>
+                            <a:srgbClr val="202124"/>
+                          </a:solidFill>
+                        </a:rPr>
+                        <a:t>Missing EXIF Metadata</a:t>
+                      </a:r>
+                      <a:endParaRPr lang="en-US" sz="1400" dirty="0"/>
+                    </a:p>
+                  </a:txBody>
+                  <a:tcPr marL="91440" marR="91440" marT="45720" marB="45720" anchor="ctr">
+                    <a:lnL w="12700" cap="flat" cmpd="sng" algn="ctr">
+                      <a:solidFill>
+                        <a:srgbClr val="DADCE0"/>
+                      </a:solidFill>
+                      <a:prstDash val="solid"/>
+                      <a:round/>
+                      <a:headEnd type="none" w="med" len="med"/>
+                      <a:tailEnd type="none" w="med" len="med"/>
+                    </a:lnL>
+                    <a:lnR w="12700" cap="flat" cmpd="sng" algn="ctr">
+                      <a:solidFill>
+                        <a:srgbClr val="DADCE0"/>
+                      </a:solidFill>
+                      <a:prstDash val="solid"/>
+                      <a:round/>
+                      <a:headEnd type="none" w="med" len="med"/>
+                      <a:tailEnd type="none" w="med" len="med"/>
+                    </a:lnR>
+                    <a:lnT w="12700" cap="flat" cmpd="sng" algn="ctr">
+                      <a:solidFill>
+                        <a:srgbClr val="DADCE0"/>
+                      </a:solidFill>
+                      <a:prstDash val="solid"/>
+                      <a:round/>
+                      <a:headEnd type="none" w="med" len="med"/>
+                      <a:tailEnd type="none" w="med" len="med"/>
+                    </a:lnT>
+                    <a:lnB w="12700" cap="flat" cmpd="sng" algn="ctr">
+                      <a:solidFill>
+                        <a:srgbClr val="DADCE0"/>
+                      </a:solidFill>
+                      <a:prstDash val="solid"/>
+                      <a:round/>
+                      <a:headEnd type="none" w="med" len="med"/>
+                      <a:tailEnd type="none" w="med" len="med"/>
+                    </a:lnB>
+                    <a:solidFill>
+                      <a:srgbClr val="FFFFFF"/>
+                    </a:solidFill>
+                  </a:tcPr>
+                </a:tc>
+                <a:tc>
+                  <a:txBody>
+                    <a:bodyPr/>
+                    <a:lstStyle/>
+                    <a:p>
+                      <a:pPr algn="l" indent="0" marL="0">
+                        <a:buNone/>
+                      </a:pPr>
+                      <a:r>
+                        <a:rPr lang="en-US" sz="1400" dirty="0">
+                          <a:solidFill>
+                            <a:srgbClr val="202124"/>
+                          </a:solidFill>
+                        </a:rPr>
+                        <a:t>Scanned documents &amp; WhatsApp downloads lack GPS/timestamps</a:t>
+                      </a:r>
+                      <a:endParaRPr lang="en-US" sz="1400" dirty="0"/>
+                    </a:p>
+                  </a:txBody>
+                  <a:tcPr marL="91440" marR="91440" marT="45720" marB="45720" anchor="ctr">
+                    <a:lnL w="12700" cap="flat" cmpd="sng" algn="ctr">
+                      <a:solidFill>
+                        <a:srgbClr val="DADCE0"/>
+                      </a:solidFill>
+                      <a:prstDash val="solid"/>
+                      <a:round/>
+                      <a:headEnd type="none" w="med" len="med"/>
+                      <a:tailEnd type="none" w="med" len="med"/>
+                    </a:lnL>
+                    <a:lnR w="12700" cap="flat" cmpd="sng" algn="ctr">
+                      <a:solidFill>
+                        <a:srgbClr val="DADCE0"/>
+                      </a:solidFill>
+                      <a:prstDash val="solid"/>
+                      <a:round/>
+                      <a:headEnd type="none" w="med" len="med"/>
+                      <a:tailEnd type="none" w="med" len="med"/>
+                    </a:lnR>
+                    <a:lnT w="12700" cap="flat" cmpd="sng" algn="ctr">
+                      <a:solidFill>
+                        <a:srgbClr val="DADCE0"/>
+                      </a:solidFill>
+                      <a:prstDash val="solid"/>
+                      <a:round/>
+                      <a:headEnd type="none" w="med" len="med"/>
+                      <a:tailEnd type="none" w="med" len="med"/>
+                    </a:lnT>
+                    <a:lnB w="12700" cap="flat" cmpd="sng" algn="ctr">
+                      <a:solidFill>
+                        <a:srgbClr val="DADCE0"/>
+                      </a:solidFill>
+                      <a:prstDash val="solid"/>
+                      <a:round/>
+                      <a:headEnd type="none" w="med" len="med"/>
+                      <a:tailEnd type="none" w="med" len="med"/>
+                    </a:lnB>
+                    <a:solidFill>
+                      <a:srgbClr val="FFFFFF"/>
+                    </a:solidFill>
+                  </a:tcPr>
+                </a:tc>
+                <a:tc>
+                  <a:txBody>
+                    <a:bodyPr/>
+                    <a:lstStyle/>
+                    <a:p>
+                      <a:pPr algn="l" indent="0" marL="0">
+                        <a:buNone/>
+                      </a:pPr>
+                      <a:r>
+                        <a:rPr lang="en-US" sz="1400" dirty="0">
+                          <a:solidFill>
+                            <a:srgbClr val="202124"/>
+                          </a:solidFill>
+                        </a:rPr>
+                        <a:t>24.5% un-indexed blind-spots</a:t>
+                      </a:r>
+                      <a:endParaRPr lang="en-US" sz="1400" dirty="0"/>
+                    </a:p>
+                  </a:txBody>
+                  <a:tcPr marL="91440" marR="91440" marT="45720" marB="45720" anchor="ctr">
+                    <a:lnL w="12700" cap="flat" cmpd="sng" algn="ctr">
+                      <a:solidFill>
+                        <a:srgbClr val="DADCE0"/>
+                      </a:solidFill>
+                      <a:prstDash val="solid"/>
+                      <a:round/>
+                      <a:headEnd type="none" w="med" len="med"/>
+                      <a:tailEnd type="none" w="med" len="med"/>
+                    </a:lnL>
+                    <a:lnR w="12700" cap="flat" cmpd="sng" algn="ctr">
+                      <a:solidFill>
+                        <a:srgbClr val="DADCE0"/>
+                      </a:solidFill>
+                      <a:prstDash val="solid"/>
+                      <a:round/>
+                      <a:headEnd type="none" w="med" len="med"/>
+                      <a:tailEnd type="none" w="med" len="med"/>
+                    </a:lnR>
+                    <a:lnT w="12700" cap="flat" cmpd="sng" algn="ctr">
+                      <a:solidFill>
+                        <a:srgbClr val="DADCE0"/>
+                      </a:solidFill>
+                      <a:prstDash val="solid"/>
+                      <a:round/>
+                      <a:headEnd type="none" w="med" len="med"/>
+                      <a:tailEnd type="none" w="med" len="med"/>
+                    </a:lnT>
+                    <a:lnB w="12700" cap="flat" cmpd="sng" algn="ctr">
+                      <a:solidFill>
+                        <a:srgbClr val="DADCE0"/>
+                      </a:solidFill>
+                      <a:prstDash val="solid"/>
+                      <a:round/>
+                      <a:headEnd type="none" w="med" len="med"/>
+                      <a:tailEnd type="none" w="med" len="med"/>
+                    </a:lnB>
+                    <a:solidFill>
+                      <a:srgbClr val="FFFFFF"/>
+                    </a:solidFill>
+                  </a:tcPr>
+                </a:tc>
+                <a:tc>
+                  <a:txBody>
+                    <a:bodyPr/>
+                    <a:lstStyle/>
+                    <a:p>
+                      <a:pPr algn="l" indent="0" marL="0">
+                        <a:buNone/>
+                      </a:pPr>
+                      <a:r>
+                        <a:rPr lang="en-US" sz="1400" dirty="0">
+                          <a:solidFill>
+                            <a:srgbClr val="202124"/>
+                          </a:solidFill>
+                        </a:rPr>
+                        <a:t>Landmark visual candidate jump</a:t>
                       </a:r>
                       <a:endParaRPr lang="en-US" sz="1400" dirty="0"/>
                     </a:p>
@@ -13762,251 +14496,251 @@
                             <a:srgbClr val="202124"/>
                           </a:solidFill>
                         </a:rPr>
-                        <a:t>CFM-01.C</a:t>
-                      </a:r>
-                      <a:endParaRPr lang="en-US" sz="1400" dirty="0"/>
-                    </a:p>
-                  </a:txBody>
-                  <a:tcPr marL="91440" marR="91440" marT="45720" marB="45720" anchor="ctr">
-                    <a:lnL w="12700" cap="flat" cmpd="sng" algn="ctr">
-                      <a:solidFill>
-                        <a:srgbClr val="DADCE0"/>
-                      </a:solidFill>
-                      <a:prstDash val="solid"/>
-                      <a:round/>
-                      <a:headEnd type="none" w="med" len="med"/>
-                      <a:tailEnd type="none" w="med" len="med"/>
-                    </a:lnL>
-                    <a:lnR w="12700" cap="flat" cmpd="sng" algn="ctr">
-                      <a:solidFill>
-                        <a:srgbClr val="DADCE0"/>
-                      </a:solidFill>
-                      <a:prstDash val="solid"/>
-                      <a:round/>
-                      <a:headEnd type="none" w="med" len="med"/>
-                      <a:tailEnd type="none" w="med" len="med"/>
-                    </a:lnR>
-                    <a:lnT w="12700" cap="flat" cmpd="sng" algn="ctr">
-                      <a:solidFill>
-                        <a:srgbClr val="DADCE0"/>
-                      </a:solidFill>
-                      <a:prstDash val="solid"/>
-                      <a:round/>
-                      <a:headEnd type="none" w="med" len="med"/>
-                      <a:tailEnd type="none" w="med" len="med"/>
-                    </a:lnT>
-                    <a:lnB w="12700" cap="flat" cmpd="sng" algn="ctr">
-                      <a:solidFill>
-                        <a:srgbClr val="DADCE0"/>
-                      </a:solidFill>
-                      <a:prstDash val="solid"/>
-                      <a:round/>
-                      <a:headEnd type="none" w="med" len="med"/>
-                      <a:tailEnd type="none" w="med" len="med"/>
-                    </a:lnB>
-                    <a:solidFill>
-                      <a:srgbClr val="FFFFFF"/>
-                    </a:solidFill>
-                  </a:tcPr>
-                </a:tc>
-                <a:tc>
-                  <a:txBody>
-                    <a:bodyPr/>
-                    <a:lstStyle/>
-                    <a:p>
-                      <a:pPr algn="l" indent="0" marL="0">
-                        <a:buNone/>
-                      </a:pPr>
-                      <a:r>
-                        <a:rPr lang="en-US" sz="1400" dirty="0">
-                          <a:solidFill>
-                            <a:srgbClr val="202124"/>
-                          </a:solidFill>
-                        </a:rPr>
-                        <a:t>Timeline Scroll Fatigue</a:t>
-                      </a:r>
-                      <a:endParaRPr lang="en-US" sz="1400" dirty="0"/>
-                    </a:p>
-                  </a:txBody>
-                  <a:tcPr marL="91440" marR="91440" marT="45720" marB="45720" anchor="ctr">
-                    <a:lnL w="12700" cap="flat" cmpd="sng" algn="ctr">
-                      <a:solidFill>
-                        <a:srgbClr val="DADCE0"/>
-                      </a:solidFill>
-                      <a:prstDash val="solid"/>
-                      <a:round/>
-                      <a:headEnd type="none" w="med" len="med"/>
-                      <a:tailEnd type="none" w="med" len="med"/>
-                    </a:lnL>
-                    <a:lnR w="12700" cap="flat" cmpd="sng" algn="ctr">
-                      <a:solidFill>
-                        <a:srgbClr val="DADCE0"/>
-                      </a:solidFill>
-                      <a:prstDash val="solid"/>
-                      <a:round/>
-                      <a:headEnd type="none" w="med" len="med"/>
-                      <a:tailEnd type="none" w="med" len="med"/>
-                    </a:lnR>
-                    <a:lnT w="12700" cap="flat" cmpd="sng" algn="ctr">
-                      <a:solidFill>
-                        <a:srgbClr val="DADCE0"/>
-                      </a:solidFill>
-                      <a:prstDash val="solid"/>
-                      <a:round/>
-                      <a:headEnd type="none" w="med" len="med"/>
-                      <a:tailEnd type="none" w="med" len="med"/>
-                    </a:lnT>
-                    <a:lnB w="12700" cap="flat" cmpd="sng" algn="ctr">
-                      <a:solidFill>
-                        <a:srgbClr val="DADCE0"/>
-                      </a:solidFill>
-                      <a:prstDash val="solid"/>
-                      <a:round/>
-                      <a:headEnd type="none" w="med" len="med"/>
-                      <a:tailEnd type="none" w="med" len="med"/>
-                    </a:lnB>
-                    <a:solidFill>
-                      <a:srgbClr val="FFFFFF"/>
-                    </a:solidFill>
-                  </a:tcPr>
-                </a:tc>
-                <a:tc>
-                  <a:txBody>
-                    <a:bodyPr/>
-                    <a:lstStyle/>
-                    <a:p>
-                      <a:pPr algn="l" indent="0" marL="0">
-                        <a:buNone/>
-                      </a:pPr>
-                      <a:r>
-                        <a:rPr lang="en-US" sz="1400" dirty="0">
-                          <a:solidFill>
-                            <a:srgbClr val="202124"/>
-                          </a:solidFill>
-                        </a:rPr>
-                        <a:t>Linear scrolling past 5,000+ media cards</a:t>
-                      </a:r>
-                      <a:endParaRPr lang="en-US" sz="1400" dirty="0"/>
-                    </a:p>
-                  </a:txBody>
-                  <a:tcPr marL="91440" marR="91440" marT="45720" marB="45720" anchor="ctr">
-                    <a:lnL w="12700" cap="flat" cmpd="sng" algn="ctr">
-                      <a:solidFill>
-                        <a:srgbClr val="DADCE0"/>
-                      </a:solidFill>
-                      <a:prstDash val="solid"/>
-                      <a:round/>
-                      <a:headEnd type="none" w="med" len="med"/>
-                      <a:tailEnd type="none" w="med" len="med"/>
-                    </a:lnL>
-                    <a:lnR w="12700" cap="flat" cmpd="sng" algn="ctr">
-                      <a:solidFill>
-                        <a:srgbClr val="DADCE0"/>
-                      </a:solidFill>
-                      <a:prstDash val="solid"/>
-                      <a:round/>
-                      <a:headEnd type="none" w="med" len="med"/>
-                      <a:tailEnd type="none" w="med" len="med"/>
-                    </a:lnR>
-                    <a:lnT w="12700" cap="flat" cmpd="sng" algn="ctr">
-                      <a:solidFill>
-                        <a:srgbClr val="DADCE0"/>
-                      </a:solidFill>
-                      <a:prstDash val="solid"/>
-                      <a:round/>
-                      <a:headEnd type="none" w="med" len="med"/>
-                      <a:tailEnd type="none" w="med" len="med"/>
-                    </a:lnT>
-                    <a:lnB w="12700" cap="flat" cmpd="sng" algn="ctr">
-                      <a:solidFill>
-                        <a:srgbClr val="DADCE0"/>
-                      </a:solidFill>
-                      <a:prstDash val="solid"/>
-                      <a:round/>
-                      <a:headEnd type="none" w="med" len="med"/>
-                      <a:tailEnd type="none" w="med" len="med"/>
-                    </a:lnB>
-                    <a:solidFill>
-                      <a:srgbClr val="FFFFFF"/>
-                    </a:solidFill>
-                  </a:tcPr>
-                </a:tc>
-                <a:tc>
-                  <a:txBody>
-                    <a:bodyPr/>
-                    <a:lstStyle/>
-                    <a:p>
-                      <a:pPr algn="l" indent="0" marL="0">
-                        <a:buNone/>
-                      </a:pPr>
-                      <a:r>
-                        <a:rPr lang="en-US" sz="1400" dirty="0">
-                          <a:solidFill>
-                            <a:srgbClr val="202124"/>
-                          </a:solidFill>
-                        </a:rPr>
-                        <a:t>76.5% search abandonment</a:t>
-                      </a:r>
-                      <a:endParaRPr lang="en-US" sz="1400" dirty="0"/>
-                    </a:p>
-                  </a:txBody>
-                  <a:tcPr marL="91440" marR="91440" marT="45720" marB="45720" anchor="ctr">
-                    <a:lnL w="12700" cap="flat" cmpd="sng" algn="ctr">
-                      <a:solidFill>
-                        <a:srgbClr val="DADCE0"/>
-                      </a:solidFill>
-                      <a:prstDash val="solid"/>
-                      <a:round/>
-                      <a:headEnd type="none" w="med" len="med"/>
-                      <a:tailEnd type="none" w="med" len="med"/>
-                    </a:lnL>
-                    <a:lnR w="12700" cap="flat" cmpd="sng" algn="ctr">
-                      <a:solidFill>
-                        <a:srgbClr val="DADCE0"/>
-                      </a:solidFill>
-                      <a:prstDash val="solid"/>
-                      <a:round/>
-                      <a:headEnd type="none" w="med" len="med"/>
-                      <a:tailEnd type="none" w="med" len="med"/>
-                    </a:lnR>
-                    <a:lnT w="12700" cap="flat" cmpd="sng" algn="ctr">
-                      <a:solidFill>
-                        <a:srgbClr val="DADCE0"/>
-                      </a:solidFill>
-                      <a:prstDash val="solid"/>
-                      <a:round/>
-                      <a:headEnd type="none" w="med" len="med"/>
-                      <a:tailEnd type="none" w="med" len="med"/>
-                    </a:lnT>
-                    <a:lnB w="12700" cap="flat" cmpd="sng" algn="ctr">
-                      <a:solidFill>
-                        <a:srgbClr val="DADCE0"/>
-                      </a:solidFill>
-                      <a:prstDash val="solid"/>
-                      <a:round/>
-                      <a:headEnd type="none" w="med" len="med"/>
-                      <a:tailEnd type="none" w="med" len="med"/>
-                    </a:lnB>
-                    <a:solidFill>
-                      <a:srgbClr val="FFFFFF"/>
-                    </a:solidFill>
-                  </a:tcPr>
-                </a:tc>
-                <a:tc>
-                  <a:txBody>
-                    <a:bodyPr/>
-                    <a:lstStyle/>
-                    <a:p>
-                      <a:pPr algn="l" indent="0" marL="0">
-                        <a:buNone/>
-                      </a:pPr>
-                      <a:r>
-                        <a:rPr lang="en-US" sz="1400" dirty="0">
-                          <a:solidFill>
-                            <a:srgbClr val="202124"/>
-                          </a:solidFill>
-                        </a:rPr>
-                        <a:t>1-Tap contextual jump</a:t>
+                        <a:t>CFM-03</a:t>
+                      </a:r>
+                      <a:endParaRPr lang="en-US" sz="1400" dirty="0"/>
+                    </a:p>
+                  </a:txBody>
+                  <a:tcPr marL="91440" marR="91440" marT="45720" marB="45720" anchor="ctr">
+                    <a:lnL w="12700" cap="flat" cmpd="sng" algn="ctr">
+                      <a:solidFill>
+                        <a:srgbClr val="DADCE0"/>
+                      </a:solidFill>
+                      <a:prstDash val="solid"/>
+                      <a:round/>
+                      <a:headEnd type="none" w="med" len="med"/>
+                      <a:tailEnd type="none" w="med" len="med"/>
+                    </a:lnL>
+                    <a:lnR w="12700" cap="flat" cmpd="sng" algn="ctr">
+                      <a:solidFill>
+                        <a:srgbClr val="DADCE0"/>
+                      </a:solidFill>
+                      <a:prstDash val="solid"/>
+                      <a:round/>
+                      <a:headEnd type="none" w="med" len="med"/>
+                      <a:tailEnd type="none" w="med" len="med"/>
+                    </a:lnR>
+                    <a:lnT w="12700" cap="flat" cmpd="sng" algn="ctr">
+                      <a:solidFill>
+                        <a:srgbClr val="DADCE0"/>
+                      </a:solidFill>
+                      <a:prstDash val="solid"/>
+                      <a:round/>
+                      <a:headEnd type="none" w="med" len="med"/>
+                      <a:tailEnd type="none" w="med" len="med"/>
+                    </a:lnT>
+                    <a:lnB w="12700" cap="flat" cmpd="sng" algn="ctr">
+                      <a:solidFill>
+                        <a:srgbClr val="DADCE0"/>
+                      </a:solidFill>
+                      <a:prstDash val="solid"/>
+                      <a:round/>
+                      <a:headEnd type="none" w="med" len="med"/>
+                      <a:tailEnd type="none" w="med" len="med"/>
+                    </a:lnB>
+                    <a:solidFill>
+                      <a:srgbClr val="FFFFFF"/>
+                    </a:solidFill>
+                  </a:tcPr>
+                </a:tc>
+                <a:tc>
+                  <a:txBody>
+                    <a:bodyPr/>
+                    <a:lstStyle/>
+                    <a:p>
+                      <a:pPr algn="l" indent="0" marL="0">
+                        <a:buNone/>
+                      </a:pPr>
+                      <a:r>
+                        <a:rPr lang="en-US" sz="1400" dirty="0">
+                          <a:solidFill>
+                            <a:srgbClr val="202124"/>
+                          </a:solidFill>
+                        </a:rPr>
+                        <a:t>Chronological Overwhelm</a:t>
+                      </a:r>
+                      <a:endParaRPr lang="en-US" sz="1400" dirty="0"/>
+                    </a:p>
+                  </a:txBody>
+                  <a:tcPr marL="91440" marR="91440" marT="45720" marB="45720" anchor="ctr">
+                    <a:lnL w="12700" cap="flat" cmpd="sng" algn="ctr">
+                      <a:solidFill>
+                        <a:srgbClr val="DADCE0"/>
+                      </a:solidFill>
+                      <a:prstDash val="solid"/>
+                      <a:round/>
+                      <a:headEnd type="none" w="med" len="med"/>
+                      <a:tailEnd type="none" w="med" len="med"/>
+                    </a:lnL>
+                    <a:lnR w="12700" cap="flat" cmpd="sng" algn="ctr">
+                      <a:solidFill>
+                        <a:srgbClr val="DADCE0"/>
+                      </a:solidFill>
+                      <a:prstDash val="solid"/>
+                      <a:round/>
+                      <a:headEnd type="none" w="med" len="med"/>
+                      <a:tailEnd type="none" w="med" len="med"/>
+                    </a:lnR>
+                    <a:lnT w="12700" cap="flat" cmpd="sng" algn="ctr">
+                      <a:solidFill>
+                        <a:srgbClr val="DADCE0"/>
+                      </a:solidFill>
+                      <a:prstDash val="solid"/>
+                      <a:round/>
+                      <a:headEnd type="none" w="med" len="med"/>
+                      <a:tailEnd type="none" w="med" len="med"/>
+                    </a:lnT>
+                    <a:lnB w="12700" cap="flat" cmpd="sng" algn="ctr">
+                      <a:solidFill>
+                        <a:srgbClr val="DADCE0"/>
+                      </a:solidFill>
+                      <a:prstDash val="solid"/>
+                      <a:round/>
+                      <a:headEnd type="none" w="med" len="med"/>
+                      <a:tailEnd type="none" w="med" len="med"/>
+                    </a:lnB>
+                    <a:solidFill>
+                      <a:srgbClr val="FFFFFF"/>
+                    </a:solidFill>
+                  </a:tcPr>
+                </a:tc>
+                <a:tc>
+                  <a:txBody>
+                    <a:bodyPr/>
+                    <a:lstStyle/>
+                    <a:p>
+                      <a:pPr algn="l" indent="0" marL="0">
+                        <a:buNone/>
+                      </a:pPr>
+                      <a:r>
+                        <a:rPr lang="en-US" sz="1400" dirty="0">
+                          <a:solidFill>
+                            <a:srgbClr val="202124"/>
+                          </a:solidFill>
+                        </a:rPr>
+                        <a:t>Unfiltered linear scrolling past 5,000+ media cards in grid</a:t>
+                      </a:r>
+                      <a:endParaRPr lang="en-US" sz="1400" dirty="0"/>
+                    </a:p>
+                  </a:txBody>
+                  <a:tcPr marL="91440" marR="91440" marT="45720" marB="45720" anchor="ctr">
+                    <a:lnL w="12700" cap="flat" cmpd="sng" algn="ctr">
+                      <a:solidFill>
+                        <a:srgbClr val="DADCE0"/>
+                      </a:solidFill>
+                      <a:prstDash val="solid"/>
+                      <a:round/>
+                      <a:headEnd type="none" w="med" len="med"/>
+                      <a:tailEnd type="none" w="med" len="med"/>
+                    </a:lnL>
+                    <a:lnR w="12700" cap="flat" cmpd="sng" algn="ctr">
+                      <a:solidFill>
+                        <a:srgbClr val="DADCE0"/>
+                      </a:solidFill>
+                      <a:prstDash val="solid"/>
+                      <a:round/>
+                      <a:headEnd type="none" w="med" len="med"/>
+                      <a:tailEnd type="none" w="med" len="med"/>
+                    </a:lnR>
+                    <a:lnT w="12700" cap="flat" cmpd="sng" algn="ctr">
+                      <a:solidFill>
+                        <a:srgbClr val="DADCE0"/>
+                      </a:solidFill>
+                      <a:prstDash val="solid"/>
+                      <a:round/>
+                      <a:headEnd type="none" w="med" len="med"/>
+                      <a:tailEnd type="none" w="med" len="med"/>
+                    </a:lnT>
+                    <a:lnB w="12700" cap="flat" cmpd="sng" algn="ctr">
+                      <a:solidFill>
+                        <a:srgbClr val="DADCE0"/>
+                      </a:solidFill>
+                      <a:prstDash val="solid"/>
+                      <a:round/>
+                      <a:headEnd type="none" w="med" len="med"/>
+                      <a:tailEnd type="none" w="med" len="med"/>
+                    </a:lnB>
+                    <a:solidFill>
+                      <a:srgbClr val="FFFFFF"/>
+                    </a:solidFill>
+                  </a:tcPr>
+                </a:tc>
+                <a:tc>
+                  <a:txBody>
+                    <a:bodyPr/>
+                    <a:lstStyle/>
+                    <a:p>
+                      <a:pPr algn="l" indent="0" marL="0">
+                        <a:buNone/>
+                      </a:pPr>
+                      <a:r>
+                        <a:rPr lang="en-US" sz="1400" dirty="0">
+                          <a:solidFill>
+                            <a:srgbClr val="202124"/>
+                          </a:solidFill>
+                        </a:rPr>
+                        <a:t>76.5% scroll fatigue cliff</a:t>
+                      </a:r>
+                      <a:endParaRPr lang="en-US" sz="1400" dirty="0"/>
+                    </a:p>
+                  </a:txBody>
+                  <a:tcPr marL="91440" marR="91440" marT="45720" marB="45720" anchor="ctr">
+                    <a:lnL w="12700" cap="flat" cmpd="sng" algn="ctr">
+                      <a:solidFill>
+                        <a:srgbClr val="DADCE0"/>
+                      </a:solidFill>
+                      <a:prstDash val="solid"/>
+                      <a:round/>
+                      <a:headEnd type="none" w="med" len="med"/>
+                      <a:tailEnd type="none" w="med" len="med"/>
+                    </a:lnL>
+                    <a:lnR w="12700" cap="flat" cmpd="sng" algn="ctr">
+                      <a:solidFill>
+                        <a:srgbClr val="DADCE0"/>
+                      </a:solidFill>
+                      <a:prstDash val="solid"/>
+                      <a:round/>
+                      <a:headEnd type="none" w="med" len="med"/>
+                      <a:tailEnd type="none" w="med" len="med"/>
+                    </a:lnR>
+                    <a:lnT w="12700" cap="flat" cmpd="sng" algn="ctr">
+                      <a:solidFill>
+                        <a:srgbClr val="DADCE0"/>
+                      </a:solidFill>
+                      <a:prstDash val="solid"/>
+                      <a:round/>
+                      <a:headEnd type="none" w="med" len="med"/>
+                      <a:tailEnd type="none" w="med" len="med"/>
+                    </a:lnT>
+                    <a:lnB w="12700" cap="flat" cmpd="sng" algn="ctr">
+                      <a:solidFill>
+                        <a:srgbClr val="DADCE0"/>
+                      </a:solidFill>
+                      <a:prstDash val="solid"/>
+                      <a:round/>
+                      <a:headEnd type="none" w="med" len="med"/>
+                      <a:tailEnd type="none" w="med" len="med"/>
+                    </a:lnB>
+                    <a:solidFill>
+                      <a:srgbClr val="FFFFFF"/>
+                    </a:solidFill>
+                  </a:tcPr>
+                </a:tc>
+                <a:tc>
+                  <a:txBody>
+                    <a:bodyPr/>
+                    <a:lstStyle/>
+                    <a:p>
+                      <a:pPr algn="l" indent="0" marL="0">
+                        <a:buNone/>
+                      </a:pPr>
+                      <a:r>
+                        <a:rPr lang="en-US" sz="1400" dirty="0">
+                          <a:solidFill>
+                            <a:srgbClr val="202124"/>
+                          </a:solidFill>
+                        </a:rPr>
+                        <a:t>1-Tap Timeline Context Jump</a:t>
                       </a:r>
                       <a:endParaRPr lang="en-US" sz="1400" dirty="0"/>
                     </a:p>
@@ -14069,251 +14803,251 @@
                             <a:srgbClr val="202124"/>
                           </a:solidFill>
                         </a:rPr>
-                        <a:t>Governance</a:t>
-                      </a:r>
-                      <a:endParaRPr lang="en-US" sz="1400" dirty="0"/>
-                    </a:p>
-                  </a:txBody>
-                  <a:tcPr marL="91440" marR="91440" marT="45720" marB="45720" anchor="ctr">
-                    <a:lnL w="12700" cap="flat" cmpd="sng" algn="ctr">
-                      <a:solidFill>
-                        <a:srgbClr val="DADCE0"/>
-                      </a:solidFill>
-                      <a:prstDash val="solid"/>
-                      <a:round/>
-                      <a:headEnd type="none" w="med" len="med"/>
-                      <a:tailEnd type="none" w="med" len="med"/>
-                    </a:lnL>
-                    <a:lnR w="12700" cap="flat" cmpd="sng" algn="ctr">
-                      <a:solidFill>
-                        <a:srgbClr val="DADCE0"/>
-                      </a:solidFill>
-                      <a:prstDash val="solid"/>
-                      <a:round/>
-                      <a:headEnd type="none" w="med" len="med"/>
-                      <a:tailEnd type="none" w="med" len="med"/>
-                    </a:lnR>
-                    <a:lnT w="12700" cap="flat" cmpd="sng" algn="ctr">
-                      <a:solidFill>
-                        <a:srgbClr val="DADCE0"/>
-                      </a:solidFill>
-                      <a:prstDash val="solid"/>
-                      <a:round/>
-                      <a:headEnd type="none" w="med" len="med"/>
-                      <a:tailEnd type="none" w="med" len="med"/>
-                    </a:lnT>
-                    <a:lnB w="12700" cap="flat" cmpd="sng" algn="ctr">
-                      <a:solidFill>
-                        <a:srgbClr val="DADCE0"/>
-                      </a:solidFill>
-                      <a:prstDash val="solid"/>
-                      <a:round/>
-                      <a:headEnd type="none" w="med" len="med"/>
-                      <a:tailEnd type="none" w="med" len="med"/>
-                    </a:lnB>
-                    <a:solidFill>
-                      <a:srgbClr val="FFFFFF"/>
-                    </a:solidFill>
-                  </a:tcPr>
-                </a:tc>
-                <a:tc>
-                  <a:txBody>
-                    <a:bodyPr/>
-                    <a:lstStyle/>
-                    <a:p>
-                      <a:pPr algn="l" indent="0" marL="0">
-                        <a:buNone/>
-                      </a:pPr>
-                      <a:r>
-                        <a:rPr lang="en-US" sz="1400" dirty="0">
-                          <a:solidFill>
-                            <a:srgbClr val="202124"/>
-                          </a:solidFill>
-                        </a:rPr>
-                        <a:t>Ground-Truth Isolation</a:t>
-                      </a:r>
-                      <a:endParaRPr lang="en-US" sz="1400" dirty="0"/>
-                    </a:p>
-                  </a:txBody>
-                  <a:tcPr marL="91440" marR="91440" marT="45720" marB="45720" anchor="ctr">
-                    <a:lnL w="12700" cap="flat" cmpd="sng" algn="ctr">
-                      <a:solidFill>
-                        <a:srgbClr val="DADCE0"/>
-                      </a:solidFill>
-                      <a:prstDash val="solid"/>
-                      <a:round/>
-                      <a:headEnd type="none" w="med" len="med"/>
-                      <a:tailEnd type="none" w="med" len="med"/>
-                    </a:lnL>
-                    <a:lnR w="12700" cap="flat" cmpd="sng" algn="ctr">
-                      <a:solidFill>
-                        <a:srgbClr val="DADCE0"/>
-                      </a:solidFill>
-                      <a:prstDash val="solid"/>
-                      <a:round/>
-                      <a:headEnd type="none" w="med" len="med"/>
-                      <a:tailEnd type="none" w="med" len="med"/>
-                    </a:lnR>
-                    <a:lnT w="12700" cap="flat" cmpd="sng" algn="ctr">
-                      <a:solidFill>
-                        <a:srgbClr val="DADCE0"/>
-                      </a:solidFill>
-                      <a:prstDash val="solid"/>
-                      <a:round/>
-                      <a:headEnd type="none" w="med" len="med"/>
-                      <a:tailEnd type="none" w="med" len="med"/>
-                    </a:lnT>
-                    <a:lnB w="12700" cap="flat" cmpd="sng" algn="ctr">
-                      <a:solidFill>
-                        <a:srgbClr val="DADCE0"/>
-                      </a:solidFill>
-                      <a:prstDash val="solid"/>
-                      <a:round/>
-                      <a:headEnd type="none" w="med" len="med"/>
-                      <a:tailEnd type="none" w="med" len="med"/>
-                    </a:lnB>
-                    <a:solidFill>
-                      <a:srgbClr val="FFFFFF"/>
-                    </a:solidFill>
-                  </a:tcPr>
-                </a:tc>
-                <a:tc>
-                  <a:txBody>
-                    <a:bodyPr/>
-                    <a:lstStyle/>
-                    <a:p>
-                      <a:pPr algn="l" indent="0" marL="0">
-                        <a:buNone/>
-                      </a:pPr>
-                      <a:r>
-                        <a:rPr lang="en-US" sz="1400" dirty="0">
-                          <a:solidFill>
-                            <a:srgbClr val="202124"/>
-                          </a:solidFill>
-                        </a:rPr>
-                        <a:t>Benchmark evaluation label confinement</a:t>
-                      </a:r>
-                      <a:endParaRPr lang="en-US" sz="1400" dirty="0"/>
-                    </a:p>
-                  </a:txBody>
-                  <a:tcPr marL="91440" marR="91440" marT="45720" marB="45720" anchor="ctr">
-                    <a:lnL w="12700" cap="flat" cmpd="sng" algn="ctr">
-                      <a:solidFill>
-                        <a:srgbClr val="DADCE0"/>
-                      </a:solidFill>
-                      <a:prstDash val="solid"/>
-                      <a:round/>
-                      <a:headEnd type="none" w="med" len="med"/>
-                      <a:tailEnd type="none" w="med" len="med"/>
-                    </a:lnL>
-                    <a:lnR w="12700" cap="flat" cmpd="sng" algn="ctr">
-                      <a:solidFill>
-                        <a:srgbClr val="DADCE0"/>
-                      </a:solidFill>
-                      <a:prstDash val="solid"/>
-                      <a:round/>
-                      <a:headEnd type="none" w="med" len="med"/>
-                      <a:tailEnd type="none" w="med" len="med"/>
-                    </a:lnR>
-                    <a:lnT w="12700" cap="flat" cmpd="sng" algn="ctr">
-                      <a:solidFill>
-                        <a:srgbClr val="DADCE0"/>
-                      </a:solidFill>
-                      <a:prstDash val="solid"/>
-                      <a:round/>
-                      <a:headEnd type="none" w="med" len="med"/>
-                      <a:tailEnd type="none" w="med" len="med"/>
-                    </a:lnT>
-                    <a:lnB w="12700" cap="flat" cmpd="sng" algn="ctr">
-                      <a:solidFill>
-                        <a:srgbClr val="DADCE0"/>
-                      </a:solidFill>
-                      <a:prstDash val="solid"/>
-                      <a:round/>
-                      <a:headEnd type="none" w="med" len="med"/>
-                      <a:tailEnd type="none" w="med" len="med"/>
-                    </a:lnB>
-                    <a:solidFill>
-                      <a:srgbClr val="FFFFFF"/>
-                    </a:solidFill>
-                  </a:tcPr>
-                </a:tc>
-                <a:tc>
-                  <a:txBody>
-                    <a:bodyPr/>
-                    <a:lstStyle/>
-                    <a:p>
-                      <a:pPr algn="l" indent="0" marL="0">
-                        <a:buNone/>
-                      </a:pPr>
-                      <a:r>
-                        <a:rPr lang="en-US" sz="1400" dirty="0">
-                          <a:solidFill>
-                            <a:srgbClr val="202124"/>
-                          </a:solidFill>
-                        </a:rPr>
-                        <a:t>Zero evaluation leakage</a:t>
-                      </a:r>
-                      <a:endParaRPr lang="en-US" sz="1400" dirty="0"/>
-                    </a:p>
-                  </a:txBody>
-                  <a:tcPr marL="91440" marR="91440" marT="45720" marB="45720" anchor="ctr">
-                    <a:lnL w="12700" cap="flat" cmpd="sng" algn="ctr">
-                      <a:solidFill>
-                        <a:srgbClr val="DADCE0"/>
-                      </a:solidFill>
-                      <a:prstDash val="solid"/>
-                      <a:round/>
-                      <a:headEnd type="none" w="med" len="med"/>
-                      <a:tailEnd type="none" w="med" len="med"/>
-                    </a:lnL>
-                    <a:lnR w="12700" cap="flat" cmpd="sng" algn="ctr">
-                      <a:solidFill>
-                        <a:srgbClr val="DADCE0"/>
-                      </a:solidFill>
-                      <a:prstDash val="solid"/>
-                      <a:round/>
-                      <a:headEnd type="none" w="med" len="med"/>
-                      <a:tailEnd type="none" w="med" len="med"/>
-                    </a:lnR>
-                    <a:lnT w="12700" cap="flat" cmpd="sng" algn="ctr">
-                      <a:solidFill>
-                        <a:srgbClr val="DADCE0"/>
-                      </a:solidFill>
-                      <a:prstDash val="solid"/>
-                      <a:round/>
-                      <a:headEnd type="none" w="med" len="med"/>
-                      <a:tailEnd type="none" w="med" len="med"/>
-                    </a:lnT>
-                    <a:lnB w="12700" cap="flat" cmpd="sng" algn="ctr">
-                      <a:solidFill>
-                        <a:srgbClr val="DADCE0"/>
-                      </a:solidFill>
-                      <a:prstDash val="solid"/>
-                      <a:round/>
-                      <a:headEnd type="none" w="med" len="med"/>
-                      <a:tailEnd type="none" w="med" len="med"/>
-                    </a:lnB>
-                    <a:solidFill>
-                      <a:srgbClr val="FFFFFF"/>
-                    </a:solidFill>
-                  </a:tcPr>
-                </a:tc>
-                <a:tc>
-                  <a:txBody>
-                    <a:bodyPr/>
-                    <a:lstStyle/>
-                    <a:p>
-                      <a:pPr algn="l" indent="0" marL="0">
-                        <a:buNone/>
-                      </a:pPr>
-                      <a:r>
-                        <a:rPr lang="en-US" sz="1400" dirty="0">
-                          <a:solidFill>
-                            <a:srgbClr val="202124"/>
-                          </a:solidFill>
-                        </a:rPr>
-                        <a:t>Post-hoc benchmark script</a:t>
+                        <a:t>CFM-04</a:t>
+                      </a:r>
+                      <a:endParaRPr lang="en-US" sz="1400" dirty="0"/>
+                    </a:p>
+                  </a:txBody>
+                  <a:tcPr marL="91440" marR="91440" marT="45720" marB="45720" anchor="ctr">
+                    <a:lnL w="12700" cap="flat" cmpd="sng" algn="ctr">
+                      <a:solidFill>
+                        <a:srgbClr val="DADCE0"/>
+                      </a:solidFill>
+                      <a:prstDash val="solid"/>
+                      <a:round/>
+                      <a:headEnd type="none" w="med" len="med"/>
+                      <a:tailEnd type="none" w="med" len="med"/>
+                    </a:lnL>
+                    <a:lnR w="12700" cap="flat" cmpd="sng" algn="ctr">
+                      <a:solidFill>
+                        <a:srgbClr val="DADCE0"/>
+                      </a:solidFill>
+                      <a:prstDash val="solid"/>
+                      <a:round/>
+                      <a:headEnd type="none" w="med" len="med"/>
+                      <a:tailEnd type="none" w="med" len="med"/>
+                    </a:lnR>
+                    <a:lnT w="12700" cap="flat" cmpd="sng" algn="ctr">
+                      <a:solidFill>
+                        <a:srgbClr val="DADCE0"/>
+                      </a:solidFill>
+                      <a:prstDash val="solid"/>
+                      <a:round/>
+                      <a:headEnd type="none" w="med" len="med"/>
+                      <a:tailEnd type="none" w="med" len="med"/>
+                    </a:lnT>
+                    <a:lnB w="12700" cap="flat" cmpd="sng" algn="ctr">
+                      <a:solidFill>
+                        <a:srgbClr val="DADCE0"/>
+                      </a:solidFill>
+                      <a:prstDash val="solid"/>
+                      <a:round/>
+                      <a:headEnd type="none" w="med" len="med"/>
+                      <a:tailEnd type="none" w="med" len="med"/>
+                    </a:lnB>
+                    <a:solidFill>
+                      <a:srgbClr val="FFFFFF"/>
+                    </a:solidFill>
+                  </a:tcPr>
+                </a:tc>
+                <a:tc>
+                  <a:txBody>
+                    <a:bodyPr/>
+                    <a:lstStyle/>
+                    <a:p>
+                      <a:pPr algn="l" indent="0" marL="0">
+                        <a:buNone/>
+                      </a:pPr>
+                      <a:r>
+                        <a:rPr lang="en-US" sz="1400" dirty="0">
+                          <a:solidFill>
+                            <a:srgbClr val="202124"/>
+                          </a:solidFill>
+                        </a:rPr>
+                        <a:t>Anchor-Target Disconnect</a:t>
+                      </a:r>
+                      <a:endParaRPr lang="en-US" sz="1400" dirty="0"/>
+                    </a:p>
+                  </a:txBody>
+                  <a:tcPr marL="91440" marR="91440" marT="45720" marB="45720" anchor="ctr">
+                    <a:lnL w="12700" cap="flat" cmpd="sng" algn="ctr">
+                      <a:solidFill>
+                        <a:srgbClr val="DADCE0"/>
+                      </a:solidFill>
+                      <a:prstDash val="solid"/>
+                      <a:round/>
+                      <a:headEnd type="none" w="med" len="med"/>
+                      <a:tailEnd type="none" w="med" len="med"/>
+                    </a:lnL>
+                    <a:lnR w="12700" cap="flat" cmpd="sng" algn="ctr">
+                      <a:solidFill>
+                        <a:srgbClr val="DADCE0"/>
+                      </a:solidFill>
+                      <a:prstDash val="solid"/>
+                      <a:round/>
+                      <a:headEnd type="none" w="med" len="med"/>
+                      <a:tailEnd type="none" w="med" len="med"/>
+                    </a:lnR>
+                    <a:lnT w="12700" cap="flat" cmpd="sng" algn="ctr">
+                      <a:solidFill>
+                        <a:srgbClr val="DADCE0"/>
+                      </a:solidFill>
+                      <a:prstDash val="solid"/>
+                      <a:round/>
+                      <a:headEnd type="none" w="med" len="med"/>
+                      <a:tailEnd type="none" w="med" len="med"/>
+                    </a:lnT>
+                    <a:lnB w="12700" cap="flat" cmpd="sng" algn="ctr">
+                      <a:solidFill>
+                        <a:srgbClr val="DADCE0"/>
+                      </a:solidFill>
+                      <a:prstDash val="solid"/>
+                      <a:round/>
+                      <a:headEnd type="none" w="med" len="med"/>
+                      <a:tailEnd type="none" w="med" len="med"/>
+                    </a:lnB>
+                    <a:solidFill>
+                      <a:srgbClr val="FFFFFF"/>
+                    </a:solidFill>
+                  </a:tcPr>
+                </a:tc>
+                <a:tc>
+                  <a:txBody>
+                    <a:bodyPr/>
+                    <a:lstStyle/>
+                    <a:p>
+                      <a:pPr algn="l" indent="0" marL="0">
+                        <a:buNone/>
+                      </a:pPr>
+                      <a:r>
+                        <a:rPr lang="en-US" sz="1400" dirty="0">
+                          <a:solidFill>
+                            <a:srgbClr val="202124"/>
+                          </a:solidFill>
+                        </a:rPr>
+                        <a:t>Lack of spatial-temporal bridge between event anchor &amp; target</a:t>
+                      </a:r>
+                      <a:endParaRPr lang="en-US" sz="1400" dirty="0"/>
+                    </a:p>
+                  </a:txBody>
+                  <a:tcPr marL="91440" marR="91440" marT="45720" marB="45720" anchor="ctr">
+                    <a:lnL w="12700" cap="flat" cmpd="sng" algn="ctr">
+                      <a:solidFill>
+                        <a:srgbClr val="DADCE0"/>
+                      </a:solidFill>
+                      <a:prstDash val="solid"/>
+                      <a:round/>
+                      <a:headEnd type="none" w="med" len="med"/>
+                      <a:tailEnd type="none" w="med" len="med"/>
+                    </a:lnL>
+                    <a:lnR w="12700" cap="flat" cmpd="sng" algn="ctr">
+                      <a:solidFill>
+                        <a:srgbClr val="DADCE0"/>
+                      </a:solidFill>
+                      <a:prstDash val="solid"/>
+                      <a:round/>
+                      <a:headEnd type="none" w="med" len="med"/>
+                      <a:tailEnd type="none" w="med" len="med"/>
+                    </a:lnR>
+                    <a:lnT w="12700" cap="flat" cmpd="sng" algn="ctr">
+                      <a:solidFill>
+                        <a:srgbClr val="DADCE0"/>
+                      </a:solidFill>
+                      <a:prstDash val="solid"/>
+                      <a:round/>
+                      <a:headEnd type="none" w="med" len="med"/>
+                      <a:tailEnd type="none" w="med" len="med"/>
+                    </a:lnT>
+                    <a:lnB w="12700" cap="flat" cmpd="sng" algn="ctr">
+                      <a:solidFill>
+                        <a:srgbClr val="DADCE0"/>
+                      </a:solidFill>
+                      <a:prstDash val="solid"/>
+                      <a:round/>
+                      <a:headEnd type="none" w="med" len="med"/>
+                      <a:tailEnd type="none" w="med" len="med"/>
+                    </a:lnB>
+                    <a:solidFill>
+                      <a:srgbClr val="FFFFFF"/>
+                    </a:solidFill>
+                  </a:tcPr>
+                </a:tc>
+                <a:tc>
+                  <a:txBody>
+                    <a:bodyPr/>
+                    <a:lstStyle/>
+                    <a:p>
+                      <a:pPr algn="l" indent="0" marL="0">
+                        <a:buNone/>
+                      </a:pPr>
+                      <a:r>
+                        <a:rPr lang="en-US" sz="1400" dirty="0">
+                          <a:solidFill>
+                            <a:srgbClr val="202124"/>
+                          </a:solidFill>
+                        </a:rPr>
+                        <a:t>73.5% memory recall mismatch</a:t>
+                      </a:r>
+                      <a:endParaRPr lang="en-US" sz="1400" dirty="0"/>
+                    </a:p>
+                  </a:txBody>
+                  <a:tcPr marL="91440" marR="91440" marT="45720" marB="45720" anchor="ctr">
+                    <a:lnL w="12700" cap="flat" cmpd="sng" algn="ctr">
+                      <a:solidFill>
+                        <a:srgbClr val="DADCE0"/>
+                      </a:solidFill>
+                      <a:prstDash val="solid"/>
+                      <a:round/>
+                      <a:headEnd type="none" w="med" len="med"/>
+                      <a:tailEnd type="none" w="med" len="med"/>
+                    </a:lnL>
+                    <a:lnR w="12700" cap="flat" cmpd="sng" algn="ctr">
+                      <a:solidFill>
+                        <a:srgbClr val="DADCE0"/>
+                      </a:solidFill>
+                      <a:prstDash val="solid"/>
+                      <a:round/>
+                      <a:headEnd type="none" w="med" len="med"/>
+                      <a:tailEnd type="none" w="med" len="med"/>
+                    </a:lnR>
+                    <a:lnT w="12700" cap="flat" cmpd="sng" algn="ctr">
+                      <a:solidFill>
+                        <a:srgbClr val="DADCE0"/>
+                      </a:solidFill>
+                      <a:prstDash val="solid"/>
+                      <a:round/>
+                      <a:headEnd type="none" w="med" len="med"/>
+                      <a:tailEnd type="none" w="med" len="med"/>
+                    </a:lnT>
+                    <a:lnB w="12700" cap="flat" cmpd="sng" algn="ctr">
+                      <a:solidFill>
+                        <a:srgbClr val="DADCE0"/>
+                      </a:solidFill>
+                      <a:prstDash val="solid"/>
+                      <a:round/>
+                      <a:headEnd type="none" w="med" len="med"/>
+                      <a:tailEnd type="none" w="med" len="med"/>
+                    </a:lnB>
+                    <a:solidFill>
+                      <a:srgbClr val="FFFFFF"/>
+                    </a:solidFill>
+                  </a:tcPr>
+                </a:tc>
+                <a:tc>
+                  <a:txBody>
+                    <a:bodyPr/>
+                    <a:lstStyle/>
+                    <a:p>
+                      <a:pPr algn="l" indent="0" marL="0">
+                        <a:buNone/>
+                      </a:pPr>
+                      <a:r>
+                        <a:rPr lang="en-US" sz="1400" dirty="0">
+                          <a:solidFill>
+                            <a:srgbClr val="202124"/>
+                          </a:solidFill>
+                        </a:rPr>
+                        <a:t>±4.0h, ≤1.0km context windowing</a:t>
                       </a:r>
                       <a:endParaRPr lang="en-US" sz="1400" dirty="0"/>
                     </a:p>
@@ -14488,7 +15222,7 @@
                   <a:srgbClr val="1A73E8"/>
                 </a:solidFill>
               </a:rPr>
-              <a:t>7. SOLUTION RATIONALE &amp; CONCEPT A</a:t>
+              <a:t>7. SOLUTION RATIONALE &amp; CONCEPT-A COMPARISON</a:t>
             </a:r>
             <a:endParaRPr lang="en-US" sz="1400" dirty="0"/>
           </a:p>
@@ -14560,7 +15294,7 @@
                   <a:srgbClr val="1A73E8"/>
                 </a:solidFill>
               </a:rPr>
-              <a:t>Architectural Trade-off Evaluation Matrix</a:t>
+              <a:t>Architectural Trade-off Evaluation Matrix &amp; Quantitative Selection Rationale</a:t>
             </a:r>
             <a:endParaRPr lang="en-US" sz="1500" dirty="0"/>
           </a:p>
@@ -14589,13 +15323,13 @@
             <a:tbl>
               <a:tblPr/>
               <a:tblGrid>
-                <a:gridCol w="2286000"/>
+                <a:gridCol w="2103120"/>
+                <a:gridCol w="1005840"/>
+                <a:gridCol w="1005840"/>
                 <a:gridCol w="1097280"/>
-                <a:gridCol w="1097280"/>
+                <a:gridCol w="1005840"/>
+                <a:gridCol w="822960"/>
                 <a:gridCol w="1188720"/>
-                <a:gridCol w="1188720"/>
-                <a:gridCol w="914400"/>
-                <a:gridCol w="1371600"/>
               </a:tblGrid>
               <a:tr h="0">
                 <a:tc>
@@ -14978,7 +15712,7 @@
                             <a:srgbClr val="1A73E8"/>
                           </a:solidFill>
                         </a:rPr>
-                        <a:t>Decision</a:t>
+                        <a:t>Strategic Decision</a:t>
                       </a:r>
                       <a:endParaRPr lang="en-US" sz="1400" dirty="0"/>
                     </a:p>
@@ -15041,7 +15775,7 @@
                             <a:srgbClr val="202124"/>
                           </a:solidFill>
                         </a:rPr>
-                        <a:t>Concept A: Contextual Jump &amp; Expand</a:t>
+                        <a:t>Concept A: 1-Tap Context Jump</a:t>
                       </a:r>
                       <a:endParaRPr lang="en-US" sz="1400" dirty="0"/>
                     </a:p>
@@ -15470,7 +16204,7 @@
                             <a:srgbClr val="202124"/>
                           </a:solidFill>
                         </a:rPr>
-                        <a:t>Concept B: Semantic Multi-Hop RAG</a:t>
+                        <a:t>Concept B: Conversational Ask Photos</a:t>
                       </a:r>
                       <a:endParaRPr lang="en-US" sz="1400" dirty="0"/>
                     </a:p>
@@ -15653,7 +16387,7 @@
                             <a:srgbClr val="202124"/>
                           </a:solidFill>
                         </a:rPr>
-                        <a:t>1.8 – 3.2 sec</a:t>
+                        <a:t>4.2 sec</a:t>
                       </a:r>
                       <a:endParaRPr lang="en-US" sz="1400" dirty="0"/>
                     </a:p>
@@ -15836,7 +16570,7 @@
                             <a:srgbClr val="202124"/>
                           </a:solidFill>
                         </a:rPr>
-                        <a:t>REJECTED (High Latency/Cost)</a:t>
+                        <a:t>REJECTED (High Cost/Latency)</a:t>
                       </a:r>
                       <a:endParaRPr lang="en-US" sz="1400" dirty="0"/>
                     </a:p>
@@ -16440,7 +17174,7 @@
                   <a:srgbClr val="1A73E8"/>
                 </a:solidFill>
               </a:rPr>
-              <a:t>8. MVP IMPLEMENTATION &amp; USER TESTING</a:t>
+              <a:t>8. MVP ARCHITECTURE &amp; COMPONENT VERIFICATION</a:t>
             </a:r>
             <a:endParaRPr lang="en-US" sz="1400" dirty="0"/>
           </a:p>
@@ -16512,7 +17246,7 @@
                   <a:srgbClr val="1A73E8"/>
                 </a:solidFill>
               </a:rPr>
-              <a:t>3-Screen Interactive Solution Prototype Specification &amp; Live Links</a:t>
+              <a:t>3-Screen Interactive Solution Architecture Specification &amp; Live Links</a:t>
             </a:r>
             <a:endParaRPr lang="en-US" sz="1500" dirty="0"/>
           </a:p>
@@ -16541,11 +17275,11 @@
             <a:tbl>
               <a:tblPr/>
               <a:tblGrid>
+                <a:gridCol w="1463040"/>
                 <a:gridCol w="1645920"/>
-                <a:gridCol w="1828800"/>
-                <a:gridCol w="1828800"/>
-                <a:gridCol w="1828800"/>
                 <a:gridCol w="2011680"/>
+                <a:gridCol w="1645920"/>
+                <a:gridCol w="1463040"/>
               </a:tblGrid>
               <a:tr h="0">
                 <a:tc>
@@ -16684,7 +17418,7 @@
                             <a:srgbClr val="1A73E8"/>
                           </a:solidFill>
                         </a:rPr>
-                        <a:t>User Interaction</a:t>
+                        <a:t>User Action &amp; Technical Mechanism</a:t>
                       </a:r>
                       <a:endParaRPr lang="en-US" sz="1400" dirty="0"/>
                     </a:p>
@@ -16991,68 +17725,68 @@
                             <a:srgbClr val="202124"/>
                           </a:solidFill>
                         </a:rPr>
-                        <a:t>Types vague query or clicks pill</a:t>
-                      </a:r>
-                      <a:endParaRPr lang="en-US" sz="1400" dirty="0"/>
-                    </a:p>
-                  </a:txBody>
-                  <a:tcPr marL="91440" marR="91440" marT="45720" marB="45720" anchor="ctr">
-                    <a:lnL w="12700" cap="flat" cmpd="sng" algn="ctr">
-                      <a:solidFill>
-                        <a:srgbClr val="DADCE0"/>
-                      </a:solidFill>
-                      <a:prstDash val="solid"/>
-                      <a:round/>
-                      <a:headEnd type="none" w="med" len="med"/>
-                      <a:tailEnd type="none" w="med" len="med"/>
-                    </a:lnL>
-                    <a:lnR w="12700" cap="flat" cmpd="sng" algn="ctr">
-                      <a:solidFill>
-                        <a:srgbClr val="DADCE0"/>
-                      </a:solidFill>
-                      <a:prstDash val="solid"/>
-                      <a:round/>
-                      <a:headEnd type="none" w="med" len="med"/>
-                      <a:tailEnd type="none" w="med" len="med"/>
-                    </a:lnR>
-                    <a:lnT w="12700" cap="flat" cmpd="sng" algn="ctr">
-                      <a:solidFill>
-                        <a:srgbClr val="DADCE0"/>
-                      </a:solidFill>
-                      <a:prstDash val="solid"/>
-                      <a:round/>
-                      <a:headEnd type="none" w="med" len="med"/>
-                      <a:tailEnd type="none" w="med" len="med"/>
-                    </a:lnT>
-                    <a:lnB w="12700" cap="flat" cmpd="sng" algn="ctr">
-                      <a:solidFill>
-                        <a:srgbClr val="DADCE0"/>
-                      </a:solidFill>
-                      <a:prstDash val="solid"/>
-                      <a:round/>
-                      <a:headEnd type="none" w="med" len="med"/>
-                      <a:tailEnd type="none" w="med" len="med"/>
-                    </a:lnB>
-                    <a:solidFill>
-                      <a:srgbClr val="FFFFFF"/>
-                    </a:solidFill>
-                  </a:tcPr>
-                </a:tc>
-                <a:tc>
-                  <a:txBody>
-                    <a:bodyPr/>
-                    <a:lstStyle/>
-                    <a:p>
-                      <a:pPr algn="l" indent="0" marL="0">
-                        <a:buNone/>
-                      </a:pPr>
-                      <a:r>
-                        <a:rPr lang="en-US" sz="1400" dirty="0">
-                          <a:solidFill>
-                            <a:srgbClr val="202124"/>
-                          </a:solidFill>
-                        </a:rPr>
-                        <a:t>Natural language text phrase</a:t>
+                        <a:t>Types vague prompt e.g. 'Goa sunset dinner receipt'</a:t>
+                      </a:r>
+                      <a:endParaRPr lang="en-US" sz="1400" dirty="0"/>
+                    </a:p>
+                  </a:txBody>
+                  <a:tcPr marL="91440" marR="91440" marT="45720" marB="45720" anchor="ctr">
+                    <a:lnL w="12700" cap="flat" cmpd="sng" algn="ctr">
+                      <a:solidFill>
+                        <a:srgbClr val="DADCE0"/>
+                      </a:solidFill>
+                      <a:prstDash val="solid"/>
+                      <a:round/>
+                      <a:headEnd type="none" w="med" len="med"/>
+                      <a:tailEnd type="none" w="med" len="med"/>
+                    </a:lnL>
+                    <a:lnR w="12700" cap="flat" cmpd="sng" algn="ctr">
+                      <a:solidFill>
+                        <a:srgbClr val="DADCE0"/>
+                      </a:solidFill>
+                      <a:prstDash val="solid"/>
+                      <a:round/>
+                      <a:headEnd type="none" w="med" len="med"/>
+                      <a:tailEnd type="none" w="med" len="med"/>
+                    </a:lnR>
+                    <a:lnT w="12700" cap="flat" cmpd="sng" algn="ctr">
+                      <a:solidFill>
+                        <a:srgbClr val="DADCE0"/>
+                      </a:solidFill>
+                      <a:prstDash val="solid"/>
+                      <a:round/>
+                      <a:headEnd type="none" w="med" len="med"/>
+                      <a:tailEnd type="none" w="med" len="med"/>
+                    </a:lnT>
+                    <a:lnB w="12700" cap="flat" cmpd="sng" algn="ctr">
+                      <a:solidFill>
+                        <a:srgbClr val="DADCE0"/>
+                      </a:solidFill>
+                      <a:prstDash val="solid"/>
+                      <a:round/>
+                      <a:headEnd type="none" w="med" len="med"/>
+                      <a:tailEnd type="none" w="med" len="med"/>
+                    </a:lnB>
+                    <a:solidFill>
+                      <a:srgbClr val="FFFFFF"/>
+                    </a:solidFill>
+                  </a:tcPr>
+                </a:tc>
+                <a:tc>
+                  <a:txBody>
+                    <a:bodyPr/>
+                    <a:lstStyle/>
+                    <a:p>
+                      <a:pPr algn="l" indent="0" marL="0">
+                        <a:buNone/>
+                      </a:pPr>
+                      <a:r>
+                        <a:rPr lang="en-US" sz="1400" dirty="0">
+                          <a:solidFill>
+                            <a:srgbClr val="202124"/>
+                          </a:solidFill>
+                        </a:rPr>
+                        <a:t>Natural language query</a:t>
                       </a:r>
                       <a:endParaRPr lang="en-US" sz="1400" dirty="0"/>
                     </a:p>
@@ -17237,7 +17971,7 @@
                             <a:srgbClr val="202124"/>
                           </a:solidFill>
                         </a:rPr>
-                        <a:t>✨ Gemini AI Signals Drawer</a:t>
+                        <a:t>✨ Gemini AI Signals</a:t>
                       </a:r>
                       <a:endParaRPr lang="en-US" sz="1400" dirty="0"/>
                     </a:p>
@@ -17420,7 +18154,7 @@
                             <a:srgbClr val="202124"/>
                           </a:solidFill>
                         </a:rPr>
-                        <a:t>Displays AI signal breakdown</a:t>
+                        <a:t>Renders AI signal breakdown</a:t>
                       </a:r>
                       <a:endParaRPr lang="en-US" sz="1400" dirty="0"/>
                     </a:p>
@@ -17544,190 +18278,190 @@
                             <a:srgbClr val="202124"/>
                           </a:solidFill>
                         </a:rPr>
-                        <a:t>Candidate Surfacing Grid</a:t>
-                      </a:r>
-                      <a:endParaRPr lang="en-US" sz="1400" dirty="0"/>
-                    </a:p>
-                  </a:txBody>
-                  <a:tcPr marL="91440" marR="91440" marT="45720" marB="45720" anchor="ctr">
-                    <a:lnL w="12700" cap="flat" cmpd="sng" algn="ctr">
-                      <a:solidFill>
-                        <a:srgbClr val="DADCE0"/>
-                      </a:solidFill>
-                      <a:prstDash val="solid"/>
-                      <a:round/>
-                      <a:headEnd type="none" w="med" len="med"/>
-                      <a:tailEnd type="none" w="med" len="med"/>
-                    </a:lnL>
-                    <a:lnR w="12700" cap="flat" cmpd="sng" algn="ctr">
-                      <a:solidFill>
-                        <a:srgbClr val="DADCE0"/>
-                      </a:solidFill>
-                      <a:prstDash val="solid"/>
-                      <a:round/>
-                      <a:headEnd type="none" w="med" len="med"/>
-                      <a:tailEnd type="none" w="med" len="med"/>
-                    </a:lnR>
-                    <a:lnT w="12700" cap="flat" cmpd="sng" algn="ctr">
-                      <a:solidFill>
-                        <a:srgbClr val="DADCE0"/>
-                      </a:solidFill>
-                      <a:prstDash val="solid"/>
-                      <a:round/>
-                      <a:headEnd type="none" w="med" len="med"/>
-                      <a:tailEnd type="none" w="med" len="med"/>
-                    </a:lnT>
-                    <a:lnB w="12700" cap="flat" cmpd="sng" algn="ctr">
-                      <a:solidFill>
-                        <a:srgbClr val="DADCE0"/>
-                      </a:solidFill>
-                      <a:prstDash val="solid"/>
-                      <a:round/>
-                      <a:headEnd type="none" w="med" len="med"/>
-                      <a:tailEnd type="none" w="med" len="med"/>
-                    </a:lnB>
-                    <a:solidFill>
-                      <a:srgbClr val="FFFFFF"/>
-                    </a:solidFill>
-                  </a:tcPr>
-                </a:tc>
-                <a:tc>
-                  <a:txBody>
-                    <a:bodyPr/>
-                    <a:lstStyle/>
-                    <a:p>
-                      <a:pPr algn="l" indent="0" marL="0">
-                        <a:buNone/>
-                      </a:pPr>
-                      <a:r>
-                        <a:rPr lang="en-US" sz="1400" dirty="0">
-                          <a:solidFill>
-                            <a:srgbClr val="202124"/>
-                          </a:solidFill>
-                        </a:rPr>
-                        <a:t>Views top candidate anchors</a:t>
-                      </a:r>
-                      <a:endParaRPr lang="en-US" sz="1400" dirty="0"/>
-                    </a:p>
-                  </a:txBody>
-                  <a:tcPr marL="91440" marR="91440" marT="45720" marB="45720" anchor="ctr">
-                    <a:lnL w="12700" cap="flat" cmpd="sng" algn="ctr">
-                      <a:solidFill>
-                        <a:srgbClr val="DADCE0"/>
-                      </a:solidFill>
-                      <a:prstDash val="solid"/>
-                      <a:round/>
-                      <a:headEnd type="none" w="med" len="med"/>
-                      <a:tailEnd type="none" w="med" len="med"/>
-                    </a:lnL>
-                    <a:lnR w="12700" cap="flat" cmpd="sng" algn="ctr">
-                      <a:solidFill>
-                        <a:srgbClr val="DADCE0"/>
-                      </a:solidFill>
-                      <a:prstDash val="solid"/>
-                      <a:round/>
-                      <a:headEnd type="none" w="med" len="med"/>
-                      <a:tailEnd type="none" w="med" len="med"/>
-                    </a:lnR>
-                    <a:lnT w="12700" cap="flat" cmpd="sng" algn="ctr">
-                      <a:solidFill>
-                        <a:srgbClr val="DADCE0"/>
-                      </a:solidFill>
-                      <a:prstDash val="solid"/>
-                      <a:round/>
-                      <a:headEnd type="none" w="med" len="med"/>
-                      <a:tailEnd type="none" w="med" len="med"/>
-                    </a:lnT>
-                    <a:lnB w="12700" cap="flat" cmpd="sng" algn="ctr">
-                      <a:solidFill>
-                        <a:srgbClr val="DADCE0"/>
-                      </a:solidFill>
-                      <a:prstDash val="solid"/>
-                      <a:round/>
-                      <a:headEnd type="none" w="med" len="med"/>
-                      <a:tailEnd type="none" w="med" len="med"/>
-                    </a:lnB>
-                    <a:solidFill>
-                      <a:srgbClr val="FFFFFF"/>
-                    </a:solidFill>
-                  </a:tcPr>
-                </a:tc>
-                <a:tc>
-                  <a:txBody>
-                    <a:bodyPr/>
-                    <a:lstStyle/>
-                    <a:p>
-                      <a:pPr algn="l" indent="0" marL="0">
-                        <a:buNone/>
-                      </a:pPr>
-                      <a:r>
-                        <a:rPr lang="en-US" sz="1400" dirty="0">
-                          <a:solidFill>
-                            <a:srgbClr val="202124"/>
-                          </a:solidFill>
-                        </a:rPr>
-                        <a:t>Similarity score ranking</a:t>
-                      </a:r>
-                      <a:endParaRPr lang="en-US" sz="1400" dirty="0"/>
-                    </a:p>
-                  </a:txBody>
-                  <a:tcPr marL="91440" marR="91440" marT="45720" marB="45720" anchor="ctr">
-                    <a:lnL w="12700" cap="flat" cmpd="sng" algn="ctr">
-                      <a:solidFill>
-                        <a:srgbClr val="DADCE0"/>
-                      </a:solidFill>
-                      <a:prstDash val="solid"/>
-                      <a:round/>
-                      <a:headEnd type="none" w="med" len="med"/>
-                      <a:tailEnd type="none" w="med" len="med"/>
-                    </a:lnL>
-                    <a:lnR w="12700" cap="flat" cmpd="sng" algn="ctr">
-                      <a:solidFill>
-                        <a:srgbClr val="DADCE0"/>
-                      </a:solidFill>
-                      <a:prstDash val="solid"/>
-                      <a:round/>
-                      <a:headEnd type="none" w="med" len="med"/>
-                      <a:tailEnd type="none" w="med" len="med"/>
-                    </a:lnR>
-                    <a:lnT w="12700" cap="flat" cmpd="sng" algn="ctr">
-                      <a:solidFill>
-                        <a:srgbClr val="DADCE0"/>
-                      </a:solidFill>
-                      <a:prstDash val="solid"/>
-                      <a:round/>
-                      <a:headEnd type="none" w="med" len="med"/>
-                      <a:tailEnd type="none" w="med" len="med"/>
-                    </a:lnT>
-                    <a:lnB w="12700" cap="flat" cmpd="sng" algn="ctr">
-                      <a:solidFill>
-                        <a:srgbClr val="DADCE0"/>
-                      </a:solidFill>
-                      <a:prstDash val="solid"/>
-                      <a:round/>
-                      <a:headEnd type="none" w="med" len="med"/>
-                      <a:tailEnd type="none" w="med" len="med"/>
-                    </a:lnB>
-                    <a:solidFill>
-                      <a:srgbClr val="FFFFFF"/>
-                    </a:solidFill>
-                  </a:tcPr>
-                </a:tc>
-                <a:tc>
-                  <a:txBody>
-                    <a:bodyPr/>
-                    <a:lstStyle/>
-                    <a:p>
-                      <a:pPr algn="l" indent="0" marL="0">
-                        <a:buNone/>
-                      </a:pPr>
-                      <a:r>
-                        <a:rPr lang="en-US" sz="1400" dirty="0">
-                          <a:solidFill>
-                            <a:srgbClr val="202124"/>
-                          </a:solidFill>
-                        </a:rPr>
-                        <a:t>Renders precision media cards</a:t>
+                        <a:t>Candidate Anchor Grid</a:t>
+                      </a:r>
+                      <a:endParaRPr lang="en-US" sz="1400" dirty="0"/>
+                    </a:p>
+                  </a:txBody>
+                  <a:tcPr marL="91440" marR="91440" marT="45720" marB="45720" anchor="ctr">
+                    <a:lnL w="12700" cap="flat" cmpd="sng" algn="ctr">
+                      <a:solidFill>
+                        <a:srgbClr val="DADCE0"/>
+                      </a:solidFill>
+                      <a:prstDash val="solid"/>
+                      <a:round/>
+                      <a:headEnd type="none" w="med" len="med"/>
+                      <a:tailEnd type="none" w="med" len="med"/>
+                    </a:lnL>
+                    <a:lnR w="12700" cap="flat" cmpd="sng" algn="ctr">
+                      <a:solidFill>
+                        <a:srgbClr val="DADCE0"/>
+                      </a:solidFill>
+                      <a:prstDash val="solid"/>
+                      <a:round/>
+                      <a:headEnd type="none" w="med" len="med"/>
+                      <a:tailEnd type="none" w="med" len="med"/>
+                    </a:lnR>
+                    <a:lnT w="12700" cap="flat" cmpd="sng" algn="ctr">
+                      <a:solidFill>
+                        <a:srgbClr val="DADCE0"/>
+                      </a:solidFill>
+                      <a:prstDash val="solid"/>
+                      <a:round/>
+                      <a:headEnd type="none" w="med" len="med"/>
+                      <a:tailEnd type="none" w="med" len="med"/>
+                    </a:lnT>
+                    <a:lnB w="12700" cap="flat" cmpd="sng" algn="ctr">
+                      <a:solidFill>
+                        <a:srgbClr val="DADCE0"/>
+                      </a:solidFill>
+                      <a:prstDash val="solid"/>
+                      <a:round/>
+                      <a:headEnd type="none" w="med" len="med"/>
+                      <a:tailEnd type="none" w="med" len="med"/>
+                    </a:lnB>
+                    <a:solidFill>
+                      <a:srgbClr val="FFFFFF"/>
+                    </a:solidFill>
+                  </a:tcPr>
+                </a:tc>
+                <a:tc>
+                  <a:txBody>
+                    <a:bodyPr/>
+                    <a:lstStyle/>
+                    <a:p>
+                      <a:pPr algn="l" indent="0" marL="0">
+                        <a:buNone/>
+                      </a:pPr>
+                      <a:r>
+                        <a:rPr lang="en-US" sz="1400" dirty="0">
+                          <a:solidFill>
+                            <a:srgbClr val="202124"/>
+                          </a:solidFill>
+                        </a:rPr>
+                        <a:t>Views top recognized candidate anchors</a:t>
+                      </a:r>
+                      <a:endParaRPr lang="en-US" sz="1400" dirty="0"/>
+                    </a:p>
+                  </a:txBody>
+                  <a:tcPr marL="91440" marR="91440" marT="45720" marB="45720" anchor="ctr">
+                    <a:lnL w="12700" cap="flat" cmpd="sng" algn="ctr">
+                      <a:solidFill>
+                        <a:srgbClr val="DADCE0"/>
+                      </a:solidFill>
+                      <a:prstDash val="solid"/>
+                      <a:round/>
+                      <a:headEnd type="none" w="med" len="med"/>
+                      <a:tailEnd type="none" w="med" len="med"/>
+                    </a:lnL>
+                    <a:lnR w="12700" cap="flat" cmpd="sng" algn="ctr">
+                      <a:solidFill>
+                        <a:srgbClr val="DADCE0"/>
+                      </a:solidFill>
+                      <a:prstDash val="solid"/>
+                      <a:round/>
+                      <a:headEnd type="none" w="med" len="med"/>
+                      <a:tailEnd type="none" w="med" len="med"/>
+                    </a:lnR>
+                    <a:lnT w="12700" cap="flat" cmpd="sng" algn="ctr">
+                      <a:solidFill>
+                        <a:srgbClr val="DADCE0"/>
+                      </a:solidFill>
+                      <a:prstDash val="solid"/>
+                      <a:round/>
+                      <a:headEnd type="none" w="med" len="med"/>
+                      <a:tailEnd type="none" w="med" len="med"/>
+                    </a:lnT>
+                    <a:lnB w="12700" cap="flat" cmpd="sng" algn="ctr">
+                      <a:solidFill>
+                        <a:srgbClr val="DADCE0"/>
+                      </a:solidFill>
+                      <a:prstDash val="solid"/>
+                      <a:round/>
+                      <a:headEnd type="none" w="med" len="med"/>
+                      <a:tailEnd type="none" w="med" len="med"/>
+                    </a:lnB>
+                    <a:solidFill>
+                      <a:srgbClr val="FFFFFF"/>
+                    </a:solidFill>
+                  </a:tcPr>
+                </a:tc>
+                <a:tc>
+                  <a:txBody>
+                    <a:bodyPr/>
+                    <a:lstStyle/>
+                    <a:p>
+                      <a:pPr algn="l" indent="0" marL="0">
+                        <a:buNone/>
+                      </a:pPr>
+                      <a:r>
+                        <a:rPr lang="en-US" sz="1400" dirty="0">
+                          <a:solidFill>
+                            <a:srgbClr val="202124"/>
+                          </a:solidFill>
+                        </a:rPr>
+                        <a:t>Similarity ranking score</a:t>
+                      </a:r>
+                      <a:endParaRPr lang="en-US" sz="1400" dirty="0"/>
+                    </a:p>
+                  </a:txBody>
+                  <a:tcPr marL="91440" marR="91440" marT="45720" marB="45720" anchor="ctr">
+                    <a:lnL w="12700" cap="flat" cmpd="sng" algn="ctr">
+                      <a:solidFill>
+                        <a:srgbClr val="DADCE0"/>
+                      </a:solidFill>
+                      <a:prstDash val="solid"/>
+                      <a:round/>
+                      <a:headEnd type="none" w="med" len="med"/>
+                      <a:tailEnd type="none" w="med" len="med"/>
+                    </a:lnL>
+                    <a:lnR w="12700" cap="flat" cmpd="sng" algn="ctr">
+                      <a:solidFill>
+                        <a:srgbClr val="DADCE0"/>
+                      </a:solidFill>
+                      <a:prstDash val="solid"/>
+                      <a:round/>
+                      <a:headEnd type="none" w="med" len="med"/>
+                      <a:tailEnd type="none" w="med" len="med"/>
+                    </a:lnR>
+                    <a:lnT w="12700" cap="flat" cmpd="sng" algn="ctr">
+                      <a:solidFill>
+                        <a:srgbClr val="DADCE0"/>
+                      </a:solidFill>
+                      <a:prstDash val="solid"/>
+                      <a:round/>
+                      <a:headEnd type="none" w="med" len="med"/>
+                      <a:tailEnd type="none" w="med" len="med"/>
+                    </a:lnT>
+                    <a:lnB w="12700" cap="flat" cmpd="sng" algn="ctr">
+                      <a:solidFill>
+                        <a:srgbClr val="DADCE0"/>
+                      </a:solidFill>
+                      <a:prstDash val="solid"/>
+                      <a:round/>
+                      <a:headEnd type="none" w="med" len="med"/>
+                      <a:tailEnd type="none" w="med" len="med"/>
+                    </a:lnB>
+                    <a:solidFill>
+                      <a:srgbClr val="FFFFFF"/>
+                    </a:solidFill>
+                  </a:tcPr>
+                </a:tc>
+                <a:tc>
+                  <a:txBody>
+                    <a:bodyPr/>
+                    <a:lstStyle/>
+                    <a:p>
+                      <a:pPr algn="l" indent="0" marL="0">
+                        <a:buNone/>
+                      </a:pPr>
+                      <a:r>
+                        <a:rPr lang="en-US" sz="1400" dirty="0">
+                          <a:solidFill>
+                            <a:srgbClr val="202124"/>
+                          </a:solidFill>
+                        </a:rPr>
+                        <a:t>Renders precision photo cards</a:t>
                       </a:r>
                       <a:endParaRPr lang="en-US" sz="1400" dirty="0"/>
                     </a:p>
@@ -17851,7 +18585,7 @@
                             <a:srgbClr val="202124"/>
                           </a:solidFill>
                         </a:rPr>
-                        <a:t>1-Tap Timeline Context Grid</a:t>
+                        <a:t>1-Tap Timeline Grid</a:t>
                       </a:r>
                       <a:endParaRPr lang="en-US" sz="1400" dirty="0"/>
                     </a:p>
@@ -17973,68 +18707,68 @@
                             <a:srgbClr val="202124"/>
                           </a:solidFill>
                         </a:rPr>
-                        <a:t>Anchor ID + spatial/temporal window</a:t>
-                      </a:r>
-                      <a:endParaRPr lang="en-US" sz="1400" dirty="0"/>
-                    </a:p>
-                  </a:txBody>
-                  <a:tcPr marL="91440" marR="91440" marT="45720" marB="45720" anchor="ctr">
-                    <a:lnL w="12700" cap="flat" cmpd="sng" algn="ctr">
-                      <a:solidFill>
-                        <a:srgbClr val="DADCE0"/>
-                      </a:solidFill>
-                      <a:prstDash val="solid"/>
-                      <a:round/>
-                      <a:headEnd type="none" w="med" len="med"/>
-                      <a:tailEnd type="none" w="med" len="med"/>
-                    </a:lnL>
-                    <a:lnR w="12700" cap="flat" cmpd="sng" algn="ctr">
-                      <a:solidFill>
-                        <a:srgbClr val="DADCE0"/>
-                      </a:solidFill>
-                      <a:prstDash val="solid"/>
-                      <a:round/>
-                      <a:headEnd type="none" w="med" len="med"/>
-                      <a:tailEnd type="none" w="med" len="med"/>
-                    </a:lnR>
-                    <a:lnT w="12700" cap="flat" cmpd="sng" algn="ctr">
-                      <a:solidFill>
-                        <a:srgbClr val="DADCE0"/>
-                      </a:solidFill>
-                      <a:prstDash val="solid"/>
-                      <a:round/>
-                      <a:headEnd type="none" w="med" len="med"/>
-                      <a:tailEnd type="none" w="med" len="med"/>
-                    </a:lnT>
-                    <a:lnB w="12700" cap="flat" cmpd="sng" algn="ctr">
-                      <a:solidFill>
-                        <a:srgbClr val="DADCE0"/>
-                      </a:solidFill>
-                      <a:prstDash val="solid"/>
-                      <a:round/>
-                      <a:headEnd type="none" w="med" len="med"/>
-                      <a:tailEnd type="none" w="med" len="med"/>
-                    </a:lnB>
-                    <a:solidFill>
-                      <a:srgbClr val="FFFFFF"/>
-                    </a:solidFill>
-                  </a:tcPr>
-                </a:tc>
-                <a:tc>
-                  <a:txBody>
-                    <a:bodyPr/>
-                    <a:lstStyle/>
-                    <a:p>
-                      <a:pPr algn="l" indent="0" marL="0">
-                        <a:buNone/>
-                      </a:pPr>
-                      <a:r>
-                        <a:rPr lang="en-US" sz="1400" dirty="0">
-                          <a:solidFill>
-                            <a:srgbClr val="202124"/>
-                          </a:solidFill>
-                        </a:rPr>
-                        <a:t>Expands 4-5 surrounding photos</a:t>
+                        <a:t>Anchor ISO + GPS coordinates</a:t>
+                      </a:r>
+                      <a:endParaRPr lang="en-US" sz="1400" dirty="0"/>
+                    </a:p>
+                  </a:txBody>
+                  <a:tcPr marL="91440" marR="91440" marT="45720" marB="45720" anchor="ctr">
+                    <a:lnL w="12700" cap="flat" cmpd="sng" algn="ctr">
+                      <a:solidFill>
+                        <a:srgbClr val="DADCE0"/>
+                      </a:solidFill>
+                      <a:prstDash val="solid"/>
+                      <a:round/>
+                      <a:headEnd type="none" w="med" len="med"/>
+                      <a:tailEnd type="none" w="med" len="med"/>
+                    </a:lnL>
+                    <a:lnR w="12700" cap="flat" cmpd="sng" algn="ctr">
+                      <a:solidFill>
+                        <a:srgbClr val="DADCE0"/>
+                      </a:solidFill>
+                      <a:prstDash val="solid"/>
+                      <a:round/>
+                      <a:headEnd type="none" w="med" len="med"/>
+                      <a:tailEnd type="none" w="med" len="med"/>
+                    </a:lnR>
+                    <a:lnT w="12700" cap="flat" cmpd="sng" algn="ctr">
+                      <a:solidFill>
+                        <a:srgbClr val="DADCE0"/>
+                      </a:solidFill>
+                      <a:prstDash val="solid"/>
+                      <a:round/>
+                      <a:headEnd type="none" w="med" len="med"/>
+                      <a:tailEnd type="none" w="med" len="med"/>
+                    </a:lnT>
+                    <a:lnB w="12700" cap="flat" cmpd="sng" algn="ctr">
+                      <a:solidFill>
+                        <a:srgbClr val="DADCE0"/>
+                      </a:solidFill>
+                      <a:prstDash val="solid"/>
+                      <a:round/>
+                      <a:headEnd type="none" w="med" len="med"/>
+                      <a:tailEnd type="none" w="med" len="med"/>
+                    </a:lnB>
+                    <a:solidFill>
+                      <a:srgbClr val="FFFFFF"/>
+                    </a:solidFill>
+                  </a:tcPr>
+                </a:tc>
+                <a:tc>
+                  <a:txBody>
+                    <a:bodyPr/>
+                    <a:lstStyle/>
+                    <a:p>
+                      <a:pPr algn="l" indent="0" marL="0">
+                        <a:buNone/>
+                      </a:pPr>
+                      <a:r>
+                        <a:rPr lang="en-US" sz="1400" dirty="0">
+                          <a:solidFill>
+                            <a:srgbClr val="202124"/>
+                          </a:solidFill>
+                        </a:rPr>
+                        <a:t>Expands ±4.0h, ≤1.0km photos</a:t>
                       </a:r>
                       <a:endParaRPr lang="en-US" sz="1400" dirty="0"/>
                     </a:p>
@@ -18158,68 +18892,68 @@
                             <a:srgbClr val="202124"/>
                           </a:solidFill>
                         </a:rPr>
-                        <a:t>Deployed Vercel MVP App</a:t>
-                      </a:r>
-                      <a:endParaRPr lang="en-US" sz="1400" dirty="0"/>
-                    </a:p>
-                  </a:txBody>
-                  <a:tcPr marL="91440" marR="91440" marT="45720" marB="45720" anchor="ctr">
-                    <a:lnL w="12700" cap="flat" cmpd="sng" algn="ctr">
-                      <a:solidFill>
-                        <a:srgbClr val="DADCE0"/>
-                      </a:solidFill>
-                      <a:prstDash val="solid"/>
-                      <a:round/>
-                      <a:headEnd type="none" w="med" len="med"/>
-                      <a:tailEnd type="none" w="med" len="med"/>
-                    </a:lnL>
-                    <a:lnR w="12700" cap="flat" cmpd="sng" algn="ctr">
-                      <a:solidFill>
-                        <a:srgbClr val="DADCE0"/>
-                      </a:solidFill>
-                      <a:prstDash val="solid"/>
-                      <a:round/>
-                      <a:headEnd type="none" w="med" len="med"/>
-                      <a:tailEnd type="none" w="med" len="med"/>
-                    </a:lnR>
-                    <a:lnT w="12700" cap="flat" cmpd="sng" algn="ctr">
-                      <a:solidFill>
-                        <a:srgbClr val="DADCE0"/>
-                      </a:solidFill>
-                      <a:prstDash val="solid"/>
-                      <a:round/>
-                      <a:headEnd type="none" w="med" len="med"/>
-                      <a:tailEnd type="none" w="med" len="med"/>
-                    </a:lnT>
-                    <a:lnB w="12700" cap="flat" cmpd="sng" algn="ctr">
-                      <a:solidFill>
-                        <a:srgbClr val="DADCE0"/>
-                      </a:solidFill>
-                      <a:prstDash val="solid"/>
-                      <a:round/>
-                      <a:headEnd type="none" w="med" len="med"/>
-                      <a:tailEnd type="none" w="med" len="med"/>
-                    </a:lnB>
-                    <a:solidFill>
-                      <a:srgbClr val="FFFFFF"/>
-                    </a:solidFill>
-                  </a:tcPr>
-                </a:tc>
-                <a:tc>
-                  <a:txBody>
-                    <a:bodyPr/>
-                    <a:lstStyle/>
-                    <a:p>
-                      <a:pPr algn="l" indent="0" marL="0">
-                        <a:buNone/>
-                      </a:pPr>
-                      <a:r>
-                        <a:rPr lang="en-US" sz="1400" dirty="0">
-                          <a:solidFill>
-                            <a:srgbClr val="202124"/>
-                          </a:solidFill>
-                        </a:rPr>
-                        <a:t>Interactive Prototype Testing</a:t>
+                        <a:t>Deployed Vercel MVP</a:t>
+                      </a:r>
+                      <a:endParaRPr lang="en-US" sz="1400" dirty="0"/>
+                    </a:p>
+                  </a:txBody>
+                  <a:tcPr marL="91440" marR="91440" marT="45720" marB="45720" anchor="ctr">
+                    <a:lnL w="12700" cap="flat" cmpd="sng" algn="ctr">
+                      <a:solidFill>
+                        <a:srgbClr val="DADCE0"/>
+                      </a:solidFill>
+                      <a:prstDash val="solid"/>
+                      <a:round/>
+                      <a:headEnd type="none" w="med" len="med"/>
+                      <a:tailEnd type="none" w="med" len="med"/>
+                    </a:lnL>
+                    <a:lnR w="12700" cap="flat" cmpd="sng" algn="ctr">
+                      <a:solidFill>
+                        <a:srgbClr val="DADCE0"/>
+                      </a:solidFill>
+                      <a:prstDash val="solid"/>
+                      <a:round/>
+                      <a:headEnd type="none" w="med" len="med"/>
+                      <a:tailEnd type="none" w="med" len="med"/>
+                    </a:lnR>
+                    <a:lnT w="12700" cap="flat" cmpd="sng" algn="ctr">
+                      <a:solidFill>
+                        <a:srgbClr val="DADCE0"/>
+                      </a:solidFill>
+                      <a:prstDash val="solid"/>
+                      <a:round/>
+                      <a:headEnd type="none" w="med" len="med"/>
+                      <a:tailEnd type="none" w="med" len="med"/>
+                    </a:lnT>
+                    <a:lnB w="12700" cap="flat" cmpd="sng" algn="ctr">
+                      <a:solidFill>
+                        <a:srgbClr val="DADCE0"/>
+                      </a:solidFill>
+                      <a:prstDash val="solid"/>
+                      <a:round/>
+                      <a:headEnd type="none" w="med" len="med"/>
+                      <a:tailEnd type="none" w="med" len="med"/>
+                    </a:lnB>
+                    <a:solidFill>
+                      <a:srgbClr val="FFFFFF"/>
+                    </a:solidFill>
+                  </a:tcPr>
+                </a:tc>
+                <a:tc>
+                  <a:txBody>
+                    <a:bodyPr/>
+                    <a:lstStyle/>
+                    <a:p>
+                      <a:pPr algn="l" indent="0" marL="0">
+                        <a:buNone/>
+                      </a:pPr>
+                      <a:r>
+                        <a:rPr lang="en-US" sz="1400" dirty="0">
+                          <a:solidFill>
+                            <a:srgbClr val="202124"/>
+                          </a:solidFill>
+                        </a:rPr>
+                        <a:t>Interactive End-to-End Prototype</a:t>
                       </a:r>
                       <a:endParaRPr lang="en-US" sz="1400" dirty="0"/>
                     </a:p>
@@ -18516,7 +19250,7 @@
                   <a:srgbClr val="1A73E8"/>
                 </a:solidFill>
               </a:rPr>
-              <a:t>9. SUCCESS METRICS &amp; BENCHMARK RESULTS</a:t>
+              <a:t>9. BENCHMARK AUDIT &amp; METRIC PROJECTIONS</a:t>
             </a:r>
             <a:endParaRPr lang="en-US" sz="1400" dirty="0"/>
           </a:p>
@@ -18552,7 +19286,7 @@
                   <a:srgbClr val="202124"/>
                 </a:solidFill>
               </a:rPr>
-              <a:t>Synthetic Benchmark Achieves 100% Anchor Discovery &amp; 100% Context Reachability</a:t>
+              <a:t>Benchmark Validation Achieves 100% Anchor Discovery &amp; 100% Target Reachability</a:t>
             </a:r>
             <a:endParaRPr lang="en-US" sz="2000" dirty="0"/>
           </a:p>
@@ -18588,7 +19322,7 @@
                   <a:srgbClr val="1A73E8"/>
                 </a:solidFill>
               </a:rPr>
-              <a:t>Ground-Truth Evaluation Benchmark &amp; API Audit Results (26 Photo Records)</a:t>
+              <a:t>Synthetic Benchmark Evaluation Results (N=120 Benchmark Items) &amp; Projected Lift Matrix</a:t>
             </a:r>
             <a:endParaRPr lang="en-US" sz="1500" dirty="0"/>
           </a:p>
@@ -18617,12 +19351,12 @@
             <a:tbl>
               <a:tblPr/>
               <a:tblGrid>
-                <a:gridCol w="1828800"/>
-                <a:gridCol w="2286000"/>
                 <a:gridCol w="1645920"/>
-                <a:gridCol w="1920240"/>
-                <a:gridCol w="731520"/>
-                <a:gridCol w="731520"/>
+                <a:gridCol w="2194560"/>
+                <a:gridCol w="1463040"/>
+                <a:gridCol w="1645920"/>
+                <a:gridCol w="640080"/>
+                <a:gridCol w="640080"/>
               </a:tblGrid>
               <a:tr h="0">
                 <a:tc>
@@ -18639,7 +19373,7 @@
                             <a:srgbClr val="1A73E8"/>
                           </a:solidFill>
                         </a:rPr>
-                        <a:t>Evaluation Scenario ID</a:t>
+                        <a:t>Scenario Benchmark ID</a:t>
                       </a:r>
                       <a:endParaRPr lang="en-US" sz="1400" dirty="0"/>
                     </a:p>
@@ -18700,7 +19434,7 @@
                             <a:srgbClr val="1A73E8"/>
                           </a:solidFill>
                         </a:rPr>
-                        <a:t>Vague Test Query Prompt</a:t>
+                        <a:t>Vague Test Prompt</a:t>
                       </a:r>
                       <a:endParaRPr lang="en-US" sz="1400" dirty="0"/>
                     </a:p>
@@ -18761,7 +19495,7 @@
                             <a:srgbClr val="1A73E8"/>
                           </a:solidFill>
                         </a:rPr>
-                        <a:t>Surfaced Anchor Photo</a:t>
+                        <a:t>Surfaced Visual Anchor</a:t>
                       </a:r>
                       <a:endParaRPr lang="en-US" sz="1400" dirty="0"/>
                     </a:p>

--- a/output/NL_GooglePhotos.pptx
+++ b/output/NL_GooglePhotos.pptx
@@ -1685,7 +1685,7 @@
         <p:spPr>
           <a:xfrm>
             <a:off x="0" y="0"/>
-            <a:ext cx="9144000" cy="1051560"/>
+            <a:ext cx="9144000" cy="960120"/>
           </a:xfrm>
           <a:prstGeom prst="rect">
             <a:avLst/>
@@ -1709,8 +1709,8 @@
         </p:nvSpPr>
         <p:spPr>
           <a:xfrm>
-            <a:off x="457200" y="109728"/>
-            <a:ext cx="8229600" cy="256032"/>
+            <a:off x="457200" y="91440"/>
+            <a:ext cx="8229600" cy="228600"/>
           </a:xfrm>
           <a:prstGeom prst="rect">
             <a:avLst/>
@@ -1745,8 +1745,8 @@
         </p:nvSpPr>
         <p:spPr>
           <a:xfrm>
-            <a:off x="457200" y="384048"/>
-            <a:ext cx="8229600" cy="594360"/>
+            <a:off x="457200" y="329184"/>
+            <a:ext cx="8229600" cy="548640"/>
           </a:xfrm>
           <a:prstGeom prst="rect">
             <a:avLst/>
@@ -1762,14 +1762,14 @@
               <a:buNone/>
             </a:pPr>
             <a:r>
-              <a:rPr lang="en-US" sz="2000" b="1" dirty="0">
+              <a:rPr lang="en-US" sz="1900" b="1" dirty="0">
                 <a:solidFill>
                   <a:srgbClr val="202124"/>
                 </a:solidFill>
               </a:rPr>
               <a:t>Gemini AI Memory Engine Solves Vague Retrieval via 1-Tap Timeline Context Jump</a:t>
             </a:r>
-            <a:endParaRPr lang="en-US" sz="2000" dirty="0"/>
+            <a:endParaRPr lang="en-US" sz="1900" dirty="0"/>
           </a:p>
         </p:txBody>
       </p:sp>
@@ -1781,8 +1781,8 @@
         </p:nvSpPr>
         <p:spPr>
           <a:xfrm>
-            <a:off x="457200" y="1143000"/>
-            <a:ext cx="8229600" cy="320040"/>
+            <a:off x="457200" y="1645920"/>
+            <a:ext cx="8229600" cy="274320"/>
           </a:xfrm>
           <a:prstGeom prst="rect">
             <a:avLst/>
@@ -1798,14 +1798,14 @@
               <a:buNone/>
             </a:pPr>
             <a:r>
-              <a:rPr lang="en-US" sz="1500" b="1" dirty="0">
+              <a:rPr lang="en-US" sz="1400" b="1" dirty="0">
                 <a:solidFill>
                   <a:srgbClr val="1A73E8"/>
                 </a:solidFill>
               </a:rPr>
               <a:t>Executive System Architecture, Empirical Metrics (N=1,000 / N=34) &amp; Live Deployments</a:t>
             </a:r>
-            <a:endParaRPr lang="en-US" sz="1500" dirty="0"/>
+            <a:endParaRPr lang="en-US" sz="1400" dirty="0"/>
           </a:p>
         </p:txBody>
       </p:sp>
@@ -1824,7 +1824,7 @@
           </p:nvPr>
         </p:nvGraphicFramePr>
         <p:xfrm>
-          <a:off x="457200" y="1508760"/>
+          <a:off x="457200" y="1938528"/>
           <a:ext cx="8229600" cy="914400"/>
         </p:xfrm>
         <a:graphic>
@@ -3692,8 +3692,8 @@
         </p:nvSpPr>
         <p:spPr>
           <a:xfrm>
-            <a:off x="457200" y="4937760"/>
-            <a:ext cx="8229600" cy="228600"/>
+            <a:off x="457200" y="4919472"/>
+            <a:ext cx="8229600" cy="201168"/>
           </a:xfrm>
           <a:prstGeom prst="rect">
             <a:avLst/>
@@ -3761,7 +3761,7 @@
         <p:spPr>
           <a:xfrm>
             <a:off x="0" y="0"/>
-            <a:ext cx="9144000" cy="1051560"/>
+            <a:ext cx="9144000" cy="960120"/>
           </a:xfrm>
           <a:prstGeom prst="rect">
             <a:avLst/>
@@ -3785,8 +3785,8 @@
         </p:nvSpPr>
         <p:spPr>
           <a:xfrm>
-            <a:off x="457200" y="109728"/>
-            <a:ext cx="8229600" cy="256032"/>
+            <a:off x="457200" y="91440"/>
+            <a:ext cx="8229600" cy="228600"/>
           </a:xfrm>
           <a:prstGeom prst="rect">
             <a:avLst/>
@@ -3821,8 +3821,8 @@
         </p:nvSpPr>
         <p:spPr>
           <a:xfrm>
-            <a:off x="457200" y="384048"/>
-            <a:ext cx="8229600" cy="594360"/>
+            <a:off x="457200" y="329184"/>
+            <a:ext cx="8229600" cy="548640"/>
           </a:xfrm>
           <a:prstGeom prst="rect">
             <a:avLst/>
@@ -3838,14 +3838,14 @@
               <a:buNone/>
             </a:pPr>
             <a:r>
-              <a:rPr lang="en-US" sz="2000" b="1" dirty="0">
+              <a:rPr lang="en-US" sz="1900" b="1" dirty="0">
                 <a:solidFill>
                   <a:srgbClr val="202124"/>
                 </a:solidFill>
               </a:rPr>
               <a:t>Phased 1% to 100% Rollout Guarded by Spatial Filters, Privacy &amp; Remote Kill-Switches</a:t>
             </a:r>
-            <a:endParaRPr lang="en-US" sz="2000" dirty="0"/>
+            <a:endParaRPr lang="en-US" sz="1900" dirty="0"/>
           </a:p>
         </p:txBody>
       </p:sp>
@@ -3857,8 +3857,8 @@
         </p:nvSpPr>
         <p:spPr>
           <a:xfrm>
-            <a:off x="457200" y="1143000"/>
-            <a:ext cx="8229600" cy="320040"/>
+            <a:off x="457200" y="1645920"/>
+            <a:ext cx="8229600" cy="274320"/>
           </a:xfrm>
           <a:prstGeom prst="rect">
             <a:avLst/>
@@ -3874,14 +3874,14 @@
               <a:buNone/>
             </a:pPr>
             <a:r>
-              <a:rPr lang="en-US" sz="1500" b="1" dirty="0">
+              <a:rPr lang="en-US" sz="1400" b="1" dirty="0">
                 <a:solidFill>
                   <a:srgbClr val="1A73E8"/>
                 </a:solidFill>
               </a:rPr>
               <a:t>Production Risk Mitigation, On-Device Governance &amp; 4-Phase Experimentation Ramp</a:t>
             </a:r>
-            <a:endParaRPr lang="en-US" sz="1500" dirty="0"/>
+            <a:endParaRPr lang="en-US" sz="1400" dirty="0"/>
           </a:p>
         </p:txBody>
       </p:sp>
@@ -3900,7 +3900,7 @@
           </p:nvPr>
         </p:nvGraphicFramePr>
         <p:xfrm>
-          <a:off x="457200" y="1508760"/>
+          <a:off x="457200" y="1938528"/>
           <a:ext cx="8229600" cy="914400"/>
         </p:xfrm>
         <a:graphic>
@@ -5768,8 +5768,8 @@
         </p:nvSpPr>
         <p:spPr>
           <a:xfrm>
-            <a:off x="457200" y="4937760"/>
-            <a:ext cx="8229600" cy="228600"/>
+            <a:off x="457200" y="4919472"/>
+            <a:ext cx="8229600" cy="201168"/>
           </a:xfrm>
           <a:prstGeom prst="rect">
             <a:avLst/>
@@ -5837,7 +5837,7 @@
         <p:spPr>
           <a:xfrm>
             <a:off x="0" y="0"/>
-            <a:ext cx="9144000" cy="1051560"/>
+            <a:ext cx="9144000" cy="960120"/>
           </a:xfrm>
           <a:prstGeom prst="rect">
             <a:avLst/>
@@ -5861,8 +5861,8 @@
         </p:nvSpPr>
         <p:spPr>
           <a:xfrm>
-            <a:off x="457200" y="109728"/>
-            <a:ext cx="8229600" cy="256032"/>
+            <a:off x="457200" y="91440"/>
+            <a:ext cx="8229600" cy="228600"/>
           </a:xfrm>
           <a:prstGeom prst="rect">
             <a:avLst/>
@@ -5897,8 +5897,8 @@
         </p:nvSpPr>
         <p:spPr>
           <a:xfrm>
-            <a:off x="457200" y="384048"/>
-            <a:ext cx="8229600" cy="594360"/>
+            <a:off x="457200" y="329184"/>
+            <a:ext cx="8229600" cy="548640"/>
           </a:xfrm>
           <a:prstGeom prst="rect">
             <a:avLst/>
@@ -5914,14 +5914,14 @@
               <a:buNone/>
             </a:pPr>
             <a:r>
-              <a:rPr lang="en-US" sz="2000" b="1" dirty="0">
+              <a:rPr lang="en-US" sz="1900" b="1" dirty="0">
                 <a:solidFill>
                   <a:srgbClr val="202124"/>
                 </a:solidFill>
               </a:rPr>
               <a:t>Decomposing Vague Retrieval Failure into Metric Tree &amp; ARR Retention Impact</a:t>
             </a:r>
-            <a:endParaRPr lang="en-US" sz="2000" dirty="0"/>
+            <a:endParaRPr lang="en-US" sz="1900" dirty="0"/>
           </a:p>
         </p:txBody>
       </p:sp>
@@ -5933,8 +5933,8 @@
         </p:nvSpPr>
         <p:spPr>
           <a:xfrm>
-            <a:off x="457200" y="1143000"/>
-            <a:ext cx="8229600" cy="320040"/>
+            <a:off x="457200" y="1645920"/>
+            <a:ext cx="8229600" cy="274320"/>
           </a:xfrm>
           <a:prstGeom prst="rect">
             <a:avLst/>
@@ -5950,14 +5950,14 @@
               <a:buNone/>
             </a:pPr>
             <a:r>
-              <a:rPr lang="en-US" sz="1500" b="1" dirty="0">
+              <a:rPr lang="en-US" sz="1400" b="1" dirty="0">
                 <a:solidFill>
                   <a:srgbClr val="1A73E8"/>
                 </a:solidFill>
               </a:rPr>
               <a:t>Canonical North-Star Metric Decomposition Tree &amp; Strategic Financial Lifts</a:t>
             </a:r>
-            <a:endParaRPr lang="en-US" sz="1500" dirty="0"/>
+            <a:endParaRPr lang="en-US" sz="1400" dirty="0"/>
           </a:p>
         </p:txBody>
       </p:sp>
@@ -5976,7 +5976,7 @@
           </p:nvPr>
         </p:nvGraphicFramePr>
         <p:xfrm>
-          <a:off x="457200" y="1508760"/>
+          <a:off x="457200" y="1938528"/>
           <a:ext cx="8229600" cy="914400"/>
         </p:xfrm>
         <a:graphic>
@@ -7844,8 +7844,8 @@
         </p:nvSpPr>
         <p:spPr>
           <a:xfrm>
-            <a:off x="457200" y="4937760"/>
-            <a:ext cx="8229600" cy="228600"/>
+            <a:off x="457200" y="4919472"/>
+            <a:ext cx="8229600" cy="201168"/>
           </a:xfrm>
           <a:prstGeom prst="rect">
             <a:avLst/>
@@ -7913,7 +7913,7 @@
         <p:spPr>
           <a:xfrm>
             <a:off x="0" y="0"/>
-            <a:ext cx="9144000" cy="1051560"/>
+            <a:ext cx="9144000" cy="960120"/>
           </a:xfrm>
           <a:prstGeom prst="rect">
             <a:avLst/>
@@ -7937,8 +7937,8 @@
         </p:nvSpPr>
         <p:spPr>
           <a:xfrm>
-            <a:off x="457200" y="109728"/>
-            <a:ext cx="8229600" cy="256032"/>
+            <a:off x="457200" y="91440"/>
+            <a:ext cx="8229600" cy="228600"/>
           </a:xfrm>
           <a:prstGeom prst="rect">
             <a:avLst/>
@@ -7973,8 +7973,8 @@
         </p:nvSpPr>
         <p:spPr>
           <a:xfrm>
-            <a:off x="457200" y="384048"/>
-            <a:ext cx="8229600" cy="594360"/>
+            <a:off x="457200" y="329184"/>
+            <a:ext cx="8229600" cy="548640"/>
           </a:xfrm>
           <a:prstGeom prst="rect">
             <a:avLst/>
@@ -7990,14 +7990,14 @@
               <a:buNone/>
             </a:pPr>
             <a:r>
-              <a:rPr lang="en-US" sz="2000" b="1" dirty="0">
+              <a:rPr lang="en-US" sz="1900" b="1" dirty="0">
                 <a:solidFill>
                   <a:srgbClr val="202124"/>
                 </a:solidFill>
               </a:rPr>
               <a:t>1,000 Public Reviews Reveal 67.6% Query Surfacing Failure and 50.0% Document Need</a:t>
             </a:r>
-            <a:endParaRPr lang="en-US" sz="2000" dirty="0"/>
+            <a:endParaRPr lang="en-US" sz="1900" dirty="0"/>
           </a:p>
         </p:txBody>
       </p:sp>
@@ -8009,8 +8009,8 @@
         </p:nvSpPr>
         <p:spPr>
           <a:xfrm>
-            <a:off x="457200" y="1143000"/>
-            <a:ext cx="8229600" cy="320040"/>
+            <a:off x="457200" y="1645920"/>
+            <a:ext cx="8229600" cy="274320"/>
           </a:xfrm>
           <a:prstGeom prst="rect">
             <a:avLst/>
@@ -8026,14 +8026,14 @@
               <a:buNone/>
             </a:pPr>
             <a:r>
-              <a:rPr lang="en-US" sz="1500" b="1" dirty="0">
+              <a:rPr lang="en-US" sz="1400" b="1" dirty="0">
                 <a:solidFill>
                   <a:srgbClr val="1A73E8"/>
                 </a:solidFill>
               </a:rPr>
               <a:t>Multi-Platform Public Feedback Analytics (Reddit/Play Store/Community) via Gemini 2.5 Flash</a:t>
             </a:r>
-            <a:endParaRPr lang="en-US" sz="1500" dirty="0"/>
+            <a:endParaRPr lang="en-US" sz="1400" dirty="0"/>
           </a:p>
         </p:txBody>
       </p:sp>
@@ -8052,7 +8052,7 @@
           </p:nvPr>
         </p:nvGraphicFramePr>
         <p:xfrm>
-          <a:off x="457200" y="1508760"/>
+          <a:off x="457200" y="1938528"/>
           <a:ext cx="8229600" cy="914400"/>
         </p:xfrm>
         <a:graphic>
@@ -9920,8 +9920,8 @@
         </p:nvSpPr>
         <p:spPr>
           <a:xfrm>
-            <a:off x="457200" y="4937760"/>
-            <a:ext cx="8229600" cy="228600"/>
+            <a:off x="457200" y="4919472"/>
+            <a:ext cx="8229600" cy="201168"/>
           </a:xfrm>
           <a:prstGeom prst="rect">
             <a:avLst/>
@@ -9989,7 +9989,7 @@
         <p:spPr>
           <a:xfrm>
             <a:off x="0" y="0"/>
-            <a:ext cx="9144000" cy="1051560"/>
+            <a:ext cx="9144000" cy="960120"/>
           </a:xfrm>
           <a:prstGeom prst="rect">
             <a:avLst/>
@@ -10013,8 +10013,8 @@
         </p:nvSpPr>
         <p:spPr>
           <a:xfrm>
-            <a:off x="457200" y="109728"/>
-            <a:ext cx="8229600" cy="256032"/>
+            <a:off x="457200" y="91440"/>
+            <a:ext cx="8229600" cy="228600"/>
           </a:xfrm>
           <a:prstGeom prst="rect">
             <a:avLst/>
@@ -10049,8 +10049,8 @@
         </p:nvSpPr>
         <p:spPr>
           <a:xfrm>
-            <a:off x="457200" y="384048"/>
-            <a:ext cx="8229600" cy="594360"/>
+            <a:off x="457200" y="329184"/>
+            <a:ext cx="8229600" cy="548640"/>
           </a:xfrm>
           <a:prstGeom prst="rect">
             <a:avLst/>
@@ -10066,14 +10066,14 @@
               <a:buNone/>
             </a:pPr>
             <a:r>
-              <a:rPr lang="en-US" sz="2000" b="1" dirty="0">
+              <a:rPr lang="en-US" sz="1900" b="1" dirty="0">
                 <a:solidFill>
                   <a:srgbClr val="202124"/>
                 </a:solidFill>
               </a:rPr>
               <a:t>Primary Research (N=34) Discovers 76.5% Scroll Fatigue Cliff and 73.5% Anchor Recall</a:t>
             </a:r>
-            <a:endParaRPr lang="en-US" sz="2000" dirty="0"/>
+            <a:endParaRPr lang="en-US" sz="1900" dirty="0"/>
           </a:p>
         </p:txBody>
       </p:sp>
@@ -10085,8 +10085,8 @@
         </p:nvSpPr>
         <p:spPr>
           <a:xfrm>
-            <a:off x="457200" y="1143000"/>
-            <a:ext cx="8229600" cy="320040"/>
+            <a:off x="457200" y="1645920"/>
+            <a:ext cx="8229600" cy="274320"/>
           </a:xfrm>
           <a:prstGeom prst="rect">
             <a:avLst/>
@@ -10102,14 +10102,14 @@
               <a:buNone/>
             </a:pPr>
             <a:r>
-              <a:rPr lang="en-US" sz="1500" b="1" dirty="0">
+              <a:rPr lang="en-US" sz="1400" b="1" dirty="0">
                 <a:solidFill>
                   <a:srgbClr val="1A73E8"/>
                 </a:solidFill>
               </a:rPr>
               <a:t>Quantitative Primary Research Survey &amp; Task Breakdown (15-Question Protocol)</a:t>
             </a:r>
-            <a:endParaRPr lang="en-US" sz="1500" dirty="0"/>
+            <a:endParaRPr lang="en-US" sz="1400" dirty="0"/>
           </a:p>
         </p:txBody>
       </p:sp>
@@ -10128,7 +10128,7 @@
           </p:nvPr>
         </p:nvGraphicFramePr>
         <p:xfrm>
-          <a:off x="457200" y="1508760"/>
+          <a:off x="457200" y="1938528"/>
           <a:ext cx="8229600" cy="914400"/>
         </p:xfrm>
         <a:graphic>
@@ -11629,8 +11629,8 @@
         </p:nvSpPr>
         <p:spPr>
           <a:xfrm>
-            <a:off x="457200" y="4937760"/>
-            <a:ext cx="8229600" cy="228600"/>
+            <a:off x="457200" y="4919472"/>
+            <a:ext cx="8229600" cy="201168"/>
           </a:xfrm>
           <a:prstGeom prst="rect">
             <a:avLst/>
@@ -11698,7 +11698,7 @@
         <p:spPr>
           <a:xfrm>
             <a:off x="0" y="0"/>
-            <a:ext cx="9144000" cy="1051560"/>
+            <a:ext cx="9144000" cy="960120"/>
           </a:xfrm>
           <a:prstGeom prst="rect">
             <a:avLst/>
@@ -11722,8 +11722,8 @@
         </p:nvSpPr>
         <p:spPr>
           <a:xfrm>
-            <a:off x="457200" y="109728"/>
-            <a:ext cx="8229600" cy="256032"/>
+            <a:off x="457200" y="91440"/>
+            <a:ext cx="8229600" cy="228600"/>
           </a:xfrm>
           <a:prstGeom prst="rect">
             <a:avLst/>
@@ -11758,8 +11758,8 @@
         </p:nvSpPr>
         <p:spPr>
           <a:xfrm>
-            <a:off x="457200" y="384048"/>
-            <a:ext cx="8229600" cy="594360"/>
+            <a:off x="457200" y="329184"/>
+            <a:ext cx="8229600" cy="548640"/>
           </a:xfrm>
           <a:prstGeom prst="rect">
             <a:avLst/>
@@ -11775,14 +11775,14 @@
               <a:buNone/>
             </a:pPr>
             <a:r>
-              <a:rPr lang="en-US" sz="2000" b="1" dirty="0">
+              <a:rPr lang="en-US" sz="1900" b="1" dirty="0">
                 <a:solidFill>
                   <a:srgbClr val="202124"/>
                 </a:solidFill>
               </a:rPr>
               <a:t>Targeting High-Volume Archivers (5,000+ Items) Facing Critical Document Retrieval Failure</a:t>
             </a:r>
-            <a:endParaRPr lang="en-US" sz="2000" dirty="0"/>
+            <a:endParaRPr lang="en-US" sz="1900" dirty="0"/>
           </a:p>
         </p:txBody>
       </p:sp>
@@ -11794,8 +11794,8 @@
         </p:nvSpPr>
         <p:spPr>
           <a:xfrm>
-            <a:off x="457200" y="1143000"/>
-            <a:ext cx="8229600" cy="320040"/>
+            <a:off x="457200" y="1645920"/>
+            <a:ext cx="8229600" cy="274320"/>
           </a:xfrm>
           <a:prstGeom prst="rect">
             <a:avLst/>
@@ -11811,14 +11811,14 @@
               <a:buNone/>
             </a:pPr>
             <a:r>
-              <a:rPr lang="en-US" sz="1500" b="1" dirty="0">
+              <a:rPr lang="en-US" sz="1400" b="1" dirty="0">
                 <a:solidFill>
                   <a:srgbClr val="1A73E8"/>
                 </a:solidFill>
               </a:rPr>
               <a:t>Behavioral Persona Segmentation Matrix &amp; High-Value Friction Quantification</a:t>
             </a:r>
-            <a:endParaRPr lang="en-US" sz="1500" dirty="0"/>
+            <a:endParaRPr lang="en-US" sz="1400" dirty="0"/>
           </a:p>
         </p:txBody>
       </p:sp>
@@ -11837,7 +11837,7 @@
           </p:nvPr>
         </p:nvGraphicFramePr>
         <p:xfrm>
-          <a:off x="457200" y="1508760"/>
+          <a:off x="457200" y="1938528"/>
           <a:ext cx="8229600" cy="914400"/>
         </p:xfrm>
         <a:graphic>
@@ -13338,8 +13338,8 @@
         </p:nvSpPr>
         <p:spPr>
           <a:xfrm>
-            <a:off x="457200" y="4937760"/>
-            <a:ext cx="8229600" cy="228600"/>
+            <a:off x="457200" y="4919472"/>
+            <a:ext cx="8229600" cy="201168"/>
           </a:xfrm>
           <a:prstGeom prst="rect">
             <a:avLst/>
@@ -13407,7 +13407,7 @@
         <p:spPr>
           <a:xfrm>
             <a:off x="0" y="0"/>
-            <a:ext cx="9144000" cy="1051560"/>
+            <a:ext cx="9144000" cy="960120"/>
           </a:xfrm>
           <a:prstGeom prst="rect">
             <a:avLst/>
@@ -13431,8 +13431,8 @@
         </p:nvSpPr>
         <p:spPr>
           <a:xfrm>
-            <a:off x="457200" y="109728"/>
-            <a:ext cx="8229600" cy="256032"/>
+            <a:off x="457200" y="91440"/>
+            <a:ext cx="8229600" cy="228600"/>
           </a:xfrm>
           <a:prstGeom prst="rect">
             <a:avLst/>
@@ -13467,8 +13467,8 @@
         </p:nvSpPr>
         <p:spPr>
           <a:xfrm>
-            <a:off x="457200" y="384048"/>
-            <a:ext cx="8229600" cy="594360"/>
+            <a:off x="457200" y="329184"/>
+            <a:ext cx="8229600" cy="548640"/>
           </a:xfrm>
           <a:prstGeom prst="rect">
             <a:avLst/>
@@ -13484,14 +13484,14 @@
               <a:buNone/>
             </a:pPr>
             <a:r>
-              <a:rPr lang="en-US" sz="2000" b="1" dirty="0">
+              <a:rPr lang="en-US" sz="1900" b="1" dirty="0">
                 <a:solidFill>
                   <a:srgbClr val="202124"/>
                 </a:solidFill>
               </a:rPr>
               <a:t>Core Root Cause: Memory Recalls Visual Anchors While Search Requires Exact Tags</a:t>
             </a:r>
-            <a:endParaRPr lang="en-US" sz="2000" dirty="0"/>
+            <a:endParaRPr lang="en-US" sz="1900" dirty="0"/>
           </a:p>
         </p:txBody>
       </p:sp>
@@ -13503,8 +13503,8 @@
         </p:nvSpPr>
         <p:spPr>
           <a:xfrm>
-            <a:off x="457200" y="1143000"/>
-            <a:ext cx="8229600" cy="320040"/>
+            <a:off x="457200" y="1645920"/>
+            <a:ext cx="8229600" cy="274320"/>
           </a:xfrm>
           <a:prstGeom prst="rect">
             <a:avLst/>
@@ -13520,14 +13520,14 @@
               <a:buNone/>
             </a:pPr>
             <a:r>
-              <a:rPr lang="en-US" sz="1500" b="1" dirty="0">
+              <a:rPr lang="en-US" sz="1400" b="1" dirty="0">
                 <a:solidFill>
                   <a:srgbClr val="1A73E8"/>
                 </a:solidFill>
               </a:rPr>
               <a:t>CFM-01 to CFM-04 Structural Failure Taxonomy &amp; Ground-Truth Isolation</a:t>
             </a:r>
-            <a:endParaRPr lang="en-US" sz="1500" dirty="0"/>
+            <a:endParaRPr lang="en-US" sz="1400" dirty="0"/>
           </a:p>
         </p:txBody>
       </p:sp>
@@ -13546,7 +13546,7 @@
           </p:nvPr>
         </p:nvGraphicFramePr>
         <p:xfrm>
-          <a:off x="457200" y="1508760"/>
+          <a:off x="457200" y="1938528"/>
           <a:ext cx="8229600" cy="914400"/>
         </p:xfrm>
         <a:graphic>
@@ -15107,8 +15107,8 @@
         </p:nvSpPr>
         <p:spPr>
           <a:xfrm>
-            <a:off x="457200" y="4937760"/>
-            <a:ext cx="8229600" cy="228600"/>
+            <a:off x="457200" y="4919472"/>
+            <a:ext cx="8229600" cy="201168"/>
           </a:xfrm>
           <a:prstGeom prst="rect">
             <a:avLst/>
@@ -15176,7 +15176,7 @@
         <p:spPr>
           <a:xfrm>
             <a:off x="0" y="0"/>
-            <a:ext cx="9144000" cy="1051560"/>
+            <a:ext cx="9144000" cy="960120"/>
           </a:xfrm>
           <a:prstGeom prst="rect">
             <a:avLst/>
@@ -15200,8 +15200,8 @@
         </p:nvSpPr>
         <p:spPr>
           <a:xfrm>
-            <a:off x="457200" y="109728"/>
-            <a:ext cx="8229600" cy="256032"/>
+            <a:off x="457200" y="91440"/>
+            <a:ext cx="8229600" cy="228600"/>
           </a:xfrm>
           <a:prstGeom prst="rect">
             <a:avLst/>
@@ -15236,8 +15236,8 @@
         </p:nvSpPr>
         <p:spPr>
           <a:xfrm>
-            <a:off x="457200" y="384048"/>
-            <a:ext cx="8229600" cy="594360"/>
+            <a:off x="457200" y="329184"/>
+            <a:ext cx="8229600" cy="548640"/>
           </a:xfrm>
           <a:prstGeom prst="rect">
             <a:avLst/>
@@ -15253,14 +15253,14 @@
               <a:buNone/>
             </a:pPr>
             <a:r>
-              <a:rPr lang="en-US" sz="2000" b="1" dirty="0">
+              <a:rPr lang="en-US" sz="1900" b="1" dirty="0">
                 <a:solidFill>
                   <a:srgbClr val="202124"/>
                 </a:solidFill>
               </a:rPr>
               <a:t>Concept A Outperforms Alternatives with 8.93/10 Score via 1-Tap Contextual Jump</a:t>
             </a:r>
-            <a:endParaRPr lang="en-US" sz="2000" dirty="0"/>
+            <a:endParaRPr lang="en-US" sz="1900" dirty="0"/>
           </a:p>
         </p:txBody>
       </p:sp>
@@ -15272,8 +15272,8 @@
         </p:nvSpPr>
         <p:spPr>
           <a:xfrm>
-            <a:off x="457200" y="1143000"/>
-            <a:ext cx="8229600" cy="320040"/>
+            <a:off x="457200" y="1645920"/>
+            <a:ext cx="8229600" cy="274320"/>
           </a:xfrm>
           <a:prstGeom prst="rect">
             <a:avLst/>
@@ -15289,14 +15289,14 @@
               <a:buNone/>
             </a:pPr>
             <a:r>
-              <a:rPr lang="en-US" sz="1500" b="1" dirty="0">
+              <a:rPr lang="en-US" sz="1400" b="1" dirty="0">
                 <a:solidFill>
                   <a:srgbClr val="1A73E8"/>
                 </a:solidFill>
               </a:rPr>
               <a:t>Architectural Trade-off Evaluation Matrix &amp; Quantitative Selection Rationale</a:t>
             </a:r>
-            <a:endParaRPr lang="en-US" sz="1500" dirty="0"/>
+            <a:endParaRPr lang="en-US" sz="1400" dirty="0"/>
           </a:p>
         </p:txBody>
       </p:sp>
@@ -15315,7 +15315,7 @@
           </p:nvPr>
         </p:nvGraphicFramePr>
         <p:xfrm>
-          <a:off x="457200" y="1508760"/>
+          <a:off x="457200" y="1938528"/>
           <a:ext cx="8229600" cy="914400"/>
         </p:xfrm>
         <a:graphic>
@@ -17059,8 +17059,8 @@
         </p:nvSpPr>
         <p:spPr>
           <a:xfrm>
-            <a:off x="457200" y="4937760"/>
-            <a:ext cx="8229600" cy="228600"/>
+            <a:off x="457200" y="4919472"/>
+            <a:ext cx="8229600" cy="201168"/>
           </a:xfrm>
           <a:prstGeom prst="rect">
             <a:avLst/>
@@ -17128,7 +17128,7 @@
         <p:spPr>
           <a:xfrm>
             <a:off x="0" y="0"/>
-            <a:ext cx="9144000" cy="1051560"/>
+            <a:ext cx="9144000" cy="960120"/>
           </a:xfrm>
           <a:prstGeom prst="rect">
             <a:avLst/>
@@ -17152,8 +17152,8 @@
         </p:nvSpPr>
         <p:spPr>
           <a:xfrm>
-            <a:off x="457200" y="109728"/>
-            <a:ext cx="8229600" cy="256032"/>
+            <a:off x="457200" y="91440"/>
+            <a:ext cx="8229600" cy="228600"/>
           </a:xfrm>
           <a:prstGeom prst="rect">
             <a:avLst/>
@@ -17188,8 +17188,8 @@
         </p:nvSpPr>
         <p:spPr>
           <a:xfrm>
-            <a:off x="457200" y="384048"/>
-            <a:ext cx="8229600" cy="594360"/>
+            <a:off x="457200" y="329184"/>
+            <a:ext cx="8229600" cy="548640"/>
           </a:xfrm>
           <a:prstGeom prst="rect">
             <a:avLst/>
@@ -17205,14 +17205,14 @@
               <a:buNone/>
             </a:pPr>
             <a:r>
-              <a:rPr lang="en-US" sz="2000" b="1" dirty="0">
+              <a:rPr lang="en-US" sz="1900" b="1" dirty="0">
                 <a:solidFill>
                   <a:srgbClr val="202124"/>
                 </a:solidFill>
               </a:rPr>
               <a:t>Interactive Gemini AI MVP Surfacing Candidate Anchors and 1-Tap Context Expansion</a:t>
             </a:r>
-            <a:endParaRPr lang="en-US" sz="2000" dirty="0"/>
+            <a:endParaRPr lang="en-US" sz="1900" dirty="0"/>
           </a:p>
         </p:txBody>
       </p:sp>
@@ -17224,8 +17224,8 @@
         </p:nvSpPr>
         <p:spPr>
           <a:xfrm>
-            <a:off x="457200" y="1143000"/>
-            <a:ext cx="8229600" cy="320040"/>
+            <a:off x="457200" y="1645920"/>
+            <a:ext cx="8229600" cy="274320"/>
           </a:xfrm>
           <a:prstGeom prst="rect">
             <a:avLst/>
@@ -17241,14 +17241,14 @@
               <a:buNone/>
             </a:pPr>
             <a:r>
-              <a:rPr lang="en-US" sz="1500" b="1" dirty="0">
+              <a:rPr lang="en-US" sz="1400" b="1" dirty="0">
                 <a:solidFill>
                   <a:srgbClr val="1A73E8"/>
                 </a:solidFill>
               </a:rPr>
               <a:t>3-Screen Interactive Solution Architecture Specification &amp; Live Links</a:t>
             </a:r>
-            <a:endParaRPr lang="en-US" sz="1500" dirty="0"/>
+            <a:endParaRPr lang="en-US" sz="1400" dirty="0"/>
           </a:p>
         </p:txBody>
       </p:sp>
@@ -17267,7 +17267,7 @@
           </p:nvPr>
         </p:nvGraphicFramePr>
         <p:xfrm>
-          <a:off x="457200" y="1508760"/>
+          <a:off x="457200" y="1938528"/>
           <a:ext cx="8229600" cy="914400"/>
         </p:xfrm>
         <a:graphic>
@@ -19135,8 +19135,8 @@
         </p:nvSpPr>
         <p:spPr>
           <a:xfrm>
-            <a:off x="457200" y="4937760"/>
-            <a:ext cx="8229600" cy="228600"/>
+            <a:off x="457200" y="4919472"/>
+            <a:ext cx="8229600" cy="201168"/>
           </a:xfrm>
           <a:prstGeom prst="rect">
             <a:avLst/>
@@ -19204,7 +19204,7 @@
         <p:spPr>
           <a:xfrm>
             <a:off x="0" y="0"/>
-            <a:ext cx="9144000" cy="1051560"/>
+            <a:ext cx="9144000" cy="960120"/>
           </a:xfrm>
           <a:prstGeom prst="rect">
             <a:avLst/>
@@ -19228,8 +19228,8 @@
         </p:nvSpPr>
         <p:spPr>
           <a:xfrm>
-            <a:off x="457200" y="109728"/>
-            <a:ext cx="8229600" cy="256032"/>
+            <a:off x="457200" y="91440"/>
+            <a:ext cx="8229600" cy="228600"/>
           </a:xfrm>
           <a:prstGeom prst="rect">
             <a:avLst/>
@@ -19264,8 +19264,8 @@
         </p:nvSpPr>
         <p:spPr>
           <a:xfrm>
-            <a:off x="457200" y="384048"/>
-            <a:ext cx="8229600" cy="594360"/>
+            <a:off x="457200" y="329184"/>
+            <a:ext cx="8229600" cy="548640"/>
           </a:xfrm>
           <a:prstGeom prst="rect">
             <a:avLst/>
@@ -19281,14 +19281,14 @@
               <a:buNone/>
             </a:pPr>
             <a:r>
-              <a:rPr lang="en-US" sz="2000" b="1" dirty="0">
+              <a:rPr lang="en-US" sz="1900" b="1" dirty="0">
                 <a:solidFill>
                   <a:srgbClr val="202124"/>
                 </a:solidFill>
               </a:rPr>
               <a:t>Benchmark Validation Achieves 100% Anchor Discovery &amp; 100% Target Reachability</a:t>
             </a:r>
-            <a:endParaRPr lang="en-US" sz="2000" dirty="0"/>
+            <a:endParaRPr lang="en-US" sz="1900" dirty="0"/>
           </a:p>
         </p:txBody>
       </p:sp>
@@ -19300,8 +19300,8 @@
         </p:nvSpPr>
         <p:spPr>
           <a:xfrm>
-            <a:off x="457200" y="1143000"/>
-            <a:ext cx="8229600" cy="320040"/>
+            <a:off x="457200" y="1645920"/>
+            <a:ext cx="8229600" cy="274320"/>
           </a:xfrm>
           <a:prstGeom prst="rect">
             <a:avLst/>
@@ -19317,14 +19317,14 @@
               <a:buNone/>
             </a:pPr>
             <a:r>
-              <a:rPr lang="en-US" sz="1500" b="1" dirty="0">
+              <a:rPr lang="en-US" sz="1400" b="1" dirty="0">
                 <a:solidFill>
                   <a:srgbClr val="1A73E8"/>
                 </a:solidFill>
               </a:rPr>
               <a:t>Synthetic Benchmark Evaluation Results (N=120 Benchmark Items) &amp; Projected Lift Matrix</a:t>
             </a:r>
-            <a:endParaRPr lang="en-US" sz="1500" dirty="0"/>
+            <a:endParaRPr lang="en-US" sz="1400" dirty="0"/>
           </a:p>
         </p:txBody>
       </p:sp>
@@ -19343,7 +19343,7 @@
           </p:nvPr>
         </p:nvGraphicFramePr>
         <p:xfrm>
-          <a:off x="457200" y="1508760"/>
+          <a:off x="457200" y="1938528"/>
           <a:ext cx="8229600" cy="914400"/>
         </p:xfrm>
         <a:graphic>
@@ -21578,8 +21578,8 @@
         </p:nvSpPr>
         <p:spPr>
           <a:xfrm>
-            <a:off x="457200" y="4937760"/>
-            <a:ext cx="8229600" cy="228600"/>
+            <a:off x="457200" y="4919472"/>
+            <a:ext cx="8229600" cy="201168"/>
           </a:xfrm>
           <a:prstGeom prst="rect">
             <a:avLst/>

--- a/output/NL_GooglePhotos.pptx
+++ b/output/NL_GooglePhotos.pptx
@@ -15222,7 +15222,7 @@
                   <a:srgbClr val="1A73E8"/>
                 </a:solidFill>
               </a:rPr>
-              <a:t>7. SOLUTION RATIONALE &amp; CONCEPT-A COMPARISON</a:t>
+              <a:t>7. PROPOSED SOLUTION &amp; WORKING MECHANISM</a:t>
             </a:r>
             <a:endParaRPr lang="en-US" sz="1400" dirty="0"/>
           </a:p>
@@ -15258,7 +15258,7 @@
                   <a:srgbClr val="202124"/>
                 </a:solidFill>
               </a:rPr>
-              <a:t>Concept A Outperforms Alternatives with 8.93/10 Score via 1-Tap Contextual Jump</a:t>
+              <a:t>Gemini AI Memory Engine Solves Vague Search via 1-Tap Timeline Context Jump</a:t>
             </a:r>
             <a:endParaRPr lang="en-US" sz="1900" dirty="0"/>
           </a:p>
@@ -15266,7 +15266,298 @@
       </p:sp>
       <p:sp>
         <p:nvSpPr>
-          <p:cNvPr id="5" name="Text 3"/>
+          <p:cNvPr id="5" name="Shape 3"/>
+          <p:cNvSpPr/>
+          <p:nvPr/>
+        </p:nvSpPr>
+        <p:spPr>
+          <a:xfrm>
+            <a:off x="457200" y="1024128"/>
+            <a:ext cx="2606040" cy="566928"/>
+          </a:xfrm>
+          <a:prstGeom prst="rect">
+            <a:avLst/>
+          </a:prstGeom>
+          <a:solidFill>
+            <a:srgbClr val="E8F0FE"/>
+          </a:solidFill>
+          <a:ln w="12700">
+            <a:solidFill>
+              <a:srgbClr val="1A73E8"/>
+            </a:solidFill>
+            <a:prstDash val="solid"/>
+          </a:ln>
+        </p:spPr>
+      </p:sp>
+      <p:sp>
+        <p:nvSpPr>
+          <p:cNvPr id="6" name="Text 4"/>
+          <p:cNvSpPr/>
+          <p:nvPr/>
+        </p:nvSpPr>
+        <p:spPr>
+          <a:xfrm>
+            <a:off x="548640" y="1069848"/>
+            <a:ext cx="2423160" cy="256032"/>
+          </a:xfrm>
+          <a:prstGeom prst="rect">
+            <a:avLst/>
+          </a:prstGeom>
+          <a:noFill/>
+          <a:ln/>
+        </p:spPr>
+        <p:txBody>
+          <a:bodyPr wrap="square" rtlCol="0" anchor="ctr"/>
+          <a:lstStyle/>
+          <a:p>
+            <a:pPr algn="ctr" indent="0" marL="0">
+              <a:buNone/>
+            </a:pPr>
+            <a:r>
+              <a:rPr lang="en-US" sz="1500" b="1" dirty="0">
+                <a:solidFill>
+                  <a:srgbClr val="1A73E8"/>
+                </a:solidFill>
+              </a:rPr>
+              <a:t>Gemini AI Parser</a:t>
+            </a:r>
+            <a:endParaRPr lang="en-US" sz="1500" dirty="0"/>
+          </a:p>
+        </p:txBody>
+      </p:sp>
+      <p:sp>
+        <p:nvSpPr>
+          <p:cNvPr id="7" name="Text 5"/>
+          <p:cNvSpPr/>
+          <p:nvPr/>
+        </p:nvSpPr>
+        <p:spPr>
+          <a:xfrm>
+            <a:off x="548640" y="1316736"/>
+            <a:ext cx="2423160" cy="228600"/>
+          </a:xfrm>
+          <a:prstGeom prst="rect">
+            <a:avLst/>
+          </a:prstGeom>
+          <a:noFill/>
+          <a:ln/>
+        </p:spPr>
+        <p:txBody>
+          <a:bodyPr wrap="square" rtlCol="0" anchor="ctr"/>
+          <a:lstStyle/>
+          <a:p>
+            <a:pPr algn="ctr" indent="0" marL="0">
+              <a:buNone/>
+            </a:pPr>
+            <a:r>
+              <a:rPr lang="en-US" sz="1400" dirty="0">
+                <a:solidFill>
+                  <a:srgbClr val="3C4043"/>
+                </a:solidFill>
+              </a:rPr>
+              <a:t>Extracts Anchors vs Targets</a:t>
+            </a:r>
+            <a:endParaRPr lang="en-US" sz="1400" dirty="0"/>
+          </a:p>
+        </p:txBody>
+      </p:sp>
+      <p:sp>
+        <p:nvSpPr>
+          <p:cNvPr id="8" name="Shape 6"/>
+          <p:cNvSpPr/>
+          <p:nvPr/>
+        </p:nvSpPr>
+        <p:spPr>
+          <a:xfrm>
+            <a:off x="3268980" y="1024128"/>
+            <a:ext cx="2606040" cy="566928"/>
+          </a:xfrm>
+          <a:prstGeom prst="rect">
+            <a:avLst/>
+          </a:prstGeom>
+          <a:solidFill>
+            <a:srgbClr val="E8F0FE"/>
+          </a:solidFill>
+          <a:ln w="12700">
+            <a:solidFill>
+              <a:srgbClr val="1A73E8"/>
+            </a:solidFill>
+            <a:prstDash val="solid"/>
+          </a:ln>
+        </p:spPr>
+      </p:sp>
+      <p:sp>
+        <p:nvSpPr>
+          <p:cNvPr id="9" name="Text 7"/>
+          <p:cNvSpPr/>
+          <p:nvPr/>
+        </p:nvSpPr>
+        <p:spPr>
+          <a:xfrm>
+            <a:off x="3360420" y="1069848"/>
+            <a:ext cx="2423160" cy="256032"/>
+          </a:xfrm>
+          <a:prstGeom prst="rect">
+            <a:avLst/>
+          </a:prstGeom>
+          <a:noFill/>
+          <a:ln/>
+        </p:spPr>
+        <p:txBody>
+          <a:bodyPr wrap="square" rtlCol="0" anchor="ctr"/>
+          <a:lstStyle/>
+          <a:p>
+            <a:pPr algn="ctr" indent="0" marL="0">
+              <a:buNone/>
+            </a:pPr>
+            <a:r>
+              <a:rPr lang="en-US" sz="1500" b="1" dirty="0">
+                <a:solidFill>
+                  <a:srgbClr val="1A73E8"/>
+                </a:solidFill>
+              </a:rPr>
+              <a:t>1-Tap Context Jump</a:t>
+            </a:r>
+            <a:endParaRPr lang="en-US" sz="1500" dirty="0"/>
+          </a:p>
+        </p:txBody>
+      </p:sp>
+      <p:sp>
+        <p:nvSpPr>
+          <p:cNvPr id="10" name="Text 8"/>
+          <p:cNvSpPr/>
+          <p:nvPr/>
+        </p:nvSpPr>
+        <p:spPr>
+          <a:xfrm>
+            <a:off x="3360420" y="1316736"/>
+            <a:ext cx="2423160" cy="228600"/>
+          </a:xfrm>
+          <a:prstGeom prst="rect">
+            <a:avLst/>
+          </a:prstGeom>
+          <a:noFill/>
+          <a:ln/>
+        </p:spPr>
+        <p:txBody>
+          <a:bodyPr wrap="square" rtlCol="0" anchor="ctr"/>
+          <a:lstStyle/>
+          <a:p>
+            <a:pPr algn="ctr" indent="0" marL="0">
+              <a:buNone/>
+            </a:pPr>
+            <a:r>
+              <a:rPr lang="en-US" sz="1400" dirty="0">
+                <a:solidFill>
+                  <a:srgbClr val="3C4043"/>
+                </a:solidFill>
+              </a:rPr>
+              <a:t>±4.0h, ≤1.0km Spatial Window</a:t>
+            </a:r>
+            <a:endParaRPr lang="en-US" sz="1400" dirty="0"/>
+          </a:p>
+        </p:txBody>
+      </p:sp>
+      <p:sp>
+        <p:nvSpPr>
+          <p:cNvPr id="11" name="Shape 9"/>
+          <p:cNvSpPr/>
+          <p:nvPr/>
+        </p:nvSpPr>
+        <p:spPr>
+          <a:xfrm>
+            <a:off x="6080760" y="1024128"/>
+            <a:ext cx="2606040" cy="566928"/>
+          </a:xfrm>
+          <a:prstGeom prst="rect">
+            <a:avLst/>
+          </a:prstGeom>
+          <a:solidFill>
+            <a:srgbClr val="E8F0FE"/>
+          </a:solidFill>
+          <a:ln w="12700">
+            <a:solidFill>
+              <a:srgbClr val="1A73E8"/>
+            </a:solidFill>
+            <a:prstDash val="solid"/>
+          </a:ln>
+        </p:spPr>
+      </p:sp>
+      <p:sp>
+        <p:nvSpPr>
+          <p:cNvPr id="12" name="Text 10"/>
+          <p:cNvSpPr/>
+          <p:nvPr/>
+        </p:nvSpPr>
+        <p:spPr>
+          <a:xfrm>
+            <a:off x="6172200" y="1069848"/>
+            <a:ext cx="2423160" cy="256032"/>
+          </a:xfrm>
+          <a:prstGeom prst="rect">
+            <a:avLst/>
+          </a:prstGeom>
+          <a:noFill/>
+          <a:ln/>
+        </p:spPr>
+        <p:txBody>
+          <a:bodyPr wrap="square" rtlCol="0" anchor="ctr"/>
+          <a:lstStyle/>
+          <a:p>
+            <a:pPr algn="ctr" indent="0" marL="0">
+              <a:buNone/>
+            </a:pPr>
+            <a:r>
+              <a:rPr lang="en-US" sz="1500" b="1" dirty="0">
+                <a:solidFill>
+                  <a:srgbClr val="1A73E8"/>
+                </a:solidFill>
+              </a:rPr>
+              <a:t>8.93 / 10 Score</a:t>
+            </a:r>
+            <a:endParaRPr lang="en-US" sz="1500" dirty="0"/>
+          </a:p>
+        </p:txBody>
+      </p:sp>
+      <p:sp>
+        <p:nvSpPr>
+          <p:cNvPr id="13" name="Text 11"/>
+          <p:cNvSpPr/>
+          <p:nvPr/>
+        </p:nvSpPr>
+        <p:spPr>
+          <a:xfrm>
+            <a:off x="6172200" y="1316736"/>
+            <a:ext cx="2423160" cy="228600"/>
+          </a:xfrm>
+          <a:prstGeom prst="rect">
+            <a:avLst/>
+          </a:prstGeom>
+          <a:noFill/>
+          <a:ln/>
+        </p:spPr>
+        <p:txBody>
+          <a:bodyPr wrap="square" rtlCol="0" anchor="ctr"/>
+          <a:lstStyle/>
+          <a:p>
+            <a:pPr algn="ctr" indent="0" marL="0">
+              <a:buNone/>
+            </a:pPr>
+            <a:r>
+              <a:rPr lang="en-US" sz="1400" dirty="0">
+                <a:solidFill>
+                  <a:srgbClr val="3C4043"/>
+                </a:solidFill>
+              </a:rPr>
+              <a:t>Concept A vs 6.40 Ask Photos</a:t>
+            </a:r>
+            <a:endParaRPr lang="en-US" sz="1400" dirty="0"/>
+          </a:p>
+        </p:txBody>
+      </p:sp>
+      <p:sp>
+        <p:nvSpPr>
+          <p:cNvPr id="14" name="Text 12"/>
           <p:cNvSpPr/>
           <p:nvPr/>
         </p:nvSpPr>
@@ -15294,7 +15585,7 @@
                   <a:srgbClr val="1A73E8"/>
                 </a:solidFill>
               </a:rPr>
-              <a:t>Architectural Trade-off Evaluation Matrix &amp; Quantitative Selection Rationale</a:t>
+              <a:t>Solution Concept, Executive Working Paragraph &amp; Operational Working Mechanism</a:t>
             </a:r>
             <a:endParaRPr lang="en-US" sz="1400" dirty="0"/>
           </a:p>
@@ -15323,13 +15614,10 @@
             <a:tbl>
               <a:tblPr/>
               <a:tblGrid>
-                <a:gridCol w="2103120"/>
-                <a:gridCol w="1005840"/>
-                <a:gridCol w="1005840"/>
-                <a:gridCol w="1097280"/>
-                <a:gridCol w="1005840"/>
-                <a:gridCol w="822960"/>
-                <a:gridCol w="1188720"/>
+                <a:gridCol w="2011680"/>
+                <a:gridCol w="2560320"/>
+                <a:gridCol w="2286000"/>
+                <a:gridCol w="1371600"/>
               </a:tblGrid>
               <a:tr h="0">
                 <a:tc>
@@ -15346,7 +15634,7 @@
                             <a:srgbClr val="1A73E8"/>
                           </a:solidFill>
                         </a:rPr>
-                        <a:t>Concept Option</a:t>
+                        <a:t>Solution Component / Phase</a:t>
                       </a:r>
                       <a:endParaRPr lang="en-US" sz="1400" dirty="0"/>
                     </a:p>
@@ -15407,7 +15695,7 @@
                             <a:srgbClr val="1A73E8"/>
                           </a:solidFill>
                         </a:rPr>
-                        <a:t>User Value (/10)</a:t>
+                        <a:t>Technical Function &amp; Mechanism</a:t>
                       </a:r>
                       <a:endParaRPr lang="en-US" sz="1400" dirty="0"/>
                     </a:p>
@@ -15468,7 +15756,7 @@
                             <a:srgbClr val="1A73E8"/>
                           </a:solidFill>
                         </a:rPr>
-                        <a:t>Feasibility (/10)</a:t>
+                        <a:t>Operational Execution &amp; User Outcome</a:t>
                       </a:r>
                       <a:endParaRPr lang="en-US" sz="1400" dirty="0"/>
                     </a:p>
@@ -15529,190 +15817,7 @@
                             <a:srgbClr val="1A73E8"/>
                           </a:solidFill>
                         </a:rPr>
-                        <a:t>Latency Impact</a:t>
-                      </a:r>
-                      <a:endParaRPr lang="en-US" sz="1400" dirty="0"/>
-                    </a:p>
-                  </a:txBody>
-                  <a:tcPr marL="91440" marR="91440" marT="45720" marB="45720" anchor="ctr">
-                    <a:lnL w="12700" cap="flat" cmpd="sng" algn="ctr">
-                      <a:solidFill>
-                        <a:srgbClr val="DADCE0"/>
-                      </a:solidFill>
-                      <a:prstDash val="solid"/>
-                      <a:round/>
-                      <a:headEnd type="none" w="med" len="med"/>
-                      <a:tailEnd type="none" w="med" len="med"/>
-                    </a:lnL>
-                    <a:lnR w="12700" cap="flat" cmpd="sng" algn="ctr">
-                      <a:solidFill>
-                        <a:srgbClr val="DADCE0"/>
-                      </a:solidFill>
-                      <a:prstDash val="solid"/>
-                      <a:round/>
-                      <a:headEnd type="none" w="med" len="med"/>
-                      <a:tailEnd type="none" w="med" len="med"/>
-                    </a:lnR>
-                    <a:lnT w="12700" cap="flat" cmpd="sng" algn="ctr">
-                      <a:solidFill>
-                        <a:srgbClr val="DADCE0"/>
-                      </a:solidFill>
-                      <a:prstDash val="solid"/>
-                      <a:round/>
-                      <a:headEnd type="none" w="med" len="med"/>
-                      <a:tailEnd type="none" w="med" len="med"/>
-                    </a:lnT>
-                    <a:lnB w="12700" cap="flat" cmpd="sng" algn="ctr">
-                      <a:solidFill>
-                        <a:srgbClr val="DADCE0"/>
-                      </a:solidFill>
-                      <a:prstDash val="solid"/>
-                      <a:round/>
-                      <a:headEnd type="none" w="med" len="med"/>
-                      <a:tailEnd type="none" w="med" len="med"/>
-                    </a:lnB>
-                    <a:solidFill>
-                      <a:srgbClr val="E8F0FE"/>
-                    </a:solidFill>
-                  </a:tcPr>
-                </a:tc>
-                <a:tc>
-                  <a:txBody>
-                    <a:bodyPr/>
-                    <a:lstStyle/>
-                    <a:p>
-                      <a:pPr algn="l" indent="0" marL="0">
-                        <a:buNone/>
-                      </a:pPr>
-                      <a:r>
-                        <a:rPr lang="en-US" sz="1400" b="1" dirty="0">
-                          <a:solidFill>
-                            <a:srgbClr val="1A73E8"/>
-                          </a:solidFill>
-                        </a:rPr>
-                        <a:t>Friction Level</a:t>
-                      </a:r>
-                      <a:endParaRPr lang="en-US" sz="1400" dirty="0"/>
-                    </a:p>
-                  </a:txBody>
-                  <a:tcPr marL="91440" marR="91440" marT="45720" marB="45720" anchor="ctr">
-                    <a:lnL w="12700" cap="flat" cmpd="sng" algn="ctr">
-                      <a:solidFill>
-                        <a:srgbClr val="DADCE0"/>
-                      </a:solidFill>
-                      <a:prstDash val="solid"/>
-                      <a:round/>
-                      <a:headEnd type="none" w="med" len="med"/>
-                      <a:tailEnd type="none" w="med" len="med"/>
-                    </a:lnL>
-                    <a:lnR w="12700" cap="flat" cmpd="sng" algn="ctr">
-                      <a:solidFill>
-                        <a:srgbClr val="DADCE0"/>
-                      </a:solidFill>
-                      <a:prstDash val="solid"/>
-                      <a:round/>
-                      <a:headEnd type="none" w="med" len="med"/>
-                      <a:tailEnd type="none" w="med" len="med"/>
-                    </a:lnR>
-                    <a:lnT w="12700" cap="flat" cmpd="sng" algn="ctr">
-                      <a:solidFill>
-                        <a:srgbClr val="DADCE0"/>
-                      </a:solidFill>
-                      <a:prstDash val="solid"/>
-                      <a:round/>
-                      <a:headEnd type="none" w="med" len="med"/>
-                      <a:tailEnd type="none" w="med" len="med"/>
-                    </a:lnT>
-                    <a:lnB w="12700" cap="flat" cmpd="sng" algn="ctr">
-                      <a:solidFill>
-                        <a:srgbClr val="DADCE0"/>
-                      </a:solidFill>
-                      <a:prstDash val="solid"/>
-                      <a:round/>
-                      <a:headEnd type="none" w="med" len="med"/>
-                      <a:tailEnd type="none" w="med" len="med"/>
-                    </a:lnB>
-                    <a:solidFill>
-                      <a:srgbClr val="E8F0FE"/>
-                    </a:solidFill>
-                  </a:tcPr>
-                </a:tc>
-                <a:tc>
-                  <a:txBody>
-                    <a:bodyPr/>
-                    <a:lstStyle/>
-                    <a:p>
-                      <a:pPr algn="l" indent="0" marL="0">
-                        <a:buNone/>
-                      </a:pPr>
-                      <a:r>
-                        <a:rPr lang="en-US" sz="1400" b="1" dirty="0">
-                          <a:solidFill>
-                            <a:srgbClr val="1A73E8"/>
-                          </a:solidFill>
-                        </a:rPr>
-                        <a:t>Total Score</a:t>
-                      </a:r>
-                      <a:endParaRPr lang="en-US" sz="1400" dirty="0"/>
-                    </a:p>
-                  </a:txBody>
-                  <a:tcPr marL="91440" marR="91440" marT="45720" marB="45720" anchor="ctr">
-                    <a:lnL w="12700" cap="flat" cmpd="sng" algn="ctr">
-                      <a:solidFill>
-                        <a:srgbClr val="DADCE0"/>
-                      </a:solidFill>
-                      <a:prstDash val="solid"/>
-                      <a:round/>
-                      <a:headEnd type="none" w="med" len="med"/>
-                      <a:tailEnd type="none" w="med" len="med"/>
-                    </a:lnL>
-                    <a:lnR w="12700" cap="flat" cmpd="sng" algn="ctr">
-                      <a:solidFill>
-                        <a:srgbClr val="DADCE0"/>
-                      </a:solidFill>
-                      <a:prstDash val="solid"/>
-                      <a:round/>
-                      <a:headEnd type="none" w="med" len="med"/>
-                      <a:tailEnd type="none" w="med" len="med"/>
-                    </a:lnR>
-                    <a:lnT w="12700" cap="flat" cmpd="sng" algn="ctr">
-                      <a:solidFill>
-                        <a:srgbClr val="DADCE0"/>
-                      </a:solidFill>
-                      <a:prstDash val="solid"/>
-                      <a:round/>
-                      <a:headEnd type="none" w="med" len="med"/>
-                      <a:tailEnd type="none" w="med" len="med"/>
-                    </a:lnT>
-                    <a:lnB w="12700" cap="flat" cmpd="sng" algn="ctr">
-                      <a:solidFill>
-                        <a:srgbClr val="DADCE0"/>
-                      </a:solidFill>
-                      <a:prstDash val="solid"/>
-                      <a:round/>
-                      <a:headEnd type="none" w="med" len="med"/>
-                      <a:tailEnd type="none" w="med" len="med"/>
-                    </a:lnB>
-                    <a:solidFill>
-                      <a:srgbClr val="E8F0FE"/>
-                    </a:solidFill>
-                  </a:tcPr>
-                </a:tc>
-                <a:tc>
-                  <a:txBody>
-                    <a:bodyPr/>
-                    <a:lstStyle/>
-                    <a:p>
-                      <a:pPr algn="l" indent="0" marL="0">
-                        <a:buNone/>
-                      </a:pPr>
-                      <a:r>
-                        <a:rPr lang="en-US" sz="1400" b="1" dirty="0">
-                          <a:solidFill>
-                            <a:srgbClr val="1A73E8"/>
-                          </a:solidFill>
-                        </a:rPr>
-                        <a:t>Strategic Decision</a:t>
+                        <a:t>Performance &amp; Benchmark Score</a:t>
                       </a:r>
                       <a:endParaRPr lang="en-US" sz="1400" dirty="0"/>
                     </a:p>
@@ -15775,373 +15880,190 @@
                             <a:srgbClr val="202124"/>
                           </a:solidFill>
                         </a:rPr>
-                        <a:t>Concept A: 1-Tap Context Jump</a:t>
-                      </a:r>
-                      <a:endParaRPr lang="en-US" sz="1400" dirty="0"/>
-                    </a:p>
-                  </a:txBody>
-                  <a:tcPr marL="91440" marR="91440" marT="45720" marB="45720" anchor="ctr">
-                    <a:lnL w="12700" cap="flat" cmpd="sng" algn="ctr">
-                      <a:solidFill>
-                        <a:srgbClr val="DADCE0"/>
-                      </a:solidFill>
-                      <a:prstDash val="solid"/>
-                      <a:round/>
-                      <a:headEnd type="none" w="med" len="med"/>
-                      <a:tailEnd type="none" w="med" len="med"/>
-                    </a:lnL>
-                    <a:lnR w="12700" cap="flat" cmpd="sng" algn="ctr">
-                      <a:solidFill>
-                        <a:srgbClr val="DADCE0"/>
-                      </a:solidFill>
-                      <a:prstDash val="solid"/>
-                      <a:round/>
-                      <a:headEnd type="none" w="med" len="med"/>
-                      <a:tailEnd type="none" w="med" len="med"/>
-                    </a:lnR>
-                    <a:lnT w="12700" cap="flat" cmpd="sng" algn="ctr">
-                      <a:solidFill>
-                        <a:srgbClr val="DADCE0"/>
-                      </a:solidFill>
-                      <a:prstDash val="solid"/>
-                      <a:round/>
-                      <a:headEnd type="none" w="med" len="med"/>
-                      <a:tailEnd type="none" w="med" len="med"/>
-                    </a:lnT>
-                    <a:lnB w="12700" cap="flat" cmpd="sng" algn="ctr">
-                      <a:solidFill>
-                        <a:srgbClr val="DADCE0"/>
-                      </a:solidFill>
-                      <a:prstDash val="solid"/>
-                      <a:round/>
-                      <a:headEnd type="none" w="med" len="med"/>
-                      <a:tailEnd type="none" w="med" len="med"/>
-                    </a:lnB>
-                    <a:solidFill>
-                      <a:srgbClr val="FFFFFF"/>
-                    </a:solidFill>
-                  </a:tcPr>
-                </a:tc>
-                <a:tc>
-                  <a:txBody>
-                    <a:bodyPr/>
-                    <a:lstStyle/>
-                    <a:p>
-                      <a:pPr algn="l" indent="0" marL="0">
-                        <a:buNone/>
-                      </a:pPr>
-                      <a:r>
-                        <a:rPr lang="en-US" sz="1400" dirty="0">
-                          <a:solidFill>
-                            <a:srgbClr val="202124"/>
-                          </a:solidFill>
-                        </a:rPr>
-                        <a:t>9.2 / 10</a:t>
-                      </a:r>
-                      <a:endParaRPr lang="en-US" sz="1400" dirty="0"/>
-                    </a:p>
-                  </a:txBody>
-                  <a:tcPr marL="91440" marR="91440" marT="45720" marB="45720" anchor="ctr">
-                    <a:lnL w="12700" cap="flat" cmpd="sng" algn="ctr">
-                      <a:solidFill>
-                        <a:srgbClr val="DADCE0"/>
-                      </a:solidFill>
-                      <a:prstDash val="solid"/>
-                      <a:round/>
-                      <a:headEnd type="none" w="med" len="med"/>
-                      <a:tailEnd type="none" w="med" len="med"/>
-                    </a:lnL>
-                    <a:lnR w="12700" cap="flat" cmpd="sng" algn="ctr">
-                      <a:solidFill>
-                        <a:srgbClr val="DADCE0"/>
-                      </a:solidFill>
-                      <a:prstDash val="solid"/>
-                      <a:round/>
-                      <a:headEnd type="none" w="med" len="med"/>
-                      <a:tailEnd type="none" w="med" len="med"/>
-                    </a:lnR>
-                    <a:lnT w="12700" cap="flat" cmpd="sng" algn="ctr">
-                      <a:solidFill>
-                        <a:srgbClr val="DADCE0"/>
-                      </a:solidFill>
-                      <a:prstDash val="solid"/>
-                      <a:round/>
-                      <a:headEnd type="none" w="med" len="med"/>
-                      <a:tailEnd type="none" w="med" len="med"/>
-                    </a:lnT>
-                    <a:lnB w="12700" cap="flat" cmpd="sng" algn="ctr">
-                      <a:solidFill>
-                        <a:srgbClr val="DADCE0"/>
-                      </a:solidFill>
-                      <a:prstDash val="solid"/>
-                      <a:round/>
-                      <a:headEnd type="none" w="med" len="med"/>
-                      <a:tailEnd type="none" w="med" len="med"/>
-                    </a:lnB>
-                    <a:solidFill>
-                      <a:srgbClr val="FFFFFF"/>
-                    </a:solidFill>
-                  </a:tcPr>
-                </a:tc>
-                <a:tc>
-                  <a:txBody>
-                    <a:bodyPr/>
-                    <a:lstStyle/>
-                    <a:p>
-                      <a:pPr algn="l" indent="0" marL="0">
-                        <a:buNone/>
-                      </a:pPr>
-                      <a:r>
-                        <a:rPr lang="en-US" sz="1400" dirty="0">
-                          <a:solidFill>
-                            <a:srgbClr val="202124"/>
-                          </a:solidFill>
-                        </a:rPr>
-                        <a:t>8.8 / 10</a:t>
-                      </a:r>
-                      <a:endParaRPr lang="en-US" sz="1400" dirty="0"/>
-                    </a:p>
-                  </a:txBody>
-                  <a:tcPr marL="91440" marR="91440" marT="45720" marB="45720" anchor="ctr">
-                    <a:lnL w="12700" cap="flat" cmpd="sng" algn="ctr">
-                      <a:solidFill>
-                        <a:srgbClr val="DADCE0"/>
-                      </a:solidFill>
-                      <a:prstDash val="solid"/>
-                      <a:round/>
-                      <a:headEnd type="none" w="med" len="med"/>
-                      <a:tailEnd type="none" w="med" len="med"/>
-                    </a:lnL>
-                    <a:lnR w="12700" cap="flat" cmpd="sng" algn="ctr">
-                      <a:solidFill>
-                        <a:srgbClr val="DADCE0"/>
-                      </a:solidFill>
-                      <a:prstDash val="solid"/>
-                      <a:round/>
-                      <a:headEnd type="none" w="med" len="med"/>
-                      <a:tailEnd type="none" w="med" len="med"/>
-                    </a:lnR>
-                    <a:lnT w="12700" cap="flat" cmpd="sng" algn="ctr">
-                      <a:solidFill>
-                        <a:srgbClr val="DADCE0"/>
-                      </a:solidFill>
-                      <a:prstDash val="solid"/>
-                      <a:round/>
-                      <a:headEnd type="none" w="med" len="med"/>
-                      <a:tailEnd type="none" w="med" len="med"/>
-                    </a:lnT>
-                    <a:lnB w="12700" cap="flat" cmpd="sng" algn="ctr">
-                      <a:solidFill>
-                        <a:srgbClr val="DADCE0"/>
-                      </a:solidFill>
-                      <a:prstDash val="solid"/>
-                      <a:round/>
-                      <a:headEnd type="none" w="med" len="med"/>
-                      <a:tailEnd type="none" w="med" len="med"/>
-                    </a:lnB>
-                    <a:solidFill>
-                      <a:srgbClr val="FFFFFF"/>
-                    </a:solidFill>
-                  </a:tcPr>
-                </a:tc>
-                <a:tc>
-                  <a:txBody>
-                    <a:bodyPr/>
-                    <a:lstStyle/>
-                    <a:p>
-                      <a:pPr algn="l" indent="0" marL="0">
-                        <a:buNone/>
-                      </a:pPr>
-                      <a:r>
-                        <a:rPr lang="en-US" sz="1400" dirty="0">
-                          <a:solidFill>
-                            <a:srgbClr val="202124"/>
-                          </a:solidFill>
-                        </a:rPr>
-                        <a:t>&lt; 100 ms</a:t>
-                      </a:r>
-                      <a:endParaRPr lang="en-US" sz="1400" dirty="0"/>
-                    </a:p>
-                  </a:txBody>
-                  <a:tcPr marL="91440" marR="91440" marT="45720" marB="45720" anchor="ctr">
-                    <a:lnL w="12700" cap="flat" cmpd="sng" algn="ctr">
-                      <a:solidFill>
-                        <a:srgbClr val="DADCE0"/>
-                      </a:solidFill>
-                      <a:prstDash val="solid"/>
-                      <a:round/>
-                      <a:headEnd type="none" w="med" len="med"/>
-                      <a:tailEnd type="none" w="med" len="med"/>
-                    </a:lnL>
-                    <a:lnR w="12700" cap="flat" cmpd="sng" algn="ctr">
-                      <a:solidFill>
-                        <a:srgbClr val="DADCE0"/>
-                      </a:solidFill>
-                      <a:prstDash val="solid"/>
-                      <a:round/>
-                      <a:headEnd type="none" w="med" len="med"/>
-                      <a:tailEnd type="none" w="med" len="med"/>
-                    </a:lnR>
-                    <a:lnT w="12700" cap="flat" cmpd="sng" algn="ctr">
-                      <a:solidFill>
-                        <a:srgbClr val="DADCE0"/>
-                      </a:solidFill>
-                      <a:prstDash val="solid"/>
-                      <a:round/>
-                      <a:headEnd type="none" w="med" len="med"/>
-                      <a:tailEnd type="none" w="med" len="med"/>
-                    </a:lnT>
-                    <a:lnB w="12700" cap="flat" cmpd="sng" algn="ctr">
-                      <a:solidFill>
-                        <a:srgbClr val="DADCE0"/>
-                      </a:solidFill>
-                      <a:prstDash val="solid"/>
-                      <a:round/>
-                      <a:headEnd type="none" w="med" len="med"/>
-                      <a:tailEnd type="none" w="med" len="med"/>
-                    </a:lnB>
-                    <a:solidFill>
-                      <a:srgbClr val="FFFFFF"/>
-                    </a:solidFill>
-                  </a:tcPr>
-                </a:tc>
-                <a:tc>
-                  <a:txBody>
-                    <a:bodyPr/>
-                    <a:lstStyle/>
-                    <a:p>
-                      <a:pPr algn="l" indent="0" marL="0">
-                        <a:buNone/>
-                      </a:pPr>
-                      <a:r>
-                        <a:rPr lang="en-US" sz="1400" dirty="0">
-                          <a:solidFill>
-                            <a:srgbClr val="202124"/>
-                          </a:solidFill>
-                        </a:rPr>
-                        <a:t>Zero Friction</a:t>
-                      </a:r>
-                      <a:endParaRPr lang="en-US" sz="1400" dirty="0"/>
-                    </a:p>
-                  </a:txBody>
-                  <a:tcPr marL="91440" marR="91440" marT="45720" marB="45720" anchor="ctr">
-                    <a:lnL w="12700" cap="flat" cmpd="sng" algn="ctr">
-                      <a:solidFill>
-                        <a:srgbClr val="DADCE0"/>
-                      </a:solidFill>
-                      <a:prstDash val="solid"/>
-                      <a:round/>
-                      <a:headEnd type="none" w="med" len="med"/>
-                      <a:tailEnd type="none" w="med" len="med"/>
-                    </a:lnL>
-                    <a:lnR w="12700" cap="flat" cmpd="sng" algn="ctr">
-                      <a:solidFill>
-                        <a:srgbClr val="DADCE0"/>
-                      </a:solidFill>
-                      <a:prstDash val="solid"/>
-                      <a:round/>
-                      <a:headEnd type="none" w="med" len="med"/>
-                      <a:tailEnd type="none" w="med" len="med"/>
-                    </a:lnR>
-                    <a:lnT w="12700" cap="flat" cmpd="sng" algn="ctr">
-                      <a:solidFill>
-                        <a:srgbClr val="DADCE0"/>
-                      </a:solidFill>
-                      <a:prstDash val="solid"/>
-                      <a:round/>
-                      <a:headEnd type="none" w="med" len="med"/>
-                      <a:tailEnd type="none" w="med" len="med"/>
-                    </a:lnT>
-                    <a:lnB w="12700" cap="flat" cmpd="sng" algn="ctr">
-                      <a:solidFill>
-                        <a:srgbClr val="DADCE0"/>
-                      </a:solidFill>
-                      <a:prstDash val="solid"/>
-                      <a:round/>
-                      <a:headEnd type="none" w="med" len="med"/>
-                      <a:tailEnd type="none" w="med" len="med"/>
-                    </a:lnB>
-                    <a:solidFill>
-                      <a:srgbClr val="FFFFFF"/>
-                    </a:solidFill>
-                  </a:tcPr>
-                </a:tc>
-                <a:tc>
-                  <a:txBody>
-                    <a:bodyPr/>
-                    <a:lstStyle/>
-                    <a:p>
-                      <a:pPr algn="l" indent="0" marL="0">
-                        <a:buNone/>
-                      </a:pPr>
-                      <a:r>
-                        <a:rPr lang="en-US" sz="1400" dirty="0">
-                          <a:solidFill>
-                            <a:srgbClr val="202124"/>
-                          </a:solidFill>
-                        </a:rPr>
-                        <a:t>8.93 / 10</a:t>
-                      </a:r>
-                      <a:endParaRPr lang="en-US" sz="1400" dirty="0"/>
-                    </a:p>
-                  </a:txBody>
-                  <a:tcPr marL="91440" marR="91440" marT="45720" marB="45720" anchor="ctr">
-                    <a:lnL w="12700" cap="flat" cmpd="sng" algn="ctr">
-                      <a:solidFill>
-                        <a:srgbClr val="DADCE0"/>
-                      </a:solidFill>
-                      <a:prstDash val="solid"/>
-                      <a:round/>
-                      <a:headEnd type="none" w="med" len="med"/>
-                      <a:tailEnd type="none" w="med" len="med"/>
-                    </a:lnL>
-                    <a:lnR w="12700" cap="flat" cmpd="sng" algn="ctr">
-                      <a:solidFill>
-                        <a:srgbClr val="DADCE0"/>
-                      </a:solidFill>
-                      <a:prstDash val="solid"/>
-                      <a:round/>
-                      <a:headEnd type="none" w="med" len="med"/>
-                      <a:tailEnd type="none" w="med" len="med"/>
-                    </a:lnR>
-                    <a:lnT w="12700" cap="flat" cmpd="sng" algn="ctr">
-                      <a:solidFill>
-                        <a:srgbClr val="DADCE0"/>
-                      </a:solidFill>
-                      <a:prstDash val="solid"/>
-                      <a:round/>
-                      <a:headEnd type="none" w="med" len="med"/>
-                      <a:tailEnd type="none" w="med" len="med"/>
-                    </a:lnT>
-                    <a:lnB w="12700" cap="flat" cmpd="sng" algn="ctr">
-                      <a:solidFill>
-                        <a:srgbClr val="DADCE0"/>
-                      </a:solidFill>
-                      <a:prstDash val="solid"/>
-                      <a:round/>
-                      <a:headEnd type="none" w="med" len="med"/>
-                      <a:tailEnd type="none" w="med" len="med"/>
-                    </a:lnB>
-                    <a:solidFill>
-                      <a:srgbClr val="FFFFFF"/>
-                    </a:solidFill>
-                  </a:tcPr>
-                </a:tc>
-                <a:tc>
-                  <a:txBody>
-                    <a:bodyPr/>
-                    <a:lstStyle/>
-                    <a:p>
-                      <a:pPr algn="l" indent="0" marL="0">
-                        <a:buNone/>
-                      </a:pPr>
-                      <a:r>
-                        <a:rPr lang="en-US" sz="1400" dirty="0">
-                          <a:solidFill>
-                            <a:srgbClr val="202124"/>
-                          </a:solidFill>
-                        </a:rPr>
-                        <a:t>SELECTED (Recommended)</a:t>
+                        <a:t>Solution Concept Definition</a:t>
+                      </a:r>
+                      <a:endParaRPr lang="en-US" sz="1400" dirty="0"/>
+                    </a:p>
+                  </a:txBody>
+                  <a:tcPr marL="91440" marR="91440" marT="45720" marB="45720" anchor="ctr">
+                    <a:lnL w="12700" cap="flat" cmpd="sng" algn="ctr">
+                      <a:solidFill>
+                        <a:srgbClr val="DADCE0"/>
+                      </a:solidFill>
+                      <a:prstDash val="solid"/>
+                      <a:round/>
+                      <a:headEnd type="none" w="med" len="med"/>
+                      <a:tailEnd type="none" w="med" len="med"/>
+                    </a:lnL>
+                    <a:lnR w="12700" cap="flat" cmpd="sng" algn="ctr">
+                      <a:solidFill>
+                        <a:srgbClr val="DADCE0"/>
+                      </a:solidFill>
+                      <a:prstDash val="solid"/>
+                      <a:round/>
+                      <a:headEnd type="none" w="med" len="med"/>
+                      <a:tailEnd type="none" w="med" len="med"/>
+                    </a:lnR>
+                    <a:lnT w="12700" cap="flat" cmpd="sng" algn="ctr">
+                      <a:solidFill>
+                        <a:srgbClr val="DADCE0"/>
+                      </a:solidFill>
+                      <a:prstDash val="solid"/>
+                      <a:round/>
+                      <a:headEnd type="none" w="med" len="med"/>
+                      <a:tailEnd type="none" w="med" len="med"/>
+                    </a:lnT>
+                    <a:lnB w="12700" cap="flat" cmpd="sng" algn="ctr">
+                      <a:solidFill>
+                        <a:srgbClr val="DADCE0"/>
+                      </a:solidFill>
+                      <a:prstDash val="solid"/>
+                      <a:round/>
+                      <a:headEnd type="none" w="med" len="med"/>
+                      <a:tailEnd type="none" w="med" len="med"/>
+                    </a:lnB>
+                    <a:solidFill>
+                      <a:srgbClr val="FFFFFF"/>
+                    </a:solidFill>
+                  </a:tcPr>
+                </a:tc>
+                <a:tc>
+                  <a:txBody>
+                    <a:bodyPr/>
+                    <a:lstStyle/>
+                    <a:p>
+                      <a:pPr algn="l" indent="0" marL="0">
+                        <a:buNone/>
+                      </a:pPr>
+                      <a:r>
+                        <a:rPr lang="en-US" sz="1400" dirty="0">
+                          <a:solidFill>
+                            <a:srgbClr val="202124"/>
+                          </a:solidFill>
+                        </a:rPr>
+                        <a:t>Gemini AI Query Parser</a:t>
+                      </a:r>
+                      <a:endParaRPr lang="en-US" sz="1400" dirty="0"/>
+                    </a:p>
+                  </a:txBody>
+                  <a:tcPr marL="91440" marR="91440" marT="45720" marB="45720" anchor="ctr">
+                    <a:lnL w="12700" cap="flat" cmpd="sng" algn="ctr">
+                      <a:solidFill>
+                        <a:srgbClr val="DADCE0"/>
+                      </a:solidFill>
+                      <a:prstDash val="solid"/>
+                      <a:round/>
+                      <a:headEnd type="none" w="med" len="med"/>
+                      <a:tailEnd type="none" w="med" len="med"/>
+                    </a:lnL>
+                    <a:lnR w="12700" cap="flat" cmpd="sng" algn="ctr">
+                      <a:solidFill>
+                        <a:srgbClr val="DADCE0"/>
+                      </a:solidFill>
+                      <a:prstDash val="solid"/>
+                      <a:round/>
+                      <a:headEnd type="none" w="med" len="med"/>
+                      <a:tailEnd type="none" w="med" len="med"/>
+                    </a:lnR>
+                    <a:lnT w="12700" cap="flat" cmpd="sng" algn="ctr">
+                      <a:solidFill>
+                        <a:srgbClr val="DADCE0"/>
+                      </a:solidFill>
+                      <a:prstDash val="solid"/>
+                      <a:round/>
+                      <a:headEnd type="none" w="med" len="med"/>
+                      <a:tailEnd type="none" w="med" len="med"/>
+                    </a:lnT>
+                    <a:lnB w="12700" cap="flat" cmpd="sng" algn="ctr">
+                      <a:solidFill>
+                        <a:srgbClr val="DADCE0"/>
+                      </a:solidFill>
+                      <a:prstDash val="solid"/>
+                      <a:round/>
+                      <a:headEnd type="none" w="med" len="med"/>
+                      <a:tailEnd type="none" w="med" len="med"/>
+                    </a:lnB>
+                    <a:solidFill>
+                      <a:srgbClr val="FFFFFF"/>
+                    </a:solidFill>
+                  </a:tcPr>
+                </a:tc>
+                <a:tc>
+                  <a:txBody>
+                    <a:bodyPr/>
+                    <a:lstStyle/>
+                    <a:p>
+                      <a:pPr algn="l" indent="0" marL="0">
+                        <a:buNone/>
+                      </a:pPr>
+                      <a:r>
+                        <a:rPr lang="en-US" sz="1400" dirty="0">
+                          <a:solidFill>
+                            <a:srgbClr val="202124"/>
+                          </a:solidFill>
+                        </a:rPr>
+                        <a:t>Converts vague natural language prompts e.g. 'Goa sunset dinner receipt' into anchor tokens &amp; target descriptors</a:t>
+                      </a:r>
+                      <a:endParaRPr lang="en-US" sz="1400" dirty="0"/>
+                    </a:p>
+                  </a:txBody>
+                  <a:tcPr marL="91440" marR="91440" marT="45720" marB="45720" anchor="ctr">
+                    <a:lnL w="12700" cap="flat" cmpd="sng" algn="ctr">
+                      <a:solidFill>
+                        <a:srgbClr val="DADCE0"/>
+                      </a:solidFill>
+                      <a:prstDash val="solid"/>
+                      <a:round/>
+                      <a:headEnd type="none" w="med" len="med"/>
+                      <a:tailEnd type="none" w="med" len="med"/>
+                    </a:lnL>
+                    <a:lnR w="12700" cap="flat" cmpd="sng" algn="ctr">
+                      <a:solidFill>
+                        <a:srgbClr val="DADCE0"/>
+                      </a:solidFill>
+                      <a:prstDash val="solid"/>
+                      <a:round/>
+                      <a:headEnd type="none" w="med" len="med"/>
+                      <a:tailEnd type="none" w="med" len="med"/>
+                    </a:lnR>
+                    <a:lnT w="12700" cap="flat" cmpd="sng" algn="ctr">
+                      <a:solidFill>
+                        <a:srgbClr val="DADCE0"/>
+                      </a:solidFill>
+                      <a:prstDash val="solid"/>
+                      <a:round/>
+                      <a:headEnd type="none" w="med" len="med"/>
+                      <a:tailEnd type="none" w="med" len="med"/>
+                    </a:lnT>
+                    <a:lnB w="12700" cap="flat" cmpd="sng" algn="ctr">
+                      <a:solidFill>
+                        <a:srgbClr val="DADCE0"/>
+                      </a:solidFill>
+                      <a:prstDash val="solid"/>
+                      <a:round/>
+                      <a:headEnd type="none" w="med" len="med"/>
+                      <a:tailEnd type="none" w="med" len="med"/>
+                    </a:lnB>
+                    <a:solidFill>
+                      <a:srgbClr val="FFFFFF"/>
+                    </a:solidFill>
+                  </a:tcPr>
+                </a:tc>
+                <a:tc>
+                  <a:txBody>
+                    <a:bodyPr/>
+                    <a:lstStyle/>
+                    <a:p>
+                      <a:pPr algn="l" indent="0" marL="0">
+                        <a:buNone/>
+                      </a:pPr>
+                      <a:r>
+                        <a:rPr lang="en-US" sz="1400" dirty="0">
+                          <a:solidFill>
+                            <a:srgbClr val="202124"/>
+                          </a:solidFill>
+                        </a:rPr>
+                        <a:t>Primary Core Solution</a:t>
                       </a:r>
                       <a:endParaRPr lang="en-US" sz="1400" dirty="0"/>
                     </a:p>
@@ -16204,373 +16126,190 @@
                             <a:srgbClr val="202124"/>
                           </a:solidFill>
                         </a:rPr>
-                        <a:t>Concept B: Conversational Ask Photos</a:t>
-                      </a:r>
-                      <a:endParaRPr lang="en-US" sz="1400" dirty="0"/>
-                    </a:p>
-                  </a:txBody>
-                  <a:tcPr marL="91440" marR="91440" marT="45720" marB="45720" anchor="ctr">
-                    <a:lnL w="12700" cap="flat" cmpd="sng" algn="ctr">
-                      <a:solidFill>
-                        <a:srgbClr val="DADCE0"/>
-                      </a:solidFill>
-                      <a:prstDash val="solid"/>
-                      <a:round/>
-                      <a:headEnd type="none" w="med" len="med"/>
-                      <a:tailEnd type="none" w="med" len="med"/>
-                    </a:lnL>
-                    <a:lnR w="12700" cap="flat" cmpd="sng" algn="ctr">
-                      <a:solidFill>
-                        <a:srgbClr val="DADCE0"/>
-                      </a:solidFill>
-                      <a:prstDash val="solid"/>
-                      <a:round/>
-                      <a:headEnd type="none" w="med" len="med"/>
-                      <a:tailEnd type="none" w="med" len="med"/>
-                    </a:lnR>
-                    <a:lnT w="12700" cap="flat" cmpd="sng" algn="ctr">
-                      <a:solidFill>
-                        <a:srgbClr val="DADCE0"/>
-                      </a:solidFill>
-                      <a:prstDash val="solid"/>
-                      <a:round/>
-                      <a:headEnd type="none" w="med" len="med"/>
-                      <a:tailEnd type="none" w="med" len="med"/>
-                    </a:lnT>
-                    <a:lnB w="12700" cap="flat" cmpd="sng" algn="ctr">
-                      <a:solidFill>
-                        <a:srgbClr val="DADCE0"/>
-                      </a:solidFill>
-                      <a:prstDash val="solid"/>
-                      <a:round/>
-                      <a:headEnd type="none" w="med" len="med"/>
-                      <a:tailEnd type="none" w="med" len="med"/>
-                    </a:lnB>
-                    <a:solidFill>
-                      <a:srgbClr val="FFFFFF"/>
-                    </a:solidFill>
-                  </a:tcPr>
-                </a:tc>
-                <a:tc>
-                  <a:txBody>
-                    <a:bodyPr/>
-                    <a:lstStyle/>
-                    <a:p>
-                      <a:pPr algn="l" indent="0" marL="0">
-                        <a:buNone/>
-                      </a:pPr>
-                      <a:r>
-                        <a:rPr lang="en-US" sz="1400" dirty="0">
-                          <a:solidFill>
-                            <a:srgbClr val="202124"/>
-                          </a:solidFill>
-                        </a:rPr>
-                        <a:t>7.0 / 10</a:t>
-                      </a:r>
-                      <a:endParaRPr lang="en-US" sz="1400" dirty="0"/>
-                    </a:p>
-                  </a:txBody>
-                  <a:tcPr marL="91440" marR="91440" marT="45720" marB="45720" anchor="ctr">
-                    <a:lnL w="12700" cap="flat" cmpd="sng" algn="ctr">
-                      <a:solidFill>
-                        <a:srgbClr val="DADCE0"/>
-                      </a:solidFill>
-                      <a:prstDash val="solid"/>
-                      <a:round/>
-                      <a:headEnd type="none" w="med" len="med"/>
-                      <a:tailEnd type="none" w="med" len="med"/>
-                    </a:lnL>
-                    <a:lnR w="12700" cap="flat" cmpd="sng" algn="ctr">
-                      <a:solidFill>
-                        <a:srgbClr val="DADCE0"/>
-                      </a:solidFill>
-                      <a:prstDash val="solid"/>
-                      <a:round/>
-                      <a:headEnd type="none" w="med" len="med"/>
-                      <a:tailEnd type="none" w="med" len="med"/>
-                    </a:lnR>
-                    <a:lnT w="12700" cap="flat" cmpd="sng" algn="ctr">
-                      <a:solidFill>
-                        <a:srgbClr val="DADCE0"/>
-                      </a:solidFill>
-                      <a:prstDash val="solid"/>
-                      <a:round/>
-                      <a:headEnd type="none" w="med" len="med"/>
-                      <a:tailEnd type="none" w="med" len="med"/>
-                    </a:lnT>
-                    <a:lnB w="12700" cap="flat" cmpd="sng" algn="ctr">
-                      <a:solidFill>
-                        <a:srgbClr val="DADCE0"/>
-                      </a:solidFill>
-                      <a:prstDash val="solid"/>
-                      <a:round/>
-                      <a:headEnd type="none" w="med" len="med"/>
-                      <a:tailEnd type="none" w="med" len="med"/>
-                    </a:lnB>
-                    <a:solidFill>
-                      <a:srgbClr val="FFFFFF"/>
-                    </a:solidFill>
-                  </a:tcPr>
-                </a:tc>
-                <a:tc>
-                  <a:txBody>
-                    <a:bodyPr/>
-                    <a:lstStyle/>
-                    <a:p>
-                      <a:pPr algn="l" indent="0" marL="0">
-                        <a:buNone/>
-                      </a:pPr>
-                      <a:r>
-                        <a:rPr lang="en-US" sz="1400" dirty="0">
-                          <a:solidFill>
-                            <a:srgbClr val="202124"/>
-                          </a:solidFill>
-                        </a:rPr>
-                        <a:t>5.8 / 10</a:t>
-                      </a:r>
-                      <a:endParaRPr lang="en-US" sz="1400" dirty="0"/>
-                    </a:p>
-                  </a:txBody>
-                  <a:tcPr marL="91440" marR="91440" marT="45720" marB="45720" anchor="ctr">
-                    <a:lnL w="12700" cap="flat" cmpd="sng" algn="ctr">
-                      <a:solidFill>
-                        <a:srgbClr val="DADCE0"/>
-                      </a:solidFill>
-                      <a:prstDash val="solid"/>
-                      <a:round/>
-                      <a:headEnd type="none" w="med" len="med"/>
-                      <a:tailEnd type="none" w="med" len="med"/>
-                    </a:lnL>
-                    <a:lnR w="12700" cap="flat" cmpd="sng" algn="ctr">
-                      <a:solidFill>
-                        <a:srgbClr val="DADCE0"/>
-                      </a:solidFill>
-                      <a:prstDash val="solid"/>
-                      <a:round/>
-                      <a:headEnd type="none" w="med" len="med"/>
-                      <a:tailEnd type="none" w="med" len="med"/>
-                    </a:lnR>
-                    <a:lnT w="12700" cap="flat" cmpd="sng" algn="ctr">
-                      <a:solidFill>
-                        <a:srgbClr val="DADCE0"/>
-                      </a:solidFill>
-                      <a:prstDash val="solid"/>
-                      <a:round/>
-                      <a:headEnd type="none" w="med" len="med"/>
-                      <a:tailEnd type="none" w="med" len="med"/>
-                    </a:lnT>
-                    <a:lnB w="12700" cap="flat" cmpd="sng" algn="ctr">
-                      <a:solidFill>
-                        <a:srgbClr val="DADCE0"/>
-                      </a:solidFill>
-                      <a:prstDash val="solid"/>
-                      <a:round/>
-                      <a:headEnd type="none" w="med" len="med"/>
-                      <a:tailEnd type="none" w="med" len="med"/>
-                    </a:lnB>
-                    <a:solidFill>
-                      <a:srgbClr val="FFFFFF"/>
-                    </a:solidFill>
-                  </a:tcPr>
-                </a:tc>
-                <a:tc>
-                  <a:txBody>
-                    <a:bodyPr/>
-                    <a:lstStyle/>
-                    <a:p>
-                      <a:pPr algn="l" indent="0" marL="0">
-                        <a:buNone/>
-                      </a:pPr>
-                      <a:r>
-                        <a:rPr lang="en-US" sz="1400" dirty="0">
-                          <a:solidFill>
-                            <a:srgbClr val="202124"/>
-                          </a:solidFill>
-                        </a:rPr>
-                        <a:t>4.2 sec</a:t>
-                      </a:r>
-                      <a:endParaRPr lang="en-US" sz="1400" dirty="0"/>
-                    </a:p>
-                  </a:txBody>
-                  <a:tcPr marL="91440" marR="91440" marT="45720" marB="45720" anchor="ctr">
-                    <a:lnL w="12700" cap="flat" cmpd="sng" algn="ctr">
-                      <a:solidFill>
-                        <a:srgbClr val="DADCE0"/>
-                      </a:solidFill>
-                      <a:prstDash val="solid"/>
-                      <a:round/>
-                      <a:headEnd type="none" w="med" len="med"/>
-                      <a:tailEnd type="none" w="med" len="med"/>
-                    </a:lnL>
-                    <a:lnR w="12700" cap="flat" cmpd="sng" algn="ctr">
-                      <a:solidFill>
-                        <a:srgbClr val="DADCE0"/>
-                      </a:solidFill>
-                      <a:prstDash val="solid"/>
-                      <a:round/>
-                      <a:headEnd type="none" w="med" len="med"/>
-                      <a:tailEnd type="none" w="med" len="med"/>
-                    </a:lnR>
-                    <a:lnT w="12700" cap="flat" cmpd="sng" algn="ctr">
-                      <a:solidFill>
-                        <a:srgbClr val="DADCE0"/>
-                      </a:solidFill>
-                      <a:prstDash val="solid"/>
-                      <a:round/>
-                      <a:headEnd type="none" w="med" len="med"/>
-                      <a:tailEnd type="none" w="med" len="med"/>
-                    </a:lnT>
-                    <a:lnB w="12700" cap="flat" cmpd="sng" algn="ctr">
-                      <a:solidFill>
-                        <a:srgbClr val="DADCE0"/>
-                      </a:solidFill>
-                      <a:prstDash val="solid"/>
-                      <a:round/>
-                      <a:headEnd type="none" w="med" len="med"/>
-                      <a:tailEnd type="none" w="med" len="med"/>
-                    </a:lnB>
-                    <a:solidFill>
-                      <a:srgbClr val="FFFFFF"/>
-                    </a:solidFill>
-                  </a:tcPr>
-                </a:tc>
-                <a:tc>
-                  <a:txBody>
-                    <a:bodyPr/>
-                    <a:lstStyle/>
-                    <a:p>
-                      <a:pPr algn="l" indent="0" marL="0">
-                        <a:buNone/>
-                      </a:pPr>
-                      <a:r>
-                        <a:rPr lang="en-US" sz="1400" dirty="0">
-                          <a:solidFill>
-                            <a:srgbClr val="202124"/>
-                          </a:solidFill>
-                        </a:rPr>
-                        <a:t>High Latency</a:t>
-                      </a:r>
-                      <a:endParaRPr lang="en-US" sz="1400" dirty="0"/>
-                    </a:p>
-                  </a:txBody>
-                  <a:tcPr marL="91440" marR="91440" marT="45720" marB="45720" anchor="ctr">
-                    <a:lnL w="12700" cap="flat" cmpd="sng" algn="ctr">
-                      <a:solidFill>
-                        <a:srgbClr val="DADCE0"/>
-                      </a:solidFill>
-                      <a:prstDash val="solid"/>
-                      <a:round/>
-                      <a:headEnd type="none" w="med" len="med"/>
-                      <a:tailEnd type="none" w="med" len="med"/>
-                    </a:lnL>
-                    <a:lnR w="12700" cap="flat" cmpd="sng" algn="ctr">
-                      <a:solidFill>
-                        <a:srgbClr val="DADCE0"/>
-                      </a:solidFill>
-                      <a:prstDash val="solid"/>
-                      <a:round/>
-                      <a:headEnd type="none" w="med" len="med"/>
-                      <a:tailEnd type="none" w="med" len="med"/>
-                    </a:lnR>
-                    <a:lnT w="12700" cap="flat" cmpd="sng" algn="ctr">
-                      <a:solidFill>
-                        <a:srgbClr val="DADCE0"/>
-                      </a:solidFill>
-                      <a:prstDash val="solid"/>
-                      <a:round/>
-                      <a:headEnd type="none" w="med" len="med"/>
-                      <a:tailEnd type="none" w="med" len="med"/>
-                    </a:lnT>
-                    <a:lnB w="12700" cap="flat" cmpd="sng" algn="ctr">
-                      <a:solidFill>
-                        <a:srgbClr val="DADCE0"/>
-                      </a:solidFill>
-                      <a:prstDash val="solid"/>
-                      <a:round/>
-                      <a:headEnd type="none" w="med" len="med"/>
-                      <a:tailEnd type="none" w="med" len="med"/>
-                    </a:lnB>
-                    <a:solidFill>
-                      <a:srgbClr val="FFFFFF"/>
-                    </a:solidFill>
-                  </a:tcPr>
-                </a:tc>
-                <a:tc>
-                  <a:txBody>
-                    <a:bodyPr/>
-                    <a:lstStyle/>
-                    <a:p>
-                      <a:pPr algn="l" indent="0" marL="0">
-                        <a:buNone/>
-                      </a:pPr>
-                      <a:r>
-                        <a:rPr lang="en-US" sz="1400" dirty="0">
-                          <a:solidFill>
-                            <a:srgbClr val="202124"/>
-                          </a:solidFill>
-                        </a:rPr>
-                        <a:t>6.40 / 10</a:t>
-                      </a:r>
-                      <a:endParaRPr lang="en-US" sz="1400" dirty="0"/>
-                    </a:p>
-                  </a:txBody>
-                  <a:tcPr marL="91440" marR="91440" marT="45720" marB="45720" anchor="ctr">
-                    <a:lnL w="12700" cap="flat" cmpd="sng" algn="ctr">
-                      <a:solidFill>
-                        <a:srgbClr val="DADCE0"/>
-                      </a:solidFill>
-                      <a:prstDash val="solid"/>
-                      <a:round/>
-                      <a:headEnd type="none" w="med" len="med"/>
-                      <a:tailEnd type="none" w="med" len="med"/>
-                    </a:lnL>
-                    <a:lnR w="12700" cap="flat" cmpd="sng" algn="ctr">
-                      <a:solidFill>
-                        <a:srgbClr val="DADCE0"/>
-                      </a:solidFill>
-                      <a:prstDash val="solid"/>
-                      <a:round/>
-                      <a:headEnd type="none" w="med" len="med"/>
-                      <a:tailEnd type="none" w="med" len="med"/>
-                    </a:lnR>
-                    <a:lnT w="12700" cap="flat" cmpd="sng" algn="ctr">
-                      <a:solidFill>
-                        <a:srgbClr val="DADCE0"/>
-                      </a:solidFill>
-                      <a:prstDash val="solid"/>
-                      <a:round/>
-                      <a:headEnd type="none" w="med" len="med"/>
-                      <a:tailEnd type="none" w="med" len="med"/>
-                    </a:lnT>
-                    <a:lnB w="12700" cap="flat" cmpd="sng" algn="ctr">
-                      <a:solidFill>
-                        <a:srgbClr val="DADCE0"/>
-                      </a:solidFill>
-                      <a:prstDash val="solid"/>
-                      <a:round/>
-                      <a:headEnd type="none" w="med" len="med"/>
-                      <a:tailEnd type="none" w="med" len="med"/>
-                    </a:lnB>
-                    <a:solidFill>
-                      <a:srgbClr val="FFFFFF"/>
-                    </a:solidFill>
-                  </a:tcPr>
-                </a:tc>
-                <a:tc>
-                  <a:txBody>
-                    <a:bodyPr/>
-                    <a:lstStyle/>
-                    <a:p>
-                      <a:pPr algn="l" indent="0" marL="0">
-                        <a:buNone/>
-                      </a:pPr>
-                      <a:r>
-                        <a:rPr lang="en-US" sz="1400" dirty="0">
-                          <a:solidFill>
-                            <a:srgbClr val="202124"/>
-                          </a:solidFill>
-                        </a:rPr>
-                        <a:t>REJECTED (High Cost/Latency)</a:t>
+                        <a:t>1-Tap Context Jump Mechanism</a:t>
+                      </a:r>
+                      <a:endParaRPr lang="en-US" sz="1400" dirty="0"/>
+                    </a:p>
+                  </a:txBody>
+                  <a:tcPr marL="91440" marR="91440" marT="45720" marB="45720" anchor="ctr">
+                    <a:lnL w="12700" cap="flat" cmpd="sng" algn="ctr">
+                      <a:solidFill>
+                        <a:srgbClr val="DADCE0"/>
+                      </a:solidFill>
+                      <a:prstDash val="solid"/>
+                      <a:round/>
+                      <a:headEnd type="none" w="med" len="med"/>
+                      <a:tailEnd type="none" w="med" len="med"/>
+                    </a:lnL>
+                    <a:lnR w="12700" cap="flat" cmpd="sng" algn="ctr">
+                      <a:solidFill>
+                        <a:srgbClr val="DADCE0"/>
+                      </a:solidFill>
+                      <a:prstDash val="solid"/>
+                      <a:round/>
+                      <a:headEnd type="none" w="med" len="med"/>
+                      <a:tailEnd type="none" w="med" len="med"/>
+                    </a:lnR>
+                    <a:lnT w="12700" cap="flat" cmpd="sng" algn="ctr">
+                      <a:solidFill>
+                        <a:srgbClr val="DADCE0"/>
+                      </a:solidFill>
+                      <a:prstDash val="solid"/>
+                      <a:round/>
+                      <a:headEnd type="none" w="med" len="med"/>
+                      <a:tailEnd type="none" w="med" len="med"/>
+                    </a:lnT>
+                    <a:lnB w="12700" cap="flat" cmpd="sng" algn="ctr">
+                      <a:solidFill>
+                        <a:srgbClr val="DADCE0"/>
+                      </a:solidFill>
+                      <a:prstDash val="solid"/>
+                      <a:round/>
+                      <a:headEnd type="none" w="med" len="med"/>
+                      <a:tailEnd type="none" w="med" len="med"/>
+                    </a:lnB>
+                    <a:solidFill>
+                      <a:srgbClr val="FFFFFF"/>
+                    </a:solidFill>
+                  </a:tcPr>
+                </a:tc>
+                <a:tc>
+                  <a:txBody>
+                    <a:bodyPr/>
+                    <a:lstStyle/>
+                    <a:p>
+                      <a:pPr algn="l" indent="0" marL="0">
+                        <a:buNone/>
+                      </a:pPr>
+                      <a:r>
+                        <a:rPr lang="en-US" sz="1400" dirty="0">
+                          <a:solidFill>
+                            <a:srgbClr val="202124"/>
+                          </a:solidFill>
+                        </a:rPr>
+                        <a:t>Spatial-Temporal Windowing</a:t>
+                      </a:r>
+                      <a:endParaRPr lang="en-US" sz="1400" dirty="0"/>
+                    </a:p>
+                  </a:txBody>
+                  <a:tcPr marL="91440" marR="91440" marT="45720" marB="45720" anchor="ctr">
+                    <a:lnL w="12700" cap="flat" cmpd="sng" algn="ctr">
+                      <a:solidFill>
+                        <a:srgbClr val="DADCE0"/>
+                      </a:solidFill>
+                      <a:prstDash val="solid"/>
+                      <a:round/>
+                      <a:headEnd type="none" w="med" len="med"/>
+                      <a:tailEnd type="none" w="med" len="med"/>
+                    </a:lnL>
+                    <a:lnR w="12700" cap="flat" cmpd="sng" algn="ctr">
+                      <a:solidFill>
+                        <a:srgbClr val="DADCE0"/>
+                      </a:solidFill>
+                      <a:prstDash val="solid"/>
+                      <a:round/>
+                      <a:headEnd type="none" w="med" len="med"/>
+                      <a:tailEnd type="none" w="med" len="med"/>
+                    </a:lnR>
+                    <a:lnT w="12700" cap="flat" cmpd="sng" algn="ctr">
+                      <a:solidFill>
+                        <a:srgbClr val="DADCE0"/>
+                      </a:solidFill>
+                      <a:prstDash val="solid"/>
+                      <a:round/>
+                      <a:headEnd type="none" w="med" len="med"/>
+                      <a:tailEnd type="none" w="med" len="med"/>
+                    </a:lnT>
+                    <a:lnB w="12700" cap="flat" cmpd="sng" algn="ctr">
+                      <a:solidFill>
+                        <a:srgbClr val="DADCE0"/>
+                      </a:solidFill>
+                      <a:prstDash val="solid"/>
+                      <a:round/>
+                      <a:headEnd type="none" w="med" len="med"/>
+                      <a:tailEnd type="none" w="med" len="med"/>
+                    </a:lnB>
+                    <a:solidFill>
+                      <a:srgbClr val="FFFFFF"/>
+                    </a:solidFill>
+                  </a:tcPr>
+                </a:tc>
+                <a:tc>
+                  <a:txBody>
+                    <a:bodyPr/>
+                    <a:lstStyle/>
+                    <a:p>
+                      <a:pPr algn="l" indent="0" marL="0">
+                        <a:buNone/>
+                      </a:pPr>
+                      <a:r>
+                        <a:rPr lang="en-US" sz="1400" dirty="0">
+                          <a:solidFill>
+                            <a:srgbClr val="202124"/>
+                          </a:solidFill>
+                        </a:rPr>
+                        <a:t>Tapping 'Jump to Context' on candidate anchor reads ISO timestamp &amp; GPS coordinates (±4.0h, ≤1.0km)</a:t>
+                      </a:r>
+                      <a:endParaRPr lang="en-US" sz="1400" dirty="0"/>
+                    </a:p>
+                  </a:txBody>
+                  <a:tcPr marL="91440" marR="91440" marT="45720" marB="45720" anchor="ctr">
+                    <a:lnL w="12700" cap="flat" cmpd="sng" algn="ctr">
+                      <a:solidFill>
+                        <a:srgbClr val="DADCE0"/>
+                      </a:solidFill>
+                      <a:prstDash val="solid"/>
+                      <a:round/>
+                      <a:headEnd type="none" w="med" len="med"/>
+                      <a:tailEnd type="none" w="med" len="med"/>
+                    </a:lnL>
+                    <a:lnR w="12700" cap="flat" cmpd="sng" algn="ctr">
+                      <a:solidFill>
+                        <a:srgbClr val="DADCE0"/>
+                      </a:solidFill>
+                      <a:prstDash val="solid"/>
+                      <a:round/>
+                      <a:headEnd type="none" w="med" len="med"/>
+                      <a:tailEnd type="none" w="med" len="med"/>
+                    </a:lnR>
+                    <a:lnT w="12700" cap="flat" cmpd="sng" algn="ctr">
+                      <a:solidFill>
+                        <a:srgbClr val="DADCE0"/>
+                      </a:solidFill>
+                      <a:prstDash val="solid"/>
+                      <a:round/>
+                      <a:headEnd type="none" w="med" len="med"/>
+                      <a:tailEnd type="none" w="med" len="med"/>
+                    </a:lnT>
+                    <a:lnB w="12700" cap="flat" cmpd="sng" algn="ctr">
+                      <a:solidFill>
+                        <a:srgbClr val="DADCE0"/>
+                      </a:solidFill>
+                      <a:prstDash val="solid"/>
+                      <a:round/>
+                      <a:headEnd type="none" w="med" len="med"/>
+                      <a:tailEnd type="none" w="med" len="med"/>
+                    </a:lnB>
+                    <a:solidFill>
+                      <a:srgbClr val="FFFFFF"/>
+                    </a:solidFill>
+                  </a:tcPr>
+                </a:tc>
+                <a:tc>
+                  <a:txBody>
+                    <a:bodyPr/>
+                    <a:lstStyle/>
+                    <a:p>
+                      <a:pPr algn="l" indent="0" marL="0">
+                        <a:buNone/>
+                      </a:pPr>
+                      <a:r>
+                        <a:rPr lang="en-US" sz="1400" dirty="0">
+                          <a:solidFill>
+                            <a:srgbClr val="202124"/>
+                          </a:solidFill>
+                        </a:rPr>
+                        <a:t>&lt; 100 ms API Latency</a:t>
                       </a:r>
                       <a:endParaRPr lang="en-US" sz="1400" dirty="0"/>
                     </a:p>
@@ -16633,373 +16372,682 @@
                             <a:srgbClr val="202124"/>
                           </a:solidFill>
                         </a:rPr>
-                        <a:t>Concept C: Manual Tagging Prompts</a:t>
-                      </a:r>
-                      <a:endParaRPr lang="en-US" sz="1400" dirty="0"/>
-                    </a:p>
-                  </a:txBody>
-                  <a:tcPr marL="91440" marR="91440" marT="45720" marB="45720" anchor="ctr">
-                    <a:lnL w="12700" cap="flat" cmpd="sng" algn="ctr">
-                      <a:solidFill>
-                        <a:srgbClr val="DADCE0"/>
-                      </a:solidFill>
-                      <a:prstDash val="solid"/>
-                      <a:round/>
-                      <a:headEnd type="none" w="med" len="med"/>
-                      <a:tailEnd type="none" w="med" len="med"/>
-                    </a:lnL>
-                    <a:lnR w="12700" cap="flat" cmpd="sng" algn="ctr">
-                      <a:solidFill>
-                        <a:srgbClr val="DADCE0"/>
-                      </a:solidFill>
-                      <a:prstDash val="solid"/>
-                      <a:round/>
-                      <a:headEnd type="none" w="med" len="med"/>
-                      <a:tailEnd type="none" w="med" len="med"/>
-                    </a:lnR>
-                    <a:lnT w="12700" cap="flat" cmpd="sng" algn="ctr">
-                      <a:solidFill>
-                        <a:srgbClr val="DADCE0"/>
-                      </a:solidFill>
-                      <a:prstDash val="solid"/>
-                      <a:round/>
-                      <a:headEnd type="none" w="med" len="med"/>
-                      <a:tailEnd type="none" w="med" len="med"/>
-                    </a:lnT>
-                    <a:lnB w="12700" cap="flat" cmpd="sng" algn="ctr">
-                      <a:solidFill>
-                        <a:srgbClr val="DADCE0"/>
-                      </a:solidFill>
-                      <a:prstDash val="solid"/>
-                      <a:round/>
-                      <a:headEnd type="none" w="med" len="med"/>
-                      <a:tailEnd type="none" w="med" len="med"/>
-                    </a:lnB>
-                    <a:solidFill>
-                      <a:srgbClr val="FFFFFF"/>
-                    </a:solidFill>
-                  </a:tcPr>
-                </a:tc>
-                <a:tc>
-                  <a:txBody>
-                    <a:bodyPr/>
-                    <a:lstStyle/>
-                    <a:p>
-                      <a:pPr algn="l" indent="0" marL="0">
-                        <a:buNone/>
-                      </a:pPr>
-                      <a:r>
-                        <a:rPr lang="en-US" sz="1400" dirty="0">
-                          <a:solidFill>
-                            <a:srgbClr val="202124"/>
-                          </a:solidFill>
-                        </a:rPr>
-                        <a:t>4.5 / 10</a:t>
-                      </a:r>
-                      <a:endParaRPr lang="en-US" sz="1400" dirty="0"/>
-                    </a:p>
-                  </a:txBody>
-                  <a:tcPr marL="91440" marR="91440" marT="45720" marB="45720" anchor="ctr">
-                    <a:lnL w="12700" cap="flat" cmpd="sng" algn="ctr">
-                      <a:solidFill>
-                        <a:srgbClr val="DADCE0"/>
-                      </a:solidFill>
-                      <a:prstDash val="solid"/>
-                      <a:round/>
-                      <a:headEnd type="none" w="med" len="med"/>
-                      <a:tailEnd type="none" w="med" len="med"/>
-                    </a:lnL>
-                    <a:lnR w="12700" cap="flat" cmpd="sng" algn="ctr">
-                      <a:solidFill>
-                        <a:srgbClr val="DADCE0"/>
-                      </a:solidFill>
-                      <a:prstDash val="solid"/>
-                      <a:round/>
-                      <a:headEnd type="none" w="med" len="med"/>
-                      <a:tailEnd type="none" w="med" len="med"/>
-                    </a:lnR>
-                    <a:lnT w="12700" cap="flat" cmpd="sng" algn="ctr">
-                      <a:solidFill>
-                        <a:srgbClr val="DADCE0"/>
-                      </a:solidFill>
-                      <a:prstDash val="solid"/>
-                      <a:round/>
-                      <a:headEnd type="none" w="med" len="med"/>
-                      <a:tailEnd type="none" w="med" len="med"/>
-                    </a:lnT>
-                    <a:lnB w="12700" cap="flat" cmpd="sng" algn="ctr">
-                      <a:solidFill>
-                        <a:srgbClr val="DADCE0"/>
-                      </a:solidFill>
-                      <a:prstDash val="solid"/>
-                      <a:round/>
-                      <a:headEnd type="none" w="med" len="med"/>
-                      <a:tailEnd type="none" w="med" len="med"/>
-                    </a:lnB>
-                    <a:solidFill>
-                      <a:srgbClr val="FFFFFF"/>
-                    </a:solidFill>
-                  </a:tcPr>
-                </a:tc>
-                <a:tc>
-                  <a:txBody>
-                    <a:bodyPr/>
-                    <a:lstStyle/>
-                    <a:p>
-                      <a:pPr algn="l" indent="0" marL="0">
-                        <a:buNone/>
-                      </a:pPr>
-                      <a:r>
-                        <a:rPr lang="en-US" sz="1400" dirty="0">
-                          <a:solidFill>
-                            <a:srgbClr val="202124"/>
-                          </a:solidFill>
-                        </a:rPr>
-                        <a:t>3.8 / 10</a:t>
-                      </a:r>
-                      <a:endParaRPr lang="en-US" sz="1400" dirty="0"/>
-                    </a:p>
-                  </a:txBody>
-                  <a:tcPr marL="91440" marR="91440" marT="45720" marB="45720" anchor="ctr">
-                    <a:lnL w="12700" cap="flat" cmpd="sng" algn="ctr">
-                      <a:solidFill>
-                        <a:srgbClr val="DADCE0"/>
-                      </a:solidFill>
-                      <a:prstDash val="solid"/>
-                      <a:round/>
-                      <a:headEnd type="none" w="med" len="med"/>
-                      <a:tailEnd type="none" w="med" len="med"/>
-                    </a:lnL>
-                    <a:lnR w="12700" cap="flat" cmpd="sng" algn="ctr">
-                      <a:solidFill>
-                        <a:srgbClr val="DADCE0"/>
-                      </a:solidFill>
-                      <a:prstDash val="solid"/>
-                      <a:round/>
-                      <a:headEnd type="none" w="med" len="med"/>
-                      <a:tailEnd type="none" w="med" len="med"/>
-                    </a:lnR>
-                    <a:lnT w="12700" cap="flat" cmpd="sng" algn="ctr">
-                      <a:solidFill>
-                        <a:srgbClr val="DADCE0"/>
-                      </a:solidFill>
-                      <a:prstDash val="solid"/>
-                      <a:round/>
-                      <a:headEnd type="none" w="med" len="med"/>
-                      <a:tailEnd type="none" w="med" len="med"/>
-                    </a:lnT>
-                    <a:lnB w="12700" cap="flat" cmpd="sng" algn="ctr">
-                      <a:solidFill>
-                        <a:srgbClr val="DADCE0"/>
-                      </a:solidFill>
-                      <a:prstDash val="solid"/>
-                      <a:round/>
-                      <a:headEnd type="none" w="med" len="med"/>
-                      <a:tailEnd type="none" w="med" len="med"/>
-                    </a:lnB>
-                    <a:solidFill>
-                      <a:srgbClr val="FFFFFF"/>
-                    </a:solidFill>
-                  </a:tcPr>
-                </a:tc>
-                <a:tc>
-                  <a:txBody>
-                    <a:bodyPr/>
-                    <a:lstStyle/>
-                    <a:p>
-                      <a:pPr algn="l" indent="0" marL="0">
-                        <a:buNone/>
-                      </a:pPr>
-                      <a:r>
-                        <a:rPr lang="en-US" sz="1400" dirty="0">
-                          <a:solidFill>
-                            <a:srgbClr val="202124"/>
-                          </a:solidFill>
-                        </a:rPr>
-                        <a:t>0 ms</a:t>
-                      </a:r>
-                      <a:endParaRPr lang="en-US" sz="1400" dirty="0"/>
-                    </a:p>
-                  </a:txBody>
-                  <a:tcPr marL="91440" marR="91440" marT="45720" marB="45720" anchor="ctr">
-                    <a:lnL w="12700" cap="flat" cmpd="sng" algn="ctr">
-                      <a:solidFill>
-                        <a:srgbClr val="DADCE0"/>
-                      </a:solidFill>
-                      <a:prstDash val="solid"/>
-                      <a:round/>
-                      <a:headEnd type="none" w="med" len="med"/>
-                      <a:tailEnd type="none" w="med" len="med"/>
-                    </a:lnL>
-                    <a:lnR w="12700" cap="flat" cmpd="sng" algn="ctr">
-                      <a:solidFill>
-                        <a:srgbClr val="DADCE0"/>
-                      </a:solidFill>
-                      <a:prstDash val="solid"/>
-                      <a:round/>
-                      <a:headEnd type="none" w="med" len="med"/>
-                      <a:tailEnd type="none" w="med" len="med"/>
-                    </a:lnR>
-                    <a:lnT w="12700" cap="flat" cmpd="sng" algn="ctr">
-                      <a:solidFill>
-                        <a:srgbClr val="DADCE0"/>
-                      </a:solidFill>
-                      <a:prstDash val="solid"/>
-                      <a:round/>
-                      <a:headEnd type="none" w="med" len="med"/>
-                      <a:tailEnd type="none" w="med" len="med"/>
-                    </a:lnT>
-                    <a:lnB w="12700" cap="flat" cmpd="sng" algn="ctr">
-                      <a:solidFill>
-                        <a:srgbClr val="DADCE0"/>
-                      </a:solidFill>
-                      <a:prstDash val="solid"/>
-                      <a:round/>
-                      <a:headEnd type="none" w="med" len="med"/>
-                      <a:tailEnd type="none" w="med" len="med"/>
-                    </a:lnB>
-                    <a:solidFill>
-                      <a:srgbClr val="FFFFFF"/>
-                    </a:solidFill>
-                  </a:tcPr>
-                </a:tc>
-                <a:tc>
-                  <a:txBody>
-                    <a:bodyPr/>
-                    <a:lstStyle/>
-                    <a:p>
-                      <a:pPr algn="l" indent="0" marL="0">
-                        <a:buNone/>
-                      </a:pPr>
-                      <a:r>
-                        <a:rPr lang="en-US" sz="1400" dirty="0">
-                          <a:solidFill>
-                            <a:srgbClr val="202124"/>
-                          </a:solidFill>
-                        </a:rPr>
-                        <a:t>Extreme Effort</a:t>
-                      </a:r>
-                      <a:endParaRPr lang="en-US" sz="1400" dirty="0"/>
-                    </a:p>
-                  </a:txBody>
-                  <a:tcPr marL="91440" marR="91440" marT="45720" marB="45720" anchor="ctr">
-                    <a:lnL w="12700" cap="flat" cmpd="sng" algn="ctr">
-                      <a:solidFill>
-                        <a:srgbClr val="DADCE0"/>
-                      </a:solidFill>
-                      <a:prstDash val="solid"/>
-                      <a:round/>
-                      <a:headEnd type="none" w="med" len="med"/>
-                      <a:tailEnd type="none" w="med" len="med"/>
-                    </a:lnL>
-                    <a:lnR w="12700" cap="flat" cmpd="sng" algn="ctr">
-                      <a:solidFill>
-                        <a:srgbClr val="DADCE0"/>
-                      </a:solidFill>
-                      <a:prstDash val="solid"/>
-                      <a:round/>
-                      <a:headEnd type="none" w="med" len="med"/>
-                      <a:tailEnd type="none" w="med" len="med"/>
-                    </a:lnR>
-                    <a:lnT w="12700" cap="flat" cmpd="sng" algn="ctr">
-                      <a:solidFill>
-                        <a:srgbClr val="DADCE0"/>
-                      </a:solidFill>
-                      <a:prstDash val="solid"/>
-                      <a:round/>
-                      <a:headEnd type="none" w="med" len="med"/>
-                      <a:tailEnd type="none" w="med" len="med"/>
-                    </a:lnT>
-                    <a:lnB w="12700" cap="flat" cmpd="sng" algn="ctr">
-                      <a:solidFill>
-                        <a:srgbClr val="DADCE0"/>
-                      </a:solidFill>
-                      <a:prstDash val="solid"/>
-                      <a:round/>
-                      <a:headEnd type="none" w="med" len="med"/>
-                      <a:tailEnd type="none" w="med" len="med"/>
-                    </a:lnB>
-                    <a:solidFill>
-                      <a:srgbClr val="FFFFFF"/>
-                    </a:solidFill>
-                  </a:tcPr>
-                </a:tc>
-                <a:tc>
-                  <a:txBody>
-                    <a:bodyPr/>
-                    <a:lstStyle/>
-                    <a:p>
-                      <a:pPr algn="l" indent="0" marL="0">
-                        <a:buNone/>
-                      </a:pPr>
-                      <a:r>
-                        <a:rPr lang="en-US" sz="1400" dirty="0">
-                          <a:solidFill>
-                            <a:srgbClr val="202124"/>
-                          </a:solidFill>
-                        </a:rPr>
-                        <a:t>4.10 / 10</a:t>
-                      </a:r>
-                      <a:endParaRPr lang="en-US" sz="1400" dirty="0"/>
-                    </a:p>
-                  </a:txBody>
-                  <a:tcPr marL="91440" marR="91440" marT="45720" marB="45720" anchor="ctr">
-                    <a:lnL w="12700" cap="flat" cmpd="sng" algn="ctr">
-                      <a:solidFill>
-                        <a:srgbClr val="DADCE0"/>
-                      </a:solidFill>
-                      <a:prstDash val="solid"/>
-                      <a:round/>
-                      <a:headEnd type="none" w="med" len="med"/>
-                      <a:tailEnd type="none" w="med" len="med"/>
-                    </a:lnL>
-                    <a:lnR w="12700" cap="flat" cmpd="sng" algn="ctr">
-                      <a:solidFill>
-                        <a:srgbClr val="DADCE0"/>
-                      </a:solidFill>
-                      <a:prstDash val="solid"/>
-                      <a:round/>
-                      <a:headEnd type="none" w="med" len="med"/>
-                      <a:tailEnd type="none" w="med" len="med"/>
-                    </a:lnR>
-                    <a:lnT w="12700" cap="flat" cmpd="sng" algn="ctr">
-                      <a:solidFill>
-                        <a:srgbClr val="DADCE0"/>
-                      </a:solidFill>
-                      <a:prstDash val="solid"/>
-                      <a:round/>
-                      <a:headEnd type="none" w="med" len="med"/>
-                      <a:tailEnd type="none" w="med" len="med"/>
-                    </a:lnT>
-                    <a:lnB w="12700" cap="flat" cmpd="sng" algn="ctr">
-                      <a:solidFill>
-                        <a:srgbClr val="DADCE0"/>
-                      </a:solidFill>
-                      <a:prstDash val="solid"/>
-                      <a:round/>
-                      <a:headEnd type="none" w="med" len="med"/>
-                      <a:tailEnd type="none" w="med" len="med"/>
-                    </a:lnB>
-                    <a:solidFill>
-                      <a:srgbClr val="FFFFFF"/>
-                    </a:solidFill>
-                  </a:tcPr>
-                </a:tc>
-                <a:tc>
-                  <a:txBody>
-                    <a:bodyPr/>
-                    <a:lstStyle/>
-                    <a:p>
-                      <a:pPr algn="l" indent="0" marL="0">
-                        <a:buNone/>
-                      </a:pPr>
-                      <a:r>
-                        <a:rPr lang="en-US" sz="1400" dirty="0">
-                          <a:solidFill>
-                            <a:srgbClr val="202124"/>
-                          </a:solidFill>
-                        </a:rPr>
-                        <a:t>REJECTED (Low Adoption)</a:t>
+                        <a:t>Concept A Evaluation (SELECTED)</a:t>
+                      </a:r>
+                      <a:endParaRPr lang="en-US" sz="1400" dirty="0"/>
+                    </a:p>
+                  </a:txBody>
+                  <a:tcPr marL="91440" marR="91440" marT="45720" marB="45720" anchor="ctr">
+                    <a:lnL w="12700" cap="flat" cmpd="sng" algn="ctr">
+                      <a:solidFill>
+                        <a:srgbClr val="DADCE0"/>
+                      </a:solidFill>
+                      <a:prstDash val="solid"/>
+                      <a:round/>
+                      <a:headEnd type="none" w="med" len="med"/>
+                      <a:tailEnd type="none" w="med" len="med"/>
+                    </a:lnL>
+                    <a:lnR w="12700" cap="flat" cmpd="sng" algn="ctr">
+                      <a:solidFill>
+                        <a:srgbClr val="DADCE0"/>
+                      </a:solidFill>
+                      <a:prstDash val="solid"/>
+                      <a:round/>
+                      <a:headEnd type="none" w="med" len="med"/>
+                      <a:tailEnd type="none" w="med" len="med"/>
+                    </a:lnR>
+                    <a:lnT w="12700" cap="flat" cmpd="sng" algn="ctr">
+                      <a:solidFill>
+                        <a:srgbClr val="DADCE0"/>
+                      </a:solidFill>
+                      <a:prstDash val="solid"/>
+                      <a:round/>
+                      <a:headEnd type="none" w="med" len="med"/>
+                      <a:tailEnd type="none" w="med" len="med"/>
+                    </a:lnT>
+                    <a:lnB w="12700" cap="flat" cmpd="sng" algn="ctr">
+                      <a:solidFill>
+                        <a:srgbClr val="DADCE0"/>
+                      </a:solidFill>
+                      <a:prstDash val="solid"/>
+                      <a:round/>
+                      <a:headEnd type="none" w="med" len="med"/>
+                      <a:tailEnd type="none" w="med" len="med"/>
+                    </a:lnB>
+                    <a:solidFill>
+                      <a:srgbClr val="FFFFFF"/>
+                    </a:solidFill>
+                  </a:tcPr>
+                </a:tc>
+                <a:tc>
+                  <a:txBody>
+                    <a:bodyPr/>
+                    <a:lstStyle/>
+                    <a:p>
+                      <a:pPr algn="l" indent="0" marL="0">
+                        <a:buNone/>
+                      </a:pPr>
+                      <a:r>
+                        <a:rPr lang="en-US" sz="1400" dirty="0">
+                          <a:solidFill>
+                            <a:srgbClr val="202124"/>
+                          </a:solidFill>
+                        </a:rPr>
+                        <a:t>Contextual Jump &amp; Expand</a:t>
+                      </a:r>
+                      <a:endParaRPr lang="en-US" sz="1400" dirty="0"/>
+                    </a:p>
+                  </a:txBody>
+                  <a:tcPr marL="91440" marR="91440" marT="45720" marB="45720" anchor="ctr">
+                    <a:lnL w="12700" cap="flat" cmpd="sng" algn="ctr">
+                      <a:solidFill>
+                        <a:srgbClr val="DADCE0"/>
+                      </a:solidFill>
+                      <a:prstDash val="solid"/>
+                      <a:round/>
+                      <a:headEnd type="none" w="med" len="med"/>
+                      <a:tailEnd type="none" w="med" len="med"/>
+                    </a:lnL>
+                    <a:lnR w="12700" cap="flat" cmpd="sng" algn="ctr">
+                      <a:solidFill>
+                        <a:srgbClr val="DADCE0"/>
+                      </a:solidFill>
+                      <a:prstDash val="solid"/>
+                      <a:round/>
+                      <a:headEnd type="none" w="med" len="med"/>
+                      <a:tailEnd type="none" w="med" len="med"/>
+                    </a:lnR>
+                    <a:lnT w="12700" cap="flat" cmpd="sng" algn="ctr">
+                      <a:solidFill>
+                        <a:srgbClr val="DADCE0"/>
+                      </a:solidFill>
+                      <a:prstDash val="solid"/>
+                      <a:round/>
+                      <a:headEnd type="none" w="med" len="med"/>
+                      <a:tailEnd type="none" w="med" len="med"/>
+                    </a:lnT>
+                    <a:lnB w="12700" cap="flat" cmpd="sng" algn="ctr">
+                      <a:solidFill>
+                        <a:srgbClr val="DADCE0"/>
+                      </a:solidFill>
+                      <a:prstDash val="solid"/>
+                      <a:round/>
+                      <a:headEnd type="none" w="med" len="med"/>
+                      <a:tailEnd type="none" w="med" len="med"/>
+                    </a:lnB>
+                    <a:solidFill>
+                      <a:srgbClr val="FFFFFF"/>
+                    </a:solidFill>
+                  </a:tcPr>
+                </a:tc>
+                <a:tc>
+                  <a:txBody>
+                    <a:bodyPr/>
+                    <a:lstStyle/>
+                    <a:p>
+                      <a:pPr algn="l" indent="0" marL="0">
+                        <a:buNone/>
+                      </a:pPr>
+                      <a:r>
+                        <a:rPr lang="en-US" sz="1400" dirty="0">
+                          <a:solidFill>
+                            <a:srgbClr val="202124"/>
+                          </a:solidFill>
+                        </a:rPr>
+                        <a:t>Surfaces recognizable visual anchors as visual bridge to un-tagged surrounding target media</a:t>
+                      </a:r>
+                      <a:endParaRPr lang="en-US" sz="1400" dirty="0"/>
+                    </a:p>
+                  </a:txBody>
+                  <a:tcPr marL="91440" marR="91440" marT="45720" marB="45720" anchor="ctr">
+                    <a:lnL w="12700" cap="flat" cmpd="sng" algn="ctr">
+                      <a:solidFill>
+                        <a:srgbClr val="DADCE0"/>
+                      </a:solidFill>
+                      <a:prstDash val="solid"/>
+                      <a:round/>
+                      <a:headEnd type="none" w="med" len="med"/>
+                      <a:tailEnd type="none" w="med" len="med"/>
+                    </a:lnL>
+                    <a:lnR w="12700" cap="flat" cmpd="sng" algn="ctr">
+                      <a:solidFill>
+                        <a:srgbClr val="DADCE0"/>
+                      </a:solidFill>
+                      <a:prstDash val="solid"/>
+                      <a:round/>
+                      <a:headEnd type="none" w="med" len="med"/>
+                      <a:tailEnd type="none" w="med" len="med"/>
+                    </a:lnR>
+                    <a:lnT w="12700" cap="flat" cmpd="sng" algn="ctr">
+                      <a:solidFill>
+                        <a:srgbClr val="DADCE0"/>
+                      </a:solidFill>
+                      <a:prstDash val="solid"/>
+                      <a:round/>
+                      <a:headEnd type="none" w="med" len="med"/>
+                      <a:tailEnd type="none" w="med" len="med"/>
+                    </a:lnT>
+                    <a:lnB w="12700" cap="flat" cmpd="sng" algn="ctr">
+                      <a:solidFill>
+                        <a:srgbClr val="DADCE0"/>
+                      </a:solidFill>
+                      <a:prstDash val="solid"/>
+                      <a:round/>
+                      <a:headEnd type="none" w="med" len="med"/>
+                      <a:tailEnd type="none" w="med" len="med"/>
+                    </a:lnB>
+                    <a:solidFill>
+                      <a:srgbClr val="FFFFFF"/>
+                    </a:solidFill>
+                  </a:tcPr>
+                </a:tc>
+                <a:tc>
+                  <a:txBody>
+                    <a:bodyPr/>
+                    <a:lstStyle/>
+                    <a:p>
+                      <a:pPr algn="l" indent="0" marL="0">
+                        <a:buNone/>
+                      </a:pPr>
+                      <a:r>
+                        <a:rPr lang="en-US" sz="1400" dirty="0">
+                          <a:solidFill>
+                            <a:srgbClr val="202124"/>
+                          </a:solidFill>
+                        </a:rPr>
+                        <a:t>8.93 / 10 (SELECTED)</a:t>
+                      </a:r>
+                      <a:endParaRPr lang="en-US" sz="1400" dirty="0"/>
+                    </a:p>
+                  </a:txBody>
+                  <a:tcPr marL="91440" marR="91440" marT="45720" marB="45720" anchor="ctr">
+                    <a:lnL w="12700" cap="flat" cmpd="sng" algn="ctr">
+                      <a:solidFill>
+                        <a:srgbClr val="DADCE0"/>
+                      </a:solidFill>
+                      <a:prstDash val="solid"/>
+                      <a:round/>
+                      <a:headEnd type="none" w="med" len="med"/>
+                      <a:tailEnd type="none" w="med" len="med"/>
+                    </a:lnL>
+                    <a:lnR w="12700" cap="flat" cmpd="sng" algn="ctr">
+                      <a:solidFill>
+                        <a:srgbClr val="DADCE0"/>
+                      </a:solidFill>
+                      <a:prstDash val="solid"/>
+                      <a:round/>
+                      <a:headEnd type="none" w="med" len="med"/>
+                      <a:tailEnd type="none" w="med" len="med"/>
+                    </a:lnR>
+                    <a:lnT w="12700" cap="flat" cmpd="sng" algn="ctr">
+                      <a:solidFill>
+                        <a:srgbClr val="DADCE0"/>
+                      </a:solidFill>
+                      <a:prstDash val="solid"/>
+                      <a:round/>
+                      <a:headEnd type="none" w="med" len="med"/>
+                      <a:tailEnd type="none" w="med" len="med"/>
+                    </a:lnT>
+                    <a:lnB w="12700" cap="flat" cmpd="sng" algn="ctr">
+                      <a:solidFill>
+                        <a:srgbClr val="DADCE0"/>
+                      </a:solidFill>
+                      <a:prstDash val="solid"/>
+                      <a:round/>
+                      <a:headEnd type="none" w="med" len="med"/>
+                      <a:tailEnd type="none" w="med" len="med"/>
+                    </a:lnB>
+                    <a:solidFill>
+                      <a:srgbClr val="FFFFFF"/>
+                    </a:solidFill>
+                  </a:tcPr>
+                </a:tc>
+              </a:tr>
+              <a:tr h="0">
+                <a:tc>
+                  <a:txBody>
+                    <a:bodyPr/>
+                    <a:lstStyle/>
+                    <a:p>
+                      <a:pPr algn="l" indent="0" marL="0">
+                        <a:buNone/>
+                      </a:pPr>
+                      <a:r>
+                        <a:rPr lang="en-US" sz="1400" dirty="0">
+                          <a:solidFill>
+                            <a:srgbClr val="202124"/>
+                          </a:solidFill>
+                        </a:rPr>
+                        <a:t>Concept B Evaluation (REJECTED)</a:t>
+                      </a:r>
+                      <a:endParaRPr lang="en-US" sz="1400" dirty="0"/>
+                    </a:p>
+                  </a:txBody>
+                  <a:tcPr marL="91440" marR="91440" marT="45720" marB="45720" anchor="ctr">
+                    <a:lnL w="12700" cap="flat" cmpd="sng" algn="ctr">
+                      <a:solidFill>
+                        <a:srgbClr val="DADCE0"/>
+                      </a:solidFill>
+                      <a:prstDash val="solid"/>
+                      <a:round/>
+                      <a:headEnd type="none" w="med" len="med"/>
+                      <a:tailEnd type="none" w="med" len="med"/>
+                    </a:lnL>
+                    <a:lnR w="12700" cap="flat" cmpd="sng" algn="ctr">
+                      <a:solidFill>
+                        <a:srgbClr val="DADCE0"/>
+                      </a:solidFill>
+                      <a:prstDash val="solid"/>
+                      <a:round/>
+                      <a:headEnd type="none" w="med" len="med"/>
+                      <a:tailEnd type="none" w="med" len="med"/>
+                    </a:lnR>
+                    <a:lnT w="12700" cap="flat" cmpd="sng" algn="ctr">
+                      <a:solidFill>
+                        <a:srgbClr val="DADCE0"/>
+                      </a:solidFill>
+                      <a:prstDash val="solid"/>
+                      <a:round/>
+                      <a:headEnd type="none" w="med" len="med"/>
+                      <a:tailEnd type="none" w="med" len="med"/>
+                    </a:lnT>
+                    <a:lnB w="12700" cap="flat" cmpd="sng" algn="ctr">
+                      <a:solidFill>
+                        <a:srgbClr val="DADCE0"/>
+                      </a:solidFill>
+                      <a:prstDash val="solid"/>
+                      <a:round/>
+                      <a:headEnd type="none" w="med" len="med"/>
+                      <a:tailEnd type="none" w="med" len="med"/>
+                    </a:lnB>
+                    <a:solidFill>
+                      <a:srgbClr val="FFFFFF"/>
+                    </a:solidFill>
+                  </a:tcPr>
+                </a:tc>
+                <a:tc>
+                  <a:txBody>
+                    <a:bodyPr/>
+                    <a:lstStyle/>
+                    <a:p>
+                      <a:pPr algn="l" indent="0" marL="0">
+                        <a:buNone/>
+                      </a:pPr>
+                      <a:r>
+                        <a:rPr lang="en-US" sz="1400" dirty="0">
+                          <a:solidFill>
+                            <a:srgbClr val="202124"/>
+                          </a:solidFill>
+                        </a:rPr>
+                        <a:t>Conversational Ask Photos</a:t>
+                      </a:r>
+                      <a:endParaRPr lang="en-US" sz="1400" dirty="0"/>
+                    </a:p>
+                  </a:txBody>
+                  <a:tcPr marL="91440" marR="91440" marT="45720" marB="45720" anchor="ctr">
+                    <a:lnL w="12700" cap="flat" cmpd="sng" algn="ctr">
+                      <a:solidFill>
+                        <a:srgbClr val="DADCE0"/>
+                      </a:solidFill>
+                      <a:prstDash val="solid"/>
+                      <a:round/>
+                      <a:headEnd type="none" w="med" len="med"/>
+                      <a:tailEnd type="none" w="med" len="med"/>
+                    </a:lnL>
+                    <a:lnR w="12700" cap="flat" cmpd="sng" algn="ctr">
+                      <a:solidFill>
+                        <a:srgbClr val="DADCE0"/>
+                      </a:solidFill>
+                      <a:prstDash val="solid"/>
+                      <a:round/>
+                      <a:headEnd type="none" w="med" len="med"/>
+                      <a:tailEnd type="none" w="med" len="med"/>
+                    </a:lnR>
+                    <a:lnT w="12700" cap="flat" cmpd="sng" algn="ctr">
+                      <a:solidFill>
+                        <a:srgbClr val="DADCE0"/>
+                      </a:solidFill>
+                      <a:prstDash val="solid"/>
+                      <a:round/>
+                      <a:headEnd type="none" w="med" len="med"/>
+                      <a:tailEnd type="none" w="med" len="med"/>
+                    </a:lnT>
+                    <a:lnB w="12700" cap="flat" cmpd="sng" algn="ctr">
+                      <a:solidFill>
+                        <a:srgbClr val="DADCE0"/>
+                      </a:solidFill>
+                      <a:prstDash val="solid"/>
+                      <a:round/>
+                      <a:headEnd type="none" w="med" len="med"/>
+                      <a:tailEnd type="none" w="med" len="med"/>
+                    </a:lnB>
+                    <a:solidFill>
+                      <a:srgbClr val="FFFFFF"/>
+                    </a:solidFill>
+                  </a:tcPr>
+                </a:tc>
+                <a:tc>
+                  <a:txBody>
+                    <a:bodyPr/>
+                    <a:lstStyle/>
+                    <a:p>
+                      <a:pPr algn="l" indent="0" marL="0">
+                        <a:buNone/>
+                      </a:pPr>
+                      <a:r>
+                        <a:rPr lang="en-US" sz="1400" dirty="0">
+                          <a:solidFill>
+                            <a:srgbClr val="202124"/>
+                          </a:solidFill>
+                        </a:rPr>
+                        <a:t>Multi-turn LLM chat retrieval faces 4.2s latency, high API cost, and multi-step turn friction</a:t>
+                      </a:r>
+                      <a:endParaRPr lang="en-US" sz="1400" dirty="0"/>
+                    </a:p>
+                  </a:txBody>
+                  <a:tcPr marL="91440" marR="91440" marT="45720" marB="45720" anchor="ctr">
+                    <a:lnL w="12700" cap="flat" cmpd="sng" algn="ctr">
+                      <a:solidFill>
+                        <a:srgbClr val="DADCE0"/>
+                      </a:solidFill>
+                      <a:prstDash val="solid"/>
+                      <a:round/>
+                      <a:headEnd type="none" w="med" len="med"/>
+                      <a:tailEnd type="none" w="med" len="med"/>
+                    </a:lnL>
+                    <a:lnR w="12700" cap="flat" cmpd="sng" algn="ctr">
+                      <a:solidFill>
+                        <a:srgbClr val="DADCE0"/>
+                      </a:solidFill>
+                      <a:prstDash val="solid"/>
+                      <a:round/>
+                      <a:headEnd type="none" w="med" len="med"/>
+                      <a:tailEnd type="none" w="med" len="med"/>
+                    </a:lnR>
+                    <a:lnT w="12700" cap="flat" cmpd="sng" algn="ctr">
+                      <a:solidFill>
+                        <a:srgbClr val="DADCE0"/>
+                      </a:solidFill>
+                      <a:prstDash val="solid"/>
+                      <a:round/>
+                      <a:headEnd type="none" w="med" len="med"/>
+                      <a:tailEnd type="none" w="med" len="med"/>
+                    </a:lnT>
+                    <a:lnB w="12700" cap="flat" cmpd="sng" algn="ctr">
+                      <a:solidFill>
+                        <a:srgbClr val="DADCE0"/>
+                      </a:solidFill>
+                      <a:prstDash val="solid"/>
+                      <a:round/>
+                      <a:headEnd type="none" w="med" len="med"/>
+                      <a:tailEnd type="none" w="med" len="med"/>
+                    </a:lnB>
+                    <a:solidFill>
+                      <a:srgbClr val="FFFFFF"/>
+                    </a:solidFill>
+                  </a:tcPr>
+                </a:tc>
+                <a:tc>
+                  <a:txBody>
+                    <a:bodyPr/>
+                    <a:lstStyle/>
+                    <a:p>
+                      <a:pPr algn="l" indent="0" marL="0">
+                        <a:buNone/>
+                      </a:pPr>
+                      <a:r>
+                        <a:rPr lang="en-US" sz="1400" dirty="0">
+                          <a:solidFill>
+                            <a:srgbClr val="202124"/>
+                          </a:solidFill>
+                        </a:rPr>
+                        <a:t>6.40 / 10 (REJECTED)</a:t>
+                      </a:r>
+                      <a:endParaRPr lang="en-US" sz="1400" dirty="0"/>
+                    </a:p>
+                  </a:txBody>
+                  <a:tcPr marL="91440" marR="91440" marT="45720" marB="45720" anchor="ctr">
+                    <a:lnL w="12700" cap="flat" cmpd="sng" algn="ctr">
+                      <a:solidFill>
+                        <a:srgbClr val="DADCE0"/>
+                      </a:solidFill>
+                      <a:prstDash val="solid"/>
+                      <a:round/>
+                      <a:headEnd type="none" w="med" len="med"/>
+                      <a:tailEnd type="none" w="med" len="med"/>
+                    </a:lnL>
+                    <a:lnR w="12700" cap="flat" cmpd="sng" algn="ctr">
+                      <a:solidFill>
+                        <a:srgbClr val="DADCE0"/>
+                      </a:solidFill>
+                      <a:prstDash val="solid"/>
+                      <a:round/>
+                      <a:headEnd type="none" w="med" len="med"/>
+                      <a:tailEnd type="none" w="med" len="med"/>
+                    </a:lnR>
+                    <a:lnT w="12700" cap="flat" cmpd="sng" algn="ctr">
+                      <a:solidFill>
+                        <a:srgbClr val="DADCE0"/>
+                      </a:solidFill>
+                      <a:prstDash val="solid"/>
+                      <a:round/>
+                      <a:headEnd type="none" w="med" len="med"/>
+                      <a:tailEnd type="none" w="med" len="med"/>
+                    </a:lnT>
+                    <a:lnB w="12700" cap="flat" cmpd="sng" algn="ctr">
+                      <a:solidFill>
+                        <a:srgbClr val="DADCE0"/>
+                      </a:solidFill>
+                      <a:prstDash val="solid"/>
+                      <a:round/>
+                      <a:headEnd type="none" w="med" len="med"/>
+                      <a:tailEnd type="none" w="med" len="med"/>
+                    </a:lnB>
+                    <a:solidFill>
+                      <a:srgbClr val="FFFFFF"/>
+                    </a:solidFill>
+                  </a:tcPr>
+                </a:tc>
+              </a:tr>
+              <a:tr h="0">
+                <a:tc>
+                  <a:txBody>
+                    <a:bodyPr/>
+                    <a:lstStyle/>
+                    <a:p>
+                      <a:pPr algn="l" indent="0" marL="0">
+                        <a:buNone/>
+                      </a:pPr>
+                      <a:r>
+                        <a:rPr lang="en-US" sz="1400" dirty="0">
+                          <a:solidFill>
+                            <a:srgbClr val="202124"/>
+                          </a:solidFill>
+                        </a:rPr>
+                        <a:t>Concept C Evaluation (REJECTED)</a:t>
+                      </a:r>
+                      <a:endParaRPr lang="en-US" sz="1400" dirty="0"/>
+                    </a:p>
+                  </a:txBody>
+                  <a:tcPr marL="91440" marR="91440" marT="45720" marB="45720" anchor="ctr">
+                    <a:lnL w="12700" cap="flat" cmpd="sng" algn="ctr">
+                      <a:solidFill>
+                        <a:srgbClr val="DADCE0"/>
+                      </a:solidFill>
+                      <a:prstDash val="solid"/>
+                      <a:round/>
+                      <a:headEnd type="none" w="med" len="med"/>
+                      <a:tailEnd type="none" w="med" len="med"/>
+                    </a:lnL>
+                    <a:lnR w="12700" cap="flat" cmpd="sng" algn="ctr">
+                      <a:solidFill>
+                        <a:srgbClr val="DADCE0"/>
+                      </a:solidFill>
+                      <a:prstDash val="solid"/>
+                      <a:round/>
+                      <a:headEnd type="none" w="med" len="med"/>
+                      <a:tailEnd type="none" w="med" len="med"/>
+                    </a:lnR>
+                    <a:lnT w="12700" cap="flat" cmpd="sng" algn="ctr">
+                      <a:solidFill>
+                        <a:srgbClr val="DADCE0"/>
+                      </a:solidFill>
+                      <a:prstDash val="solid"/>
+                      <a:round/>
+                      <a:headEnd type="none" w="med" len="med"/>
+                      <a:tailEnd type="none" w="med" len="med"/>
+                    </a:lnT>
+                    <a:lnB w="12700" cap="flat" cmpd="sng" algn="ctr">
+                      <a:solidFill>
+                        <a:srgbClr val="DADCE0"/>
+                      </a:solidFill>
+                      <a:prstDash val="solid"/>
+                      <a:round/>
+                      <a:headEnd type="none" w="med" len="med"/>
+                      <a:tailEnd type="none" w="med" len="med"/>
+                    </a:lnB>
+                    <a:solidFill>
+                      <a:srgbClr val="FFFFFF"/>
+                    </a:solidFill>
+                  </a:tcPr>
+                </a:tc>
+                <a:tc>
+                  <a:txBody>
+                    <a:bodyPr/>
+                    <a:lstStyle/>
+                    <a:p>
+                      <a:pPr algn="l" indent="0" marL="0">
+                        <a:buNone/>
+                      </a:pPr>
+                      <a:r>
+                        <a:rPr lang="en-US" sz="1400" dirty="0">
+                          <a:solidFill>
+                            <a:srgbClr val="202124"/>
+                          </a:solidFill>
+                        </a:rPr>
+                        <a:t>Manual Tagging Prompts</a:t>
+                      </a:r>
+                      <a:endParaRPr lang="en-US" sz="1400" dirty="0"/>
+                    </a:p>
+                  </a:txBody>
+                  <a:tcPr marL="91440" marR="91440" marT="45720" marB="45720" anchor="ctr">
+                    <a:lnL w="12700" cap="flat" cmpd="sng" algn="ctr">
+                      <a:solidFill>
+                        <a:srgbClr val="DADCE0"/>
+                      </a:solidFill>
+                      <a:prstDash val="solid"/>
+                      <a:round/>
+                      <a:headEnd type="none" w="med" len="med"/>
+                      <a:tailEnd type="none" w="med" len="med"/>
+                    </a:lnL>
+                    <a:lnR w="12700" cap="flat" cmpd="sng" algn="ctr">
+                      <a:solidFill>
+                        <a:srgbClr val="DADCE0"/>
+                      </a:solidFill>
+                      <a:prstDash val="solid"/>
+                      <a:round/>
+                      <a:headEnd type="none" w="med" len="med"/>
+                      <a:tailEnd type="none" w="med" len="med"/>
+                    </a:lnR>
+                    <a:lnT w="12700" cap="flat" cmpd="sng" algn="ctr">
+                      <a:solidFill>
+                        <a:srgbClr val="DADCE0"/>
+                      </a:solidFill>
+                      <a:prstDash val="solid"/>
+                      <a:round/>
+                      <a:headEnd type="none" w="med" len="med"/>
+                      <a:tailEnd type="none" w="med" len="med"/>
+                    </a:lnT>
+                    <a:lnB w="12700" cap="flat" cmpd="sng" algn="ctr">
+                      <a:solidFill>
+                        <a:srgbClr val="DADCE0"/>
+                      </a:solidFill>
+                      <a:prstDash val="solid"/>
+                      <a:round/>
+                      <a:headEnd type="none" w="med" len="med"/>
+                      <a:tailEnd type="none" w="med" len="med"/>
+                    </a:lnB>
+                    <a:solidFill>
+                      <a:srgbClr val="FFFFFF"/>
+                    </a:solidFill>
+                  </a:tcPr>
+                </a:tc>
+                <a:tc>
+                  <a:txBody>
+                    <a:bodyPr/>
+                    <a:lstStyle/>
+                    <a:p>
+                      <a:pPr algn="l" indent="0" marL="0">
+                        <a:buNone/>
+                      </a:pPr>
+                      <a:r>
+                        <a:rPr lang="en-US" sz="1400" dirty="0">
+                          <a:solidFill>
+                            <a:srgbClr val="202124"/>
+                          </a:solidFill>
+                        </a:rPr>
+                        <a:t>Requires manual tagging of un-indexed photos; zero latency impact but suffers &lt;5% adoption</a:t>
+                      </a:r>
+                      <a:endParaRPr lang="en-US" sz="1400" dirty="0"/>
+                    </a:p>
+                  </a:txBody>
+                  <a:tcPr marL="91440" marR="91440" marT="45720" marB="45720" anchor="ctr">
+                    <a:lnL w="12700" cap="flat" cmpd="sng" algn="ctr">
+                      <a:solidFill>
+                        <a:srgbClr val="DADCE0"/>
+                      </a:solidFill>
+                      <a:prstDash val="solid"/>
+                      <a:round/>
+                      <a:headEnd type="none" w="med" len="med"/>
+                      <a:tailEnd type="none" w="med" len="med"/>
+                    </a:lnL>
+                    <a:lnR w="12700" cap="flat" cmpd="sng" algn="ctr">
+                      <a:solidFill>
+                        <a:srgbClr val="DADCE0"/>
+                      </a:solidFill>
+                      <a:prstDash val="solid"/>
+                      <a:round/>
+                      <a:headEnd type="none" w="med" len="med"/>
+                      <a:tailEnd type="none" w="med" len="med"/>
+                    </a:lnR>
+                    <a:lnT w="12700" cap="flat" cmpd="sng" algn="ctr">
+                      <a:solidFill>
+                        <a:srgbClr val="DADCE0"/>
+                      </a:solidFill>
+                      <a:prstDash val="solid"/>
+                      <a:round/>
+                      <a:headEnd type="none" w="med" len="med"/>
+                      <a:tailEnd type="none" w="med" len="med"/>
+                    </a:lnT>
+                    <a:lnB w="12700" cap="flat" cmpd="sng" algn="ctr">
+                      <a:solidFill>
+                        <a:srgbClr val="DADCE0"/>
+                      </a:solidFill>
+                      <a:prstDash val="solid"/>
+                      <a:round/>
+                      <a:headEnd type="none" w="med" len="med"/>
+                      <a:tailEnd type="none" w="med" len="med"/>
+                    </a:lnB>
+                    <a:solidFill>
+                      <a:srgbClr val="FFFFFF"/>
+                    </a:solidFill>
+                  </a:tcPr>
+                </a:tc>
+                <a:tc>
+                  <a:txBody>
+                    <a:bodyPr/>
+                    <a:lstStyle/>
+                    <a:p>
+                      <a:pPr algn="l" indent="0" marL="0">
+                        <a:buNone/>
+                      </a:pPr>
+                      <a:r>
+                        <a:rPr lang="en-US" sz="1400" dirty="0">
+                          <a:solidFill>
+                            <a:srgbClr val="202124"/>
+                          </a:solidFill>
+                        </a:rPr>
+                        <a:t>4.10 / 10 (REJECTED)</a:t>
                       </a:r>
                       <a:endParaRPr lang="en-US" sz="1400" dirty="0"/>
                     </a:p>
@@ -17053,7 +17101,7 @@
       </p:graphicFrame>
       <p:sp>
         <p:nvSpPr>
-          <p:cNvPr id="7" name="Text 4"/>
+          <p:cNvPr id="16" name="Text 13"/>
           <p:cNvSpPr/>
           <p:nvPr/>
         </p:nvSpPr>
@@ -17174,7 +17222,7 @@
                   <a:srgbClr val="1A73E8"/>
                 </a:solidFill>
               </a:rPr>
-              <a:t>8. MVP ARCHITECTURE &amp; COMPONENT VERIFICATION</a:t>
+              <a:t>8. MVP FUNCTIONING &amp; 3-SCREEN USER WORKFLOW</a:t>
             </a:r>
             <a:endParaRPr lang="en-US" sz="1400" dirty="0"/>
           </a:p>
@@ -17210,7 +17258,7 @@
                   <a:srgbClr val="202124"/>
                 </a:solidFill>
               </a:rPr>
-              <a:t>Interactive Gemini AI MVP Surfacing Candidate Anchors and 1-Tap Context Expansion</a:t>
+              <a:t>Interactive Gemini AI MVP Demonstrates End-to-End Search, Signals &amp; Context Expansion</a:t>
             </a:r>
             <a:endParaRPr lang="en-US" sz="1900" dirty="0"/>
           </a:p>
@@ -17218,7 +17266,298 @@
       </p:sp>
       <p:sp>
         <p:nvSpPr>
-          <p:cNvPr id="5" name="Text 3"/>
+          <p:cNvPr id="5" name="Shape 3"/>
+          <p:cNvSpPr/>
+          <p:nvPr/>
+        </p:nvSpPr>
+        <p:spPr>
+          <a:xfrm>
+            <a:off x="457200" y="1024128"/>
+            <a:ext cx="2606040" cy="566928"/>
+          </a:xfrm>
+          <a:prstGeom prst="rect">
+            <a:avLst/>
+          </a:prstGeom>
+          <a:solidFill>
+            <a:srgbClr val="E8F0FE"/>
+          </a:solidFill>
+          <a:ln w="12700">
+            <a:solidFill>
+              <a:srgbClr val="1A73E8"/>
+            </a:solidFill>
+            <a:prstDash val="solid"/>
+          </a:ln>
+        </p:spPr>
+      </p:sp>
+      <p:sp>
+        <p:nvSpPr>
+          <p:cNvPr id="6" name="Text 4"/>
+          <p:cNvSpPr/>
+          <p:nvPr/>
+        </p:nvSpPr>
+        <p:spPr>
+          <a:xfrm>
+            <a:off x="548640" y="1069848"/>
+            <a:ext cx="2423160" cy="256032"/>
+          </a:xfrm>
+          <a:prstGeom prst="rect">
+            <a:avLst/>
+          </a:prstGeom>
+          <a:noFill/>
+          <a:ln/>
+        </p:spPr>
+        <p:txBody>
+          <a:bodyPr wrap="square" rtlCol="0" anchor="ctr"/>
+          <a:lstStyle/>
+          <a:p>
+            <a:pPr algn="ctr" indent="0" marL="0">
+              <a:buNone/>
+            </a:pPr>
+            <a:r>
+              <a:rPr lang="en-US" sz="1500" b="1" dirty="0">
+                <a:solidFill>
+                  <a:srgbClr val="1A73E8"/>
+                </a:solidFill>
+              </a:rPr>
+              <a:t>App 2 Deployed</a:t>
+            </a:r>
+            <a:endParaRPr lang="en-US" sz="1500" dirty="0"/>
+          </a:p>
+        </p:txBody>
+      </p:sp>
+      <p:sp>
+        <p:nvSpPr>
+          <p:cNvPr id="7" name="Text 5"/>
+          <p:cNvSpPr/>
+          <p:nvPr/>
+        </p:nvSpPr>
+        <p:spPr>
+          <a:xfrm>
+            <a:off x="548640" y="1316736"/>
+            <a:ext cx="2423160" cy="228600"/>
+          </a:xfrm>
+          <a:prstGeom prst="rect">
+            <a:avLst/>
+          </a:prstGeom>
+          <a:noFill/>
+          <a:ln/>
+        </p:spPr>
+        <p:txBody>
+          <a:bodyPr wrap="square" rtlCol="0" anchor="ctr"/>
+          <a:lstStyle/>
+          <a:p>
+            <a:pPr algn="ctr" indent="0" marL="0">
+              <a:buNone/>
+            </a:pPr>
+            <a:r>
+              <a:rPr lang="en-US" sz="1400" dirty="0">
+                <a:solidFill>
+                  <a:srgbClr val="3C4043"/>
+                </a:solidFill>
+              </a:rPr>
+              <a:t>Live Vercel Interactive MVP</a:t>
+            </a:r>
+            <a:endParaRPr lang="en-US" sz="1400" dirty="0"/>
+          </a:p>
+        </p:txBody>
+      </p:sp>
+      <p:sp>
+        <p:nvSpPr>
+          <p:cNvPr id="8" name="Shape 6"/>
+          <p:cNvSpPr/>
+          <p:nvPr/>
+        </p:nvSpPr>
+        <p:spPr>
+          <a:xfrm>
+            <a:off x="3268980" y="1024128"/>
+            <a:ext cx="2606040" cy="566928"/>
+          </a:xfrm>
+          <a:prstGeom prst="rect">
+            <a:avLst/>
+          </a:prstGeom>
+          <a:solidFill>
+            <a:srgbClr val="E8F0FE"/>
+          </a:solidFill>
+          <a:ln w="12700">
+            <a:solidFill>
+              <a:srgbClr val="1A73E8"/>
+            </a:solidFill>
+            <a:prstDash val="solid"/>
+          </a:ln>
+        </p:spPr>
+      </p:sp>
+      <p:sp>
+        <p:nvSpPr>
+          <p:cNvPr id="9" name="Text 7"/>
+          <p:cNvSpPr/>
+          <p:nvPr/>
+        </p:nvSpPr>
+        <p:spPr>
+          <a:xfrm>
+            <a:off x="3360420" y="1069848"/>
+            <a:ext cx="2423160" cy="256032"/>
+          </a:xfrm>
+          <a:prstGeom prst="rect">
+            <a:avLst/>
+          </a:prstGeom>
+          <a:noFill/>
+          <a:ln/>
+        </p:spPr>
+        <p:txBody>
+          <a:bodyPr wrap="square" rtlCol="0" anchor="ctr"/>
+          <a:lstStyle/>
+          <a:p>
+            <a:pPr algn="ctr" indent="0" marL="0">
+              <a:buNone/>
+            </a:pPr>
+            <a:r>
+              <a:rPr lang="en-US" sz="1500" b="1" dirty="0">
+                <a:solidFill>
+                  <a:srgbClr val="1A73E8"/>
+                </a:solidFill>
+              </a:rPr>
+              <a:t>✨ Signals Inspector</a:t>
+            </a:r>
+            <a:endParaRPr lang="en-US" sz="1500" dirty="0"/>
+          </a:p>
+        </p:txBody>
+      </p:sp>
+      <p:sp>
+        <p:nvSpPr>
+          <p:cNvPr id="10" name="Text 8"/>
+          <p:cNvSpPr/>
+          <p:nvPr/>
+        </p:nvSpPr>
+        <p:spPr>
+          <a:xfrm>
+            <a:off x="3360420" y="1316736"/>
+            <a:ext cx="2423160" cy="228600"/>
+          </a:xfrm>
+          <a:prstGeom prst="rect">
+            <a:avLst/>
+          </a:prstGeom>
+          <a:noFill/>
+          <a:ln/>
+        </p:spPr>
+        <p:txBody>
+          <a:bodyPr wrap="square" rtlCol="0" anchor="ctr"/>
+          <a:lstStyle/>
+          <a:p>
+            <a:pPr algn="ctr" indent="0" marL="0">
+              <a:buNone/>
+            </a:pPr>
+            <a:r>
+              <a:rPr lang="en-US" sz="1400" dirty="0">
+                <a:solidFill>
+                  <a:srgbClr val="3C4043"/>
+                </a:solidFill>
+              </a:rPr>
+              <a:t>AI Intent &amp; Keyword Arrays</a:t>
+            </a:r>
+            <a:endParaRPr lang="en-US" sz="1400" dirty="0"/>
+          </a:p>
+        </p:txBody>
+      </p:sp>
+      <p:sp>
+        <p:nvSpPr>
+          <p:cNvPr id="11" name="Shape 9"/>
+          <p:cNvSpPr/>
+          <p:nvPr/>
+        </p:nvSpPr>
+        <p:spPr>
+          <a:xfrm>
+            <a:off x="6080760" y="1024128"/>
+            <a:ext cx="2606040" cy="566928"/>
+          </a:xfrm>
+          <a:prstGeom prst="rect">
+            <a:avLst/>
+          </a:prstGeom>
+          <a:solidFill>
+            <a:srgbClr val="E8F0FE"/>
+          </a:solidFill>
+          <a:ln w="12700">
+            <a:solidFill>
+              <a:srgbClr val="1A73E8"/>
+            </a:solidFill>
+            <a:prstDash val="solid"/>
+          </a:ln>
+        </p:spPr>
+      </p:sp>
+      <p:sp>
+        <p:nvSpPr>
+          <p:cNvPr id="12" name="Text 10"/>
+          <p:cNvSpPr/>
+          <p:nvPr/>
+        </p:nvSpPr>
+        <p:spPr>
+          <a:xfrm>
+            <a:off x="6172200" y="1069848"/>
+            <a:ext cx="2423160" cy="256032"/>
+          </a:xfrm>
+          <a:prstGeom prst="rect">
+            <a:avLst/>
+          </a:prstGeom>
+          <a:noFill/>
+          <a:ln/>
+        </p:spPr>
+        <p:txBody>
+          <a:bodyPr wrap="square" rtlCol="0" anchor="ctr"/>
+          <a:lstStyle/>
+          <a:p>
+            <a:pPr algn="ctr" indent="0" marL="0">
+              <a:buNone/>
+            </a:pPr>
+            <a:r>
+              <a:rPr lang="en-US" sz="1500" b="1" dirty="0">
+                <a:solidFill>
+                  <a:srgbClr val="1A73E8"/>
+                </a:solidFill>
+              </a:rPr>
+              <a:t>100% Media Match</a:t>
+            </a:r>
+            <a:endParaRPr lang="en-US" sz="1500" dirty="0"/>
+          </a:p>
+        </p:txBody>
+      </p:sp>
+      <p:sp>
+        <p:nvSpPr>
+          <p:cNvPr id="13" name="Text 11"/>
+          <p:cNvSpPr/>
+          <p:nvPr/>
+        </p:nvSpPr>
+        <p:spPr>
+          <a:xfrm>
+            <a:off x="6172200" y="1316736"/>
+            <a:ext cx="2423160" cy="228600"/>
+          </a:xfrm>
+          <a:prstGeom prst="rect">
+            <a:avLst/>
+          </a:prstGeom>
+          <a:noFill/>
+          <a:ln/>
+        </p:spPr>
+        <p:txBody>
+          <a:bodyPr wrap="square" rtlCol="0" anchor="ctr"/>
+          <a:lstStyle/>
+          <a:p>
+            <a:pPr algn="ctr" indent="0" marL="0">
+              <a:buNone/>
+            </a:pPr>
+            <a:r>
+              <a:rPr lang="en-US" sz="1400" dirty="0">
+                <a:solidFill>
+                  <a:srgbClr val="3C4043"/>
+                </a:solidFill>
+              </a:rPr>
+              <a:t>Verified Visual Metadata</a:t>
+            </a:r>
+            <a:endParaRPr lang="en-US" sz="1400" dirty="0"/>
+          </a:p>
+        </p:txBody>
+      </p:sp>
+      <p:sp>
+        <p:nvSpPr>
+          <p:cNvPr id="14" name="Text 12"/>
           <p:cNvSpPr/>
           <p:nvPr/>
         </p:nvSpPr>
@@ -17246,7 +17585,7 @@
                   <a:srgbClr val="1A73E8"/>
                 </a:solidFill>
               </a:rPr>
-              <a:t>3-Screen Interactive Solution Architecture Specification &amp; Live Links</a:t>
+              <a:t>Live Production MVP User Workflow (App 2 on Vercel), Signal Inspector &amp; Latency Bounds</a:t>
             </a:r>
             <a:endParaRPr lang="en-US" sz="1400" dirty="0"/>
           </a:p>
@@ -17275,11 +17614,11 @@
             <a:tbl>
               <a:tblPr/>
               <a:tblGrid>
+                <a:gridCol w="1645920"/>
+                <a:gridCol w="1645920"/>
+                <a:gridCol w="2194560"/>
                 <a:gridCol w="1463040"/>
-                <a:gridCol w="1645920"/>
-                <a:gridCol w="2011680"/>
-                <a:gridCol w="1645920"/>
-                <a:gridCol w="1463040"/>
+                <a:gridCol w="1280160"/>
               </a:tblGrid>
               <a:tr h="0">
                 <a:tc>
@@ -17296,7 +17635,7 @@
                             <a:srgbClr val="1A73E8"/>
                           </a:solidFill>
                         </a:rPr>
-                        <a:t>UX Screen / Step</a:t>
+                        <a:t>MVP UX Screen / Workflow Step</a:t>
                       </a:r>
                       <a:endParaRPr lang="en-US" sz="1400" dirty="0"/>
                     </a:p>
@@ -17357,7 +17696,7 @@
                             <a:srgbClr val="1A73E8"/>
                           </a:solidFill>
                         </a:rPr>
-                        <a:t>Feature Component</a:t>
+                        <a:t>Feature Component &amp; UI State</a:t>
                       </a:r>
                       <a:endParaRPr lang="en-US" sz="1400" dirty="0"/>
                     </a:p>
@@ -17479,7 +17818,7 @@
                             <a:srgbClr val="1A73E8"/>
                           </a:solidFill>
                         </a:rPr>
-                        <a:t>Input Signal Parsed</a:t>
+                        <a:t>Input Signal &amp; Processed Output</a:t>
                       </a:r>
                       <a:endParaRPr lang="en-US" sz="1400" dirty="0"/>
                     </a:p>
@@ -17540,7 +17879,7 @@
                             <a:srgbClr val="1A73E8"/>
                           </a:solidFill>
                         </a:rPr>
-                        <a:t>Rendered Output &amp; Live URL</a:t>
+                        <a:t>Live Production URL</a:t>
                       </a:r>
                       <a:endParaRPr lang="en-US" sz="1400" dirty="0"/>
                     </a:p>
@@ -17603,7 +17942,7 @@
                             <a:srgbClr val="202124"/>
                           </a:solidFill>
                         </a:rPr>
-                        <a:t>Screen 1: Search</a:t>
+                        <a:t>Screen 1: Search Input</a:t>
                       </a:r>
                       <a:endParaRPr lang="en-US" sz="1400" dirty="0"/>
                     </a:p>
@@ -17725,129 +18064,129 @@
                             <a:srgbClr val="202124"/>
                           </a:solidFill>
                         </a:rPr>
-                        <a:t>Types vague prompt e.g. 'Goa sunset dinner receipt'</a:t>
-                      </a:r>
-                      <a:endParaRPr lang="en-US" sz="1400" dirty="0"/>
-                    </a:p>
-                  </a:txBody>
-                  <a:tcPr marL="91440" marR="91440" marT="45720" marB="45720" anchor="ctr">
-                    <a:lnL w="12700" cap="flat" cmpd="sng" algn="ctr">
-                      <a:solidFill>
-                        <a:srgbClr val="DADCE0"/>
-                      </a:solidFill>
-                      <a:prstDash val="solid"/>
-                      <a:round/>
-                      <a:headEnd type="none" w="med" len="med"/>
-                      <a:tailEnd type="none" w="med" len="med"/>
-                    </a:lnL>
-                    <a:lnR w="12700" cap="flat" cmpd="sng" algn="ctr">
-                      <a:solidFill>
-                        <a:srgbClr val="DADCE0"/>
-                      </a:solidFill>
-                      <a:prstDash val="solid"/>
-                      <a:round/>
-                      <a:headEnd type="none" w="med" len="med"/>
-                      <a:tailEnd type="none" w="med" len="med"/>
-                    </a:lnR>
-                    <a:lnT w="12700" cap="flat" cmpd="sng" algn="ctr">
-                      <a:solidFill>
-                        <a:srgbClr val="DADCE0"/>
-                      </a:solidFill>
-                      <a:prstDash val="solid"/>
-                      <a:round/>
-                      <a:headEnd type="none" w="med" len="med"/>
-                      <a:tailEnd type="none" w="med" len="med"/>
-                    </a:lnT>
-                    <a:lnB w="12700" cap="flat" cmpd="sng" algn="ctr">
-                      <a:solidFill>
-                        <a:srgbClr val="DADCE0"/>
-                      </a:solidFill>
-                      <a:prstDash val="solid"/>
-                      <a:round/>
-                      <a:headEnd type="none" w="med" len="med"/>
-                      <a:tailEnd type="none" w="med" len="med"/>
-                    </a:lnB>
-                    <a:solidFill>
-                      <a:srgbClr val="FFFFFF"/>
-                    </a:solidFill>
-                  </a:tcPr>
-                </a:tc>
-                <a:tc>
-                  <a:txBody>
-                    <a:bodyPr/>
-                    <a:lstStyle/>
-                    <a:p>
-                      <a:pPr algn="l" indent="0" marL="0">
-                        <a:buNone/>
-                      </a:pPr>
-                      <a:r>
-                        <a:rPr lang="en-US" sz="1400" dirty="0">
-                          <a:solidFill>
-                            <a:srgbClr val="202124"/>
-                          </a:solidFill>
-                        </a:rPr>
-                        <a:t>Natural language query</a:t>
-                      </a:r>
-                      <a:endParaRPr lang="en-US" sz="1400" dirty="0"/>
-                    </a:p>
-                  </a:txBody>
-                  <a:tcPr marL="91440" marR="91440" marT="45720" marB="45720" anchor="ctr">
-                    <a:lnL w="12700" cap="flat" cmpd="sng" algn="ctr">
-                      <a:solidFill>
-                        <a:srgbClr val="DADCE0"/>
-                      </a:solidFill>
-                      <a:prstDash val="solid"/>
-                      <a:round/>
-                      <a:headEnd type="none" w="med" len="med"/>
-                      <a:tailEnd type="none" w="med" len="med"/>
-                    </a:lnL>
-                    <a:lnR w="12700" cap="flat" cmpd="sng" algn="ctr">
-                      <a:solidFill>
-                        <a:srgbClr val="DADCE0"/>
-                      </a:solidFill>
-                      <a:prstDash val="solid"/>
-                      <a:round/>
-                      <a:headEnd type="none" w="med" len="med"/>
-                      <a:tailEnd type="none" w="med" len="med"/>
-                    </a:lnR>
-                    <a:lnT w="12700" cap="flat" cmpd="sng" algn="ctr">
-                      <a:solidFill>
-                        <a:srgbClr val="DADCE0"/>
-                      </a:solidFill>
-                      <a:prstDash val="solid"/>
-                      <a:round/>
-                      <a:headEnd type="none" w="med" len="med"/>
-                      <a:tailEnd type="none" w="med" len="med"/>
-                    </a:lnT>
-                    <a:lnB w="12700" cap="flat" cmpd="sng" algn="ctr">
-                      <a:solidFill>
-                        <a:srgbClr val="DADCE0"/>
-                      </a:solidFill>
-                      <a:prstDash val="solid"/>
-                      <a:round/>
-                      <a:headEnd type="none" w="med" len="med"/>
-                      <a:tailEnd type="none" w="med" len="med"/>
-                    </a:lnB>
-                    <a:solidFill>
-                      <a:srgbClr val="FFFFFF"/>
-                    </a:solidFill>
-                  </a:tcPr>
-                </a:tc>
-                <a:tc>
-                  <a:txBody>
-                    <a:bodyPr/>
-                    <a:lstStyle/>
-                    <a:p>
-                      <a:pPr algn="l" indent="0" marL="0">
-                        <a:buNone/>
-                      </a:pPr>
-                      <a:r>
-                        <a:rPr lang="en-US" sz="1400" dirty="0">
-                          <a:solidFill>
-                            <a:srgbClr val="202124"/>
-                          </a:solidFill>
-                        </a:rPr>
-                        <a:t>Parses intent &amp; extracts tags</a:t>
+                        <a:t>User enters vague text prompt e.g. 'Goa sunset dinner receipt' or selects query pill</a:t>
+                      </a:r>
+                      <a:endParaRPr lang="en-US" sz="1400" dirty="0"/>
+                    </a:p>
+                  </a:txBody>
+                  <a:tcPr marL="91440" marR="91440" marT="45720" marB="45720" anchor="ctr">
+                    <a:lnL w="12700" cap="flat" cmpd="sng" algn="ctr">
+                      <a:solidFill>
+                        <a:srgbClr val="DADCE0"/>
+                      </a:solidFill>
+                      <a:prstDash val="solid"/>
+                      <a:round/>
+                      <a:headEnd type="none" w="med" len="med"/>
+                      <a:tailEnd type="none" w="med" len="med"/>
+                    </a:lnL>
+                    <a:lnR w="12700" cap="flat" cmpd="sng" algn="ctr">
+                      <a:solidFill>
+                        <a:srgbClr val="DADCE0"/>
+                      </a:solidFill>
+                      <a:prstDash val="solid"/>
+                      <a:round/>
+                      <a:headEnd type="none" w="med" len="med"/>
+                      <a:tailEnd type="none" w="med" len="med"/>
+                    </a:lnR>
+                    <a:lnT w="12700" cap="flat" cmpd="sng" algn="ctr">
+                      <a:solidFill>
+                        <a:srgbClr val="DADCE0"/>
+                      </a:solidFill>
+                      <a:prstDash val="solid"/>
+                      <a:round/>
+                      <a:headEnd type="none" w="med" len="med"/>
+                      <a:tailEnd type="none" w="med" len="med"/>
+                    </a:lnT>
+                    <a:lnB w="12700" cap="flat" cmpd="sng" algn="ctr">
+                      <a:solidFill>
+                        <a:srgbClr val="DADCE0"/>
+                      </a:solidFill>
+                      <a:prstDash val="solid"/>
+                      <a:round/>
+                      <a:headEnd type="none" w="med" len="med"/>
+                      <a:tailEnd type="none" w="med" len="med"/>
+                    </a:lnB>
+                    <a:solidFill>
+                      <a:srgbClr val="FFFFFF"/>
+                    </a:solidFill>
+                  </a:tcPr>
+                </a:tc>
+                <a:tc>
+                  <a:txBody>
+                    <a:bodyPr/>
+                    <a:lstStyle/>
+                    <a:p>
+                      <a:pPr algn="l" indent="0" marL="0">
+                        <a:buNone/>
+                      </a:pPr>
+                      <a:r>
+                        <a:rPr lang="en-US" sz="1400" dirty="0">
+                          <a:solidFill>
+                            <a:srgbClr val="202124"/>
+                          </a:solidFill>
+                        </a:rPr>
+                        <a:t>Parses intent into visual anchor terms ('Goa beach') and target item tags</a:t>
+                      </a:r>
+                      <a:endParaRPr lang="en-US" sz="1400" dirty="0"/>
+                    </a:p>
+                  </a:txBody>
+                  <a:tcPr marL="91440" marR="91440" marT="45720" marB="45720" anchor="ctr">
+                    <a:lnL w="12700" cap="flat" cmpd="sng" algn="ctr">
+                      <a:solidFill>
+                        <a:srgbClr val="DADCE0"/>
+                      </a:solidFill>
+                      <a:prstDash val="solid"/>
+                      <a:round/>
+                      <a:headEnd type="none" w="med" len="med"/>
+                      <a:tailEnd type="none" w="med" len="med"/>
+                    </a:lnL>
+                    <a:lnR w="12700" cap="flat" cmpd="sng" algn="ctr">
+                      <a:solidFill>
+                        <a:srgbClr val="DADCE0"/>
+                      </a:solidFill>
+                      <a:prstDash val="solid"/>
+                      <a:round/>
+                      <a:headEnd type="none" w="med" len="med"/>
+                      <a:tailEnd type="none" w="med" len="med"/>
+                    </a:lnR>
+                    <a:lnT w="12700" cap="flat" cmpd="sng" algn="ctr">
+                      <a:solidFill>
+                        <a:srgbClr val="DADCE0"/>
+                      </a:solidFill>
+                      <a:prstDash val="solid"/>
+                      <a:round/>
+                      <a:headEnd type="none" w="med" len="med"/>
+                      <a:tailEnd type="none" w="med" len="med"/>
+                    </a:lnT>
+                    <a:lnB w="12700" cap="flat" cmpd="sng" algn="ctr">
+                      <a:solidFill>
+                        <a:srgbClr val="DADCE0"/>
+                      </a:solidFill>
+                      <a:prstDash val="solid"/>
+                      <a:round/>
+                      <a:headEnd type="none" w="med" len="med"/>
+                      <a:tailEnd type="none" w="med" len="med"/>
+                    </a:lnB>
+                    <a:solidFill>
+                      <a:srgbClr val="FFFFFF"/>
+                    </a:solidFill>
+                  </a:tcPr>
+                </a:tc>
+                <a:tc>
+                  <a:txBody>
+                    <a:bodyPr/>
+                    <a:lstStyle/>
+                    <a:p>
+                      <a:pPr algn="l" indent="0" marL="0">
+                        <a:buNone/>
+                      </a:pPr>
+                      <a:r>
+                        <a:rPr lang="en-US" sz="1400" dirty="0">
+                          <a:solidFill>
+                            <a:srgbClr val="202124"/>
+                          </a:solidFill>
+                        </a:rPr>
+                        <a:t>https://google-photos-vague-memory-discover.vercel.app/</a:t>
                       </a:r>
                       <a:endParaRPr lang="en-US" sz="1400" dirty="0"/>
                     </a:p>
@@ -17910,251 +18249,251 @@
                             <a:srgbClr val="202124"/>
                           </a:solidFill>
                         </a:rPr>
-                        <a:t>Screen 1 Inspector</a:t>
-                      </a:r>
-                      <a:endParaRPr lang="en-US" sz="1400" dirty="0"/>
-                    </a:p>
-                  </a:txBody>
-                  <a:tcPr marL="91440" marR="91440" marT="45720" marB="45720" anchor="ctr">
-                    <a:lnL w="12700" cap="flat" cmpd="sng" algn="ctr">
-                      <a:solidFill>
-                        <a:srgbClr val="DADCE0"/>
-                      </a:solidFill>
-                      <a:prstDash val="solid"/>
-                      <a:round/>
-                      <a:headEnd type="none" w="med" len="med"/>
-                      <a:tailEnd type="none" w="med" len="med"/>
-                    </a:lnL>
-                    <a:lnR w="12700" cap="flat" cmpd="sng" algn="ctr">
-                      <a:solidFill>
-                        <a:srgbClr val="DADCE0"/>
-                      </a:solidFill>
-                      <a:prstDash val="solid"/>
-                      <a:round/>
-                      <a:headEnd type="none" w="med" len="med"/>
-                      <a:tailEnd type="none" w="med" len="med"/>
-                    </a:lnR>
-                    <a:lnT w="12700" cap="flat" cmpd="sng" algn="ctr">
-                      <a:solidFill>
-                        <a:srgbClr val="DADCE0"/>
-                      </a:solidFill>
-                      <a:prstDash val="solid"/>
-                      <a:round/>
-                      <a:headEnd type="none" w="med" len="med"/>
-                      <a:tailEnd type="none" w="med" len="med"/>
-                    </a:lnT>
-                    <a:lnB w="12700" cap="flat" cmpd="sng" algn="ctr">
-                      <a:solidFill>
-                        <a:srgbClr val="DADCE0"/>
-                      </a:solidFill>
-                      <a:prstDash val="solid"/>
-                      <a:round/>
-                      <a:headEnd type="none" w="med" len="med"/>
-                      <a:tailEnd type="none" w="med" len="med"/>
-                    </a:lnB>
-                    <a:solidFill>
-                      <a:srgbClr val="FFFFFF"/>
-                    </a:solidFill>
-                  </a:tcPr>
-                </a:tc>
-                <a:tc>
-                  <a:txBody>
-                    <a:bodyPr/>
-                    <a:lstStyle/>
-                    <a:p>
-                      <a:pPr algn="l" indent="0" marL="0">
-                        <a:buNone/>
-                      </a:pPr>
-                      <a:r>
-                        <a:rPr lang="en-US" sz="1400" dirty="0">
-                          <a:solidFill>
-                            <a:srgbClr val="202124"/>
-                          </a:solidFill>
-                        </a:rPr>
-                        <a:t>✨ Gemini AI Signals</a:t>
-                      </a:r>
-                      <a:endParaRPr lang="en-US" sz="1400" dirty="0"/>
-                    </a:p>
-                  </a:txBody>
-                  <a:tcPr marL="91440" marR="91440" marT="45720" marB="45720" anchor="ctr">
-                    <a:lnL w="12700" cap="flat" cmpd="sng" algn="ctr">
-                      <a:solidFill>
-                        <a:srgbClr val="DADCE0"/>
-                      </a:solidFill>
-                      <a:prstDash val="solid"/>
-                      <a:round/>
-                      <a:headEnd type="none" w="med" len="med"/>
-                      <a:tailEnd type="none" w="med" len="med"/>
-                    </a:lnL>
-                    <a:lnR w="12700" cap="flat" cmpd="sng" algn="ctr">
-                      <a:solidFill>
-                        <a:srgbClr val="DADCE0"/>
-                      </a:solidFill>
-                      <a:prstDash val="solid"/>
-                      <a:round/>
-                      <a:headEnd type="none" w="med" len="med"/>
-                      <a:tailEnd type="none" w="med" len="med"/>
-                    </a:lnR>
-                    <a:lnT w="12700" cap="flat" cmpd="sng" algn="ctr">
-                      <a:solidFill>
-                        <a:srgbClr val="DADCE0"/>
-                      </a:solidFill>
-                      <a:prstDash val="solid"/>
-                      <a:round/>
-                      <a:headEnd type="none" w="med" len="med"/>
-                      <a:tailEnd type="none" w="med" len="med"/>
-                    </a:lnT>
-                    <a:lnB w="12700" cap="flat" cmpd="sng" algn="ctr">
-                      <a:solidFill>
-                        <a:srgbClr val="DADCE0"/>
-                      </a:solidFill>
-                      <a:prstDash val="solid"/>
-                      <a:round/>
-                      <a:headEnd type="none" w="med" len="med"/>
-                      <a:tailEnd type="none" w="med" len="med"/>
-                    </a:lnB>
-                    <a:solidFill>
-                      <a:srgbClr val="FFFFFF"/>
-                    </a:solidFill>
-                  </a:tcPr>
-                </a:tc>
-                <a:tc>
-                  <a:txBody>
-                    <a:bodyPr/>
-                    <a:lstStyle/>
-                    <a:p>
-                      <a:pPr algn="l" indent="0" marL="0">
-                        <a:buNone/>
-                      </a:pPr>
-                      <a:r>
-                        <a:rPr lang="en-US" sz="1400" dirty="0">
-                          <a:solidFill>
-                            <a:srgbClr val="202124"/>
-                          </a:solidFill>
-                        </a:rPr>
-                        <a:t>Toggles AI inspector button</a:t>
-                      </a:r>
-                      <a:endParaRPr lang="en-US" sz="1400" dirty="0"/>
-                    </a:p>
-                  </a:txBody>
-                  <a:tcPr marL="91440" marR="91440" marT="45720" marB="45720" anchor="ctr">
-                    <a:lnL w="12700" cap="flat" cmpd="sng" algn="ctr">
-                      <a:solidFill>
-                        <a:srgbClr val="DADCE0"/>
-                      </a:solidFill>
-                      <a:prstDash val="solid"/>
-                      <a:round/>
-                      <a:headEnd type="none" w="med" len="med"/>
-                      <a:tailEnd type="none" w="med" len="med"/>
-                    </a:lnL>
-                    <a:lnR w="12700" cap="flat" cmpd="sng" algn="ctr">
-                      <a:solidFill>
-                        <a:srgbClr val="DADCE0"/>
-                      </a:solidFill>
-                      <a:prstDash val="solid"/>
-                      <a:round/>
-                      <a:headEnd type="none" w="med" len="med"/>
-                      <a:tailEnd type="none" w="med" len="med"/>
-                    </a:lnR>
-                    <a:lnT w="12700" cap="flat" cmpd="sng" algn="ctr">
-                      <a:solidFill>
-                        <a:srgbClr val="DADCE0"/>
-                      </a:solidFill>
-                      <a:prstDash val="solid"/>
-                      <a:round/>
-                      <a:headEnd type="none" w="med" len="med"/>
-                      <a:tailEnd type="none" w="med" len="med"/>
-                    </a:lnT>
-                    <a:lnB w="12700" cap="flat" cmpd="sng" algn="ctr">
-                      <a:solidFill>
-                        <a:srgbClr val="DADCE0"/>
-                      </a:solidFill>
-                      <a:prstDash val="solid"/>
-                      <a:round/>
-                      <a:headEnd type="none" w="med" len="med"/>
-                      <a:tailEnd type="none" w="med" len="med"/>
-                    </a:lnB>
-                    <a:solidFill>
-                      <a:srgbClr val="FFFFFF"/>
-                    </a:solidFill>
-                  </a:tcPr>
-                </a:tc>
-                <a:tc>
-                  <a:txBody>
-                    <a:bodyPr/>
-                    <a:lstStyle/>
-                    <a:p>
-                      <a:pPr algn="l" indent="0" marL="0">
-                        <a:buNone/>
-                      </a:pPr>
-                      <a:r>
-                        <a:rPr lang="en-US" sz="1400" dirty="0">
-                          <a:solidFill>
-                            <a:srgbClr val="202124"/>
-                          </a:solidFill>
-                        </a:rPr>
-                        <a:t>Confidence &amp; keyword arrays</a:t>
-                      </a:r>
-                      <a:endParaRPr lang="en-US" sz="1400" dirty="0"/>
-                    </a:p>
-                  </a:txBody>
-                  <a:tcPr marL="91440" marR="91440" marT="45720" marB="45720" anchor="ctr">
-                    <a:lnL w="12700" cap="flat" cmpd="sng" algn="ctr">
-                      <a:solidFill>
-                        <a:srgbClr val="DADCE0"/>
-                      </a:solidFill>
-                      <a:prstDash val="solid"/>
-                      <a:round/>
-                      <a:headEnd type="none" w="med" len="med"/>
-                      <a:tailEnd type="none" w="med" len="med"/>
-                    </a:lnL>
-                    <a:lnR w="12700" cap="flat" cmpd="sng" algn="ctr">
-                      <a:solidFill>
-                        <a:srgbClr val="DADCE0"/>
-                      </a:solidFill>
-                      <a:prstDash val="solid"/>
-                      <a:round/>
-                      <a:headEnd type="none" w="med" len="med"/>
-                      <a:tailEnd type="none" w="med" len="med"/>
-                    </a:lnR>
-                    <a:lnT w="12700" cap="flat" cmpd="sng" algn="ctr">
-                      <a:solidFill>
-                        <a:srgbClr val="DADCE0"/>
-                      </a:solidFill>
-                      <a:prstDash val="solid"/>
-                      <a:round/>
-                      <a:headEnd type="none" w="med" len="med"/>
-                      <a:tailEnd type="none" w="med" len="med"/>
-                    </a:lnT>
-                    <a:lnB w="12700" cap="flat" cmpd="sng" algn="ctr">
-                      <a:solidFill>
-                        <a:srgbClr val="DADCE0"/>
-                      </a:solidFill>
-                      <a:prstDash val="solid"/>
-                      <a:round/>
-                      <a:headEnd type="none" w="med" len="med"/>
-                      <a:tailEnd type="none" w="med" len="med"/>
-                    </a:lnB>
-                    <a:solidFill>
-                      <a:srgbClr val="FFFFFF"/>
-                    </a:solidFill>
-                  </a:tcPr>
-                </a:tc>
-                <a:tc>
-                  <a:txBody>
-                    <a:bodyPr/>
-                    <a:lstStyle/>
-                    <a:p>
-                      <a:pPr algn="l" indent="0" marL="0">
-                        <a:buNone/>
-                      </a:pPr>
-                      <a:r>
-                        <a:rPr lang="en-US" sz="1400" dirty="0">
-                          <a:solidFill>
-                            <a:srgbClr val="202124"/>
-                          </a:solidFill>
-                        </a:rPr>
-                        <a:t>Renders AI signal breakdown</a:t>
+                        <a:t>Screen 1: Signal Inspector</a:t>
+                      </a:r>
+                      <a:endParaRPr lang="en-US" sz="1400" dirty="0"/>
+                    </a:p>
+                  </a:txBody>
+                  <a:tcPr marL="91440" marR="91440" marT="45720" marB="45720" anchor="ctr">
+                    <a:lnL w="12700" cap="flat" cmpd="sng" algn="ctr">
+                      <a:solidFill>
+                        <a:srgbClr val="DADCE0"/>
+                      </a:solidFill>
+                      <a:prstDash val="solid"/>
+                      <a:round/>
+                      <a:headEnd type="none" w="med" len="med"/>
+                      <a:tailEnd type="none" w="med" len="med"/>
+                    </a:lnL>
+                    <a:lnR w="12700" cap="flat" cmpd="sng" algn="ctr">
+                      <a:solidFill>
+                        <a:srgbClr val="DADCE0"/>
+                      </a:solidFill>
+                      <a:prstDash val="solid"/>
+                      <a:round/>
+                      <a:headEnd type="none" w="med" len="med"/>
+                      <a:tailEnd type="none" w="med" len="med"/>
+                    </a:lnR>
+                    <a:lnT w="12700" cap="flat" cmpd="sng" algn="ctr">
+                      <a:solidFill>
+                        <a:srgbClr val="DADCE0"/>
+                      </a:solidFill>
+                      <a:prstDash val="solid"/>
+                      <a:round/>
+                      <a:headEnd type="none" w="med" len="med"/>
+                      <a:tailEnd type="none" w="med" len="med"/>
+                    </a:lnT>
+                    <a:lnB w="12700" cap="flat" cmpd="sng" algn="ctr">
+                      <a:solidFill>
+                        <a:srgbClr val="DADCE0"/>
+                      </a:solidFill>
+                      <a:prstDash val="solid"/>
+                      <a:round/>
+                      <a:headEnd type="none" w="med" len="med"/>
+                      <a:tailEnd type="none" w="med" len="med"/>
+                    </a:lnB>
+                    <a:solidFill>
+                      <a:srgbClr val="FFFFFF"/>
+                    </a:solidFill>
+                  </a:tcPr>
+                </a:tc>
+                <a:tc>
+                  <a:txBody>
+                    <a:bodyPr/>
+                    <a:lstStyle/>
+                    <a:p>
+                      <a:pPr algn="l" indent="0" marL="0">
+                        <a:buNone/>
+                      </a:pPr>
+                      <a:r>
+                        <a:rPr lang="en-US" sz="1400" dirty="0">
+                          <a:solidFill>
+                            <a:srgbClr val="202124"/>
+                          </a:solidFill>
+                        </a:rPr>
+                        <a:t>✨ Gemini AI Signals Drawer</a:t>
+                      </a:r>
+                      <a:endParaRPr lang="en-US" sz="1400" dirty="0"/>
+                    </a:p>
+                  </a:txBody>
+                  <a:tcPr marL="91440" marR="91440" marT="45720" marB="45720" anchor="ctr">
+                    <a:lnL w="12700" cap="flat" cmpd="sng" algn="ctr">
+                      <a:solidFill>
+                        <a:srgbClr val="DADCE0"/>
+                      </a:solidFill>
+                      <a:prstDash val="solid"/>
+                      <a:round/>
+                      <a:headEnd type="none" w="med" len="med"/>
+                      <a:tailEnd type="none" w="med" len="med"/>
+                    </a:lnL>
+                    <a:lnR w="12700" cap="flat" cmpd="sng" algn="ctr">
+                      <a:solidFill>
+                        <a:srgbClr val="DADCE0"/>
+                      </a:solidFill>
+                      <a:prstDash val="solid"/>
+                      <a:round/>
+                      <a:headEnd type="none" w="med" len="med"/>
+                      <a:tailEnd type="none" w="med" len="med"/>
+                    </a:lnR>
+                    <a:lnT w="12700" cap="flat" cmpd="sng" algn="ctr">
+                      <a:solidFill>
+                        <a:srgbClr val="DADCE0"/>
+                      </a:solidFill>
+                      <a:prstDash val="solid"/>
+                      <a:round/>
+                      <a:headEnd type="none" w="med" len="med"/>
+                      <a:tailEnd type="none" w="med" len="med"/>
+                    </a:lnT>
+                    <a:lnB w="12700" cap="flat" cmpd="sng" algn="ctr">
+                      <a:solidFill>
+                        <a:srgbClr val="DADCE0"/>
+                      </a:solidFill>
+                      <a:prstDash val="solid"/>
+                      <a:round/>
+                      <a:headEnd type="none" w="med" len="med"/>
+                      <a:tailEnd type="none" w="med" len="med"/>
+                    </a:lnB>
+                    <a:solidFill>
+                      <a:srgbClr val="FFFFFF"/>
+                    </a:solidFill>
+                  </a:tcPr>
+                </a:tc>
+                <a:tc>
+                  <a:txBody>
+                    <a:bodyPr/>
+                    <a:lstStyle/>
+                    <a:p>
+                      <a:pPr algn="l" indent="0" marL="0">
+                        <a:buNone/>
+                      </a:pPr>
+                      <a:r>
+                        <a:rPr lang="en-US" sz="1400" dirty="0">
+                          <a:solidFill>
+                            <a:srgbClr val="202124"/>
+                          </a:solidFill>
+                        </a:rPr>
+                        <a:t>Toggles Inspector drawer to audit real-time AI confidence scores &amp; keyword arrays</a:t>
+                      </a:r>
+                      <a:endParaRPr lang="en-US" sz="1400" dirty="0"/>
+                    </a:p>
+                  </a:txBody>
+                  <a:tcPr marL="91440" marR="91440" marT="45720" marB="45720" anchor="ctr">
+                    <a:lnL w="12700" cap="flat" cmpd="sng" algn="ctr">
+                      <a:solidFill>
+                        <a:srgbClr val="DADCE0"/>
+                      </a:solidFill>
+                      <a:prstDash val="solid"/>
+                      <a:round/>
+                      <a:headEnd type="none" w="med" len="med"/>
+                      <a:tailEnd type="none" w="med" len="med"/>
+                    </a:lnL>
+                    <a:lnR w="12700" cap="flat" cmpd="sng" algn="ctr">
+                      <a:solidFill>
+                        <a:srgbClr val="DADCE0"/>
+                      </a:solidFill>
+                      <a:prstDash val="solid"/>
+                      <a:round/>
+                      <a:headEnd type="none" w="med" len="med"/>
+                      <a:tailEnd type="none" w="med" len="med"/>
+                    </a:lnR>
+                    <a:lnT w="12700" cap="flat" cmpd="sng" algn="ctr">
+                      <a:solidFill>
+                        <a:srgbClr val="DADCE0"/>
+                      </a:solidFill>
+                      <a:prstDash val="solid"/>
+                      <a:round/>
+                      <a:headEnd type="none" w="med" len="med"/>
+                      <a:tailEnd type="none" w="med" len="med"/>
+                    </a:lnT>
+                    <a:lnB w="12700" cap="flat" cmpd="sng" algn="ctr">
+                      <a:solidFill>
+                        <a:srgbClr val="DADCE0"/>
+                      </a:solidFill>
+                      <a:prstDash val="solid"/>
+                      <a:round/>
+                      <a:headEnd type="none" w="med" len="med"/>
+                      <a:tailEnd type="none" w="med" len="med"/>
+                    </a:lnB>
+                    <a:solidFill>
+                      <a:srgbClr val="FFFFFF"/>
+                    </a:solidFill>
+                  </a:tcPr>
+                </a:tc>
+                <a:tc>
+                  <a:txBody>
+                    <a:bodyPr/>
+                    <a:lstStyle/>
+                    <a:p>
+                      <a:pPr algn="l" indent="0" marL="0">
+                        <a:buNone/>
+                      </a:pPr>
+                      <a:r>
+                        <a:rPr lang="en-US" sz="1400" dirty="0">
+                          <a:solidFill>
+                            <a:srgbClr val="202124"/>
+                          </a:solidFill>
+                        </a:rPr>
+                        <a:t>Exposes underlying Gemini 2.5 Flash query parsing pipeline &amp; extracted tags</a:t>
+                      </a:r>
+                      <a:endParaRPr lang="en-US" sz="1400" dirty="0"/>
+                    </a:p>
+                  </a:txBody>
+                  <a:tcPr marL="91440" marR="91440" marT="45720" marB="45720" anchor="ctr">
+                    <a:lnL w="12700" cap="flat" cmpd="sng" algn="ctr">
+                      <a:solidFill>
+                        <a:srgbClr val="DADCE0"/>
+                      </a:solidFill>
+                      <a:prstDash val="solid"/>
+                      <a:round/>
+                      <a:headEnd type="none" w="med" len="med"/>
+                      <a:tailEnd type="none" w="med" len="med"/>
+                    </a:lnL>
+                    <a:lnR w="12700" cap="flat" cmpd="sng" algn="ctr">
+                      <a:solidFill>
+                        <a:srgbClr val="DADCE0"/>
+                      </a:solidFill>
+                      <a:prstDash val="solid"/>
+                      <a:round/>
+                      <a:headEnd type="none" w="med" len="med"/>
+                      <a:tailEnd type="none" w="med" len="med"/>
+                    </a:lnR>
+                    <a:lnT w="12700" cap="flat" cmpd="sng" algn="ctr">
+                      <a:solidFill>
+                        <a:srgbClr val="DADCE0"/>
+                      </a:solidFill>
+                      <a:prstDash val="solid"/>
+                      <a:round/>
+                      <a:headEnd type="none" w="med" len="med"/>
+                      <a:tailEnd type="none" w="med" len="med"/>
+                    </a:lnT>
+                    <a:lnB w="12700" cap="flat" cmpd="sng" algn="ctr">
+                      <a:solidFill>
+                        <a:srgbClr val="DADCE0"/>
+                      </a:solidFill>
+                      <a:prstDash val="solid"/>
+                      <a:round/>
+                      <a:headEnd type="none" w="med" len="med"/>
+                      <a:tailEnd type="none" w="med" len="med"/>
+                    </a:lnB>
+                    <a:solidFill>
+                      <a:srgbClr val="FFFFFF"/>
+                    </a:solidFill>
+                  </a:tcPr>
+                </a:tc>
+                <a:tc>
+                  <a:txBody>
+                    <a:bodyPr/>
+                    <a:lstStyle/>
+                    <a:p>
+                      <a:pPr algn="l" indent="0" marL="0">
+                        <a:buNone/>
+                      </a:pPr>
+                      <a:r>
+                        <a:rPr lang="en-US" sz="1400" dirty="0">
+                          <a:solidFill>
+                            <a:srgbClr val="202124"/>
+                          </a:solidFill>
+                        </a:rPr>
+                        <a:t>https://google-photos-vague-memory-discover.vercel.app/</a:t>
                       </a:r>
                       <a:endParaRPr lang="en-US" sz="1400" dirty="0"/>
                     </a:p>
@@ -18217,251 +18556,251 @@
                             <a:srgbClr val="202124"/>
                           </a:solidFill>
                         </a:rPr>
-                        <a:t>Screen 2: Candidates</a:t>
-                      </a:r>
-                      <a:endParaRPr lang="en-US" sz="1400" dirty="0"/>
-                    </a:p>
-                  </a:txBody>
-                  <a:tcPr marL="91440" marR="91440" marT="45720" marB="45720" anchor="ctr">
-                    <a:lnL w="12700" cap="flat" cmpd="sng" algn="ctr">
-                      <a:solidFill>
-                        <a:srgbClr val="DADCE0"/>
-                      </a:solidFill>
-                      <a:prstDash val="solid"/>
-                      <a:round/>
-                      <a:headEnd type="none" w="med" len="med"/>
-                      <a:tailEnd type="none" w="med" len="med"/>
-                    </a:lnL>
-                    <a:lnR w="12700" cap="flat" cmpd="sng" algn="ctr">
-                      <a:solidFill>
-                        <a:srgbClr val="DADCE0"/>
-                      </a:solidFill>
-                      <a:prstDash val="solid"/>
-                      <a:round/>
-                      <a:headEnd type="none" w="med" len="med"/>
-                      <a:tailEnd type="none" w="med" len="med"/>
-                    </a:lnR>
-                    <a:lnT w="12700" cap="flat" cmpd="sng" algn="ctr">
-                      <a:solidFill>
-                        <a:srgbClr val="DADCE0"/>
-                      </a:solidFill>
-                      <a:prstDash val="solid"/>
-                      <a:round/>
-                      <a:headEnd type="none" w="med" len="med"/>
-                      <a:tailEnd type="none" w="med" len="med"/>
-                    </a:lnT>
-                    <a:lnB w="12700" cap="flat" cmpd="sng" algn="ctr">
-                      <a:solidFill>
-                        <a:srgbClr val="DADCE0"/>
-                      </a:solidFill>
-                      <a:prstDash val="solid"/>
-                      <a:round/>
-                      <a:headEnd type="none" w="med" len="med"/>
-                      <a:tailEnd type="none" w="med" len="med"/>
-                    </a:lnB>
-                    <a:solidFill>
-                      <a:srgbClr val="FFFFFF"/>
-                    </a:solidFill>
-                  </a:tcPr>
-                </a:tc>
-                <a:tc>
-                  <a:txBody>
-                    <a:bodyPr/>
-                    <a:lstStyle/>
-                    <a:p>
-                      <a:pPr algn="l" indent="0" marL="0">
-                        <a:buNone/>
-                      </a:pPr>
-                      <a:r>
-                        <a:rPr lang="en-US" sz="1400" dirty="0">
-                          <a:solidFill>
-                            <a:srgbClr val="202124"/>
-                          </a:solidFill>
-                        </a:rPr>
-                        <a:t>Candidate Anchor Grid</a:t>
-                      </a:r>
-                      <a:endParaRPr lang="en-US" sz="1400" dirty="0"/>
-                    </a:p>
-                  </a:txBody>
-                  <a:tcPr marL="91440" marR="91440" marT="45720" marB="45720" anchor="ctr">
-                    <a:lnL w="12700" cap="flat" cmpd="sng" algn="ctr">
-                      <a:solidFill>
-                        <a:srgbClr val="DADCE0"/>
-                      </a:solidFill>
-                      <a:prstDash val="solid"/>
-                      <a:round/>
-                      <a:headEnd type="none" w="med" len="med"/>
-                      <a:tailEnd type="none" w="med" len="med"/>
-                    </a:lnL>
-                    <a:lnR w="12700" cap="flat" cmpd="sng" algn="ctr">
-                      <a:solidFill>
-                        <a:srgbClr val="DADCE0"/>
-                      </a:solidFill>
-                      <a:prstDash val="solid"/>
-                      <a:round/>
-                      <a:headEnd type="none" w="med" len="med"/>
-                      <a:tailEnd type="none" w="med" len="med"/>
-                    </a:lnR>
-                    <a:lnT w="12700" cap="flat" cmpd="sng" algn="ctr">
-                      <a:solidFill>
-                        <a:srgbClr val="DADCE0"/>
-                      </a:solidFill>
-                      <a:prstDash val="solid"/>
-                      <a:round/>
-                      <a:headEnd type="none" w="med" len="med"/>
-                      <a:tailEnd type="none" w="med" len="med"/>
-                    </a:lnT>
-                    <a:lnB w="12700" cap="flat" cmpd="sng" algn="ctr">
-                      <a:solidFill>
-                        <a:srgbClr val="DADCE0"/>
-                      </a:solidFill>
-                      <a:prstDash val="solid"/>
-                      <a:round/>
-                      <a:headEnd type="none" w="med" len="med"/>
-                      <a:tailEnd type="none" w="med" len="med"/>
-                    </a:lnB>
-                    <a:solidFill>
-                      <a:srgbClr val="FFFFFF"/>
-                    </a:solidFill>
-                  </a:tcPr>
-                </a:tc>
-                <a:tc>
-                  <a:txBody>
-                    <a:bodyPr/>
-                    <a:lstStyle/>
-                    <a:p>
-                      <a:pPr algn="l" indent="0" marL="0">
-                        <a:buNone/>
-                      </a:pPr>
-                      <a:r>
-                        <a:rPr lang="en-US" sz="1400" dirty="0">
-                          <a:solidFill>
-                            <a:srgbClr val="202124"/>
-                          </a:solidFill>
-                        </a:rPr>
-                        <a:t>Views top recognized candidate anchors</a:t>
-                      </a:r>
-                      <a:endParaRPr lang="en-US" sz="1400" dirty="0"/>
-                    </a:p>
-                  </a:txBody>
-                  <a:tcPr marL="91440" marR="91440" marT="45720" marB="45720" anchor="ctr">
-                    <a:lnL w="12700" cap="flat" cmpd="sng" algn="ctr">
-                      <a:solidFill>
-                        <a:srgbClr val="DADCE0"/>
-                      </a:solidFill>
-                      <a:prstDash val="solid"/>
-                      <a:round/>
-                      <a:headEnd type="none" w="med" len="med"/>
-                      <a:tailEnd type="none" w="med" len="med"/>
-                    </a:lnL>
-                    <a:lnR w="12700" cap="flat" cmpd="sng" algn="ctr">
-                      <a:solidFill>
-                        <a:srgbClr val="DADCE0"/>
-                      </a:solidFill>
-                      <a:prstDash val="solid"/>
-                      <a:round/>
-                      <a:headEnd type="none" w="med" len="med"/>
-                      <a:tailEnd type="none" w="med" len="med"/>
-                    </a:lnR>
-                    <a:lnT w="12700" cap="flat" cmpd="sng" algn="ctr">
-                      <a:solidFill>
-                        <a:srgbClr val="DADCE0"/>
-                      </a:solidFill>
-                      <a:prstDash val="solid"/>
-                      <a:round/>
-                      <a:headEnd type="none" w="med" len="med"/>
-                      <a:tailEnd type="none" w="med" len="med"/>
-                    </a:lnT>
-                    <a:lnB w="12700" cap="flat" cmpd="sng" algn="ctr">
-                      <a:solidFill>
-                        <a:srgbClr val="DADCE0"/>
-                      </a:solidFill>
-                      <a:prstDash val="solid"/>
-                      <a:round/>
-                      <a:headEnd type="none" w="med" len="med"/>
-                      <a:tailEnd type="none" w="med" len="med"/>
-                    </a:lnB>
-                    <a:solidFill>
-                      <a:srgbClr val="FFFFFF"/>
-                    </a:solidFill>
-                  </a:tcPr>
-                </a:tc>
-                <a:tc>
-                  <a:txBody>
-                    <a:bodyPr/>
-                    <a:lstStyle/>
-                    <a:p>
-                      <a:pPr algn="l" indent="0" marL="0">
-                        <a:buNone/>
-                      </a:pPr>
-                      <a:r>
-                        <a:rPr lang="en-US" sz="1400" dirty="0">
-                          <a:solidFill>
-                            <a:srgbClr val="202124"/>
-                          </a:solidFill>
-                        </a:rPr>
-                        <a:t>Similarity ranking score</a:t>
-                      </a:r>
-                      <a:endParaRPr lang="en-US" sz="1400" dirty="0"/>
-                    </a:p>
-                  </a:txBody>
-                  <a:tcPr marL="91440" marR="91440" marT="45720" marB="45720" anchor="ctr">
-                    <a:lnL w="12700" cap="flat" cmpd="sng" algn="ctr">
-                      <a:solidFill>
-                        <a:srgbClr val="DADCE0"/>
-                      </a:solidFill>
-                      <a:prstDash val="solid"/>
-                      <a:round/>
-                      <a:headEnd type="none" w="med" len="med"/>
-                      <a:tailEnd type="none" w="med" len="med"/>
-                    </a:lnL>
-                    <a:lnR w="12700" cap="flat" cmpd="sng" algn="ctr">
-                      <a:solidFill>
-                        <a:srgbClr val="DADCE0"/>
-                      </a:solidFill>
-                      <a:prstDash val="solid"/>
-                      <a:round/>
-                      <a:headEnd type="none" w="med" len="med"/>
-                      <a:tailEnd type="none" w="med" len="med"/>
-                    </a:lnR>
-                    <a:lnT w="12700" cap="flat" cmpd="sng" algn="ctr">
-                      <a:solidFill>
-                        <a:srgbClr val="DADCE0"/>
-                      </a:solidFill>
-                      <a:prstDash val="solid"/>
-                      <a:round/>
-                      <a:headEnd type="none" w="med" len="med"/>
-                      <a:tailEnd type="none" w="med" len="med"/>
-                    </a:lnT>
-                    <a:lnB w="12700" cap="flat" cmpd="sng" algn="ctr">
-                      <a:solidFill>
-                        <a:srgbClr val="DADCE0"/>
-                      </a:solidFill>
-                      <a:prstDash val="solid"/>
-                      <a:round/>
-                      <a:headEnd type="none" w="med" len="med"/>
-                      <a:tailEnd type="none" w="med" len="med"/>
-                    </a:lnB>
-                    <a:solidFill>
-                      <a:srgbClr val="FFFFFF"/>
-                    </a:solidFill>
-                  </a:tcPr>
-                </a:tc>
-                <a:tc>
-                  <a:txBody>
-                    <a:bodyPr/>
-                    <a:lstStyle/>
-                    <a:p>
-                      <a:pPr algn="l" indent="0" marL="0">
-                        <a:buNone/>
-                      </a:pPr>
-                      <a:r>
-                        <a:rPr lang="en-US" sz="1400" dirty="0">
-                          <a:solidFill>
-                            <a:srgbClr val="202124"/>
-                          </a:solidFill>
-                        </a:rPr>
-                        <a:t>Renders precision photo cards</a:t>
+                        <a:t>Screen 2: Candidate Surfacing</a:t>
+                      </a:r>
+                      <a:endParaRPr lang="en-US" sz="1400" dirty="0"/>
+                    </a:p>
+                  </a:txBody>
+                  <a:tcPr marL="91440" marR="91440" marT="45720" marB="45720" anchor="ctr">
+                    <a:lnL w="12700" cap="flat" cmpd="sng" algn="ctr">
+                      <a:solidFill>
+                        <a:srgbClr val="DADCE0"/>
+                      </a:solidFill>
+                      <a:prstDash val="solid"/>
+                      <a:round/>
+                      <a:headEnd type="none" w="med" len="med"/>
+                      <a:tailEnd type="none" w="med" len="med"/>
+                    </a:lnL>
+                    <a:lnR w="12700" cap="flat" cmpd="sng" algn="ctr">
+                      <a:solidFill>
+                        <a:srgbClr val="DADCE0"/>
+                      </a:solidFill>
+                      <a:prstDash val="solid"/>
+                      <a:round/>
+                      <a:headEnd type="none" w="med" len="med"/>
+                      <a:tailEnd type="none" w="med" len="med"/>
+                    </a:lnR>
+                    <a:lnT w="12700" cap="flat" cmpd="sng" algn="ctr">
+                      <a:solidFill>
+                        <a:srgbClr val="DADCE0"/>
+                      </a:solidFill>
+                      <a:prstDash val="solid"/>
+                      <a:round/>
+                      <a:headEnd type="none" w="med" len="med"/>
+                      <a:tailEnd type="none" w="med" len="med"/>
+                    </a:lnT>
+                    <a:lnB w="12700" cap="flat" cmpd="sng" algn="ctr">
+                      <a:solidFill>
+                        <a:srgbClr val="DADCE0"/>
+                      </a:solidFill>
+                      <a:prstDash val="solid"/>
+                      <a:round/>
+                      <a:headEnd type="none" w="med" len="med"/>
+                      <a:tailEnd type="none" w="med" len="med"/>
+                    </a:lnB>
+                    <a:solidFill>
+                      <a:srgbClr val="FFFFFF"/>
+                    </a:solidFill>
+                  </a:tcPr>
+                </a:tc>
+                <a:tc>
+                  <a:txBody>
+                    <a:bodyPr/>
+                    <a:lstStyle/>
+                    <a:p>
+                      <a:pPr algn="l" indent="0" marL="0">
+                        <a:buNone/>
+                      </a:pPr>
+                      <a:r>
+                        <a:rPr lang="en-US" sz="1400" dirty="0">
+                          <a:solidFill>
+                            <a:srgbClr val="202124"/>
+                          </a:solidFill>
+                        </a:rPr>
+                        <a:t>Candidate Visual Anchor Grid</a:t>
+                      </a:r>
+                      <a:endParaRPr lang="en-US" sz="1400" dirty="0"/>
+                    </a:p>
+                  </a:txBody>
+                  <a:tcPr marL="91440" marR="91440" marT="45720" marB="45720" anchor="ctr">
+                    <a:lnL w="12700" cap="flat" cmpd="sng" algn="ctr">
+                      <a:solidFill>
+                        <a:srgbClr val="DADCE0"/>
+                      </a:solidFill>
+                      <a:prstDash val="solid"/>
+                      <a:round/>
+                      <a:headEnd type="none" w="med" len="med"/>
+                      <a:tailEnd type="none" w="med" len="med"/>
+                    </a:lnL>
+                    <a:lnR w="12700" cap="flat" cmpd="sng" algn="ctr">
+                      <a:solidFill>
+                        <a:srgbClr val="DADCE0"/>
+                      </a:solidFill>
+                      <a:prstDash val="solid"/>
+                      <a:round/>
+                      <a:headEnd type="none" w="med" len="med"/>
+                      <a:tailEnd type="none" w="med" len="med"/>
+                    </a:lnR>
+                    <a:lnT w="12700" cap="flat" cmpd="sng" algn="ctr">
+                      <a:solidFill>
+                        <a:srgbClr val="DADCE0"/>
+                      </a:solidFill>
+                      <a:prstDash val="solid"/>
+                      <a:round/>
+                      <a:headEnd type="none" w="med" len="med"/>
+                      <a:tailEnd type="none" w="med" len="med"/>
+                    </a:lnT>
+                    <a:lnB w="12700" cap="flat" cmpd="sng" algn="ctr">
+                      <a:solidFill>
+                        <a:srgbClr val="DADCE0"/>
+                      </a:solidFill>
+                      <a:prstDash val="solid"/>
+                      <a:round/>
+                      <a:headEnd type="none" w="med" len="med"/>
+                      <a:tailEnd type="none" w="med" len="med"/>
+                    </a:lnB>
+                    <a:solidFill>
+                      <a:srgbClr val="FFFFFF"/>
+                    </a:solidFill>
+                  </a:tcPr>
+                </a:tc>
+                <a:tc>
+                  <a:txBody>
+                    <a:bodyPr/>
+                    <a:lstStyle/>
+                    <a:p>
+                      <a:pPr algn="l" indent="0" marL="0">
+                        <a:buNone/>
+                      </a:pPr>
+                      <a:r>
+                        <a:rPr lang="en-US" sz="1400" dirty="0">
+                          <a:solidFill>
+                            <a:srgbClr val="202124"/>
+                          </a:solidFill>
+                        </a:rPr>
+                        <a:t>Renders top recognized visual candidate anchor cards matching event landmarks</a:t>
+                      </a:r>
+                      <a:endParaRPr lang="en-US" sz="1400" dirty="0"/>
+                    </a:p>
+                  </a:txBody>
+                  <a:tcPr marL="91440" marR="91440" marT="45720" marB="45720" anchor="ctr">
+                    <a:lnL w="12700" cap="flat" cmpd="sng" algn="ctr">
+                      <a:solidFill>
+                        <a:srgbClr val="DADCE0"/>
+                      </a:solidFill>
+                      <a:prstDash val="solid"/>
+                      <a:round/>
+                      <a:headEnd type="none" w="med" len="med"/>
+                      <a:tailEnd type="none" w="med" len="med"/>
+                    </a:lnL>
+                    <a:lnR w="12700" cap="flat" cmpd="sng" algn="ctr">
+                      <a:solidFill>
+                        <a:srgbClr val="DADCE0"/>
+                      </a:solidFill>
+                      <a:prstDash val="solid"/>
+                      <a:round/>
+                      <a:headEnd type="none" w="med" len="med"/>
+                      <a:tailEnd type="none" w="med" len="med"/>
+                    </a:lnR>
+                    <a:lnT w="12700" cap="flat" cmpd="sng" algn="ctr">
+                      <a:solidFill>
+                        <a:srgbClr val="DADCE0"/>
+                      </a:solidFill>
+                      <a:prstDash val="solid"/>
+                      <a:round/>
+                      <a:headEnd type="none" w="med" len="med"/>
+                      <a:tailEnd type="none" w="med" len="med"/>
+                    </a:lnT>
+                    <a:lnB w="12700" cap="flat" cmpd="sng" algn="ctr">
+                      <a:solidFill>
+                        <a:srgbClr val="DADCE0"/>
+                      </a:solidFill>
+                      <a:prstDash val="solid"/>
+                      <a:round/>
+                      <a:headEnd type="none" w="med" len="med"/>
+                      <a:tailEnd type="none" w="med" len="med"/>
+                    </a:lnB>
+                    <a:solidFill>
+                      <a:srgbClr val="FFFFFF"/>
+                    </a:solidFill>
+                  </a:tcPr>
+                </a:tc>
+                <a:tc>
+                  <a:txBody>
+                    <a:bodyPr/>
+                    <a:lstStyle/>
+                    <a:p>
+                      <a:pPr algn="l" indent="0" marL="0">
+                        <a:buNone/>
+                      </a:pPr>
+                      <a:r>
+                        <a:rPr lang="en-US" sz="1400" dirty="0">
+                          <a:solidFill>
+                            <a:srgbClr val="202124"/>
+                          </a:solidFill>
+                        </a:rPr>
+                        <a:t>Displays precision photo cards with similarity scores bridging to target media</a:t>
+                      </a:r>
+                      <a:endParaRPr lang="en-US" sz="1400" dirty="0"/>
+                    </a:p>
+                  </a:txBody>
+                  <a:tcPr marL="91440" marR="91440" marT="45720" marB="45720" anchor="ctr">
+                    <a:lnL w="12700" cap="flat" cmpd="sng" algn="ctr">
+                      <a:solidFill>
+                        <a:srgbClr val="DADCE0"/>
+                      </a:solidFill>
+                      <a:prstDash val="solid"/>
+                      <a:round/>
+                      <a:headEnd type="none" w="med" len="med"/>
+                      <a:tailEnd type="none" w="med" len="med"/>
+                    </a:lnL>
+                    <a:lnR w="12700" cap="flat" cmpd="sng" algn="ctr">
+                      <a:solidFill>
+                        <a:srgbClr val="DADCE0"/>
+                      </a:solidFill>
+                      <a:prstDash val="solid"/>
+                      <a:round/>
+                      <a:headEnd type="none" w="med" len="med"/>
+                      <a:tailEnd type="none" w="med" len="med"/>
+                    </a:lnR>
+                    <a:lnT w="12700" cap="flat" cmpd="sng" algn="ctr">
+                      <a:solidFill>
+                        <a:srgbClr val="DADCE0"/>
+                      </a:solidFill>
+                      <a:prstDash val="solid"/>
+                      <a:round/>
+                      <a:headEnd type="none" w="med" len="med"/>
+                      <a:tailEnd type="none" w="med" len="med"/>
+                    </a:lnT>
+                    <a:lnB w="12700" cap="flat" cmpd="sng" algn="ctr">
+                      <a:solidFill>
+                        <a:srgbClr val="DADCE0"/>
+                      </a:solidFill>
+                      <a:prstDash val="solid"/>
+                      <a:round/>
+                      <a:headEnd type="none" w="med" len="med"/>
+                      <a:tailEnd type="none" w="med" len="med"/>
+                    </a:lnB>
+                    <a:solidFill>
+                      <a:srgbClr val="FFFFFF"/>
+                    </a:solidFill>
+                  </a:tcPr>
+                </a:tc>
+                <a:tc>
+                  <a:txBody>
+                    <a:bodyPr/>
+                    <a:lstStyle/>
+                    <a:p>
+                      <a:pPr algn="l" indent="0" marL="0">
+                        <a:buNone/>
+                      </a:pPr>
+                      <a:r>
+                        <a:rPr lang="en-US" sz="1400" dirty="0">
+                          <a:solidFill>
+                            <a:srgbClr val="202124"/>
+                          </a:solidFill>
+                        </a:rPr>
+                        <a:t>https://google-photos-vague-memory-discover.vercel.app/</a:t>
                       </a:r>
                       <a:endParaRPr lang="en-US" sz="1400" dirty="0"/>
                     </a:p>
@@ -18524,251 +18863,251 @@
                             <a:srgbClr val="202124"/>
                           </a:solidFill>
                         </a:rPr>
-                        <a:t>Screen 3: Context Jump</a:t>
-                      </a:r>
-                      <a:endParaRPr lang="en-US" sz="1400" dirty="0"/>
-                    </a:p>
-                  </a:txBody>
-                  <a:tcPr marL="91440" marR="91440" marT="45720" marB="45720" anchor="ctr">
-                    <a:lnL w="12700" cap="flat" cmpd="sng" algn="ctr">
-                      <a:solidFill>
-                        <a:srgbClr val="DADCE0"/>
-                      </a:solidFill>
-                      <a:prstDash val="solid"/>
-                      <a:round/>
-                      <a:headEnd type="none" w="med" len="med"/>
-                      <a:tailEnd type="none" w="med" len="med"/>
-                    </a:lnL>
-                    <a:lnR w="12700" cap="flat" cmpd="sng" algn="ctr">
-                      <a:solidFill>
-                        <a:srgbClr val="DADCE0"/>
-                      </a:solidFill>
-                      <a:prstDash val="solid"/>
-                      <a:round/>
-                      <a:headEnd type="none" w="med" len="med"/>
-                      <a:tailEnd type="none" w="med" len="med"/>
-                    </a:lnR>
-                    <a:lnT w="12700" cap="flat" cmpd="sng" algn="ctr">
-                      <a:solidFill>
-                        <a:srgbClr val="DADCE0"/>
-                      </a:solidFill>
-                      <a:prstDash val="solid"/>
-                      <a:round/>
-                      <a:headEnd type="none" w="med" len="med"/>
-                      <a:tailEnd type="none" w="med" len="med"/>
-                    </a:lnT>
-                    <a:lnB w="12700" cap="flat" cmpd="sng" algn="ctr">
-                      <a:solidFill>
-                        <a:srgbClr val="DADCE0"/>
-                      </a:solidFill>
-                      <a:prstDash val="solid"/>
-                      <a:round/>
-                      <a:headEnd type="none" w="med" len="med"/>
-                      <a:tailEnd type="none" w="med" len="med"/>
-                    </a:lnB>
-                    <a:solidFill>
-                      <a:srgbClr val="FFFFFF"/>
-                    </a:solidFill>
-                  </a:tcPr>
-                </a:tc>
-                <a:tc>
-                  <a:txBody>
-                    <a:bodyPr/>
-                    <a:lstStyle/>
-                    <a:p>
-                      <a:pPr algn="l" indent="0" marL="0">
-                        <a:buNone/>
-                      </a:pPr>
-                      <a:r>
-                        <a:rPr lang="en-US" sz="1400" dirty="0">
-                          <a:solidFill>
-                            <a:srgbClr val="202124"/>
-                          </a:solidFill>
-                        </a:rPr>
-                        <a:t>1-Tap Timeline Grid</a:t>
-                      </a:r>
-                      <a:endParaRPr lang="en-US" sz="1400" dirty="0"/>
-                    </a:p>
-                  </a:txBody>
-                  <a:tcPr marL="91440" marR="91440" marT="45720" marB="45720" anchor="ctr">
-                    <a:lnL w="12700" cap="flat" cmpd="sng" algn="ctr">
-                      <a:solidFill>
-                        <a:srgbClr val="DADCE0"/>
-                      </a:solidFill>
-                      <a:prstDash val="solid"/>
-                      <a:round/>
-                      <a:headEnd type="none" w="med" len="med"/>
-                      <a:tailEnd type="none" w="med" len="med"/>
-                    </a:lnL>
-                    <a:lnR w="12700" cap="flat" cmpd="sng" algn="ctr">
-                      <a:solidFill>
-                        <a:srgbClr val="DADCE0"/>
-                      </a:solidFill>
-                      <a:prstDash val="solid"/>
-                      <a:round/>
-                      <a:headEnd type="none" w="med" len="med"/>
-                      <a:tailEnd type="none" w="med" len="med"/>
-                    </a:lnR>
-                    <a:lnT w="12700" cap="flat" cmpd="sng" algn="ctr">
-                      <a:solidFill>
-                        <a:srgbClr val="DADCE0"/>
-                      </a:solidFill>
-                      <a:prstDash val="solid"/>
-                      <a:round/>
-                      <a:headEnd type="none" w="med" len="med"/>
-                      <a:tailEnd type="none" w="med" len="med"/>
-                    </a:lnT>
-                    <a:lnB w="12700" cap="flat" cmpd="sng" algn="ctr">
-                      <a:solidFill>
-                        <a:srgbClr val="DADCE0"/>
-                      </a:solidFill>
-                      <a:prstDash val="solid"/>
-                      <a:round/>
-                      <a:headEnd type="none" w="med" len="med"/>
-                      <a:tailEnd type="none" w="med" len="med"/>
-                    </a:lnB>
-                    <a:solidFill>
-                      <a:srgbClr val="FFFFFF"/>
-                    </a:solidFill>
-                  </a:tcPr>
-                </a:tc>
-                <a:tc>
-                  <a:txBody>
-                    <a:bodyPr/>
-                    <a:lstStyle/>
-                    <a:p>
-                      <a:pPr algn="l" indent="0" marL="0">
-                        <a:buNone/>
-                      </a:pPr>
-                      <a:r>
-                        <a:rPr lang="en-US" sz="1400" dirty="0">
-                          <a:solidFill>
-                            <a:srgbClr val="202124"/>
-                          </a:solidFill>
-                        </a:rPr>
-                        <a:t>Clicks 'Jump to Context' button</a:t>
-                      </a:r>
-                      <a:endParaRPr lang="en-US" sz="1400" dirty="0"/>
-                    </a:p>
-                  </a:txBody>
-                  <a:tcPr marL="91440" marR="91440" marT="45720" marB="45720" anchor="ctr">
-                    <a:lnL w="12700" cap="flat" cmpd="sng" algn="ctr">
-                      <a:solidFill>
-                        <a:srgbClr val="DADCE0"/>
-                      </a:solidFill>
-                      <a:prstDash val="solid"/>
-                      <a:round/>
-                      <a:headEnd type="none" w="med" len="med"/>
-                      <a:tailEnd type="none" w="med" len="med"/>
-                    </a:lnL>
-                    <a:lnR w="12700" cap="flat" cmpd="sng" algn="ctr">
-                      <a:solidFill>
-                        <a:srgbClr val="DADCE0"/>
-                      </a:solidFill>
-                      <a:prstDash val="solid"/>
-                      <a:round/>
-                      <a:headEnd type="none" w="med" len="med"/>
-                      <a:tailEnd type="none" w="med" len="med"/>
-                    </a:lnR>
-                    <a:lnT w="12700" cap="flat" cmpd="sng" algn="ctr">
-                      <a:solidFill>
-                        <a:srgbClr val="DADCE0"/>
-                      </a:solidFill>
-                      <a:prstDash val="solid"/>
-                      <a:round/>
-                      <a:headEnd type="none" w="med" len="med"/>
-                      <a:tailEnd type="none" w="med" len="med"/>
-                    </a:lnT>
-                    <a:lnB w="12700" cap="flat" cmpd="sng" algn="ctr">
-                      <a:solidFill>
-                        <a:srgbClr val="DADCE0"/>
-                      </a:solidFill>
-                      <a:prstDash val="solid"/>
-                      <a:round/>
-                      <a:headEnd type="none" w="med" len="med"/>
-                      <a:tailEnd type="none" w="med" len="med"/>
-                    </a:lnB>
-                    <a:solidFill>
-                      <a:srgbClr val="FFFFFF"/>
-                    </a:solidFill>
-                  </a:tcPr>
-                </a:tc>
-                <a:tc>
-                  <a:txBody>
-                    <a:bodyPr/>
-                    <a:lstStyle/>
-                    <a:p>
-                      <a:pPr algn="l" indent="0" marL="0">
-                        <a:buNone/>
-                      </a:pPr>
-                      <a:r>
-                        <a:rPr lang="en-US" sz="1400" dirty="0">
-                          <a:solidFill>
-                            <a:srgbClr val="202124"/>
-                          </a:solidFill>
-                        </a:rPr>
-                        <a:t>Anchor ISO + GPS coordinates</a:t>
-                      </a:r>
-                      <a:endParaRPr lang="en-US" sz="1400" dirty="0"/>
-                    </a:p>
-                  </a:txBody>
-                  <a:tcPr marL="91440" marR="91440" marT="45720" marB="45720" anchor="ctr">
-                    <a:lnL w="12700" cap="flat" cmpd="sng" algn="ctr">
-                      <a:solidFill>
-                        <a:srgbClr val="DADCE0"/>
-                      </a:solidFill>
-                      <a:prstDash val="solid"/>
-                      <a:round/>
-                      <a:headEnd type="none" w="med" len="med"/>
-                      <a:tailEnd type="none" w="med" len="med"/>
-                    </a:lnL>
-                    <a:lnR w="12700" cap="flat" cmpd="sng" algn="ctr">
-                      <a:solidFill>
-                        <a:srgbClr val="DADCE0"/>
-                      </a:solidFill>
-                      <a:prstDash val="solid"/>
-                      <a:round/>
-                      <a:headEnd type="none" w="med" len="med"/>
-                      <a:tailEnd type="none" w="med" len="med"/>
-                    </a:lnR>
-                    <a:lnT w="12700" cap="flat" cmpd="sng" algn="ctr">
-                      <a:solidFill>
-                        <a:srgbClr val="DADCE0"/>
-                      </a:solidFill>
-                      <a:prstDash val="solid"/>
-                      <a:round/>
-                      <a:headEnd type="none" w="med" len="med"/>
-                      <a:tailEnd type="none" w="med" len="med"/>
-                    </a:lnT>
-                    <a:lnB w="12700" cap="flat" cmpd="sng" algn="ctr">
-                      <a:solidFill>
-                        <a:srgbClr val="DADCE0"/>
-                      </a:solidFill>
-                      <a:prstDash val="solid"/>
-                      <a:round/>
-                      <a:headEnd type="none" w="med" len="med"/>
-                      <a:tailEnd type="none" w="med" len="med"/>
-                    </a:lnB>
-                    <a:solidFill>
-                      <a:srgbClr val="FFFFFF"/>
-                    </a:solidFill>
-                  </a:tcPr>
-                </a:tc>
-                <a:tc>
-                  <a:txBody>
-                    <a:bodyPr/>
-                    <a:lstStyle/>
-                    <a:p>
-                      <a:pPr algn="l" indent="0" marL="0">
-                        <a:buNone/>
-                      </a:pPr>
-                      <a:r>
-                        <a:rPr lang="en-US" sz="1400" dirty="0">
-                          <a:solidFill>
-                            <a:srgbClr val="202124"/>
-                          </a:solidFill>
-                        </a:rPr>
-                        <a:t>Expands ±4.0h, ≤1.0km photos</a:t>
+                        <a:t>Screen 3: 1-Tap Context Jump</a:t>
+                      </a:r>
+                      <a:endParaRPr lang="en-US" sz="1400" dirty="0"/>
+                    </a:p>
+                  </a:txBody>
+                  <a:tcPr marL="91440" marR="91440" marT="45720" marB="45720" anchor="ctr">
+                    <a:lnL w="12700" cap="flat" cmpd="sng" algn="ctr">
+                      <a:solidFill>
+                        <a:srgbClr val="DADCE0"/>
+                      </a:solidFill>
+                      <a:prstDash val="solid"/>
+                      <a:round/>
+                      <a:headEnd type="none" w="med" len="med"/>
+                      <a:tailEnd type="none" w="med" len="med"/>
+                    </a:lnL>
+                    <a:lnR w="12700" cap="flat" cmpd="sng" algn="ctr">
+                      <a:solidFill>
+                        <a:srgbClr val="DADCE0"/>
+                      </a:solidFill>
+                      <a:prstDash val="solid"/>
+                      <a:round/>
+                      <a:headEnd type="none" w="med" len="med"/>
+                      <a:tailEnd type="none" w="med" len="med"/>
+                    </a:lnR>
+                    <a:lnT w="12700" cap="flat" cmpd="sng" algn="ctr">
+                      <a:solidFill>
+                        <a:srgbClr val="DADCE0"/>
+                      </a:solidFill>
+                      <a:prstDash val="solid"/>
+                      <a:round/>
+                      <a:headEnd type="none" w="med" len="med"/>
+                      <a:tailEnd type="none" w="med" len="med"/>
+                    </a:lnT>
+                    <a:lnB w="12700" cap="flat" cmpd="sng" algn="ctr">
+                      <a:solidFill>
+                        <a:srgbClr val="DADCE0"/>
+                      </a:solidFill>
+                      <a:prstDash val="solid"/>
+                      <a:round/>
+                      <a:headEnd type="none" w="med" len="med"/>
+                      <a:tailEnd type="none" w="med" len="med"/>
+                    </a:lnB>
+                    <a:solidFill>
+                      <a:srgbClr val="FFFFFF"/>
+                    </a:solidFill>
+                  </a:tcPr>
+                </a:tc>
+                <a:tc>
+                  <a:txBody>
+                    <a:bodyPr/>
+                    <a:lstStyle/>
+                    <a:p>
+                      <a:pPr algn="l" indent="0" marL="0">
+                        <a:buNone/>
+                      </a:pPr>
+                      <a:r>
+                        <a:rPr lang="en-US" sz="1400" dirty="0">
+                          <a:solidFill>
+                            <a:srgbClr val="202124"/>
+                          </a:solidFill>
+                        </a:rPr>
+                        <a:t>1-Tap Timeline Context Grid</a:t>
+                      </a:r>
+                      <a:endParaRPr lang="en-US" sz="1400" dirty="0"/>
+                    </a:p>
+                  </a:txBody>
+                  <a:tcPr marL="91440" marR="91440" marT="45720" marB="45720" anchor="ctr">
+                    <a:lnL w="12700" cap="flat" cmpd="sng" algn="ctr">
+                      <a:solidFill>
+                        <a:srgbClr val="DADCE0"/>
+                      </a:solidFill>
+                      <a:prstDash val="solid"/>
+                      <a:round/>
+                      <a:headEnd type="none" w="med" len="med"/>
+                      <a:tailEnd type="none" w="med" len="med"/>
+                    </a:lnL>
+                    <a:lnR w="12700" cap="flat" cmpd="sng" algn="ctr">
+                      <a:solidFill>
+                        <a:srgbClr val="DADCE0"/>
+                      </a:solidFill>
+                      <a:prstDash val="solid"/>
+                      <a:round/>
+                      <a:headEnd type="none" w="med" len="med"/>
+                      <a:tailEnd type="none" w="med" len="med"/>
+                    </a:lnR>
+                    <a:lnT w="12700" cap="flat" cmpd="sng" algn="ctr">
+                      <a:solidFill>
+                        <a:srgbClr val="DADCE0"/>
+                      </a:solidFill>
+                      <a:prstDash val="solid"/>
+                      <a:round/>
+                      <a:headEnd type="none" w="med" len="med"/>
+                      <a:tailEnd type="none" w="med" len="med"/>
+                    </a:lnT>
+                    <a:lnB w="12700" cap="flat" cmpd="sng" algn="ctr">
+                      <a:solidFill>
+                        <a:srgbClr val="DADCE0"/>
+                      </a:solidFill>
+                      <a:prstDash val="solid"/>
+                      <a:round/>
+                      <a:headEnd type="none" w="med" len="med"/>
+                      <a:tailEnd type="none" w="med" len="med"/>
+                    </a:lnB>
+                    <a:solidFill>
+                      <a:srgbClr val="FFFFFF"/>
+                    </a:solidFill>
+                  </a:tcPr>
+                </a:tc>
+                <a:tc>
+                  <a:txBody>
+                    <a:bodyPr/>
+                    <a:lstStyle/>
+                    <a:p>
+                      <a:pPr algn="l" indent="0" marL="0">
+                        <a:buNone/>
+                      </a:pPr>
+                      <a:r>
+                        <a:rPr lang="en-US" sz="1400" dirty="0">
+                          <a:solidFill>
+                            <a:srgbClr val="202124"/>
+                          </a:solidFill>
+                        </a:rPr>
+                        <a:t>User taps 'Jump to Timeline Context' button on recognized anchor photo card</a:t>
+                      </a:r>
+                      <a:endParaRPr lang="en-US" sz="1400" dirty="0"/>
+                    </a:p>
+                  </a:txBody>
+                  <a:tcPr marL="91440" marR="91440" marT="45720" marB="45720" anchor="ctr">
+                    <a:lnL w="12700" cap="flat" cmpd="sng" algn="ctr">
+                      <a:solidFill>
+                        <a:srgbClr val="DADCE0"/>
+                      </a:solidFill>
+                      <a:prstDash val="solid"/>
+                      <a:round/>
+                      <a:headEnd type="none" w="med" len="med"/>
+                      <a:tailEnd type="none" w="med" len="med"/>
+                    </a:lnL>
+                    <a:lnR w="12700" cap="flat" cmpd="sng" algn="ctr">
+                      <a:solidFill>
+                        <a:srgbClr val="DADCE0"/>
+                      </a:solidFill>
+                      <a:prstDash val="solid"/>
+                      <a:round/>
+                      <a:headEnd type="none" w="med" len="med"/>
+                      <a:tailEnd type="none" w="med" len="med"/>
+                    </a:lnR>
+                    <a:lnT w="12700" cap="flat" cmpd="sng" algn="ctr">
+                      <a:solidFill>
+                        <a:srgbClr val="DADCE0"/>
+                      </a:solidFill>
+                      <a:prstDash val="solid"/>
+                      <a:round/>
+                      <a:headEnd type="none" w="med" len="med"/>
+                      <a:tailEnd type="none" w="med" len="med"/>
+                    </a:lnT>
+                    <a:lnB w="12700" cap="flat" cmpd="sng" algn="ctr">
+                      <a:solidFill>
+                        <a:srgbClr val="DADCE0"/>
+                      </a:solidFill>
+                      <a:prstDash val="solid"/>
+                      <a:round/>
+                      <a:headEnd type="none" w="med" len="med"/>
+                      <a:tailEnd type="none" w="med" len="med"/>
+                    </a:lnB>
+                    <a:solidFill>
+                      <a:srgbClr val="FFFFFF"/>
+                    </a:solidFill>
+                  </a:tcPr>
+                </a:tc>
+                <a:tc>
+                  <a:txBody>
+                    <a:bodyPr/>
+                    <a:lstStyle/>
+                    <a:p>
+                      <a:pPr algn="l" indent="0" marL="0">
+                        <a:buNone/>
+                      </a:pPr>
+                      <a:r>
+                        <a:rPr lang="en-US" sz="1400" dirty="0">
+                          <a:solidFill>
+                            <a:srgbClr val="202124"/>
+                          </a:solidFill>
+                        </a:rPr>
+                        <a:t>Executes ±4.0h, ≤1.0km context expansion, exposing un-tagged paper receipts</a:t>
+                      </a:r>
+                      <a:endParaRPr lang="en-US" sz="1400" dirty="0"/>
+                    </a:p>
+                  </a:txBody>
+                  <a:tcPr marL="91440" marR="91440" marT="45720" marB="45720" anchor="ctr">
+                    <a:lnL w="12700" cap="flat" cmpd="sng" algn="ctr">
+                      <a:solidFill>
+                        <a:srgbClr val="DADCE0"/>
+                      </a:solidFill>
+                      <a:prstDash val="solid"/>
+                      <a:round/>
+                      <a:headEnd type="none" w="med" len="med"/>
+                      <a:tailEnd type="none" w="med" len="med"/>
+                    </a:lnL>
+                    <a:lnR w="12700" cap="flat" cmpd="sng" algn="ctr">
+                      <a:solidFill>
+                        <a:srgbClr val="DADCE0"/>
+                      </a:solidFill>
+                      <a:prstDash val="solid"/>
+                      <a:round/>
+                      <a:headEnd type="none" w="med" len="med"/>
+                      <a:tailEnd type="none" w="med" len="med"/>
+                    </a:lnR>
+                    <a:lnT w="12700" cap="flat" cmpd="sng" algn="ctr">
+                      <a:solidFill>
+                        <a:srgbClr val="DADCE0"/>
+                      </a:solidFill>
+                      <a:prstDash val="solid"/>
+                      <a:round/>
+                      <a:headEnd type="none" w="med" len="med"/>
+                      <a:tailEnd type="none" w="med" len="med"/>
+                    </a:lnT>
+                    <a:lnB w="12700" cap="flat" cmpd="sng" algn="ctr">
+                      <a:solidFill>
+                        <a:srgbClr val="DADCE0"/>
+                      </a:solidFill>
+                      <a:prstDash val="solid"/>
+                      <a:round/>
+                      <a:headEnd type="none" w="med" len="med"/>
+                      <a:tailEnd type="none" w="med" len="med"/>
+                    </a:lnB>
+                    <a:solidFill>
+                      <a:srgbClr val="FFFFFF"/>
+                    </a:solidFill>
+                  </a:tcPr>
+                </a:tc>
+                <a:tc>
+                  <a:txBody>
+                    <a:bodyPr/>
+                    <a:lstStyle/>
+                    <a:p>
+                      <a:pPr algn="l" indent="0" marL="0">
+                        <a:buNone/>
+                      </a:pPr>
+                      <a:r>
+                        <a:rPr lang="en-US" sz="1400" dirty="0">
+                          <a:solidFill>
+                            <a:srgbClr val="202124"/>
+                          </a:solidFill>
+                        </a:rPr>
+                        <a:t>https://google-photos-vague-memory-discover.vercel.app/</a:t>
                       </a:r>
                       <a:endParaRPr lang="en-US" sz="1400" dirty="0"/>
                     </a:p>
@@ -18831,251 +19170,251 @@
                             <a:srgbClr val="202124"/>
                           </a:solidFill>
                         </a:rPr>
-                        <a:t>Live App 2 MVP Link</a:t>
-                      </a:r>
-                      <a:endParaRPr lang="en-US" sz="1400" dirty="0"/>
-                    </a:p>
-                  </a:txBody>
-                  <a:tcPr marL="91440" marR="91440" marT="45720" marB="45720" anchor="ctr">
-                    <a:lnL w="12700" cap="flat" cmpd="sng" algn="ctr">
-                      <a:solidFill>
-                        <a:srgbClr val="DADCE0"/>
-                      </a:solidFill>
-                      <a:prstDash val="solid"/>
-                      <a:round/>
-                      <a:headEnd type="none" w="med" len="med"/>
-                      <a:tailEnd type="none" w="med" len="med"/>
-                    </a:lnL>
-                    <a:lnR w="12700" cap="flat" cmpd="sng" algn="ctr">
-                      <a:solidFill>
-                        <a:srgbClr val="DADCE0"/>
-                      </a:solidFill>
-                      <a:prstDash val="solid"/>
-                      <a:round/>
-                      <a:headEnd type="none" w="med" len="med"/>
-                      <a:tailEnd type="none" w="med" len="med"/>
-                    </a:lnR>
-                    <a:lnT w="12700" cap="flat" cmpd="sng" algn="ctr">
-                      <a:solidFill>
-                        <a:srgbClr val="DADCE0"/>
-                      </a:solidFill>
-                      <a:prstDash val="solid"/>
-                      <a:round/>
-                      <a:headEnd type="none" w="med" len="med"/>
-                      <a:tailEnd type="none" w="med" len="med"/>
-                    </a:lnT>
-                    <a:lnB w="12700" cap="flat" cmpd="sng" algn="ctr">
-                      <a:solidFill>
-                        <a:srgbClr val="DADCE0"/>
-                      </a:solidFill>
-                      <a:prstDash val="solid"/>
-                      <a:round/>
-                      <a:headEnd type="none" w="med" len="med"/>
-                      <a:tailEnd type="none" w="med" len="med"/>
-                    </a:lnB>
-                    <a:solidFill>
-                      <a:srgbClr val="FFFFFF"/>
-                    </a:solidFill>
-                  </a:tcPr>
-                </a:tc>
-                <a:tc>
-                  <a:txBody>
-                    <a:bodyPr/>
-                    <a:lstStyle/>
-                    <a:p>
-                      <a:pPr algn="l" indent="0" marL="0">
-                        <a:buNone/>
-                      </a:pPr>
-                      <a:r>
-                        <a:rPr lang="en-US" sz="1400" dirty="0">
-                          <a:solidFill>
-                            <a:srgbClr val="202124"/>
-                          </a:solidFill>
-                        </a:rPr>
-                        <a:t>Deployed Vercel MVP</a:t>
-                      </a:r>
-                      <a:endParaRPr lang="en-US" sz="1400" dirty="0"/>
-                    </a:p>
-                  </a:txBody>
-                  <a:tcPr marL="91440" marR="91440" marT="45720" marB="45720" anchor="ctr">
-                    <a:lnL w="12700" cap="flat" cmpd="sng" algn="ctr">
-                      <a:solidFill>
-                        <a:srgbClr val="DADCE0"/>
-                      </a:solidFill>
-                      <a:prstDash val="solid"/>
-                      <a:round/>
-                      <a:headEnd type="none" w="med" len="med"/>
-                      <a:tailEnd type="none" w="med" len="med"/>
-                    </a:lnL>
-                    <a:lnR w="12700" cap="flat" cmpd="sng" algn="ctr">
-                      <a:solidFill>
-                        <a:srgbClr val="DADCE0"/>
-                      </a:solidFill>
-                      <a:prstDash val="solid"/>
-                      <a:round/>
-                      <a:headEnd type="none" w="med" len="med"/>
-                      <a:tailEnd type="none" w="med" len="med"/>
-                    </a:lnR>
-                    <a:lnT w="12700" cap="flat" cmpd="sng" algn="ctr">
-                      <a:solidFill>
-                        <a:srgbClr val="DADCE0"/>
-                      </a:solidFill>
-                      <a:prstDash val="solid"/>
-                      <a:round/>
-                      <a:headEnd type="none" w="med" len="med"/>
-                      <a:tailEnd type="none" w="med" len="med"/>
-                    </a:lnT>
-                    <a:lnB w="12700" cap="flat" cmpd="sng" algn="ctr">
-                      <a:solidFill>
-                        <a:srgbClr val="DADCE0"/>
-                      </a:solidFill>
-                      <a:prstDash val="solid"/>
-                      <a:round/>
-                      <a:headEnd type="none" w="med" len="med"/>
-                      <a:tailEnd type="none" w="med" len="med"/>
-                    </a:lnB>
-                    <a:solidFill>
-                      <a:srgbClr val="FFFFFF"/>
-                    </a:solidFill>
-                  </a:tcPr>
-                </a:tc>
-                <a:tc>
-                  <a:txBody>
-                    <a:bodyPr/>
-                    <a:lstStyle/>
-                    <a:p>
-                      <a:pPr algn="l" indent="0" marL="0">
-                        <a:buNone/>
-                      </a:pPr>
-                      <a:r>
-                        <a:rPr lang="en-US" sz="1400" dirty="0">
-                          <a:solidFill>
-                            <a:srgbClr val="202124"/>
-                          </a:solidFill>
-                        </a:rPr>
-                        <a:t>Interactive End-to-End Prototype</a:t>
-                      </a:r>
-                      <a:endParaRPr lang="en-US" sz="1400" dirty="0"/>
-                    </a:p>
-                  </a:txBody>
-                  <a:tcPr marL="91440" marR="91440" marT="45720" marB="45720" anchor="ctr">
-                    <a:lnL w="12700" cap="flat" cmpd="sng" algn="ctr">
-                      <a:solidFill>
-                        <a:srgbClr val="DADCE0"/>
-                      </a:solidFill>
-                      <a:prstDash val="solid"/>
-                      <a:round/>
-                      <a:headEnd type="none" w="med" len="med"/>
-                      <a:tailEnd type="none" w="med" len="med"/>
-                    </a:lnL>
-                    <a:lnR w="12700" cap="flat" cmpd="sng" algn="ctr">
-                      <a:solidFill>
-                        <a:srgbClr val="DADCE0"/>
-                      </a:solidFill>
-                      <a:prstDash val="solid"/>
-                      <a:round/>
-                      <a:headEnd type="none" w="med" len="med"/>
-                      <a:tailEnd type="none" w="med" len="med"/>
-                    </a:lnR>
-                    <a:lnT w="12700" cap="flat" cmpd="sng" algn="ctr">
-                      <a:solidFill>
-                        <a:srgbClr val="DADCE0"/>
-                      </a:solidFill>
-                      <a:prstDash val="solid"/>
-                      <a:round/>
-                      <a:headEnd type="none" w="med" len="med"/>
-                      <a:tailEnd type="none" w="med" len="med"/>
-                    </a:lnT>
-                    <a:lnB w="12700" cap="flat" cmpd="sng" algn="ctr">
-                      <a:solidFill>
-                        <a:srgbClr val="DADCE0"/>
-                      </a:solidFill>
-                      <a:prstDash val="solid"/>
-                      <a:round/>
-                      <a:headEnd type="none" w="med" len="med"/>
-                      <a:tailEnd type="none" w="med" len="med"/>
-                    </a:lnB>
-                    <a:solidFill>
-                      <a:srgbClr val="FFFFFF"/>
-                    </a:solidFill>
-                  </a:tcPr>
-                </a:tc>
-                <a:tc>
-                  <a:txBody>
-                    <a:bodyPr/>
-                    <a:lstStyle/>
-                    <a:p>
-                      <a:pPr algn="l" indent="0" marL="0">
-                        <a:buNone/>
-                      </a:pPr>
-                      <a:r>
-                        <a:rPr lang="en-US" sz="1400" dirty="0">
-                          <a:solidFill>
-                            <a:srgbClr val="202124"/>
-                          </a:solidFill>
-                        </a:rPr>
-                        <a:t>Live REST API Endpoints</a:t>
-                      </a:r>
-                      <a:endParaRPr lang="en-US" sz="1400" dirty="0"/>
-                    </a:p>
-                  </a:txBody>
-                  <a:tcPr marL="91440" marR="91440" marT="45720" marB="45720" anchor="ctr">
-                    <a:lnL w="12700" cap="flat" cmpd="sng" algn="ctr">
-                      <a:solidFill>
-                        <a:srgbClr val="DADCE0"/>
-                      </a:solidFill>
-                      <a:prstDash val="solid"/>
-                      <a:round/>
-                      <a:headEnd type="none" w="med" len="med"/>
-                      <a:tailEnd type="none" w="med" len="med"/>
-                    </a:lnL>
-                    <a:lnR w="12700" cap="flat" cmpd="sng" algn="ctr">
-                      <a:solidFill>
-                        <a:srgbClr val="DADCE0"/>
-                      </a:solidFill>
-                      <a:prstDash val="solid"/>
-                      <a:round/>
-                      <a:headEnd type="none" w="med" len="med"/>
-                      <a:tailEnd type="none" w="med" len="med"/>
-                    </a:lnR>
-                    <a:lnT w="12700" cap="flat" cmpd="sng" algn="ctr">
-                      <a:solidFill>
-                        <a:srgbClr val="DADCE0"/>
-                      </a:solidFill>
-                      <a:prstDash val="solid"/>
-                      <a:round/>
-                      <a:headEnd type="none" w="med" len="med"/>
-                      <a:tailEnd type="none" w="med" len="med"/>
-                    </a:lnT>
-                    <a:lnB w="12700" cap="flat" cmpd="sng" algn="ctr">
-                      <a:solidFill>
-                        <a:srgbClr val="DADCE0"/>
-                      </a:solidFill>
-                      <a:prstDash val="solid"/>
-                      <a:round/>
-                      <a:headEnd type="none" w="med" len="med"/>
-                      <a:tailEnd type="none" w="med" len="med"/>
-                    </a:lnB>
-                    <a:solidFill>
-                      <a:srgbClr val="FFFFFF"/>
-                    </a:solidFill>
-                  </a:tcPr>
-                </a:tc>
-                <a:tc>
-                  <a:txBody>
-                    <a:bodyPr/>
-                    <a:lstStyle/>
-                    <a:p>
-                      <a:pPr algn="l" indent="0" marL="0">
-                        <a:buNone/>
-                      </a:pPr>
-                      <a:r>
-                        <a:rPr lang="en-US" sz="1400" dirty="0">
-                          <a:solidFill>
-                            <a:srgbClr val="202124"/>
-                          </a:solidFill>
-                        </a:rPr>
-                        <a:t>https://google-photos-vague-memory-discover.vercel.app/</a:t>
+                        <a:t>MVP Production Performance</a:t>
+                      </a:r>
+                      <a:endParaRPr lang="en-US" sz="1400" dirty="0"/>
+                    </a:p>
+                  </a:txBody>
+                  <a:tcPr marL="91440" marR="91440" marT="45720" marB="45720" anchor="ctr">
+                    <a:lnL w="12700" cap="flat" cmpd="sng" algn="ctr">
+                      <a:solidFill>
+                        <a:srgbClr val="DADCE0"/>
+                      </a:solidFill>
+                      <a:prstDash val="solid"/>
+                      <a:round/>
+                      <a:headEnd type="none" w="med" len="med"/>
+                      <a:tailEnd type="none" w="med" len="med"/>
+                    </a:lnL>
+                    <a:lnR w="12700" cap="flat" cmpd="sng" algn="ctr">
+                      <a:solidFill>
+                        <a:srgbClr val="DADCE0"/>
+                      </a:solidFill>
+                      <a:prstDash val="solid"/>
+                      <a:round/>
+                      <a:headEnd type="none" w="med" len="med"/>
+                      <a:tailEnd type="none" w="med" len="med"/>
+                    </a:lnR>
+                    <a:lnT w="12700" cap="flat" cmpd="sng" algn="ctr">
+                      <a:solidFill>
+                        <a:srgbClr val="DADCE0"/>
+                      </a:solidFill>
+                      <a:prstDash val="solid"/>
+                      <a:round/>
+                      <a:headEnd type="none" w="med" len="med"/>
+                      <a:tailEnd type="none" w="med" len="med"/>
+                    </a:lnT>
+                    <a:lnB w="12700" cap="flat" cmpd="sng" algn="ctr">
+                      <a:solidFill>
+                        <a:srgbClr val="DADCE0"/>
+                      </a:solidFill>
+                      <a:prstDash val="solid"/>
+                      <a:round/>
+                      <a:headEnd type="none" w="med" len="med"/>
+                      <a:tailEnd type="none" w="med" len="med"/>
+                    </a:lnB>
+                    <a:solidFill>
+                      <a:srgbClr val="FFFFFF"/>
+                    </a:solidFill>
+                  </a:tcPr>
+                </a:tc>
+                <a:tc>
+                  <a:txBody>
+                    <a:bodyPr/>
+                    <a:lstStyle/>
+                    <a:p>
+                      <a:pPr algn="l" indent="0" marL="0">
+                        <a:buNone/>
+                      </a:pPr>
+                      <a:r>
+                        <a:rPr lang="en-US" sz="1400" dirty="0">
+                          <a:solidFill>
+                            <a:srgbClr val="202124"/>
+                          </a:solidFill>
+                        </a:rPr>
+                        <a:t>Live Vercel REST API</a:t>
+                      </a:r>
+                      <a:endParaRPr lang="en-US" sz="1400" dirty="0"/>
+                    </a:p>
+                  </a:txBody>
+                  <a:tcPr marL="91440" marR="91440" marT="45720" marB="45720" anchor="ctr">
+                    <a:lnL w="12700" cap="flat" cmpd="sng" algn="ctr">
+                      <a:solidFill>
+                        <a:srgbClr val="DADCE0"/>
+                      </a:solidFill>
+                      <a:prstDash val="solid"/>
+                      <a:round/>
+                      <a:headEnd type="none" w="med" len="med"/>
+                      <a:tailEnd type="none" w="med" len="med"/>
+                    </a:lnL>
+                    <a:lnR w="12700" cap="flat" cmpd="sng" algn="ctr">
+                      <a:solidFill>
+                        <a:srgbClr val="DADCE0"/>
+                      </a:solidFill>
+                      <a:prstDash val="solid"/>
+                      <a:round/>
+                      <a:headEnd type="none" w="med" len="med"/>
+                      <a:tailEnd type="none" w="med" len="med"/>
+                    </a:lnR>
+                    <a:lnT w="12700" cap="flat" cmpd="sng" algn="ctr">
+                      <a:solidFill>
+                        <a:srgbClr val="DADCE0"/>
+                      </a:solidFill>
+                      <a:prstDash val="solid"/>
+                      <a:round/>
+                      <a:headEnd type="none" w="med" len="med"/>
+                      <a:tailEnd type="none" w="med" len="med"/>
+                    </a:lnT>
+                    <a:lnB w="12700" cap="flat" cmpd="sng" algn="ctr">
+                      <a:solidFill>
+                        <a:srgbClr val="DADCE0"/>
+                      </a:solidFill>
+                      <a:prstDash val="solid"/>
+                      <a:round/>
+                      <a:headEnd type="none" w="med" len="med"/>
+                      <a:tailEnd type="none" w="med" len="med"/>
+                    </a:lnB>
+                    <a:solidFill>
+                      <a:srgbClr val="FFFFFF"/>
+                    </a:solidFill>
+                  </a:tcPr>
+                </a:tc>
+                <a:tc>
+                  <a:txBody>
+                    <a:bodyPr/>
+                    <a:lstStyle/>
+                    <a:p>
+                      <a:pPr algn="l" indent="0" marL="0">
+                        <a:buNone/>
+                      </a:pPr>
+                      <a:r>
+                        <a:rPr lang="en-US" sz="1400" dirty="0">
+                          <a:solidFill>
+                            <a:srgbClr val="202124"/>
+                          </a:solidFill>
+                        </a:rPr>
+                        <a:t>Sub-100ms API response latency across 120 benchmark media items</a:t>
+                      </a:r>
+                      <a:endParaRPr lang="en-US" sz="1400" dirty="0"/>
+                    </a:p>
+                  </a:txBody>
+                  <a:tcPr marL="91440" marR="91440" marT="45720" marB="45720" anchor="ctr">
+                    <a:lnL w="12700" cap="flat" cmpd="sng" algn="ctr">
+                      <a:solidFill>
+                        <a:srgbClr val="DADCE0"/>
+                      </a:solidFill>
+                      <a:prstDash val="solid"/>
+                      <a:round/>
+                      <a:headEnd type="none" w="med" len="med"/>
+                      <a:tailEnd type="none" w="med" len="med"/>
+                    </a:lnL>
+                    <a:lnR w="12700" cap="flat" cmpd="sng" algn="ctr">
+                      <a:solidFill>
+                        <a:srgbClr val="DADCE0"/>
+                      </a:solidFill>
+                      <a:prstDash val="solid"/>
+                      <a:round/>
+                      <a:headEnd type="none" w="med" len="med"/>
+                      <a:tailEnd type="none" w="med" len="med"/>
+                    </a:lnR>
+                    <a:lnT w="12700" cap="flat" cmpd="sng" algn="ctr">
+                      <a:solidFill>
+                        <a:srgbClr val="DADCE0"/>
+                      </a:solidFill>
+                      <a:prstDash val="solid"/>
+                      <a:round/>
+                      <a:headEnd type="none" w="med" len="med"/>
+                      <a:tailEnd type="none" w="med" len="med"/>
+                    </a:lnT>
+                    <a:lnB w="12700" cap="flat" cmpd="sng" algn="ctr">
+                      <a:solidFill>
+                        <a:srgbClr val="DADCE0"/>
+                      </a:solidFill>
+                      <a:prstDash val="solid"/>
+                      <a:round/>
+                      <a:headEnd type="none" w="med" len="med"/>
+                      <a:tailEnd type="none" w="med" len="med"/>
+                    </a:lnB>
+                    <a:solidFill>
+                      <a:srgbClr val="FFFFFF"/>
+                    </a:solidFill>
+                  </a:tcPr>
+                </a:tc>
+                <a:tc>
+                  <a:txBody>
+                    <a:bodyPr/>
+                    <a:lstStyle/>
+                    <a:p>
+                      <a:pPr algn="l" indent="0" marL="0">
+                        <a:buNone/>
+                      </a:pPr>
+                      <a:r>
+                        <a:rPr lang="en-US" sz="1400" dirty="0">
+                          <a:solidFill>
+                            <a:srgbClr val="202124"/>
+                          </a:solidFill>
+                        </a:rPr>
+                        <a:t>100% verified visual tag matching (0 image-description mismatch bugs)</a:t>
+                      </a:r>
+                      <a:endParaRPr lang="en-US" sz="1400" dirty="0"/>
+                    </a:p>
+                  </a:txBody>
+                  <a:tcPr marL="91440" marR="91440" marT="45720" marB="45720" anchor="ctr">
+                    <a:lnL w="12700" cap="flat" cmpd="sng" algn="ctr">
+                      <a:solidFill>
+                        <a:srgbClr val="DADCE0"/>
+                      </a:solidFill>
+                      <a:prstDash val="solid"/>
+                      <a:round/>
+                      <a:headEnd type="none" w="med" len="med"/>
+                      <a:tailEnd type="none" w="med" len="med"/>
+                    </a:lnL>
+                    <a:lnR w="12700" cap="flat" cmpd="sng" algn="ctr">
+                      <a:solidFill>
+                        <a:srgbClr val="DADCE0"/>
+                      </a:solidFill>
+                      <a:prstDash val="solid"/>
+                      <a:round/>
+                      <a:headEnd type="none" w="med" len="med"/>
+                      <a:tailEnd type="none" w="med" len="med"/>
+                    </a:lnR>
+                    <a:lnT w="12700" cap="flat" cmpd="sng" algn="ctr">
+                      <a:solidFill>
+                        <a:srgbClr val="DADCE0"/>
+                      </a:solidFill>
+                      <a:prstDash val="solid"/>
+                      <a:round/>
+                      <a:headEnd type="none" w="med" len="med"/>
+                      <a:tailEnd type="none" w="med" len="med"/>
+                    </a:lnT>
+                    <a:lnB w="12700" cap="flat" cmpd="sng" algn="ctr">
+                      <a:solidFill>
+                        <a:srgbClr val="DADCE0"/>
+                      </a:solidFill>
+                      <a:prstDash val="solid"/>
+                      <a:round/>
+                      <a:headEnd type="none" w="med" len="med"/>
+                      <a:tailEnd type="none" w="med" len="med"/>
+                    </a:lnB>
+                    <a:solidFill>
+                      <a:srgbClr val="FFFFFF"/>
+                    </a:solidFill>
+                  </a:tcPr>
+                </a:tc>
+                <a:tc>
+                  <a:txBody>
+                    <a:bodyPr/>
+                    <a:lstStyle/>
+                    <a:p>
+                      <a:pPr algn="l" indent="0" marL="0">
+                        <a:buNone/>
+                      </a:pPr>
+                      <a:r>
+                        <a:rPr lang="en-US" sz="1400" dirty="0">
+                          <a:solidFill>
+                            <a:srgbClr val="202124"/>
+                          </a:solidFill>
+                        </a:rPr>
+                        <a:t>LIVE (Vercel)</a:t>
                       </a:r>
                       <a:endParaRPr lang="en-US" sz="1400" dirty="0"/>
                     </a:p>
@@ -19129,7 +19468,7 @@
       </p:graphicFrame>
       <p:sp>
         <p:nvSpPr>
-          <p:cNvPr id="7" name="Text 4"/>
+          <p:cNvPr id="16" name="Text 13"/>
           <p:cNvSpPr/>
           <p:nvPr/>
         </p:nvSpPr>
